--- a/courses/ai-native/sessions/s02.pptx
+++ b/courses/ai-native/sessions/s02.pptx
@@ -16778,7 +16778,7 @@
                 <a:latin typeface="맑은 고딕"/>
                 <a:ea typeface="맑은 고딕"/>
               </a:rPr>
-              <a:t> 모호한 요청에서 업무 규칙을 찾아 정하고, 위임할 수 있는 작업 명세로 만든다.</a:t>
+              <a:t> 모호한 요청에서 업무 규칙을 찾아 정하고, 위임할 수 있는 작업 명세서로 만든다.</a:t>
             </a:r>
           </a:p>
         </p:txBody>

--- a/courses/ai-native/sessions/s02.pptx
+++ b/courses/ai-native/sessions/s02.pptx
@@ -3768,7 +3768,7 @@
           </p:nvPr>
         </p:nvGraphicFramePr>
         <p:xfrm>
-          <a:off x="412306" y="1884410"/>
+          <a:off x="412306" y="1837690"/>
           <a:ext cx="8305800" cy="3873500"/>
         </p:xfrm>
         <a:graphic>
@@ -5552,7 +5552,7 @@
         </p:nvSpPr>
         <p:spPr>
           <a:xfrm>
-            <a:off x="365760" y="1585960"/>
+            <a:off x="365760" y="1539240"/>
             <a:ext cx="8412480" cy="222250"/>
           </a:xfrm>
           <a:prstGeom prst="rect">
@@ -5601,7 +5601,7 @@
         </p:nvSpPr>
         <p:spPr>
           <a:xfrm>
-            <a:off x="365760" y="4002010"/>
+            <a:off x="365760" y="4082290"/>
             <a:ext cx="8412480" cy="1692593"/>
           </a:xfrm>
           <a:prstGeom prst="rect">
@@ -5883,7 +5883,7 @@
           </p:nvPr>
         </p:nvGraphicFramePr>
         <p:xfrm>
-          <a:off x="1382585" y="2141448"/>
+          <a:off x="1382585" y="2112010"/>
           <a:ext cx="6365240" cy="3873500"/>
         </p:xfrm>
         <a:graphic>
@@ -6629,7 +6629,7 @@
         </p:nvSpPr>
         <p:spPr>
           <a:xfrm>
-            <a:off x="365760" y="1842998"/>
+            <a:off x="365760" y="1813560"/>
             <a:ext cx="8412480" cy="222250"/>
           </a:xfrm>
           <a:prstGeom prst="rect">
@@ -6678,7 +6678,7 @@
         </p:nvSpPr>
         <p:spPr>
           <a:xfrm>
-            <a:off x="365760" y="3683048"/>
+            <a:off x="365760" y="3780610"/>
             <a:ext cx="8412480" cy="524240"/>
           </a:xfrm>
           <a:prstGeom prst="rect">
@@ -8453,7 +8453,7 @@
         </p:nvSpPr>
         <p:spPr>
           <a:xfrm>
-            <a:off x="365760" y="2935198"/>
+            <a:off x="365760" y="3062198"/>
             <a:ext cx="8412480" cy="2089833"/>
           </a:xfrm>
           <a:prstGeom prst="rect">
@@ -8778,7 +8778,7 @@
           </p:nvPr>
         </p:nvGraphicFramePr>
         <p:xfrm>
-          <a:off x="800926" y="2141448"/>
+          <a:off x="800926" y="2112010"/>
           <a:ext cx="7528560" cy="3873500"/>
         </p:xfrm>
         <a:graphic>
@@ -10352,7 +10352,7 @@
         </p:nvSpPr>
         <p:spPr>
           <a:xfrm>
-            <a:off x="365760" y="1842998"/>
+            <a:off x="365760" y="1813560"/>
             <a:ext cx="8412480" cy="222250"/>
           </a:xfrm>
           <a:prstGeom prst="rect">
@@ -10401,7 +10401,7 @@
         </p:nvSpPr>
         <p:spPr>
           <a:xfrm>
-            <a:off x="365760" y="3395048"/>
+            <a:off x="365760" y="3492610"/>
             <a:ext cx="8412480" cy="2487074"/>
           </a:xfrm>
           <a:prstGeom prst="rect">
@@ -10769,7 +10769,7 @@
           </p:nvPr>
         </p:nvGraphicFramePr>
         <p:xfrm>
-          <a:off x="1523556" y="2141448"/>
+          <a:off x="1523556" y="2112010"/>
           <a:ext cx="6083300" cy="3873500"/>
         </p:xfrm>
         <a:graphic>
@@ -11474,7 +11474,7 @@
         </p:nvSpPr>
         <p:spPr>
           <a:xfrm>
-            <a:off x="365760" y="1842998"/>
+            <a:off x="365760" y="1813560"/>
             <a:ext cx="8412480" cy="222250"/>
           </a:xfrm>
           <a:prstGeom prst="rect">
@@ -11523,7 +11523,7 @@
         </p:nvSpPr>
         <p:spPr>
           <a:xfrm>
-            <a:off x="365760" y="3107048"/>
+            <a:off x="365760" y="3204610"/>
             <a:ext cx="8412480" cy="781278"/>
           </a:xfrm>
           <a:prstGeom prst="rect">
@@ -11989,8 +11989,8 @@
         </p:nvSpPr>
         <p:spPr>
           <a:xfrm>
-            <a:off x="365760" y="4150273"/>
-            <a:ext cx="8412480" cy="274320"/>
+            <a:off x="365760" y="2938272"/>
+            <a:ext cx="8412480" cy="201168"/>
           </a:xfrm>
           <a:prstGeom prst="rect">
             <a:avLst/>
@@ -12033,7 +12033,7 @@
         </p:blipFill>
         <p:spPr>
           <a:xfrm>
-            <a:off x="1460500" y="4424593"/>
+            <a:off x="1460500" y="3176016"/>
             <a:ext cx="6223000" cy="444500"/>
           </a:xfrm>
           <a:prstGeom prst="rect">
@@ -12210,7 +12210,7 @@
           </p:nvPr>
         </p:nvGraphicFramePr>
         <p:xfrm>
-          <a:off x="811086" y="1884410"/>
+          <a:off x="811086" y="1837690"/>
           <a:ext cx="7508240" cy="3873500"/>
         </p:xfrm>
         <a:graphic>
@@ -13251,7 +13251,7 @@
         </p:nvSpPr>
         <p:spPr>
           <a:xfrm>
-            <a:off x="365760" y="1585960"/>
+            <a:off x="365760" y="1539240"/>
             <a:ext cx="8412480" cy="222250"/>
           </a:xfrm>
           <a:prstGeom prst="rect">
@@ -13455,7 +13455,7 @@
           </p:nvPr>
         </p:nvGraphicFramePr>
         <p:xfrm>
-          <a:off x="1677226" y="3356535"/>
+          <a:off x="1677226" y="3335366"/>
           <a:ext cx="5775960" cy="3873500"/>
         </p:xfrm>
         <a:graphic>
@@ -14411,7 +14411,7 @@
         </p:nvSpPr>
         <p:spPr>
           <a:xfrm>
-            <a:off x="365760" y="3058085"/>
+            <a:off x="365760" y="3036916"/>
             <a:ext cx="8412480" cy="222250"/>
           </a:xfrm>
           <a:prstGeom prst="rect">
@@ -14460,7 +14460,7 @@
         </p:nvSpPr>
         <p:spPr>
           <a:xfrm>
-            <a:off x="365760" y="4610135"/>
+            <a:off x="365760" y="4715966"/>
             <a:ext cx="8412480" cy="1435556"/>
           </a:xfrm>
           <a:prstGeom prst="rect">
@@ -16974,7 +16974,7 @@
           </p:nvPr>
         </p:nvGraphicFramePr>
         <p:xfrm>
-          <a:off x="412306" y="2141448"/>
+          <a:off x="412306" y="2112010"/>
           <a:ext cx="8305800" cy="3873500"/>
         </p:xfrm>
         <a:graphic>
@@ -19566,7 +19566,7 @@
         </p:nvSpPr>
         <p:spPr>
           <a:xfrm>
-            <a:off x="365760" y="1842998"/>
+            <a:off x="365760" y="1813560"/>
             <a:ext cx="8412480" cy="222250"/>
           </a:xfrm>
           <a:prstGeom prst="rect">
@@ -20308,7 +20308,7 @@
           </p:nvPr>
         </p:nvGraphicFramePr>
         <p:xfrm>
-          <a:off x="412306" y="4080914"/>
+          <a:off x="412306" y="3335366"/>
           <a:ext cx="8305800" cy="3873500"/>
         </p:xfrm>
         <a:graphic>
@@ -21215,7 +21215,7 @@
         <p:spPr>
           <a:xfrm>
             <a:off x="365760" y="960120"/>
-            <a:ext cx="8412480" cy="2720744"/>
+            <a:ext cx="8412480" cy="1996365"/>
           </a:xfrm>
           <a:prstGeom prst="rect">
             <a:avLst/>
@@ -21452,7 +21452,7 @@
         </p:nvSpPr>
         <p:spPr>
           <a:xfrm>
-            <a:off x="365760" y="3782464"/>
+            <a:off x="365760" y="3036916"/>
             <a:ext cx="8412480" cy="222250"/>
           </a:xfrm>
           <a:prstGeom prst="rect">
@@ -21902,8 +21902,8 @@
         </p:nvSpPr>
         <p:spPr>
           <a:xfrm>
-            <a:off x="365760" y="3834083"/>
-            <a:ext cx="8412480" cy="274320"/>
+            <a:off x="365760" y="3298490"/>
+            <a:ext cx="8412480" cy="201168"/>
           </a:xfrm>
           <a:prstGeom prst="rect">
             <a:avLst/>
@@ -21946,7 +21946,7 @@
         </p:blipFill>
         <p:spPr>
           <a:xfrm>
-            <a:off x="1658938" y="4108403"/>
+            <a:off x="1658938" y="3536234"/>
             <a:ext cx="5826125" cy="1381125"/>
           </a:xfrm>
           <a:prstGeom prst="rect">
@@ -22135,7 +22135,7 @@
           </p:nvPr>
         </p:nvGraphicFramePr>
         <p:xfrm>
-          <a:off x="412306" y="2141448"/>
+          <a:off x="412306" y="2112010"/>
           <a:ext cx="8305800" cy="3873500"/>
         </p:xfrm>
         <a:graphic>
@@ -23778,7 +23778,7 @@
         </p:nvSpPr>
         <p:spPr>
           <a:xfrm>
-            <a:off x="365760" y="1842998"/>
+            <a:off x="365760" y="1813560"/>
             <a:ext cx="8412480" cy="222250"/>
           </a:xfrm>
           <a:prstGeom prst="rect">
@@ -23827,8 +23827,8 @@
         </p:nvSpPr>
         <p:spPr>
           <a:xfrm>
-            <a:off x="365760" y="3683048"/>
-            <a:ext cx="8412480" cy="1342087"/>
+            <a:off x="365760" y="3780610"/>
+            <a:ext cx="8412480" cy="1190201"/>
           </a:xfrm>
           <a:prstGeom prst="rect">
             <a:avLst/>
@@ -24126,7 +24126,7 @@
           </p:nvPr>
         </p:nvGraphicFramePr>
         <p:xfrm>
-          <a:off x="1609916" y="2398486"/>
+          <a:off x="1609916" y="2386330"/>
           <a:ext cx="5910580" cy="3873500"/>
         </p:xfrm>
         <a:graphic>
@@ -25472,7 +25472,7 @@
         </p:nvSpPr>
         <p:spPr>
           <a:xfrm>
-            <a:off x="365760" y="2100036"/>
+            <a:off x="365760" y="2087880"/>
             <a:ext cx="8412480" cy="222250"/>
           </a:xfrm>
           <a:prstGeom prst="rect">
@@ -25521,7 +25521,7 @@
         </p:nvSpPr>
         <p:spPr>
           <a:xfrm>
-            <a:off x="365760" y="3940086"/>
+            <a:off x="365760" y="4054930"/>
             <a:ext cx="8412480" cy="1739328"/>
           </a:xfrm>
           <a:prstGeom prst="rect">
@@ -25843,7 +25843,7 @@
           </p:nvPr>
         </p:nvGraphicFramePr>
         <p:xfrm>
-          <a:off x="1413066" y="3800509"/>
+          <a:off x="1413066" y="3735763"/>
           <a:ext cx="6304280" cy="3873500"/>
         </p:xfrm>
         <a:graphic>
@@ -27121,7 +27121,7 @@
         </p:nvSpPr>
         <p:spPr>
           <a:xfrm>
-            <a:off x="365760" y="3502059"/>
+            <a:off x="365760" y="3437313"/>
             <a:ext cx="8412480" cy="222250"/>
           </a:xfrm>
           <a:prstGeom prst="rect">
@@ -27875,7 +27875,7 @@
           </p:nvPr>
         </p:nvGraphicFramePr>
         <p:xfrm>
-          <a:off x="950785" y="1884410"/>
+          <a:off x="950785" y="1837690"/>
           <a:ext cx="7228840" cy="3873500"/>
         </p:xfrm>
         <a:graphic>
@@ -28748,7 +28748,7 @@
         </p:nvSpPr>
         <p:spPr>
           <a:xfrm>
-            <a:off x="365760" y="1585960"/>
+            <a:off x="365760" y="1539240"/>
             <a:ext cx="8412480" cy="222250"/>
           </a:xfrm>
           <a:prstGeom prst="rect">

--- a/courses/ai-native/sessions/s02.pptx
+++ b/courses/ai-native/sessions/s02.pptx
@@ -696,7 +696,7 @@
             <a:pPr lvl="0"/>
             <a:r>
               <a:rPr lang="ko-KR" sz="1200"/>
-              <a:t>맥락의 한계("01. AI 협업의 특성과 사람의 판단 책임"의 「맥락의 한계」)가 그대로 드러난 장면이다. 대화형 보조에서는 맥락을 사람이 골라 붙인다.</a:t>
+              <a:t>맥락의 한계("세션 01. AI 협업의 특성과 사람의 판단 책임"의 「맥락의 한계」)가 그대로 드러난 장면이다. 대화형 보조에서는 맥락을 사람이 골라 붙인다.</a:t>
             </a:r>
           </a:p>
         </p:txBody>
@@ -839,7 +839,7 @@
             <a:pPr lvl="0"/>
             <a:r>
               <a:rPr lang="ko-KR" sz="1200"/>
-              <a:t>에이전트에게 허용한 도구는 읽기·편집과 테스트 실행 스크립트 하나다. 위임 경계는 "06. 작업 위임과 도구·권한·상태의 경계"에서 다룬다.</a:t>
+              <a:t>에이전트에게 허용한 도구는 읽기·편집과 테스트 실행 스크립트 하나다. 위임 경계는 "세션 06. 작업 위임과 도구·권한·상태의 경계"에서 다룬다.</a:t>
             </a:r>
           </a:p>
         </p:txBody>
@@ -1029,7 +1029,7 @@
             <a:pPr lvl="0"/>
             <a:r>
               <a:rPr lang="ko-KR" sz="1200"/>
-              <a:t>업무 규칙을 정하는 일은 "03. 요구의 구체화와 명세"에서, 수용 테스트는 "04. 수용 기준과 검증 가능한 작업 단위"에서 다룬다.</a:t>
+              <a:t>업무 규칙을 정하는 일은 "세션 03. 요구의 구체화와 명세"에서, 수용 테스트는 "세션 04. 수용 기준과 검증 가능한 작업 단위"에서 다룬다.</a:t>
             </a:r>
           </a:p>
           <a:p>
@@ -1165,7 +1165,7 @@
             <a:pPr lvl="0"/>
             <a:r>
               <a:rPr lang="ko-KR" sz="1200"/>
-              <a:t>실패 기록은 "10. 실패 대응·재시도·복구", 평가 세트는 "11. 평가 세트와 운영 점검 — 보안·비용·모델 변경"에서 다룬다.</a:t>
+              <a:t>실패 기록은 "세션 10. 실패 대응·재시도·복구", 평가 세트는 "세션 11. 평가 세트와 운영 점검 — 보안·비용·모델 변경"에서 다룬다.</a:t>
             </a:r>
           </a:p>
         </p:txBody>
@@ -1226,14 +1226,14 @@
             <a:pPr lvl="0"/>
             <a:r>
               <a:rPr lang="ko-KR" sz="1200"/>
-              <a:t>"01. AI 협업의 특성과 사람의 판단 책임"의 첫 시도는 성격이 다른 작업을 모두 요청 한 줄로 에이전트에게 맡겼다. 이 세션은 결정 지도의 첫 결정, 곧 작업마다 어떤 방식으로 맡길지를 다룬다.</a:t>
+              <a:t>"세션 01. AI 협업의 특성과 사람의 판단 책임"의 첫 시도는 성격이 다른 작업을 모두 요청 한 줄로 에이전트에게 맡겼다. 이 세션은 결정 지도의 첫 결정, 곧 작업마다 어떤 방식으로 맡길지를 다룬다.</a:t>
             </a:r>
           </a:p>
           <a:p>
             <a:pPr lvl="0"/>
             <a:r>
               <a:rPr lang="ko-KR" sz="1200"/>
-              <a:t>고른 방식을 패턴과 사람의 확인 지점으로 구성하는 일은 "07. 워크플로·에이전트와 사람의 개입"이 맡는다.</a:t>
+              <a:t>고른 방식을 패턴과 사람의 확인 지점으로 구성하는 일은 "세션 07. 워크플로·에이전트와 사람의 개입"이 맡는다.</a:t>
             </a:r>
           </a:p>
         </p:txBody>
@@ -1709,7 +1709,7 @@
             <a:pPr lvl="0"/>
             <a:r>
               <a:rPr lang="ko-KR" sz="1200"/>
-              <a:t>워크플로·에이전트의 정의는 "01. AI 협업의 특성과 사람의 판단 책임"의 「워크플로와 에이전트」에서 인용했다. 수작업과 대화형 보조는 이 과정이 더한 비교 대상이다.</a:t>
+              <a:t>워크플로·에이전트의 정의는 "세션 01. AI 협업의 특성과 사람의 판단 책임"의 「워크플로와 에이전트」에서 인용했다. 수작업과 대화형 보조는 이 과정이 더한 비교 대상이다.</a:t>
             </a:r>
           </a:p>
           <a:p>
@@ -1927,7 +1927,7 @@
             <a:pPr lvl="0"/>
             <a:r>
               <a:rPr lang="ko-KR" sz="1200"/>
-              <a:t>"AI는 추측한다"는 "01. AI 협업의 특성과 사람의 판단 책임"의 첫 시도에서 본 것이다. 센서는 "09. 검증 하네스·결과 점검·피드백"에서 다룬다.</a:t>
+              <a:t>"AI는 추측한다"는 "세션 01. AI 협업의 특성과 사람의 판단 책임"의 첫 시도에서 본 것이다. 센서는 "세션 09. 검증 하네스·결과 점검·피드백"에서 다룬다.</a:t>
             </a:r>
           </a:p>
         </p:txBody>

--- a/courses/ai-native/sessions/s02.pptx
+++ b/courses/ai-native/sessions/s02.pptx
@@ -7800,7 +7800,7 @@
                 <a:latin typeface="맑은 고딕"/>
                 <a:ea typeface="맑은 고딕"/>
               </a:rPr>
-              <a:t> 두 파일을 고쳤다. 테스트도 돌리려 했으나 권한이 없어 멈췄다.</a:t>
+              <a:t> 두 파일을 고쳤고, 테스트는 권한이 없어 멈췄다.</a:t>
             </a:r>
           </a:p>
           <a:p>
@@ -12033,8 +12033,8 @@
         </p:blipFill>
         <p:spPr>
           <a:xfrm>
-            <a:off x="1460500" y="3176016"/>
-            <a:ext cx="6223000" cy="444500"/>
+            <a:off x="1441450" y="3176016"/>
+            <a:ext cx="6261100" cy="447221"/>
           </a:xfrm>
           <a:prstGeom prst="rect">
             <a:avLst/>
@@ -16532,7 +16532,7 @@
                 <a:latin typeface="맑은 고딕"/>
                 <a:ea typeface="맑은 고딕"/>
               </a:rPr>
-              <a:t> 업무 규칙의 확정, 절차의 확정, 결과의 자동 확인, 되돌리기 쉬움</a:t>
+              <a:t> 업무 규칙·절차의 확정, 자동 확인, 되돌리기 쉬움</a:t>
             </a:r>
           </a:p>
           <a:p>

--- a/courses/ai-native/sessions/s02.pptx
+++ b/courses/ai-native/sessions/s02.pptx
@@ -14247,7 +14247,7 @@
                 <a:latin typeface="맑은 고딕"/>
                 <a:ea typeface="맑은 고딕"/>
               </a:rPr>
-              <a:t>"LLM으로 애플리케이션을 만들 때는 </a:t>
+              <a:t>LLM으로 애플리케이션을 만들 때는 </a:t>
             </a:r>
             <a:r>
               <a:rPr sz="1800" b="1">
@@ -14267,7 +14267,7 @@
                 <a:latin typeface="맑은 고딕"/>
                 <a:ea typeface="맑은 고딕"/>
               </a:rPr>
-              <a:t>을 찾고, 필요할 때만 복잡도를 높이라. 에이전트 시스템을 </a:t>
+              <a:t>을 찾고 필요할 때만 복잡도를 높인다 — 에이전트 시스템을 </a:t>
             </a:r>
             <a:r>
               <a:rPr sz="1800" b="1">
@@ -14287,7 +14287,7 @@
                 <a:latin typeface="맑은 고딕"/>
                 <a:ea typeface="맑은 고딕"/>
               </a:rPr>
-              <a:t>일 수도 있다"</a:t>
+              <a:t>일 수도 있다</a:t>
             </a:r>
             <a:r>
               <a:rPr sz="1000" b="0">
@@ -14307,27 +14307,7 @@
                 <a:latin typeface="맑은 고딕"/>
                 <a:ea typeface="맑은 고딕"/>
               </a:rPr>
-              <a:t>"When building applications with LLMs, we recommend finding the simplest solution possible, and only increasing complexity when needed. This might mean not building agentic systems at all."</a:t>
-            </a:r>
-            <a:r>
-              <a:rPr sz="1000" b="0">
-                <a:solidFill>
-                  <a:srgbClr val="000000"/>
-                </a:solidFill>
-                <a:latin typeface="맑은 고딕"/>
-                <a:ea typeface="맑은 고딕"/>
-              </a:rPr>
-              <a:t>, </a:t>
-            </a:r>
-            <a:r>
-              <a:rPr sz="1000" b="0">
-                <a:solidFill>
-                  <a:srgbClr val="000000"/>
-                </a:solidFill>
-                <a:latin typeface="맑은 고딕"/>
-                <a:ea typeface="맑은 고딕"/>
-              </a:rPr>
-              <a:t>[Anthropic 2024]</a:t>
+              <a:t>"When building applications with LLMs, we recommend finding the simplest solution possible, and only increasing complexity when needed. This might mean not building agentic systems at all.", [Anthropic 2024]</a:t>
             </a:r>
           </a:p>
         </p:txBody>
@@ -21760,7 +21740,7 @@
                 <a:latin typeface="맑은 고딕"/>
                 <a:ea typeface="맑은 고딕"/>
               </a:rPr>
-              <a:t>"에이전트 시스템의 기본 구성 요소는 검색·도구·기억 같은 </a:t>
+              <a:t>에이전트 시스템의 기본 구성 요소는 검색·도구·기억 같은 </a:t>
             </a:r>
             <a:r>
               <a:rPr sz="1800" b="1">
@@ -21780,7 +21760,7 @@
                 <a:latin typeface="맑은 고딕"/>
                 <a:ea typeface="맑은 고딕"/>
               </a:rPr>
-              <a:t>이다"</a:t>
+              <a:t>이다</a:t>
             </a:r>
             <a:r>
               <a:rPr sz="1000" b="0">
@@ -21800,27 +21780,7 @@
                 <a:latin typeface="맑은 고딕"/>
                 <a:ea typeface="맑은 고딕"/>
               </a:rPr>
-              <a:t>"The basic building block of agentic systems is an LLM enhanced with augmentations such as retrieval, tools, and memory."</a:t>
-            </a:r>
-            <a:r>
-              <a:rPr sz="1000" b="0">
-                <a:solidFill>
-                  <a:srgbClr val="000000"/>
-                </a:solidFill>
-                <a:latin typeface="맑은 고딕"/>
-                <a:ea typeface="맑은 고딕"/>
-              </a:rPr>
-              <a:t>, </a:t>
-            </a:r>
-            <a:r>
-              <a:rPr sz="1000" b="0">
-                <a:solidFill>
-                  <a:srgbClr val="000000"/>
-                </a:solidFill>
-                <a:latin typeface="맑은 고딕"/>
-                <a:ea typeface="맑은 고딕"/>
-              </a:rPr>
-              <a:t>[Anthropic 2024]</a:t>
+              <a:t>"The basic building block of agentic systems is an LLM enhanced with augmentations such as retrieval, tools, and memory.", [Anthropic 2024]</a:t>
             </a:r>
           </a:p>
           <a:p>
@@ -23828,7 +23788,7 @@
         <p:spPr>
           <a:xfrm>
             <a:off x="365760" y="3780610"/>
-            <a:ext cx="8412480" cy="1190201"/>
+            <a:ext cx="8412480" cy="1085050"/>
           </a:xfrm>
           <a:prstGeom prst="rect">
             <a:avLst/>
@@ -23860,7 +23820,7 @@
                 <a:latin typeface="맑은 고딕"/>
                 <a:ea typeface="맑은 고딕"/>
               </a:rPr>
-              <a:t>"워크플로는 잘 정의된 작업에 </a:t>
+              <a:t>워크플로는 잘 정의된 작업에 </a:t>
             </a:r>
             <a:r>
               <a:rPr sz="1800" b="1">
@@ -23880,7 +23840,7 @@
                 <a:latin typeface="맑은 고딕"/>
                 <a:ea typeface="맑은 고딕"/>
               </a:rPr>
-              <a:t>을 주고, 에이전트는 </a:t>
+              <a:t>을 주고 에이전트는 </a:t>
             </a:r>
             <a:r>
               <a:rPr sz="1800" b="1">
@@ -23900,7 +23860,7 @@
                 <a:latin typeface="맑은 고딕"/>
                 <a:ea typeface="맑은 고딕"/>
               </a:rPr>
-              <a:t>이 대규모로 필요할 때 더 나은 선택이다"</a:t>
+              <a:t>이 대규모로 필요할 때 더 나은 선택이다</a:t>
             </a:r>
             <a:r>
               <a:rPr sz="1000" b="0">
@@ -23920,27 +23880,7 @@
                 <a:latin typeface="맑은 고딕"/>
                 <a:ea typeface="맑은 고딕"/>
               </a:rPr>
-              <a:t>"workflows offer predictability and consistency for well-defined tasks, whereas agents are the better option when flexibility and model-driven decision-making are needed at scale."</a:t>
-            </a:r>
-            <a:r>
-              <a:rPr sz="1000" b="0">
-                <a:solidFill>
-                  <a:srgbClr val="000000"/>
-                </a:solidFill>
-                <a:latin typeface="맑은 고딕"/>
-                <a:ea typeface="맑은 고딕"/>
-              </a:rPr>
-              <a:t>, </a:t>
-            </a:r>
-            <a:r>
-              <a:rPr sz="1000" b="0">
-                <a:solidFill>
-                  <a:srgbClr val="000000"/>
-                </a:solidFill>
-                <a:latin typeface="맑은 고딕"/>
-                <a:ea typeface="맑은 고딕"/>
-              </a:rPr>
-              <a:t>[Anthropic 2024]</a:t>
+              <a:t>"workflows offer predictability and consistency for well-defined tasks, whereas agents are the better option when flexibility and model-driven decision-making are needed at scale.", [Anthropic 2024]</a:t>
             </a:r>
           </a:p>
         </p:txBody>
@@ -25554,7 +25494,7 @@
                 <a:latin typeface="맑은 고딕"/>
                 <a:ea typeface="맑은 고딕"/>
               </a:rPr>
-              <a:t>"에이전트는 필요한 </a:t>
+              <a:t>에이전트는 필요한 </a:t>
             </a:r>
             <a:r>
               <a:rPr sz="1800" b="1">
@@ -25574,7 +25514,7 @@
                 <a:latin typeface="맑은 고딕"/>
                 <a:ea typeface="맑은 고딕"/>
               </a:rPr>
-              <a:t>, 고정된 경로를 코드로 정할 수 없는 열린 문제에 쓸 수 있다"</a:t>
+              <a:t> 고정된 경로를 코드로 정할 수 없는 열린 문제에 쓸 수 있다</a:t>
             </a:r>
             <a:r>
               <a:rPr sz="1000" b="0">
@@ -25594,27 +25534,7 @@
                 <a:latin typeface="맑은 고딕"/>
                 <a:ea typeface="맑은 고딕"/>
               </a:rPr>
-              <a:t>"Agents can be used for open-ended problems where it's difficult or impossible to predict the required number of steps, and where you can't hardcode a fixed path."</a:t>
-            </a:r>
-            <a:r>
-              <a:rPr sz="1000" b="0">
-                <a:solidFill>
-                  <a:srgbClr val="000000"/>
-                </a:solidFill>
-                <a:latin typeface="맑은 고딕"/>
-                <a:ea typeface="맑은 고딕"/>
-              </a:rPr>
-              <a:t>, </a:t>
-            </a:r>
-            <a:r>
-              <a:rPr sz="1000" b="0">
-                <a:solidFill>
-                  <a:srgbClr val="000000"/>
-                </a:solidFill>
-                <a:latin typeface="맑은 고딕"/>
-                <a:ea typeface="맑은 고딕"/>
-              </a:rPr>
-              <a:t>[Anthropic 2024]</a:t>
+              <a:t>"Agents can be used for open-ended problems where it's difficult or impossible to predict the required number of steps, and where you can't hardcode a fixed path.", [Anthropic 2024]</a:t>
             </a:r>
           </a:p>
           <a:p>
@@ -26894,7 +26814,7 @@
                 <a:latin typeface="맑은 고딕"/>
                 <a:ea typeface="맑은 고딕"/>
               </a:rPr>
-              <a:t>"에이전트 시스템은 더 나은 작업 성능을 얻는 대신 </a:t>
+              <a:t>에이전트 시스템은 더 나은 작업 성능을 얻는 대신 </a:t>
             </a:r>
             <a:r>
               <a:rPr sz="1800" b="1">
@@ -26914,7 +26834,7 @@
                 <a:latin typeface="맑은 고딕"/>
                 <a:ea typeface="맑은 고딕"/>
               </a:rPr>
-              <a:t>을 치르는 경우가 많다. 그 교환이 언제 맞는지 따져야 한다"</a:t>
+              <a:t>을 치르는 경우가 많으므로 그 교환이 언제 맞는지 따져야 한다</a:t>
             </a:r>
             <a:r>
               <a:rPr sz="1000" b="0">
@@ -26934,27 +26854,7 @@
                 <a:latin typeface="맑은 고딕"/>
                 <a:ea typeface="맑은 고딕"/>
               </a:rPr>
-              <a:t>"Agentic systems often trade latency and cost for better task performance, and you should consider when this tradeoff makes sense."</a:t>
-            </a:r>
-            <a:r>
-              <a:rPr sz="1000" b="0">
-                <a:solidFill>
-                  <a:srgbClr val="000000"/>
-                </a:solidFill>
-                <a:latin typeface="맑은 고딕"/>
-                <a:ea typeface="맑은 고딕"/>
-              </a:rPr>
-              <a:t>, </a:t>
-            </a:r>
-            <a:r>
-              <a:rPr sz="1000" b="0">
-                <a:solidFill>
-                  <a:srgbClr val="000000"/>
-                </a:solidFill>
-                <a:latin typeface="맑은 고딕"/>
-                <a:ea typeface="맑은 고딕"/>
-              </a:rPr>
-              <a:t>[Anthropic 2024]</a:t>
+              <a:t>"Agentic systems often trade latency and cost for better task performance, and you should consider when this tradeoff makes sense.", [Anthropic 2024]</a:t>
             </a:r>
           </a:p>
           <a:p>
@@ -26977,7 +26877,7 @@
                 <a:latin typeface="맑은 고딕"/>
                 <a:ea typeface="맑은 고딕"/>
               </a:rPr>
-              <a:t>"에이전트의 자율성은 </a:t>
+              <a:t>에이전트의 자율성은 </a:t>
             </a:r>
             <a:r>
               <a:rPr sz="1800" b="1">
@@ -26997,7 +26897,7 @@
                 <a:latin typeface="맑은 고딕"/>
                 <a:ea typeface="맑은 고딕"/>
               </a:rPr>
-              <a:t>을 뜻한다"</a:t>
+              <a:t>을 뜻한다</a:t>
             </a:r>
             <a:r>
               <a:rPr sz="1000" b="0">
@@ -27017,27 +26917,7 @@
                 <a:latin typeface="맑은 고딕"/>
                 <a:ea typeface="맑은 고딕"/>
               </a:rPr>
-              <a:t>"The autonomous nature of agents means higher costs, and the potential for compounding errors."</a:t>
-            </a:r>
-            <a:r>
-              <a:rPr sz="1000" b="0">
-                <a:solidFill>
-                  <a:srgbClr val="000000"/>
-                </a:solidFill>
-                <a:latin typeface="맑은 고딕"/>
-                <a:ea typeface="맑은 고딕"/>
-              </a:rPr>
-              <a:t>, </a:t>
-            </a:r>
-            <a:r>
-              <a:rPr sz="1000" b="0">
-                <a:solidFill>
-                  <a:srgbClr val="000000"/>
-                </a:solidFill>
-                <a:latin typeface="맑은 고딕"/>
-                <a:ea typeface="맑은 고딕"/>
-              </a:rPr>
-              <a:t>[Anthropic 2024]</a:t>
+              <a:t>"The autonomous nature of agents means higher costs, and the potential for compounding errors.", [Anthropic 2024]</a:t>
             </a:r>
           </a:p>
         </p:txBody>

--- a/courses/ai-native/sessions/s02.pptx
+++ b/courses/ai-native/sessions/s02.pptx
@@ -3768,7 +3768,7 @@
           </p:nvPr>
         </p:nvGraphicFramePr>
         <p:xfrm>
-          <a:off x="412306" y="1837690"/>
+          <a:off x="412306" y="2112010"/>
           <a:ext cx="8305800" cy="3873500"/>
         </p:xfrm>
         <a:graphic>
@@ -5418,7 +5418,7 @@
         <p:spPr>
           <a:xfrm>
             <a:off x="365760" y="960120"/>
-            <a:ext cx="8412480" cy="524240"/>
+            <a:ext cx="8412480" cy="781278"/>
           </a:xfrm>
           <a:prstGeom prst="rect">
             <a:avLst/>
@@ -5448,7 +5448,7 @@
                 <a:latin typeface="맑은 고딕"/>
                 <a:ea typeface="맑은 고딕"/>
               </a:rPr>
-              <a:t>주문 기능의 작업 6가지의 </a:t>
+              <a:t>첫 릴리스에 해야 할 일 여섯 가지를 </a:t>
             </a:r>
             <a:r>
               <a:rPr sz="1800" b="1">
@@ -5458,7 +5458,7 @@
                 <a:latin typeface="맑은 고딕"/>
                 <a:ea typeface="맑은 고딕"/>
               </a:rPr>
-              <a:t>작업 특성에 따른 활용 방식</a:t>
+              <a:t>작업 특성</a:t>
             </a:r>
             <a:r>
               <a:rPr sz="1800" b="0">
@@ -5468,7 +5468,7 @@
                 <a:latin typeface="맑은 고딕"/>
                 <a:ea typeface="맑은 고딕"/>
               </a:rPr>
-              <a:t>은 다음과 같다.</a:t>
+              <a:t>으로 따져 보면 방식이 다음과 같이 갈린다.</a:t>
             </a:r>
           </a:p>
         </p:txBody>
@@ -5552,7 +5552,7 @@
         </p:nvSpPr>
         <p:spPr>
           <a:xfrm>
-            <a:off x="365760" y="1539240"/>
+            <a:off x="365760" y="1813560"/>
             <a:ext cx="8412480" cy="222250"/>
           </a:xfrm>
           <a:prstGeom prst="rect">
@@ -5601,7 +5601,7 @@
         </p:nvSpPr>
         <p:spPr>
           <a:xfrm>
-            <a:off x="365760" y="4082290"/>
+            <a:off x="365760" y="4356610"/>
             <a:ext cx="8412480" cy="1692593"/>
           </a:xfrm>
           <a:prstGeom prst="rect">
@@ -5677,7 +5677,7 @@
                 <a:latin typeface="맑은 고딕"/>
                 <a:ea typeface="맑은 고딕"/>
               </a:rPr>
-              <a:t>에이전트는 하나</a:t>
+              <a:t>에이전트에게 맡긴 것은 하나뿐이다</a:t>
             </a:r>
             <a:r>
               <a:rPr sz="1800" b="0">
@@ -5697,7 +5697,7 @@
                 <a:latin typeface="맑은 고딕"/>
                 <a:ea typeface="맑은 고딕"/>
               </a:rPr>
-              <a:t> 작업 6가지 가운데 에이전트에게 맡긴 작업은 주문 금액·상태 구현뿐이다.</a:t>
+              <a:t> 여섯 가지 가운데 주문 금액·상태 구현만 에이전트에게 맡겼다.</a:t>
             </a:r>
           </a:p>
         </p:txBody>
@@ -6525,7 +6525,7 @@
                 <a:latin typeface="맑은 고딕"/>
                 <a:ea typeface="맑은 고딕"/>
               </a:rPr>
-              <a:t>같은 작업을 3가지 방식으로 </a:t>
+              <a:t>같은 작업을 세 가지 방식으로 </a:t>
             </a:r>
             <a:r>
               <a:rPr sz="1800" b="1">
@@ -6535,7 +6535,7 @@
                 <a:latin typeface="맑은 고딕"/>
                 <a:ea typeface="맑은 고딕"/>
               </a:rPr>
-              <a:t>실제로</a:t>
+              <a:t>실제로 실행했다</a:t>
             </a:r>
             <a:r>
               <a:rPr sz="1800" b="0">
@@ -6545,7 +6545,7 @@
                 <a:latin typeface="맑은 고딕"/>
                 <a:ea typeface="맑은 고딕"/>
               </a:rPr>
-              <a:t> 해 보았다. 세 번 모두 같은 저장소 사본, 같은 업무 규칙, 같은 수용 테스트를 썼다.</a:t>
+              <a:t>. 세 번 모두 같은 저장소 사본과 같은 업무 규칙과 같은 수용 테스트를 썼다.</a:t>
             </a:r>
           </a:p>
         </p:txBody>
@@ -6971,7 +6971,7 @@
                 <a:latin typeface="맑은 고딕"/>
                 <a:ea typeface="맑은 고딕"/>
               </a:rPr>
-              <a:t>사람이 질문하고, 답을 붙여 넣고, 테스트를 돌렸다. LLM은 </a:t>
+              <a:t>사람이 질문하고 답을 붙여 넣고 테스트를 돌렸다. LLM은 </a:t>
             </a:r>
             <a:r>
               <a:rPr sz="1800" b="1">
@@ -6981,7 +6981,7 @@
                 <a:latin typeface="맑은 고딕"/>
                 <a:ea typeface="맑은 고딕"/>
               </a:rPr>
-              <a:t>질문에 붙인 것만</a:t>
+              <a:t>질문에 함께 붙인 내용만</a:t>
             </a:r>
             <a:r>
               <a:rPr sz="1800" b="0">
@@ -6991,7 +6991,7 @@
                 <a:latin typeface="맑은 고딕"/>
                 <a:ea typeface="맑은 고딕"/>
               </a:rPr>
-              <a:t> 보았다.</a:t>
+              <a:t> 볼 수 있었다.</a:t>
             </a:r>
           </a:p>
           <a:p>
@@ -7506,7 +7506,7 @@
                 <a:latin typeface="맑은 고딕"/>
                 <a:ea typeface="맑은 고딕"/>
               </a:rPr>
-              <a:t>미리 정한 프롬프트 3개를 </a:t>
+              <a:t>미리 정해 둔 프롬프트 셋을 </a:t>
             </a:r>
             <a:r>
               <a:rPr sz="1800" b="1">
@@ -7526,7 +7526,7 @@
                 <a:latin typeface="맑은 고딕"/>
                 <a:ea typeface="맑은 고딕"/>
               </a:rPr>
-              <a:t> 실행했다. 단계마다 쓸 수 있는 도구를 그 단계에 필요한 것만 허용했다.</a:t>
+              <a:t> 실행했다. 단계마다 그 단계에 필요한 도구만 쓰도록 열어 두었다.</a:t>
             </a:r>
           </a:p>
           <a:p>
@@ -8407,6 +8407,16 @@
               <a:buNone/>
             </a:pPr>
             <a:r>
+              <a:rPr sz="1800" b="1">
+                <a:solidFill>
+                  <a:srgbClr val="000000"/>
+                </a:solidFill>
+                <a:latin typeface="맑은 고딕"/>
+                <a:ea typeface="맑은 고딕"/>
+              </a:rPr>
+              <a:t>과제 하나만</a:t>
+            </a:r>
+            <a:r>
               <a:rPr sz="1800" b="0">
                 <a:solidFill>
                   <a:srgbClr val="000000"/>
@@ -8414,27 +8424,7 @@
                 <a:latin typeface="맑은 고딕"/>
                 <a:ea typeface="맑은 고딕"/>
               </a:rPr>
-              <a:t>과제 </a:t>
-            </a:r>
-            <a:r>
-              <a:rPr sz="1800" b="1">
-                <a:solidFill>
-                  <a:srgbClr val="000000"/>
-                </a:solidFill>
-                <a:latin typeface="맑은 고딕"/>
-                <a:ea typeface="맑은 고딕"/>
-              </a:rPr>
-              <a:t>하나</a:t>
-            </a:r>
-            <a:r>
-              <a:rPr sz="1800" b="0">
-                <a:solidFill>
-                  <a:srgbClr val="000000"/>
-                </a:solidFill>
-                <a:latin typeface="맑은 고딕"/>
-                <a:ea typeface="맑은 고딕"/>
-              </a:rPr>
-              <a:t>만 주었다. 에이전트가 파일을 읽고, 고치고, 테스트를 돌려 끝냈다. 아래는 에이전트가 만든 코드다.</a:t>
+              <a:t> 주었다. 에이전트가 스스로 파일을 읽고 고치고 테스트를 돌려 끝냈다. 아래는 에이전트가 만든 코드다.</a:t>
             </a:r>
           </a:p>
         </p:txBody>
@@ -10248,7 +10238,7 @@
                 <a:latin typeface="맑은 고딕"/>
                 <a:ea typeface="맑은 고딕"/>
               </a:rPr>
-              <a:t>3가지 방식 모두 업무 규칙을 지켰다. 다른 것은 </a:t>
+              <a:t>세 방식 모두 업무 규칙을 지켰다. 달랐던 것은 </a:t>
             </a:r>
             <a:r>
               <a:rPr sz="1800" b="1">
@@ -10258,7 +10248,7 @@
                 <a:latin typeface="맑은 고딕"/>
                 <a:ea typeface="맑은 고딕"/>
               </a:rPr>
-              <a:t>사람이 개입한 곳, 걸린 시간, 쓴 토큰</a:t>
+              <a:t>사람이 개입한 자리와 걸린 시간과 쓴 토큰</a:t>
             </a:r>
             <a:r>
               <a:rPr sz="1800" b="0">
@@ -11370,7 +11360,7 @@
                 <a:latin typeface="맑은 고딕"/>
                 <a:ea typeface="맑은 고딕"/>
               </a:rPr>
-              <a:t>같은 연동 코드도 </a:t>
+              <a:t>같은 연동 코드라도 </a:t>
             </a:r>
             <a:r>
               <a:rPr sz="1800" b="1">
@@ -11380,7 +11370,7 @@
                 <a:latin typeface="맑은 고딕"/>
                 <a:ea typeface="맑은 고딕"/>
               </a:rPr>
-              <a:t>외부 문서의 품질</a:t>
+              <a:t>외부 시스템 문서의 품질</a:t>
             </a:r>
             <a:r>
               <a:rPr sz="1800" b="0">
@@ -11390,7 +11380,7 @@
                 <a:latin typeface="맑은 고딕"/>
                 <a:ea typeface="맑은 고딕"/>
               </a:rPr>
-              <a:t>에 따라 절차의 확정 여부가 바뀐다.</a:t>
+              <a:t>에 따라 절차가 정해져 있는지 아닌지가 달라진다.</a:t>
             </a:r>
           </a:p>
         </p:txBody>
@@ -11841,7 +11831,7 @@
                 <a:latin typeface="맑은 고딕"/>
                 <a:ea typeface="맑은 고딕"/>
               </a:rPr>
-              <a:t>으로 정한다.</a:t>
+              <a:t>으로 정한다. 같은 구현이라도 업무 규칙이 정해지기 전과 후가 다르다.</a:t>
             </a:r>
           </a:p>
           <a:p>
@@ -11989,7 +11979,7 @@
         </p:nvSpPr>
         <p:spPr>
           <a:xfrm>
-            <a:off x="365760" y="2938272"/>
+            <a:off x="365760" y="3212592"/>
             <a:ext cx="8412480" cy="201168"/>
           </a:xfrm>
           <a:prstGeom prst="rect">
@@ -12033,7 +12023,7 @@
         </p:blipFill>
         <p:spPr>
           <a:xfrm>
-            <a:off x="1441450" y="3176016"/>
+            <a:off x="1441450" y="3450336"/>
             <a:ext cx="6261100" cy="447221"/>
           </a:xfrm>
           <a:prstGeom prst="rect">
@@ -12210,7 +12200,7 @@
           </p:nvPr>
         </p:nvGraphicFramePr>
         <p:xfrm>
-          <a:off x="811086" y="1837690"/>
+          <a:off x="811086" y="2112010"/>
           <a:ext cx="7508240" cy="3873500"/>
         </p:xfrm>
         <a:graphic>
@@ -13117,7 +13107,7 @@
         <p:spPr>
           <a:xfrm>
             <a:off x="365760" y="960120"/>
-            <a:ext cx="8412480" cy="524240"/>
+            <a:ext cx="8412480" cy="781278"/>
           </a:xfrm>
           <a:prstGeom prst="rect">
             <a:avLst/>
@@ -13147,7 +13137,7 @@
                 <a:latin typeface="맑은 고딕"/>
                 <a:ea typeface="맑은 고딕"/>
               </a:rPr>
-              <a:t>작업 특성에 맞지 않는 방식은 </a:t>
+              <a:t>작업 특성에 맞지 않는 방식을 골랐다면 </a:t>
             </a:r>
             <a:r>
               <a:rPr sz="1800" b="1">
@@ -13157,7 +13147,7 @@
                 <a:latin typeface="맑은 고딕"/>
                 <a:ea typeface="맑은 고딕"/>
               </a:rPr>
-              <a:t>재검토하여 적절한 방식을 선택한다</a:t>
+              <a:t>방식을 다시 고른다</a:t>
             </a:r>
             <a:r>
               <a:rPr sz="1800" b="0">
@@ -13167,7 +13157,7 @@
                 <a:latin typeface="맑은 고딕"/>
                 <a:ea typeface="맑은 고딕"/>
               </a:rPr>
-              <a:t>.</a:t>
+              <a:t>. 아래 셋이 자주 보이는 경우다.</a:t>
             </a:r>
           </a:p>
         </p:txBody>
@@ -13251,7 +13241,7 @@
         </p:nvSpPr>
         <p:spPr>
           <a:xfrm>
-            <a:off x="365760" y="1539240"/>
+            <a:off x="365760" y="1813560"/>
             <a:ext cx="8412480" cy="222250"/>
           </a:xfrm>
           <a:prstGeom prst="rect">
@@ -14307,7 +14297,27 @@
                 <a:latin typeface="맑은 고딕"/>
                 <a:ea typeface="맑은 고딕"/>
               </a:rPr>
-              <a:t>"When building applications with LLMs, we recommend finding the simplest solution possible, and only increasing complexity when needed. This might mean not building agentic systems at all.", [Anthropic 2024]</a:t>
+              <a:t>"When building applications with LLMs, we recommend finding the simplest solution possible, and only increasing complexity when needed. This might mean not building agentic systems at all."</a:t>
+            </a:r>
+            <a:r>
+              <a:rPr sz="1000" b="0">
+                <a:solidFill>
+                  <a:srgbClr val="000000"/>
+                </a:solidFill>
+                <a:latin typeface="맑은 고딕"/>
+                <a:ea typeface="맑은 고딕"/>
+              </a:rPr>
+              <a:t>, </a:t>
+            </a:r>
+            <a:r>
+              <a:rPr sz="1000" b="0">
+                <a:solidFill>
+                  <a:srgbClr val="000000"/>
+                </a:solidFill>
+                <a:latin typeface="맑은 고딕"/>
+                <a:ea typeface="맑은 고딕"/>
+              </a:rPr>
+              <a:t>[Anthropic 2024]</a:t>
             </a:r>
           </a:p>
         </p:txBody>
@@ -14757,6 +14767,16 @@
               <a:buNone/>
             </a:pPr>
             <a:r>
+              <a:rPr sz="1800" b="0">
+                <a:solidFill>
+                  <a:srgbClr val="000000"/>
+                </a:solidFill>
+                <a:latin typeface="맑은 고딕"/>
+                <a:ea typeface="맑은 고딕"/>
+              </a:rPr>
+              <a:t>작업마다 </a:t>
+            </a:r>
+            <a:r>
               <a:rPr sz="1800" b="1">
                 <a:solidFill>
                   <a:srgbClr val="000000"/>
@@ -14764,7 +14784,7 @@
                 <a:latin typeface="맑은 고딕"/>
                 <a:ea typeface="맑은 고딕"/>
               </a:rPr>
-              <a:t>작업 특성</a:t>
+              <a:t>무엇이 정해져 있고 무엇을 확인할 수 있는지</a:t>
             </a:r>
             <a:r>
               <a:rPr sz="1800" b="0">
@@ -14774,7 +14794,7 @@
                 <a:latin typeface="맑은 고딕"/>
                 <a:ea typeface="맑은 고딕"/>
               </a:rPr>
-              <a:t>에 따라 일하는 방식을 선택한다.</a:t>
+              <a:t>를 보고 AI를 쓰는 방식을 고른다.</a:t>
             </a:r>
           </a:p>
           <a:p>
@@ -21225,7 +21245,7 @@
                 <a:latin typeface="맑은 고딕"/>
                 <a:ea typeface="맑은 고딕"/>
               </a:rPr>
-              <a:t>작업 특성은 </a:t>
+              <a:t>작업 특성은 그 작업을 </a:t>
             </a:r>
             <a:r>
               <a:rPr sz="1800" b="1">
@@ -21235,7 +21255,7 @@
                 <a:latin typeface="맑은 고딕"/>
                 <a:ea typeface="맑은 고딕"/>
               </a:rPr>
-              <a:t>그 작업을 AI에게 맡겨도 되는지, 어떻게 맡길지를 가르는 성질</a:t>
+              <a:t>AI에게 맡겨도 되는지, 맡긴다면 어떤 방식으로 맡길지</a:t>
             </a:r>
             <a:r>
               <a:rPr sz="1800" b="0">
@@ -21245,7 +21265,7 @@
                 <a:latin typeface="맑은 고딕"/>
                 <a:ea typeface="맑은 고딕"/>
               </a:rPr>
-              <a:t>이다.</a:t>
+              <a:t>를 가르는 성질이다.</a:t>
             </a:r>
           </a:p>
           <a:p>
@@ -21348,7 +21368,27 @@
                 <a:latin typeface="맑은 고딕"/>
                 <a:ea typeface="맑은 고딕"/>
               </a:rPr>
-              <a:t>"Code solutions are verifiable through automated tests; Agents can iterate on solutions using test results as feedback; The problem space is well-defined and structured; and Output quality can be measured objectively.", [Anthropic 2024]</a:t>
+              <a:t>"Code solutions are verifiable through automated tests; Agents can iterate on solutions using test results as feedback; The problem space is well-defined and structured; and Output quality can be measured objectively."</a:t>
+            </a:r>
+            <a:r>
+              <a:rPr sz="1000" b="0">
+                <a:solidFill>
+                  <a:srgbClr val="000000"/>
+                </a:solidFill>
+                <a:latin typeface="맑은 고딕"/>
+                <a:ea typeface="맑은 고딕"/>
+              </a:rPr>
+              <a:t>, </a:t>
+            </a:r>
+            <a:r>
+              <a:rPr sz="1000" b="0">
+                <a:solidFill>
+                  <a:srgbClr val="000000"/>
+                </a:solidFill>
+                <a:latin typeface="맑은 고딕"/>
+                <a:ea typeface="맑은 고딕"/>
+              </a:rPr>
+              <a:t>[Anthropic 2024]</a:t>
             </a:r>
           </a:p>
         </p:txBody>
@@ -21707,7 +21747,7 @@
                 <a:latin typeface="맑은 고딕"/>
                 <a:ea typeface="맑은 고딕"/>
               </a:rPr>
-              <a:t>증강 LLM은 LLM에 검색·도구·기억을 붙인 것</a:t>
+              <a:t>증강 LLM</a:t>
             </a:r>
             <a:r>
               <a:rPr sz="1800" b="0">
@@ -21717,7 +21757,7 @@
                 <a:latin typeface="맑은 고딕"/>
                 <a:ea typeface="맑은 고딕"/>
               </a:rPr>
-              <a:t>이다. 대화형 보조·워크플로·에이전트는 모두 증강 LLM을 쓴다.</a:t>
+              <a:t>은 LLM에 검색·도구·기억을 붙인 것이다. 대화형 보조도 워크플로도 에이전트도 모두 이 증강 LLM 위에서 돈다.</a:t>
             </a:r>
           </a:p>
           <a:p>
@@ -21780,7 +21820,27 @@
                 <a:latin typeface="맑은 고딕"/>
                 <a:ea typeface="맑은 고딕"/>
               </a:rPr>
-              <a:t>"The basic building block of agentic systems is an LLM enhanced with augmentations such as retrieval, tools, and memory.", [Anthropic 2024]</a:t>
+              <a:t>"The basic building block of agentic systems is an LLM enhanced with augmentations such as retrieval, tools, and memory."</a:t>
+            </a:r>
+            <a:r>
+              <a:rPr sz="1000" b="0">
+                <a:solidFill>
+                  <a:srgbClr val="000000"/>
+                </a:solidFill>
+                <a:latin typeface="맑은 고딕"/>
+                <a:ea typeface="맑은 고딕"/>
+              </a:rPr>
+              <a:t>, </a:t>
+            </a:r>
+            <a:r>
+              <a:rPr sz="1000" b="0">
+                <a:solidFill>
+                  <a:srgbClr val="000000"/>
+                </a:solidFill>
+                <a:latin typeface="맑은 고딕"/>
+                <a:ea typeface="맑은 고딕"/>
+              </a:rPr>
+              <a:t>[Anthropic 2024]</a:t>
             </a:r>
           </a:p>
           <a:p>
@@ -22095,7 +22155,7 @@
           </p:nvPr>
         </p:nvGraphicFramePr>
         <p:xfrm>
-          <a:off x="412306" y="2112010"/>
+          <a:off x="412306" y="2386330"/>
           <a:ext cx="8305800" cy="3873500"/>
         </p:xfrm>
         <a:graphic>
@@ -23584,7 +23644,7 @@
         <p:spPr>
           <a:xfrm>
             <a:off x="365760" y="960120"/>
-            <a:ext cx="8412480" cy="781278"/>
+            <a:ext cx="8412480" cy="1038316"/>
           </a:xfrm>
           <a:prstGeom prst="rect">
             <a:avLst/>
@@ -23624,7 +23684,7 @@
                 <a:latin typeface="맑은 고딕"/>
                 <a:ea typeface="맑은 고딕"/>
               </a:rPr>
-              <a:t>사람이 정하던 작업 순서를 LLM이 정한다</a:t>
+              <a:t>작업 순서를 정하는 쪽이 사람에서 LLM으로 옮겨 간다</a:t>
             </a:r>
             <a:r>
               <a:rPr sz="1800" b="0">
@@ -23634,7 +23694,7 @@
                 <a:latin typeface="맑은 고딕"/>
                 <a:ea typeface="맑은 고딕"/>
               </a:rPr>
-              <a:t>. LLM이 사람의 확인 없이 정하는 범위가 </a:t>
+              <a:t>. LLM이 사람의 확인 없이 스스로 정하는 범위를 </a:t>
             </a:r>
             <a:r>
               <a:rPr sz="1800" b="1">
@@ -23654,7 +23714,7 @@
                 <a:latin typeface="맑은 고딕"/>
                 <a:ea typeface="맑은 고딕"/>
               </a:rPr>
-              <a:t>이다.</a:t>
+              <a:t>이라 부른다.</a:t>
             </a:r>
           </a:p>
         </p:txBody>
@@ -23738,7 +23798,7 @@
         </p:nvSpPr>
         <p:spPr>
           <a:xfrm>
-            <a:off x="365760" y="1813560"/>
+            <a:off x="365760" y="2087880"/>
             <a:ext cx="8412480" cy="222250"/>
           </a:xfrm>
           <a:prstGeom prst="rect">
@@ -23787,7 +23847,7 @@
         </p:nvSpPr>
         <p:spPr>
           <a:xfrm>
-            <a:off x="365760" y="3780610"/>
+            <a:off x="365760" y="4054930"/>
             <a:ext cx="8412480" cy="1085050"/>
           </a:xfrm>
           <a:prstGeom prst="rect">
@@ -23880,7 +23940,27 @@
                 <a:latin typeface="맑은 고딕"/>
                 <a:ea typeface="맑은 고딕"/>
               </a:rPr>
-              <a:t>"workflows offer predictability and consistency for well-defined tasks, whereas agents are the better option when flexibility and model-driven decision-making are needed at scale.", [Anthropic 2024]</a:t>
+              <a:t>"workflows offer predictability and consistency for well-defined tasks, whereas agents are the better option when flexibility and model-driven decision-making are needed at scale."</a:t>
+            </a:r>
+            <a:r>
+              <a:rPr sz="1000" b="0">
+                <a:solidFill>
+                  <a:srgbClr val="000000"/>
+                </a:solidFill>
+                <a:latin typeface="맑은 고딕"/>
+                <a:ea typeface="맑은 고딕"/>
+              </a:rPr>
+              <a:t>, </a:t>
+            </a:r>
+            <a:r>
+              <a:rPr sz="1000" b="0">
+                <a:solidFill>
+                  <a:srgbClr val="000000"/>
+                </a:solidFill>
+                <a:latin typeface="맑은 고딕"/>
+                <a:ea typeface="맑은 고딕"/>
+              </a:rPr>
+              <a:t>[Anthropic 2024]</a:t>
             </a:r>
           </a:p>
         </p:txBody>
@@ -25308,7 +25388,7 @@
                 <a:latin typeface="맑은 고딕"/>
                 <a:ea typeface="맑은 고딕"/>
               </a:rPr>
-              <a:t>가장 단순하면서 충분한 방식</a:t>
+              <a:t>가장 단순하면서도 충분한 방식</a:t>
             </a:r>
             <a:r>
               <a:rPr sz="1800" b="0">
@@ -25318,17 +25398,7 @@
                 <a:latin typeface="맑은 고딕"/>
                 <a:ea typeface="맑은 고딕"/>
               </a:rPr>
-              <a:t>에 닿는다. 업무 규칙과 되돌리기를 먼저 묻는다 —</a:t>
-            </a:r>
-            <a:r>
-              <a:rPr sz="1600" b="0">
-                <a:solidFill>
-                  <a:srgbClr val="000000"/>
-                </a:solidFill>
-                <a:latin typeface="맑은 고딕"/>
-                <a:ea typeface="맑은 고딕"/>
-              </a:rPr>
-              <a:t> 이 둘은 AI가 아무리 뛰어나도 바뀌지 않는다.</a:t>
+              <a:t>에 이른다. 업무 규칙이 정해졌는지와 되돌릴 수 있는지를 먼저 묻는다. 이 둘은 모델이 좋아져도 달라지지 않기 때문이다.</a:t>
             </a:r>
           </a:p>
         </p:txBody>
@@ -25534,7 +25604,27 @@
                 <a:latin typeface="맑은 고딕"/>
                 <a:ea typeface="맑은 고딕"/>
               </a:rPr>
-              <a:t>"Agents can be used for open-ended problems where it's difficult or impossible to predict the required number of steps, and where you can't hardcode a fixed path.", [Anthropic 2024]</a:t>
+              <a:t>"Agents can be used for open-ended problems where it's difficult or impossible to predict the required number of steps, and where you can't hardcode a fixed path."</a:t>
+            </a:r>
+            <a:r>
+              <a:rPr sz="1000" b="0">
+                <a:solidFill>
+                  <a:srgbClr val="000000"/>
+                </a:solidFill>
+                <a:latin typeface="맑은 고딕"/>
+                <a:ea typeface="맑은 고딕"/>
+              </a:rPr>
+              <a:t>, </a:t>
+            </a:r>
+            <a:r>
+              <a:rPr sz="1000" b="0">
+                <a:solidFill>
+                  <a:srgbClr val="000000"/>
+                </a:solidFill>
+                <a:latin typeface="맑은 고딕"/>
+                <a:ea typeface="맑은 고딕"/>
+              </a:rPr>
+              <a:t>[Anthropic 2024]</a:t>
             </a:r>
           </a:p>
           <a:p>
@@ -25763,7 +25853,7 @@
           </p:nvPr>
         </p:nvGraphicFramePr>
         <p:xfrm>
-          <a:off x="1413066" y="3735763"/>
+          <a:off x="1413066" y="4010083"/>
           <a:ext cx="6304280" cy="3873500"/>
         </p:xfrm>
         <a:graphic>
@@ -26741,7 +26831,7 @@
         <p:spPr>
           <a:xfrm>
             <a:off x="365760" y="960120"/>
-            <a:ext cx="8412480" cy="2440339"/>
+            <a:ext cx="8412480" cy="2697377"/>
           </a:xfrm>
           <a:prstGeom prst="rect">
             <a:avLst/>
@@ -26781,7 +26871,7 @@
                 <a:latin typeface="맑은 고딕"/>
                 <a:ea typeface="맑은 고딕"/>
               </a:rPr>
-              <a:t>사람이 확인하는 시점이 뒤로 가고, 오류가 쌓이는 범위가 넓어진다</a:t>
+              <a:t>사람이 결과를 확인하는 시점이 뒤로 밀리고, 그사이 오류가 쌓이는 범위도 넓어진다</a:t>
             </a:r>
             <a:r>
               <a:rPr sz="1800" b="0">
@@ -26791,7 +26881,7 @@
                 <a:latin typeface="맑은 고딕"/>
                 <a:ea typeface="맑은 고딕"/>
               </a:rPr>
-              <a:t>. 비용은 작업이 크고 반복이 늘수록 커진다.</a:t>
+              <a:t>. 작업이 크고 반복이 많을수록 그 비용이 커진다.</a:t>
             </a:r>
           </a:p>
           <a:p>
@@ -26854,7 +26944,27 @@
                 <a:latin typeface="맑은 고딕"/>
                 <a:ea typeface="맑은 고딕"/>
               </a:rPr>
-              <a:t>"Agentic systems often trade latency and cost for better task performance, and you should consider when this tradeoff makes sense.", [Anthropic 2024]</a:t>
+              <a:t>"Agentic systems often trade latency and cost for better task performance, and you should consider when this tradeoff makes sense."</a:t>
+            </a:r>
+            <a:r>
+              <a:rPr sz="1000" b="0">
+                <a:solidFill>
+                  <a:srgbClr val="000000"/>
+                </a:solidFill>
+                <a:latin typeface="맑은 고딕"/>
+                <a:ea typeface="맑은 고딕"/>
+              </a:rPr>
+              <a:t>, </a:t>
+            </a:r>
+            <a:r>
+              <a:rPr sz="1000" b="0">
+                <a:solidFill>
+                  <a:srgbClr val="000000"/>
+                </a:solidFill>
+                <a:latin typeface="맑은 고딕"/>
+                <a:ea typeface="맑은 고딕"/>
+              </a:rPr>
+              <a:t>[Anthropic 2024]</a:t>
             </a:r>
           </a:p>
           <a:p>
@@ -26917,7 +27027,27 @@
                 <a:latin typeface="맑은 고딕"/>
                 <a:ea typeface="맑은 고딕"/>
               </a:rPr>
-              <a:t>"The autonomous nature of agents means higher costs, and the potential for compounding errors.", [Anthropic 2024]</a:t>
+              <a:t>"The autonomous nature of agents means higher costs, and the potential for compounding errors."</a:t>
+            </a:r>
+            <a:r>
+              <a:rPr sz="1000" b="0">
+                <a:solidFill>
+                  <a:srgbClr val="000000"/>
+                </a:solidFill>
+                <a:latin typeface="맑은 고딕"/>
+                <a:ea typeface="맑은 고딕"/>
+              </a:rPr>
+              <a:t>, </a:t>
+            </a:r>
+            <a:r>
+              <a:rPr sz="1000" b="0">
+                <a:solidFill>
+                  <a:srgbClr val="000000"/>
+                </a:solidFill>
+                <a:latin typeface="맑은 고딕"/>
+                <a:ea typeface="맑은 고딕"/>
+              </a:rPr>
+              <a:t>[Anthropic 2024]</a:t>
             </a:r>
           </a:p>
         </p:txBody>
@@ -27001,7 +27131,7 @@
         </p:nvSpPr>
         <p:spPr>
           <a:xfrm>
-            <a:off x="365760" y="3437313"/>
+            <a:off x="365760" y="3711633"/>
             <a:ext cx="8412480" cy="222250"/>
           </a:xfrm>
           <a:prstGeom prst="rect">
@@ -27271,7 +27401,7 @@
                 <a:latin typeface="맑은 고딕"/>
                 <a:ea typeface="맑은 고딕"/>
               </a:rPr>
-              <a:t>AI에게 맡기지 않는 작업은 </a:t>
+              <a:t>AI에게 맡기지 않는 작업은 두 가지다. </a:t>
             </a:r>
             <a:r>
               <a:rPr sz="1800" b="1">
@@ -27281,7 +27411,7 @@
                 <a:latin typeface="맑은 고딕"/>
                 <a:ea typeface="맑은 고딕"/>
               </a:rPr>
-              <a:t>두 종류</a:t>
+              <a:t>AI가 할 수 없는 작업</a:t>
             </a:r>
             <a:r>
               <a:rPr sz="1800" b="0">
@@ -27291,7 +27421,27 @@
                 <a:latin typeface="맑은 고딕"/>
                 <a:ea typeface="맑은 고딕"/>
               </a:rPr>
-              <a:t>다.</a:t>
+              <a:t>과 </a:t>
+            </a:r>
+            <a:r>
+              <a:rPr sz="1800" b="1">
+                <a:solidFill>
+                  <a:srgbClr val="000000"/>
+                </a:solidFill>
+                <a:latin typeface="맑은 고딕"/>
+                <a:ea typeface="맑은 고딕"/>
+              </a:rPr>
+              <a:t>AI를 쓸 이유가 없는 작업</a:t>
+            </a:r>
+            <a:r>
+              <a:rPr sz="1800" b="0">
+                <a:solidFill>
+                  <a:srgbClr val="000000"/>
+                </a:solidFill>
+                <a:latin typeface="맑은 고딕"/>
+                <a:ea typeface="맑은 고딕"/>
+              </a:rPr>
+              <a:t>이다.</a:t>
             </a:r>
           </a:p>
           <a:p>
@@ -27569,7 +27719,27 @@
                 <a:latin typeface="맑은 고딕"/>
                 <a:ea typeface="맑은 고딕"/>
               </a:rPr>
-              <a:t>"Before committing to building an agent, validate that your use case can meet these criteria clearly. Otherwise, a deterministic solution may suffice.", [OpenAI 2025]</a:t>
+              <a:t>"Before committing to building an agent, validate that your use case can meet these criteria clearly. Otherwise, a deterministic solution may suffice."</a:t>
+            </a:r>
+            <a:r>
+              <a:rPr sz="1000" b="0">
+                <a:solidFill>
+                  <a:srgbClr val="000000"/>
+                </a:solidFill>
+                <a:latin typeface="맑은 고딕"/>
+                <a:ea typeface="맑은 고딕"/>
+              </a:rPr>
+              <a:t>, </a:t>
+            </a:r>
+            <a:r>
+              <a:rPr sz="1000" b="0">
+                <a:solidFill>
+                  <a:srgbClr val="000000"/>
+                </a:solidFill>
+                <a:latin typeface="맑은 고딕"/>
+                <a:ea typeface="맑은 고딕"/>
+              </a:rPr>
+              <a:t>[OpenAI 2025]</a:t>
             </a:r>
           </a:p>
         </p:txBody>
@@ -27755,7 +27925,7 @@
           </p:nvPr>
         </p:nvGraphicFramePr>
         <p:xfrm>
-          <a:off x="950785" y="1837690"/>
+          <a:off x="950785" y="2112010"/>
           <a:ext cx="7228840" cy="3873500"/>
         </p:xfrm>
         <a:graphic>
@@ -28494,7 +28664,7 @@
         <p:spPr>
           <a:xfrm>
             <a:off x="365760" y="960120"/>
-            <a:ext cx="8412480" cy="524240"/>
+            <a:ext cx="8412480" cy="781278"/>
           </a:xfrm>
           <a:prstGeom prst="rect">
             <a:avLst/>
@@ -28534,7 +28704,7 @@
                 <a:latin typeface="맑은 고딕"/>
                 <a:ea typeface="맑은 고딕"/>
               </a:rPr>
-              <a:t>절차를 미리 정할 수 없고 판단이 많은 작업</a:t>
+              <a:t>절차를 미리 정해 둘 수 없고 중간에 판단할 일이 많은 작업</a:t>
             </a:r>
             <a:r>
               <a:rPr sz="1800" b="0">
@@ -28628,7 +28798,7 @@
         </p:nvSpPr>
         <p:spPr>
           <a:xfrm>
-            <a:off x="365760" y="1539240"/>
+            <a:off x="365760" y="1813560"/>
             <a:ext cx="8412480" cy="222250"/>
           </a:xfrm>
           <a:prstGeom prst="rect">

--- a/courses/ai-native/sessions/s02.pptx
+++ b/courses/ai-native/sessions/s02.pptx
@@ -1863,7 +1863,7 @@
             <a:pPr lvl="0"/>
             <a:r>
               <a:rPr lang="ko-KR" sz="1200"/>
-              <a:t>이 세 층이 이 세션의 순서다. 형식은 「03. 요구를 담는 형식」과 「04. 유저 스토리」가, 문서는 「05. 요구사항 정의서와 작업 명세서」가 펼친다.</a:t>
+              <a:t>이 세 층이 이 세션의 순서다. 형식은 「03. 요구를 담는 형식」과 「04. 사용자 이야기」가, 문서는 「05. 요구사항 정의서와 작업 명세서」가 펼친다.</a:t>
             </a:r>
           </a:p>
         </p:txBody>
@@ -3314,7 +3314,7 @@
                 <a:latin typeface="맑은 고딕"/>
                 <a:ea typeface="맑은 고딕"/>
               </a:rPr>
-              <a:t>02. 요구와 유저 스토리 목차</a:t>
+              <a:t>02. 요구와 사용자 이야기 목차</a:t>
             </a:r>
           </a:p>
         </p:txBody>
@@ -3462,7 +3462,7 @@
                 <a:latin typeface="맑은 고딕"/>
                 <a:ea typeface="맑은 고딕"/>
               </a:rPr>
-              <a:t>04. 유저 스토리</a:t>
+              <a:t>04. 사용자 이야기</a:t>
             </a:r>
           </a:p>
           <a:p>
@@ -3608,7 +3608,7 @@
                 <a:latin typeface="맑은 고딕"/>
                 <a:ea typeface="맑은 고딕"/>
               </a:rPr>
-              <a:t> 요구사항 정의서와 유저 스토리</a:t>
+              <a:t> 요구사항 정의서와 사용자 이야기</a:t>
             </a:r>
           </a:p>
           <a:p>
@@ -3804,7 +3804,7 @@
                 <a:latin typeface="맑은 고딕"/>
                 <a:ea typeface="맑은 고딕"/>
               </a:rPr>
-              <a:t>좋은 유저 스토리 — INVEST</a:t>
+              <a:t>좋은 사용자 이야기 — INVEST</a:t>
             </a:r>
           </a:p>
           <a:p>
@@ -3816,7 +3816,7 @@
                 <a:latin typeface="맑은 고딕"/>
                 <a:ea typeface="맑은 고딕"/>
               </a:rPr>
-              <a:t>04. 유저 스토리</a:t>
+              <a:t>04. 사용자 이야기</a:t>
             </a:r>
           </a:p>
         </p:txBody>
@@ -3844,7 +3844,7 @@
           <a:p>
             <a:r>
               <a:rPr kumimoji="1" lang="en-US" altLang="ko-KR" sz="1400" dirty="0" err="1"/>
-              <a:t>02. 요구와 유저 스토리</a:t>
+              <a:t>02. 요구와 사용자 이야기</a:t>
             </a:r>
           </a:p>
         </p:txBody>
@@ -5193,7 +5193,7 @@
                 <a:latin typeface="맑은 고딕"/>
                 <a:ea typeface="맑은 고딕"/>
               </a:rPr>
-              <a:t>좋은 유저 스토리의 조건을 모은 것이 </a:t>
+              <a:t>좋은 사용자 이야기의 조건을 모은 것이 </a:t>
             </a:r>
             <a:r>
               <a:rPr sz="1800" b="1">
@@ -5542,7 +5542,7 @@
                 <a:latin typeface="맑은 고딕"/>
                 <a:ea typeface="맑은 고딕"/>
               </a:rPr>
-              <a:t>04. 유저 스토리</a:t>
+              <a:t>04. 사용자 이야기</a:t>
             </a:r>
           </a:p>
         </p:txBody>
@@ -5570,7 +5570,7 @@
           <a:p>
             <a:r>
               <a:rPr kumimoji="1" lang="en-US" altLang="ko-KR" sz="1400" dirty="0" err="1"/>
-              <a:t>02. 요구와 유저 스토리</a:t>
+              <a:t>02. 요구와 사용자 이야기</a:t>
             </a:r>
           </a:p>
         </p:txBody>
@@ -6646,7 +6646,7 @@
           <a:p>
             <a:r>
               <a:rPr kumimoji="1" lang="en-US" altLang="ko-KR" sz="1400" dirty="0" err="1"/>
-              <a:t>02. 요구와 유저 스토리</a:t>
+              <a:t>02. 요구와 사용자 이야기</a:t>
             </a:r>
           </a:p>
         </p:txBody>
@@ -7664,7 +7664,7 @@
           <a:p>
             <a:r>
               <a:rPr kumimoji="1" lang="en-US" altLang="ko-KR" sz="1400" dirty="0" err="1"/>
-              <a:t>02. 요구와 유저 스토리</a:t>
+              <a:t>02. 요구와 사용자 이야기</a:t>
             </a:r>
           </a:p>
         </p:txBody>
@@ -7740,7 +7740,7 @@
           </p:nvPr>
         </p:nvGraphicFramePr>
         <p:xfrm>
-          <a:off x="1900746" y="4257238"/>
+          <a:off x="1900746" y="4096513"/>
           <a:ext cx="5328920" cy="3873500"/>
         </p:xfrm>
         <a:graphic>
@@ -8341,7 +8341,7 @@
                 <a:latin typeface="맑은 고딕"/>
                 <a:ea typeface="맑은 고딕"/>
               </a:rPr>
-              <a:t>요구 → 유저 스토리</a:t>
+              <a:t>요구 → 사용자 이야기</a:t>
             </a:r>
             <a:r>
               <a:rPr sz="1400" b="1">
@@ -8475,7 +8475,7 @@
         </p:nvSpPr>
         <p:spPr>
           <a:xfrm>
-            <a:off x="365760" y="3958788"/>
+            <a:off x="365760" y="3798063"/>
             <a:ext cx="8412480" cy="222250"/>
           </a:xfrm>
           <a:prstGeom prst="rect">
@@ -8524,7 +8524,7 @@
         </p:nvSpPr>
         <p:spPr>
           <a:xfrm>
-            <a:off x="365760" y="5349838"/>
+            <a:off x="365760" y="5189113"/>
             <a:ext cx="8412480" cy="1178518"/>
           </a:xfrm>
           <a:prstGeom prst="rect">
@@ -8690,8 +8690,8 @@
         </p:blipFill>
         <p:spPr>
           <a:xfrm>
-            <a:off x="435392" y="2124456"/>
-            <a:ext cx="8259626" cy="1496004"/>
+            <a:off x="716461" y="2124456"/>
+            <a:ext cx="7697490" cy="1335279"/>
           </a:xfrm>
           <a:prstGeom prst="rect">
             <a:avLst/>
@@ -8803,7 +8803,7 @@
           <a:p>
             <a:r>
               <a:rPr kumimoji="1" lang="en-US" altLang="ko-KR" sz="1400" dirty="0" err="1"/>
-              <a:t>02. 요구와 유저 스토리</a:t>
+              <a:t>02. 요구와 사용자 이야기</a:t>
             </a:r>
           </a:p>
         </p:txBody>
@@ -10145,7 +10145,7 @@
           <a:p>
             <a:r>
               <a:rPr kumimoji="1" lang="en-US" altLang="ko-KR" sz="1400" dirty="0" err="1"/>
-              <a:t>02. 요구와 유저 스토리</a:t>
+              <a:t>02. 요구와 사용자 이야기</a:t>
             </a:r>
           </a:p>
         </p:txBody>
@@ -11527,7 +11527,7 @@
           <a:p>
             <a:r>
               <a:rPr kumimoji="1" lang="en-US" altLang="ko-KR" sz="1400" dirty="0" err="1"/>
-              <a:t>02. 요구와 유저 스토리</a:t>
+              <a:t>02. 요구와 사용자 이야기</a:t>
             </a:r>
           </a:p>
         </p:txBody>
@@ -12560,7 +12560,7 @@
           <a:p>
             <a:r>
               <a:rPr kumimoji="1" lang="en-US" altLang="ko-KR" sz="1400" dirty="0" err="1"/>
-              <a:t>02. 요구와 유저 스토리</a:t>
+              <a:t>02. 요구와 사용자 이야기</a:t>
             </a:r>
           </a:p>
         </p:txBody>
@@ -13157,7 +13157,7 @@
           <a:p>
             <a:r>
               <a:rPr kumimoji="1" lang="en-US" altLang="ko-KR" sz="1400" dirty="0" err="1"/>
-              <a:t>02. 요구와 유저 스토리</a:t>
+              <a:t>02. 요구와 사용자 이야기</a:t>
             </a:r>
           </a:p>
         </p:txBody>
@@ -14543,7 +14543,7 @@
           <a:p>
             <a:r>
               <a:rPr kumimoji="1" lang="en-US" altLang="ko-KR" sz="1400" dirty="0" err="1"/>
-              <a:t>02. 요구와 유저 스토리</a:t>
+              <a:t>02. 요구와 사용자 이야기</a:t>
             </a:r>
           </a:p>
         </p:txBody>
@@ -14649,6 +14649,165 @@
             </a:r>
           </a:p>
           <a:p>
+            <a:pPr lvl="3" marL="457200" indent="-182880">
+              <a:spcBef>
+                <a:spcPts val="300"/>
+              </a:spcBef>
+              <a:spcAft>
+                <a:spcPts val="300"/>
+              </a:spcAft>
+              <a:buSzPct val="90000"/>
+              <a:buFont typeface="Wingdings" pitchFamily="2" charset="2"/>
+              <a:buChar char=""/>
+            </a:pPr>
+            <a:r>
+              <a:rPr sz="1200" b="1">
+                <a:solidFill>
+                  <a:srgbClr val="000000"/>
+                </a:solidFill>
+                <a:latin typeface="맑은 고딕"/>
+                <a:ea typeface="맑은 고딕"/>
+              </a:rPr>
+              <a:t>판매가</a:t>
+            </a:r>
+            <a:r>
+              <a:rPr sz="1200" b="0">
+                <a:solidFill>
+                  <a:srgbClr val="000000"/>
+                </a:solidFill>
+                <a:latin typeface="맑은 고딕"/>
+                <a:ea typeface="맑은 고딕"/>
+              </a:rPr>
+              <a:t> —</a:t>
+            </a:r>
+            <a:r>
+              <a:rPr sz="1000" b="0">
+                <a:solidFill>
+                  <a:srgbClr val="000000"/>
+                </a:solidFill>
+                <a:latin typeface="맑은 고딕"/>
+                <a:ea typeface="맑은 고딕"/>
+              </a:rPr>
+              <a:t> 상품 시스템이 관리하는 상품의 현재 판매 가격 </a:t>
+            </a:r>
+            <a:r>
+              <a:rPr sz="800" b="0">
+                <a:solidFill>
+                  <a:srgbClr val="000000"/>
+                </a:solidFill>
+                <a:latin typeface="맑은 고딕"/>
+                <a:ea typeface="맑은 고딕"/>
+              </a:rPr>
+              <a:t>(근거: 회의 메모)</a:t>
+            </a:r>
+          </a:p>
+          <a:p>
+            <a:pPr lvl="3" marL="457200" indent="-182880">
+              <a:spcBef>
+                <a:spcPts val="300"/>
+              </a:spcBef>
+              <a:spcAft>
+                <a:spcPts val="300"/>
+              </a:spcAft>
+              <a:buSzPct val="90000"/>
+              <a:buFont typeface="Wingdings" pitchFamily="2" charset="2"/>
+              <a:buChar char=""/>
+            </a:pPr>
+            <a:r>
+              <a:rPr sz="1200" b="1">
+                <a:solidFill>
+                  <a:srgbClr val="000000"/>
+                </a:solidFill>
+                <a:latin typeface="맑은 고딕"/>
+                <a:ea typeface="맑은 고딕"/>
+              </a:rPr>
+              <a:t>주문 금액</a:t>
+            </a:r>
+            <a:r>
+              <a:rPr sz="1200" b="0">
+                <a:solidFill>
+                  <a:srgbClr val="000000"/>
+                </a:solidFill>
+                <a:latin typeface="맑은 고딕"/>
+                <a:ea typeface="맑은 고딕"/>
+              </a:rPr>
+              <a:t> —</a:t>
+            </a:r>
+            <a:r>
+              <a:rPr sz="1000" b="0">
+                <a:solidFill>
+                  <a:srgbClr val="000000"/>
+                </a:solidFill>
+                <a:latin typeface="맑은 고딕"/>
+                <a:ea typeface="맑은 고딕"/>
+              </a:rPr>
+              <a:t> 주문이 생길 때의 판매가로 정한 금액. 그 뒤에는 바뀌지 않음 </a:t>
+            </a:r>
+            <a:r>
+              <a:rPr sz="800" b="0">
+                <a:solidFill>
+                  <a:srgbClr val="000000"/>
+                </a:solidFill>
+                <a:latin typeface="맑은 고딕"/>
+                <a:ea typeface="맑은 고딕"/>
+              </a:rPr>
+              <a:t>(근거: 회의 메모)</a:t>
+            </a:r>
+          </a:p>
+          <a:p>
+            <a:pPr lvl="3" marL="457200" indent="-182880">
+              <a:spcBef>
+                <a:spcPts val="300"/>
+              </a:spcBef>
+              <a:spcAft>
+                <a:spcPts val="300"/>
+              </a:spcAft>
+              <a:buSzPct val="90000"/>
+              <a:buFont typeface="Wingdings" pitchFamily="2" charset="2"/>
+              <a:buChar char=""/>
+            </a:pPr>
+            <a:r>
+              <a:rPr sz="1200" b="1">
+                <a:solidFill>
+                  <a:srgbClr val="000000"/>
+                </a:solidFill>
+                <a:latin typeface="맑은 고딕"/>
+                <a:ea typeface="맑은 고딕"/>
+              </a:rPr>
+              <a:t>결제대기</a:t>
+            </a:r>
+            <a:r>
+              <a:rPr sz="1200" b="0">
+                <a:solidFill>
+                  <a:srgbClr val="000000"/>
+                </a:solidFill>
+                <a:latin typeface="맑은 고딕"/>
+                <a:ea typeface="맑은 고딕"/>
+              </a:rPr>
+              <a:t> —</a:t>
+            </a:r>
+            <a:r>
+              <a:rPr sz="1000" b="0">
+                <a:solidFill>
+                  <a:srgbClr val="000000"/>
+                </a:solidFill>
+                <a:latin typeface="맑은 고딕"/>
+                <a:ea typeface="맑은 고딕"/>
+              </a:rPr>
+              <a:t> 주문이 생겼지만 결제가 아직 승인되지 않은 주문 상태 </a:t>
+            </a:r>
+            <a:r>
+              <a:rPr sz="800" b="0">
+                <a:solidFill>
+                  <a:srgbClr val="000000"/>
+                </a:solidFill>
+                <a:latin typeface="맑은 고딕"/>
+                <a:ea typeface="맑은 고딕"/>
+              </a:rPr>
+              <a:t>(근거: 회의 메모)</a:t>
+            </a:r>
+          </a:p>
+          <a:p>
             <a:pPr lvl="2" marL="228600" indent="-182880">
               <a:spcBef>
                 <a:spcPts val="300"/>
@@ -14668,10 +14827,33 @@
                 <a:latin typeface="맑은 고딕"/>
                 <a:ea typeface="맑은 고딕"/>
               </a:rPr>
-              <a:t>판매가</a:t>
-            </a:r>
-            <a:r>
-              <a:rPr sz="1400" b="0">
+              <a:t>사용자 이야기</a:t>
+            </a:r>
+          </a:p>
+          <a:p>
+            <a:pPr lvl="3" marL="457200" indent="-182880">
+              <a:spcBef>
+                <a:spcPts val="300"/>
+              </a:spcBef>
+              <a:spcAft>
+                <a:spcPts val="300"/>
+              </a:spcAft>
+              <a:buSzPct val="90000"/>
+              <a:buFont typeface="Wingdings" pitchFamily="2" charset="2"/>
+              <a:buChar char=""/>
+            </a:pPr>
+            <a:r>
+              <a:rPr sz="1200" b="1">
+                <a:solidFill>
+                  <a:srgbClr val="000000"/>
+                </a:solidFill>
+                <a:latin typeface="맑은 고딕"/>
+                <a:ea typeface="맑은 고딕"/>
+              </a:rPr>
+              <a:t>US-1 장바구니 상품 주문</a:t>
+            </a:r>
+            <a:r>
+              <a:rPr sz="1200" b="0">
                 <a:solidFill>
                   <a:srgbClr val="000000"/>
                 </a:solidFill>
@@ -14681,6 +14863,39 @@
               <a:t> —</a:t>
             </a:r>
             <a:r>
+              <a:rPr sz="1000" b="0">
+                <a:solidFill>
+                  <a:srgbClr val="000000"/>
+                </a:solidFill>
+                <a:latin typeface="맑은 고딕"/>
+                <a:ea typeface="맑은 고딕"/>
+              </a:rPr>
+              <a:t> 주문이 생기고 상태는 결제대기가 된다. 주문이 생길 때의 판매가로 주문 금액이 정해진다.</a:t>
+            </a:r>
+          </a:p>
+          <a:p>
+            <a:pPr lvl="3" marL="457200" indent="-182880">
+              <a:spcBef>
+                <a:spcPts val="300"/>
+              </a:spcBef>
+              <a:spcAft>
+                <a:spcPts val="300"/>
+              </a:spcAft>
+              <a:buSzPct val="90000"/>
+              <a:buFont typeface="Wingdings" pitchFamily="2" charset="2"/>
+              <a:buChar char=""/>
+            </a:pPr>
+            <a:r>
+              <a:rPr sz="1200" b="1">
+                <a:solidFill>
+                  <a:srgbClr val="000000"/>
+                </a:solidFill>
+                <a:latin typeface="맑은 고딕"/>
+                <a:ea typeface="맑은 고딕"/>
+              </a:rPr>
+              <a:t>US-2 주문 결제</a:t>
+            </a:r>
+            <a:r>
               <a:rPr sz="1200" b="0">
                 <a:solidFill>
                   <a:srgbClr val="000000"/>
@@ -14688,7 +14903,7 @@
                 <a:latin typeface="맑은 고딕"/>
                 <a:ea typeface="맑은 고딕"/>
               </a:rPr>
-              <a:t> 상품 시스템이 관리하는 상품의 현재 판매 가격 </a:t>
+              <a:t> —</a:t>
             </a:r>
             <a:r>
               <a:rPr sz="1000" b="0">
@@ -14698,7 +14913,50 @@
                 <a:latin typeface="맑은 고딕"/>
                 <a:ea typeface="맑은 고딕"/>
               </a:rPr>
-              <a:t>(근거: 회의 메모)</a:t>
+              <a:t> 승인되면 배송 요청이 간다. 승인되지 않은 주문에는 가지 않는다.</a:t>
+            </a:r>
+          </a:p>
+          <a:p>
+            <a:pPr lvl="3" marL="457200" indent="-182880">
+              <a:spcBef>
+                <a:spcPts val="300"/>
+              </a:spcBef>
+              <a:spcAft>
+                <a:spcPts val="300"/>
+              </a:spcAft>
+              <a:buSzPct val="90000"/>
+              <a:buFont typeface="Wingdings" pitchFamily="2" charset="2"/>
+              <a:buChar char=""/>
+            </a:pPr>
+            <a:r>
+              <a:rPr sz="1200" b="1">
+                <a:solidFill>
+                  <a:srgbClr val="000000"/>
+                </a:solidFill>
+                <a:latin typeface="맑은 고딕"/>
+                <a:ea typeface="맑은 고딕"/>
+              </a:rPr>
+              <a:t>US-3 거절 후 다시 결제</a:t>
+            </a:r>
+            <a:r>
+              <a:rPr sz="1200" b="0">
+                <a:solidFill>
+                  <a:srgbClr val="000000"/>
+                </a:solidFill>
+                <a:latin typeface="맑은 고딕"/>
+                <a:ea typeface="맑은 고딕"/>
+              </a:rPr>
+              <a:t> —</a:t>
+            </a:r>
+            <a:r>
+              <a:rPr sz="1000" b="0">
+                <a:solidFill>
+                  <a:srgbClr val="000000"/>
+                </a:solidFill>
+                <a:latin typeface="맑은 고딕"/>
+                <a:ea typeface="맑은 고딕"/>
+              </a:rPr>
+              <a:t> 거절되면 결제대기로 남고, 다른 카드로 다시 결제할 수 있다.</a:t>
             </a:r>
           </a:p>
           <a:p>
@@ -14721,17 +14979,30 @@
                 <a:latin typeface="맑은 고딕"/>
                 <a:ea typeface="맑은 고딕"/>
               </a:rPr>
-              <a:t>주문 금액</a:t>
-            </a:r>
-            <a:r>
-              <a:rPr sz="1400" b="0">
-                <a:solidFill>
-                  <a:srgbClr val="000000"/>
-                </a:solidFill>
-                <a:latin typeface="맑은 고딕"/>
-                <a:ea typeface="맑은 고딕"/>
-              </a:rPr>
-              <a:t> —</a:t>
+              <a:t>업무 규칙</a:t>
+            </a:r>
+          </a:p>
+          <a:p>
+            <a:pPr lvl="3" marL="457200" indent="-182880">
+              <a:spcBef>
+                <a:spcPts val="300"/>
+              </a:spcBef>
+              <a:spcAft>
+                <a:spcPts val="300"/>
+              </a:spcAft>
+              <a:buSzPct val="90000"/>
+              <a:buFont typeface="Wingdings" pitchFamily="2" charset="2"/>
+              <a:buChar char=""/>
+            </a:pPr>
+            <a:r>
+              <a:rPr sz="1200" b="1">
+                <a:solidFill>
+                  <a:srgbClr val="000000"/>
+                </a:solidFill>
+                <a:latin typeface="맑은 고딕"/>
+                <a:ea typeface="맑은 고딕"/>
+              </a:rPr>
+              <a:t>BR-1 주문 금액</a:t>
             </a:r>
             <a:r>
               <a:rPr sz="1200" b="0">
@@ -14741,17 +15012,57 @@
                 <a:latin typeface="맑은 고딕"/>
                 <a:ea typeface="맑은 고딕"/>
               </a:rPr>
-              <a:t> 주문이 생길 때의 판매가로 정한 금액. 그 뒤에는 바뀌지 않음 </a:t>
-            </a:r>
-            <a:r>
-              <a:rPr sz="1000" b="0">
-                <a:solidFill>
-                  <a:srgbClr val="000000"/>
-                </a:solidFill>
-                <a:latin typeface="맑은 고딕"/>
-                <a:ea typeface="맑은 고딕"/>
-              </a:rPr>
-              <a:t>(근거: 회의 메모)</a:t>
+              <a:t> · </a:t>
+            </a:r>
+            <a:r>
+              <a:rPr sz="1200" b="1">
+                <a:solidFill>
+                  <a:srgbClr val="000000"/>
+                </a:solidFill>
+                <a:latin typeface="맑은 고딕"/>
+                <a:ea typeface="맑은 고딕"/>
+              </a:rPr>
+              <a:t>BR-2 배송 요청</a:t>
+            </a:r>
+            <a:r>
+              <a:rPr sz="1200" b="0">
+                <a:solidFill>
+                  <a:srgbClr val="000000"/>
+                </a:solidFill>
+                <a:latin typeface="맑은 고딕"/>
+                <a:ea typeface="맑은 고딕"/>
+              </a:rPr>
+              <a:t> · </a:t>
+            </a:r>
+            <a:r>
+              <a:rPr sz="1200" b="1">
+                <a:solidFill>
+                  <a:srgbClr val="000000"/>
+                </a:solidFill>
+                <a:latin typeface="맑은 고딕"/>
+                <a:ea typeface="맑은 고딕"/>
+              </a:rPr>
+              <a:t>BR-3 결제 거절</a:t>
+            </a:r>
+            <a:r>
+              <a:rPr sz="1200" b="0">
+                <a:solidFill>
+                  <a:srgbClr val="000000"/>
+                </a:solidFill>
+                <a:latin typeface="맑은 고딕"/>
+                <a:ea typeface="맑은 고딕"/>
+              </a:rPr>
+              <a:t> </a:t>
+            </a:r>
+            <a:r>
+              <a:rPr sz="800" b="0">
+                <a:solidFill>
+                  <a:srgbClr val="000000"/>
+                </a:solidFill>
+                <a:latin typeface="맑은 고딕"/>
+                <a:ea typeface="맑은 고딕"/>
+              </a:rPr>
+              <a:t>(근거: 모두 회의 메모)</a:t>
             </a:r>
           </a:p>
           <a:p>
@@ -14774,41 +15085,11 @@
                 <a:latin typeface="맑은 고딕"/>
                 <a:ea typeface="맑은 고딕"/>
               </a:rPr>
-              <a:t>결제대기</a:t>
-            </a:r>
-            <a:r>
-              <a:rPr sz="1400" b="0">
-                <a:solidFill>
-                  <a:srgbClr val="000000"/>
-                </a:solidFill>
-                <a:latin typeface="맑은 고딕"/>
-                <a:ea typeface="맑은 고딕"/>
-              </a:rPr>
-              <a:t> —</a:t>
-            </a:r>
-            <a:r>
-              <a:rPr sz="1200" b="0">
-                <a:solidFill>
-                  <a:srgbClr val="000000"/>
-                </a:solidFill>
-                <a:latin typeface="맑은 고딕"/>
-                <a:ea typeface="맑은 고딕"/>
-              </a:rPr>
-              <a:t> 주문이 생겼지만 결제가 아직 승인되지 않은 주문 상태 </a:t>
-            </a:r>
-            <a:r>
-              <a:rPr sz="1000" b="0">
-                <a:solidFill>
-                  <a:srgbClr val="000000"/>
-                </a:solidFill>
-                <a:latin typeface="맑은 고딕"/>
-                <a:ea typeface="맑은 고딕"/>
-              </a:rPr>
-              <a:t>(근거: 회의 메모)</a:t>
-            </a:r>
-          </a:p>
-          <a:p>
-            <a:pPr lvl="2" marL="228600" indent="-182880">
+              <a:t>미정 질문 15가지</a:t>
+            </a:r>
+          </a:p>
+          <a:p>
+            <a:pPr lvl="3" marL="457200" indent="-182880">
               <a:spcBef>
                 <a:spcPts val="300"/>
               </a:spcBef>
@@ -14817,50 +15098,17 @@
               </a:spcAft>
               <a:buSzPct val="90000"/>
               <a:buFont typeface="Wingdings" pitchFamily="2" charset="2"/>
-              <a:buChar char=""/>
+              <a:buChar char=""/>
             </a:pPr>
             <a:r>
-              <a:rPr sz="1400" b="1">
-                <a:solidFill>
-                  <a:srgbClr val="000000"/>
-                </a:solidFill>
-                <a:latin typeface="맑은 고딕"/>
-                <a:ea typeface="맑은 고딕"/>
-              </a:rPr>
-              <a:t>유저 스토리</a:t>
-            </a:r>
-          </a:p>
-          <a:p>
-            <a:pPr lvl="2" marL="228600" indent="-182880">
-              <a:spcBef>
-                <a:spcPts val="300"/>
-              </a:spcBef>
-              <a:spcAft>
-                <a:spcPts val="300"/>
-              </a:spcAft>
-              <a:buSzPct val="90000"/>
-              <a:buFont typeface="Wingdings" pitchFamily="2" charset="2"/>
-              <a:buChar char=""/>
-            </a:pPr>
-            <a:r>
-              <a:rPr sz="1400" b="1">
-                <a:solidFill>
-                  <a:srgbClr val="000000"/>
-                </a:solidFill>
-                <a:latin typeface="맑은 고딕"/>
-                <a:ea typeface="맑은 고딕"/>
-              </a:rPr>
-              <a:t>US-1 장바구니 상품 주문</a:t>
-            </a:r>
-            <a:r>
-              <a:rPr sz="1400" b="0">
-                <a:solidFill>
-                  <a:srgbClr val="000000"/>
-                </a:solidFill>
-                <a:latin typeface="맑은 고딕"/>
-                <a:ea typeface="맑은 고딕"/>
-              </a:rPr>
-              <a:t> —</a:t>
+              <a:rPr sz="1200" b="1">
+                <a:solidFill>
+                  <a:srgbClr val="000000"/>
+                </a:solidFill>
+                <a:latin typeface="맑은 고딕"/>
+                <a:ea typeface="맑은 고딕"/>
+              </a:rPr>
+              <a:t>주문이 언제 생기는가</a:t>
             </a:r>
             <a:r>
               <a:rPr sz="1200" b="0">
@@ -14870,7 +15118,27 @@
                 <a:latin typeface="맑은 고딕"/>
                 <a:ea typeface="맑은 고딕"/>
               </a:rPr>
-              <a:t> 주문이 생기고 상태는 결제대기가 된다. 주문이 생길 때의 판매가로 주문 금액이 정해진다.</a:t>
+              <a:t> · 금액 구성 · 판매가가 내리면 · 재고 · 결제대기 기한 · 재결제 횟수 · </a:t>
+            </a:r>
+            <a:r>
+              <a:rPr sz="1200" b="1">
+                <a:solidFill>
+                  <a:srgbClr val="000000"/>
+                </a:solidFill>
+                <a:latin typeface="맑은 고딕"/>
+                <a:ea typeface="맑은 고딕"/>
+              </a:rPr>
+              <a:t>승인 뒤 상태 이름</a:t>
+            </a:r>
+            <a:r>
+              <a:rPr sz="1200" b="0">
+                <a:solidFill>
+                  <a:srgbClr val="000000"/>
+                </a:solidFill>
+                <a:latin typeface="맑은 고딕"/>
+                <a:ea typeface="맑은 고딕"/>
+              </a:rPr>
+              <a:t> · 배송 요청 실패 · 취소와 환불의 범위 ......</a:t>
             </a:r>
           </a:p>
         </p:txBody>
@@ -14941,303 +15209,6 @@
                 <a:ea typeface="맑은 고딕"/>
               </a:rPr>
               <a:t> 초안을 냈다.</a:t>
-            </a:r>
-          </a:p>
-        </p:txBody>
-      </p:sp>
-      <p:sp>
-        <p:nvSpPr>
-          <p:cNvPr id="10" name="내용 개체 틀 7">
-            <a:extLst>
-              <a:ext uri="{FF2B5EF4-FFF2-40B4-BE49-F238E27FC236}">
-                <a16:creationId xmlns:a16="http://schemas.microsoft.com/office/drawing/2014/main" id="{BEBA2C4A-B0BF-F2E4-EA6E-614C99CBA184}"/>
-              </a:ext>
-            </a:extLst>
-          </p:cNvPr>
-          <p:cNvSpPr>
-            <a:spLocks noGrp="1"/>
-          </p:cNvSpPr>
-          <p:nvPr>
-            <p:ph idx="1"/>
-          </p:nvPr>
-        </p:nvSpPr>
-        <p:spPr>
-          <a:xfrm>
-            <a:off x="4572000" y="1414318"/>
-            <a:ext cx="4439412" cy="4898147"/>
-          </a:xfrm>
-        </p:spPr>
-        <p:txBody>
-          <a:bodyPr>
-            <a:normAutofit/>
-          </a:bodyPr>
-          <a:lstStyle/>
-          <a:p>
-            <a:pPr lvl="2" marL="228600" indent="-182880">
-              <a:spcBef>
-                <a:spcPts val="300"/>
-              </a:spcBef>
-              <a:spcAft>
-                <a:spcPts val="300"/>
-              </a:spcAft>
-              <a:buSzPct val="90000"/>
-              <a:buFont typeface="Wingdings" pitchFamily="2" charset="2"/>
-              <a:buChar char=""/>
-            </a:pPr>
-            <a:r>
-              <a:rPr sz="1400" b="1">
-                <a:solidFill>
-                  <a:srgbClr val="000000"/>
-                </a:solidFill>
-                <a:latin typeface="맑은 고딕"/>
-                <a:ea typeface="맑은 고딕"/>
-              </a:rPr>
-              <a:t>US-2 주문 결제</a:t>
-            </a:r>
-            <a:r>
-              <a:rPr sz="1400" b="0">
-                <a:solidFill>
-                  <a:srgbClr val="000000"/>
-                </a:solidFill>
-                <a:latin typeface="맑은 고딕"/>
-                <a:ea typeface="맑은 고딕"/>
-              </a:rPr>
-              <a:t> —</a:t>
-            </a:r>
-            <a:r>
-              <a:rPr sz="1200" b="0">
-                <a:solidFill>
-                  <a:srgbClr val="000000"/>
-                </a:solidFill>
-                <a:latin typeface="맑은 고딕"/>
-                <a:ea typeface="맑은 고딕"/>
-              </a:rPr>
-              <a:t> 승인되면 배송 요청이 간다. 승인되지 않은 주문에는 가지 않는다.</a:t>
-            </a:r>
-          </a:p>
-          <a:p>
-            <a:pPr lvl="2" marL="228600" indent="-182880">
-              <a:spcBef>
-                <a:spcPts val="300"/>
-              </a:spcBef>
-              <a:spcAft>
-                <a:spcPts val="300"/>
-              </a:spcAft>
-              <a:buSzPct val="90000"/>
-              <a:buFont typeface="Wingdings" pitchFamily="2" charset="2"/>
-              <a:buChar char=""/>
-            </a:pPr>
-            <a:r>
-              <a:rPr sz="1400" b="1">
-                <a:solidFill>
-                  <a:srgbClr val="000000"/>
-                </a:solidFill>
-                <a:latin typeface="맑은 고딕"/>
-                <a:ea typeface="맑은 고딕"/>
-              </a:rPr>
-              <a:t>US-3 거절 후 다시 결제</a:t>
-            </a:r>
-            <a:r>
-              <a:rPr sz="1400" b="0">
-                <a:solidFill>
-                  <a:srgbClr val="000000"/>
-                </a:solidFill>
-                <a:latin typeface="맑은 고딕"/>
-                <a:ea typeface="맑은 고딕"/>
-              </a:rPr>
-              <a:t> —</a:t>
-            </a:r>
-            <a:r>
-              <a:rPr sz="1200" b="0">
-                <a:solidFill>
-                  <a:srgbClr val="000000"/>
-                </a:solidFill>
-                <a:latin typeface="맑은 고딕"/>
-                <a:ea typeface="맑은 고딕"/>
-              </a:rPr>
-              <a:t> 거절되면 결제대기로 남고, 다른 카드로 다시 결제할 수 있다.</a:t>
-            </a:r>
-          </a:p>
-          <a:p>
-            <a:pPr lvl="2" marL="228600" indent="-182880">
-              <a:spcBef>
-                <a:spcPts val="300"/>
-              </a:spcBef>
-              <a:spcAft>
-                <a:spcPts val="300"/>
-              </a:spcAft>
-              <a:buSzPct val="90000"/>
-              <a:buFont typeface="Wingdings" pitchFamily="2" charset="2"/>
-              <a:buChar char=""/>
-            </a:pPr>
-            <a:r>
-              <a:rPr sz="1400" b="1">
-                <a:solidFill>
-                  <a:srgbClr val="000000"/>
-                </a:solidFill>
-                <a:latin typeface="맑은 고딕"/>
-                <a:ea typeface="맑은 고딕"/>
-              </a:rPr>
-              <a:t>업무 규칙</a:t>
-            </a:r>
-          </a:p>
-          <a:p>
-            <a:pPr lvl="2" marL="228600" indent="-182880">
-              <a:spcBef>
-                <a:spcPts val="300"/>
-              </a:spcBef>
-              <a:spcAft>
-                <a:spcPts val="300"/>
-              </a:spcAft>
-              <a:buSzPct val="90000"/>
-              <a:buFont typeface="Wingdings" pitchFamily="2" charset="2"/>
-              <a:buChar char=""/>
-            </a:pPr>
-            <a:r>
-              <a:rPr sz="1400" b="1">
-                <a:solidFill>
-                  <a:srgbClr val="000000"/>
-                </a:solidFill>
-                <a:latin typeface="맑은 고딕"/>
-                <a:ea typeface="맑은 고딕"/>
-              </a:rPr>
-              <a:t>BR-1 주문 금액</a:t>
-            </a:r>
-            <a:r>
-              <a:rPr sz="1400" b="0">
-                <a:solidFill>
-                  <a:srgbClr val="000000"/>
-                </a:solidFill>
-                <a:latin typeface="맑은 고딕"/>
-                <a:ea typeface="맑은 고딕"/>
-              </a:rPr>
-              <a:t> · </a:t>
-            </a:r>
-            <a:r>
-              <a:rPr sz="1400" b="1">
-                <a:solidFill>
-                  <a:srgbClr val="000000"/>
-                </a:solidFill>
-                <a:latin typeface="맑은 고딕"/>
-                <a:ea typeface="맑은 고딕"/>
-              </a:rPr>
-              <a:t>BR-2 배송 요청</a:t>
-            </a:r>
-            <a:r>
-              <a:rPr sz="1400" b="0">
-                <a:solidFill>
-                  <a:srgbClr val="000000"/>
-                </a:solidFill>
-                <a:latin typeface="맑은 고딕"/>
-                <a:ea typeface="맑은 고딕"/>
-              </a:rPr>
-              <a:t> · </a:t>
-            </a:r>
-            <a:r>
-              <a:rPr sz="1400" b="1">
-                <a:solidFill>
-                  <a:srgbClr val="000000"/>
-                </a:solidFill>
-                <a:latin typeface="맑은 고딕"/>
-                <a:ea typeface="맑은 고딕"/>
-              </a:rPr>
-              <a:t>BR-3 결제 거절</a:t>
-            </a:r>
-            <a:r>
-              <a:rPr sz="1400" b="0">
-                <a:solidFill>
-                  <a:srgbClr val="000000"/>
-                </a:solidFill>
-                <a:latin typeface="맑은 고딕"/>
-                <a:ea typeface="맑은 고딕"/>
-              </a:rPr>
-              <a:t> </a:t>
-            </a:r>
-            <a:r>
-              <a:rPr sz="1000" b="0">
-                <a:solidFill>
-                  <a:srgbClr val="000000"/>
-                </a:solidFill>
-                <a:latin typeface="맑은 고딕"/>
-                <a:ea typeface="맑은 고딕"/>
-              </a:rPr>
-              <a:t>(근거: 모두 회의 메모)</a:t>
-            </a:r>
-          </a:p>
-          <a:p>
-            <a:pPr lvl="2" marL="228600" indent="-182880">
-              <a:spcBef>
-                <a:spcPts val="300"/>
-              </a:spcBef>
-              <a:spcAft>
-                <a:spcPts val="300"/>
-              </a:spcAft>
-              <a:buSzPct val="90000"/>
-              <a:buFont typeface="Wingdings" pitchFamily="2" charset="2"/>
-              <a:buChar char=""/>
-            </a:pPr>
-            <a:r>
-              <a:rPr sz="1400" b="1">
-                <a:solidFill>
-                  <a:srgbClr val="000000"/>
-                </a:solidFill>
-                <a:latin typeface="맑은 고딕"/>
-                <a:ea typeface="맑은 고딕"/>
-              </a:rPr>
-              <a:t>미정 질문 15가지</a:t>
-            </a:r>
-          </a:p>
-          <a:p>
-            <a:pPr lvl="2" marL="228600" indent="-182880">
-              <a:spcBef>
-                <a:spcPts val="300"/>
-              </a:spcBef>
-              <a:spcAft>
-                <a:spcPts val="300"/>
-              </a:spcAft>
-              <a:buSzPct val="90000"/>
-              <a:buFont typeface="Wingdings" pitchFamily="2" charset="2"/>
-              <a:buChar char=""/>
-            </a:pPr>
-            <a:r>
-              <a:rPr sz="1400" b="1">
-                <a:solidFill>
-                  <a:srgbClr val="000000"/>
-                </a:solidFill>
-                <a:latin typeface="맑은 고딕"/>
-                <a:ea typeface="맑은 고딕"/>
-              </a:rPr>
-              <a:t>주문이 언제 생기는가</a:t>
-            </a:r>
-            <a:r>
-              <a:rPr sz="1400" b="0">
-                <a:solidFill>
-                  <a:srgbClr val="000000"/>
-                </a:solidFill>
-                <a:latin typeface="맑은 고딕"/>
-                <a:ea typeface="맑은 고딕"/>
-              </a:rPr>
-              <a:t> · 금액 구성 · 판매가가 내리면 · 재고 · 결제대기 기한 · 재결제 횟수 · </a:t>
-            </a:r>
-            <a:r>
-              <a:rPr sz="1400" b="1">
-                <a:solidFill>
-                  <a:srgbClr val="000000"/>
-                </a:solidFill>
-                <a:latin typeface="맑은 고딕"/>
-                <a:ea typeface="맑은 고딕"/>
-              </a:rPr>
-              <a:t>승인 뒤 상태 이름</a:t>
-            </a:r>
-            <a:r>
-              <a:rPr sz="1400" b="0">
-                <a:solidFill>
-                  <a:srgbClr val="000000"/>
-                </a:solidFill>
-                <a:latin typeface="맑은 고딕"/>
-                <a:ea typeface="맑은 고딕"/>
-              </a:rPr>
-              <a:t> · 배송 요청 실패 · 취소와 환불의 범위 ......</a:t>
             </a:r>
           </a:p>
         </p:txBody>
@@ -15370,7 +15341,7 @@
           <a:p>
             <a:r>
               <a:rPr kumimoji="1" lang="en-US" altLang="ko-KR" sz="1400" dirty="0" err="1"/>
-              <a:t>02. 요구와 유저 스토리</a:t>
+              <a:t>02. 요구와 사용자 이야기</a:t>
             </a:r>
           </a:p>
         </p:txBody>
@@ -15571,7 +15542,7 @@
                 <a:latin typeface="맑은 고딕"/>
                 <a:ea typeface="맑은 고딕"/>
               </a:rPr>
-              <a:t>을 구분하고, 유저 스토리를 작업 단위로 쓴다.</a:t>
+              <a:t>을 구분하고, 사용자 이야기를 작업 단위로 쓴다.</a:t>
             </a:r>
           </a:p>
           <a:p>
@@ -15594,7 +15565,7 @@
                 <a:latin typeface="맑은 고딕"/>
                 <a:ea typeface="맑은 고딕"/>
               </a:rPr>
-              <a:t>유저 스토리를 </a:t>
+              <a:t>사용자 이야기를 </a:t>
             </a:r>
             <a:r>
               <a:rPr sz="1800" b="1">
@@ -15906,7 +15877,7 @@
           <a:p>
             <a:r>
               <a:rPr kumimoji="1" lang="en-US" altLang="ko-KR" sz="1400" dirty="0" err="1"/>
-              <a:t>02. 요구와 유저 스토리</a:t>
+              <a:t>02. 요구와 사용자 이야기</a:t>
             </a:r>
           </a:p>
         </p:txBody>
@@ -17434,7 +17405,7 @@
           <a:p>
             <a:r>
               <a:rPr kumimoji="1" lang="en-US" altLang="ko-KR" sz="1400" dirty="0" err="1"/>
-              <a:t>02. 요구와 유저 스토리</a:t>
+              <a:t>02. 요구와 사용자 이야기</a:t>
             </a:r>
           </a:p>
         </p:txBody>
@@ -18922,7 +18893,7 @@
                 <a:latin typeface="맑은 고딕"/>
                 <a:ea typeface="맑은 고딕"/>
               </a:rPr>
-              <a:t>10. 실습 — 요구사항 정의서와 유저 스토리</a:t>
+              <a:t>10. 실습 — 요구사항 정의서와 사용자 이야기</a:t>
             </a:r>
           </a:p>
         </p:txBody>
@@ -18985,7 +18956,7 @@
           <a:p>
             <a:r>
               <a:rPr kumimoji="1" lang="en-US" altLang="ko-KR" sz="1400" dirty="0" err="1"/>
-              <a:t>02. 요구와 유저 스토리</a:t>
+              <a:t>02. 요구와 사용자 이야기</a:t>
             </a:r>
           </a:p>
         </p:txBody>
@@ -19866,7 +19837,7 @@
           <a:p>
             <a:r>
               <a:rPr kumimoji="1" lang="en-US" altLang="ko-KR" sz="1400" dirty="0" err="1"/>
-              <a:t>02. 요구와 유저 스토리</a:t>
+              <a:t>02. 요구와 사용자 이야기</a:t>
             </a:r>
           </a:p>
         </p:txBody>
@@ -20002,7 +19973,7 @@
                 <a:latin typeface="맑은 고딕"/>
                 <a:ea typeface="맑은 고딕"/>
               </a:rPr>
-              <a:t>요구와 유저 스토리의 핵심</a:t>
+              <a:t>요구와 사용자 이야기의 핵심</a:t>
             </a:r>
           </a:p>
           <a:p>
@@ -20446,7 +20417,7 @@
           <a:p>
             <a:r>
               <a:rPr kumimoji="1" lang="en-US" altLang="ko-KR" sz="1400" dirty="0" err="1"/>
-              <a:t>별첨: 02. 요구와 유저 스토리</a:t>
+              <a:t>별첨: 02. 요구와 사용자 이야기</a:t>
             </a:r>
           </a:p>
         </p:txBody>
@@ -21336,7 +21307,7 @@
           <a:p>
             <a:r>
               <a:rPr kumimoji="1" lang="en-US" altLang="ko-KR" sz="1400" dirty="0" err="1"/>
-              <a:t>별첨: 02. 요구와 유저 스토리</a:t>
+              <a:t>별첨: 02. 요구와 사용자 이야기</a:t>
             </a:r>
           </a:p>
         </p:txBody>
@@ -21824,7 +21795,7 @@
           <a:p>
             <a:r>
               <a:rPr kumimoji="1" lang="en-US" altLang="ko-KR" sz="1400" dirty="0" err="1"/>
-              <a:t>02. 요구와 유저 스토리</a:t>
+              <a:t>02. 요구와 사용자 이야기</a:t>
             </a:r>
           </a:p>
         </p:txBody>
@@ -23299,7 +23270,7 @@
           <a:p>
             <a:r>
               <a:rPr kumimoji="1" lang="en-US" altLang="ko-KR" sz="1400" dirty="0" err="1"/>
-              <a:t>02. 요구와 유저 스토리</a:t>
+              <a:t>02. 요구와 사용자 이야기</a:t>
             </a:r>
           </a:p>
         </p:txBody>
@@ -24212,7 +24183,7 @@
           <a:p>
             <a:r>
               <a:rPr kumimoji="1" lang="en-US" altLang="ko-KR" sz="1400" dirty="0" err="1"/>
-              <a:t>02. 요구와 유저 스토리</a:t>
+              <a:t>02. 요구와 사용자 이야기</a:t>
             </a:r>
           </a:p>
         </p:txBody>
@@ -24859,7 +24830,7 @@
                           <a:ea typeface="맑은 고딕" panose="020B0503020000020004" pitchFamily="34" charset="-127"/>
                           <a:cs typeface="맑은 고딕"/>
                         </a:rPr>
-                        <a:t>형식 — 유저 스토리</a:t>
+                        <a:t>형식 — 사용자 이야기</a:t>
                       </a:r>
                     </a:p>
                   </a:txBody>
@@ -25413,7 +25384,27 @@
                 <a:latin typeface="맑은 고딕"/>
                 <a:ea typeface="맑은 고딕"/>
               </a:rPr>
-              <a:t>, 유저 스토리는 그것을 담는 </a:t>
+              <a:t>, 사용자 이야기</a:t>
+            </a:r>
+            <a:r>
+              <a:rPr sz="1400" b="0">
+                <a:solidFill>
+                  <a:srgbClr val="000000"/>
+                </a:solidFill>
+                <a:latin typeface="맑은 고딕"/>
+                <a:ea typeface="맑은 고딕"/>
+              </a:rPr>
+              <a:t>(user story)</a:t>
+            </a:r>
+            <a:r>
+              <a:rPr sz="1800" b="0">
+                <a:solidFill>
+                  <a:srgbClr val="000000"/>
+                </a:solidFill>
+                <a:latin typeface="맑은 고딕"/>
+                <a:ea typeface="맑은 고딕"/>
+              </a:rPr>
+              <a:t>는 그것을 담는 </a:t>
             </a:r>
             <a:r>
               <a:rPr sz="1800" b="1">
@@ -25800,7 +25791,7 @@
           <a:p>
             <a:r>
               <a:rPr kumimoji="1" lang="en-US" altLang="ko-KR" sz="1400" dirty="0" err="1"/>
-              <a:t>02. 요구와 유저 스토리</a:t>
+              <a:t>02. 요구와 사용자 이야기</a:t>
             </a:r>
           </a:p>
         </p:txBody>
@@ -26447,7 +26438,7 @@
                           <a:ea typeface="맑은 고딕" panose="020B0503020000020004" pitchFamily="34" charset="-127"/>
                           <a:cs typeface="맑은 고딕"/>
                         </a:rPr>
-                        <a:t>유저 스토리</a:t>
+                        <a:t>사용자 이야기</a:t>
                       </a:r>
                     </a:p>
                   </a:txBody>
@@ -27082,7 +27073,7 @@
                 <a:latin typeface="맑은 고딕"/>
                 <a:ea typeface="맑은 고딕"/>
               </a:rPr>
-              <a:t>뼈대는 유저 스토리</a:t>
+              <a:t>뼈대는 사용자 이야기</a:t>
             </a:r>
             <a:r>
               <a:rPr sz="1800" b="0">
@@ -27102,7 +27093,7 @@
                 <a:latin typeface="맑은 고딕"/>
                 <a:ea typeface="맑은 고딕"/>
               </a:rPr>
-              <a:t> 이벤트–반응 목록과 유스케이스는 정의와 쓰임만 알아 두고, 맡기는 단위는 유저 스토리로 쓴다.</a:t>
+              <a:t> 이벤트–반응 목록과 유스케이스는 정의와 쓰임만 알아 두고, 맡기는 단위는 사용자 이야기로 쓴다.</a:t>
             </a:r>
           </a:p>
           <a:p>
@@ -27227,7 +27218,7 @@
                 <a:latin typeface="맑은 고딕"/>
                 <a:ea typeface="맑은 고딕"/>
               </a:rPr>
-              <a:t>04. 유저 스토리</a:t>
+              <a:t>04. 사용자 이야기</a:t>
             </a:r>
           </a:p>
         </p:txBody>
@@ -27290,7 +27281,7 @@
           <a:p>
             <a:r>
               <a:rPr kumimoji="1" lang="en-US" altLang="ko-KR" sz="1400" dirty="0" err="1"/>
-              <a:t>02. 요구와 유저 스토리</a:t>
+              <a:t>02. 요구와 사용자 이야기</a:t>
             </a:r>
           </a:p>
         </p:txBody>
@@ -27385,7 +27376,7 @@
                 <a:latin typeface="맑은 고딕"/>
                 <a:ea typeface="맑은 고딕"/>
               </a:rPr>
-              <a:t>유저 스토리는 AI에게 맡기는 작업의 단위</a:t>
+              <a:t>사용자 이야기는 AI에게 맡기는 작업의 단위</a:t>
             </a:r>
             <a:r>
               <a:rPr sz="1800" b="0">
@@ -27418,7 +27409,7 @@
                 <a:latin typeface="맑은 고딕"/>
                 <a:ea typeface="맑은 고딕"/>
               </a:rPr>
-              <a:t>유저 스토리에는 결정적인 세 가지 면이 있고 이를 </a:t>
+              <a:t>사용자 이야기에는 결정적인 세 가지 면이 있고 이를 </a:t>
             </a:r>
             <a:r>
               <a:rPr sz="1800" b="1">
@@ -27752,7 +27743,7 @@
                 <a:latin typeface="맑은 고딕"/>
                 <a:ea typeface="맑은 고딕"/>
               </a:rPr>
-              <a:t>04. 유저 스토리</a:t>
+              <a:t>04. 사용자 이야기</a:t>
             </a:r>
           </a:p>
         </p:txBody>
@@ -27815,7 +27806,7 @@
           <a:p>
             <a:r>
               <a:rPr kumimoji="1" lang="en-US" altLang="ko-KR" sz="1400" dirty="0" err="1"/>
-              <a:t>02. 요구와 유저 스토리</a:t>
+              <a:t>02. 요구와 사용자 이야기</a:t>
             </a:r>
           </a:p>
         </p:txBody>
@@ -28016,7 +28007,7 @@
                 <a:latin typeface="맑은 고딕"/>
                 <a:ea typeface="맑은 고딕"/>
               </a:rPr>
-              <a:t>유저 스토리는 </a:t>
+              <a:t>사용자 이야기는 </a:t>
             </a:r>
             <a:r>
               <a:rPr sz="1800" b="1">
@@ -28359,7 +28350,7 @@
                 <a:latin typeface="맑은 고딕"/>
                 <a:ea typeface="맑은 고딕"/>
               </a:rPr>
-              <a:t>04. 유저 스토리</a:t>
+              <a:t>04. 사용자 이야기</a:t>
             </a:r>
           </a:p>
         </p:txBody>
@@ -28422,7 +28413,7 @@
           <a:p>
             <a:r>
               <a:rPr kumimoji="1" lang="en-US" altLang="ko-KR" sz="1400" dirty="0" err="1"/>
-              <a:t>02. 요구와 유저 스토리</a:t>
+              <a:t>02. 요구와 사용자 이야기</a:t>
             </a:r>
           </a:p>
         </p:txBody>

--- a/courses/ai-native/sessions/s02.pptx
+++ b/courses/ai-native/sessions/s02.pptx
@@ -27,7 +27,6 @@
     <p:sldId id="272" r:id="javaLecture17"/>
     <p:sldId id="273" r:id="javaLecture18"/>
     <p:sldId id="274" r:id="javaLecture19"/>
-    <p:sldId id="275" r:id="javaLecture20"/>
   </p:sldIdLst>
   <p:sldSz cx="9144000" cy="6858000" type="screen4x3"/>
   <p:notesSz cx="6858000" cy="9144000"/>
@@ -1122,7 +1121,28 @@
             <a:pPr lvl="0"/>
             <a:r>
               <a:rPr lang="ko-KR" sz="1200"/>
-              <a:t>실제 최종 MD의 전제와 여섯 일 전문이다. 이어지는 「공통 전환 조건」은 원본의 다음 절이며 별도 문서가 아니다. 제목 단계와 목록 들여쓰기만 대응했다.</a:t>
+              <a:t>실제 최종 응답 code/s02/exercise-conversation/order/codex-response-05.md의 전제와 여섯 일, 이어지는 「공통 전환 조건」까지가 원본 문서 전체다. 배포 MD인 활용-방식-판단.md는 응답과 바이트가 같다. 제목 단계와 목록 들여쓰기만 Session Source에 대응했고 문장·순서·강조는 바꾸지 않았다.</a:t>
+            </a:r>
+          </a:p>
+          <a:p>
+            <a:pPr lvl="0"/>
+            <a:r>
+              <a:rPr lang="ko-KR" sz="1200"/>
+              <a:t>2026-10-22에 tools/run-exercise-turn.py로 Codex CLI의 ①~⑤를 실제 실행했다. ④에서 요청 제한(429)이 두 차례 발생했고 Claude CLI도 세션 한도로 실패했다. 실패 근거와 이후 성공한 실행을 함께 남겼다.</a:t>
+            </a:r>
+          </a:p>
+          <a:p>
+            <a:pPr lvl="0"/>
+            <a:r>
+              <a:rPr lang="ko-KR" sz="1200"/>
+              <a:t>초기 초안은 주문 실행 흐름과 개발 작업을 혼동하고 검사 실행을 LLM 워크플로로 분류했다. ②~④에서 이를 고쳤다. 요구·모델·검사가 아직 없는 현재 선택과 준비 후의 조건부 선택을 나눈 결과다.</a:t>
+            </a:r>
+          </a:p>
+          <a:p>
+            <a:pPr lvl="0"/>
+            <a:r>
+              <a:rPr lang="ko-KR" sz="1200"/>
+              <a:t>실습 1의 업무 조건은 input-s01.md에 그대로 보존했다. 강의의 여섯 일과 실습의 여섯 일은 같지 않아도 된다. 빈 저장소 실습에는 운영 이관이 없다.</a:t>
             </a:r>
           </a:p>
         </p:txBody>
@@ -1191,88 +1211,6 @@
             <a:r>
               <a:rPr lang="ko-KR" sz="1200"/>
               <a:t>"세션 01. 사람의 일과 AI의 일"의 첫 시도를 재료의 성질로 다시 설명한다. 새 구현 코드는 넣지 않는다.</a:t>
-            </a:r>
-          </a:p>
-        </p:txBody>
-      </p:sp>
-    </p:spTree>
-  </p:cSld>
-  <p:clrMapOvr>
-    <a:masterClrMapping/>
-  </p:clrMapOvr>
-</p:notes>
-</file>
-
-<file path=ppt/notesSlides/notesSlide20.xml><?xml version="1.0" encoding="utf-8"?>
-<p:notes xmlns:a="http://schemas.openxmlformats.org/drawingml/2006/main" xmlns:r="http://schemas.openxmlformats.org/officeDocument/2006/relationships" xmlns:p="http://schemas.openxmlformats.org/presentationml/2006/main">
-  <p:cSld>
-    <p:spTree>
-      <p:nvGrpSpPr>
-        <p:cNvPr id="1" name=""/>
-        <p:cNvGrpSpPr/>
-        <p:nvPr/>
-      </p:nvGrpSpPr>
-      <p:grpSpPr>
-        <a:xfrm>
-          <a:off x="0" y="0"/>
-          <a:ext cx="0" cy="0"/>
-          <a:chOff x="0" y="0"/>
-          <a:chExt cx="0" cy="0"/>
-        </a:xfrm>
-      </p:grpSpPr>
-      <p:sp>
-        <p:nvSpPr>
-          <p:cNvPr id="2" name="슬라이드 이미지 개체 틀"/>
-          <p:cNvSpPr/>
-          <p:nvPr>
-            <p:ph type="sldImg" idx="2"/>
-          </p:nvPr>
-        </p:nvSpPr>
-        <p:spPr/>
-        <p:txBody>
-          <a:bodyPr/>
-          <a:lstStyle/>
-          <a:p/>
-        </p:txBody>
-      </p:sp>
-      <p:sp>
-        <p:nvSpPr>
-          <p:cNvPr id="3" name="슬라이드 노트 개체 틀"/>
-          <p:cNvSpPr/>
-          <p:nvPr>
-            <p:ph type="body" idx="3"/>
-          </p:nvPr>
-        </p:nvSpPr>
-        <p:spPr/>
-        <p:txBody>
-          <a:bodyPr/>
-          <a:lstStyle/>
-          <a:p>
-            <a:pPr lvl="0"/>
-            <a:r>
-              <a:rPr lang="ko-KR" sz="1200"/>
-              <a:t>code/s02/exercise-conversation/order/codex-response-05.md의 실제 최종 MD 전문이다. 제목 단계와 목록 들여쓰기만 Session Source에 대응했고 문장·순서·강조는 바꾸지 않았다. 배포 MD인 활용-방식-판단.md는 응답과 바이트가 같다.</a:t>
-            </a:r>
-          </a:p>
-          <a:p>
-            <a:pPr lvl="0"/>
-            <a:r>
-              <a:rPr lang="ko-KR" sz="1200"/>
-              <a:t>2026-10-22에 tools/run-exercise-turn.py로 Codex CLI의 ①~⑤를 실제 실행했다. ④에서 요청 제한(429)이 두 차례 발생했고 Claude CLI도 세션 한도로 실패했다. 실패 근거와 이후 성공한 실행을 함께 남겼다.</a:t>
-            </a:r>
-          </a:p>
-          <a:p>
-            <a:pPr lvl="0"/>
-            <a:r>
-              <a:rPr lang="ko-KR" sz="1200"/>
-              <a:t>초기 초안은 주문 실행 흐름과 개발 작업을 혼동하고 검사 실행을 LLM 워크플로로 분류했다. ②~④에서 이를 고쳤다. 요구·모델·검사가 아직 없는 현재 선택과 준비 후의 조건부 선택을 나눈 결과다.</a:t>
-            </a:r>
-          </a:p>
-          <a:p>
-            <a:pPr lvl="0"/>
-            <a:r>
-              <a:rPr lang="ko-KR" sz="1200"/>
-              <a:t>실습 1의 업무 조건은 input-s01.md에 그대로 보존했다. 강의의 여섯 일과 실습의 여섯 일은 같지 않아도 된다. 빈 저장소 실습에는 운영 이관이 없다.</a:t>
             </a:r>
           </a:p>
         </p:txBody>
@@ -3769,8 +3707,8 @@
         </p:blipFill>
         <p:spPr>
           <a:xfrm>
-            <a:off x="844451" y="3347812"/>
-            <a:ext cx="7455098" cy="2605481"/>
+            <a:off x="908844" y="3347812"/>
+            <a:ext cx="7326312" cy="2373576"/>
           </a:xfrm>
           <a:prstGeom prst="rect">
             <a:avLst/>
@@ -5750,7 +5688,7 @@
         <p:spPr>
           <a:xfrm>
             <a:off x="365760" y="4356610"/>
-            <a:ext cx="8412480" cy="1435556"/>
+            <a:ext cx="8412480" cy="1325880"/>
           </a:xfrm>
           <a:prstGeom prst="rect">
             <a:avLst/>
@@ -7895,8 +7833,8 @@
         </p:blipFill>
         <p:spPr>
           <a:xfrm>
-            <a:off x="1370602" y="4785914"/>
-            <a:ext cx="6402797" cy="392008"/>
+            <a:off x="1560959" y="4785914"/>
+            <a:ext cx="6022082" cy="330293"/>
           </a:xfrm>
           <a:prstGeom prst="rect">
             <a:avLst/>
@@ -9465,7 +9403,7 @@
         <p:spPr>
           <a:xfrm>
             <a:off x="365760" y="3492610"/>
-            <a:ext cx="8412480" cy="2744111"/>
+            <a:ext cx="8412480" cy="2575560"/>
           </a:xfrm>
           <a:prstGeom prst="rect">
             <a:avLst/>
@@ -11049,7 +10987,7 @@
         <p:spPr>
           <a:xfrm>
             <a:off x="365760" y="4068610"/>
-            <a:ext cx="8412480" cy="781278"/>
+            <a:ext cx="8412480" cy="701040"/>
           </a:xfrm>
           <a:prstGeom prst="rect">
             <a:avLst/>
@@ -12637,8 +12575,8 @@
         </p:nvSpPr>
         <p:spPr>
           <a:xfrm>
-            <a:off x="233172" y="1580444"/>
-            <a:ext cx="4338828" cy="4732021"/>
+            <a:off x="233172" y="1536700"/>
+            <a:ext cx="4338828" cy="4775765"/>
           </a:xfrm>
         </p:spPr>
         <p:txBody>
@@ -13025,6 +12963,133 @@
                 <a:ea typeface="맑은 고딕"/>
               </a:rPr>
               <a:t>. 담당자가 LLM의 답마다 확인한다.</a:t>
+            </a:r>
+          </a:p>
+          <a:p>
+            <a:pPr lvl="2" marL="551180" indent="-139700">
+              <a:spcBef>
+                <a:spcPts val="300"/>
+              </a:spcBef>
+              <a:spcAft>
+                <a:spcPts val="300"/>
+              </a:spcAft>
+              <a:buNone/>
+            </a:pPr>
+            <a:r>
+              <a:rPr sz="1000" b="0">
+                <a:solidFill>
+                  <a:srgbClr val="000000"/>
+                </a:solidFill>
+                <a:latin typeface="맑은 고딕"/>
+                <a:ea typeface="맑은 고딕"/>
+              </a:rPr>
+              <a:t>4. </a:t>
+            </a:r>
+            <a:r>
+              <a:rPr sz="1000" b="1">
+                <a:solidFill>
+                  <a:srgbClr val="000000"/>
+                </a:solidFill>
+                <a:latin typeface="맑은 고딕"/>
+                <a:ea typeface="맑은 고딕"/>
+              </a:rPr>
+              <a:t>확정 범위 코드 구현</a:t>
+            </a:r>
+          </a:p>
+          <a:p>
+            <a:pPr lvl="3" marL="731520" indent="-137160">
+              <a:spcBef>
+                <a:spcPts val="300"/>
+              </a:spcBef>
+              <a:spcAft>
+                <a:spcPts val="300"/>
+              </a:spcAft>
+              <a:buSzPct val="90000"/>
+              <a:buFont typeface="Wingdings" pitchFamily="2" charset="2"/>
+              <a:buChar char=""/>
+            </a:pPr>
+            <a:r>
+              <a:rPr sz="1000" b="1">
+                <a:solidFill>
+                  <a:srgbClr val="000000"/>
+                </a:solidFill>
+                <a:latin typeface="맑은 고딕"/>
+                <a:ea typeface="맑은 고딕"/>
+              </a:rPr>
+              <a:t>특성:</a:t>
+            </a:r>
+            <a:r>
+              <a:rPr sz="1000" b="0">
+                <a:solidFill>
+                  <a:srgbClr val="000000"/>
+                </a:solidFill>
+                <a:latin typeface="맑은 고딕"/>
+                <a:ea typeface="맑은 고딕"/>
+              </a:rPr>
+              <a:t> 업무 규칙—</a:t>
+            </a:r>
+            <a:r>
+              <a:rPr sz="1000" b="0">
+                <a:solidFill>
+                  <a:srgbClr val="000000"/>
+                </a:solidFill>
+                <a:latin typeface="맑은 고딕"/>
+                <a:ea typeface="맑은 고딕"/>
+              </a:rPr>
+              <a:t>확정 조건만 구현하고 미정 분기를 정책화하지 않아야 함 / 절차—설계와 구현 절차가 없음 / 자동 확인—완료 조건과 자동 검사가 아직 없음 / 되돌림—작은 로컬 변경으로 Git 복구 가능</a:t>
+            </a:r>
+          </a:p>
+          <a:p>
+            <a:pPr lvl="3" marL="731520" indent="-137160">
+              <a:spcBef>
+                <a:spcPts val="300"/>
+              </a:spcBef>
+              <a:spcAft>
+                <a:spcPts val="300"/>
+              </a:spcAft>
+              <a:buSzPct val="90000"/>
+              <a:buFont typeface="Wingdings" pitchFamily="2" charset="2"/>
+              <a:buChar char=""/>
+            </a:pPr>
+            <a:r>
+              <a:rPr sz="1000" b="1">
+                <a:solidFill>
+                  <a:srgbClr val="000000"/>
+                </a:solidFill>
+                <a:latin typeface="맑은 고딕"/>
+                <a:ea typeface="맑은 고딕"/>
+              </a:rPr>
+              <a:t>선택·근거와 사람 확인 시점:</a:t>
+            </a:r>
+            <a:r>
+              <a:rPr sz="1000" b="0">
+                <a:solidFill>
+                  <a:srgbClr val="000000"/>
+                </a:solidFill>
+                <a:latin typeface="맑은 고딕"/>
+                <a:ea typeface="맑은 고딕"/>
+              </a:rPr>
+              <a:t> 현재는 </a:t>
+            </a:r>
+            <a:r>
+              <a:rPr sz="1000" b="1">
+                <a:solidFill>
+                  <a:srgbClr val="000000"/>
+                </a:solidFill>
+                <a:latin typeface="맑은 고딕"/>
+                <a:ea typeface="맑은 고딕"/>
+              </a:rPr>
+              <a:t>대화형 보조</a:t>
+            </a:r>
+            <a:r>
+              <a:rPr sz="1000" b="0">
+                <a:solidFill>
+                  <a:srgbClr val="000000"/>
+                </a:solidFill>
+                <a:latin typeface="맑은 고딕"/>
+                <a:ea typeface="맑은 고딕"/>
+              </a:rPr>
+              <a:t>. 담당자가 LLM의 답마다 정책 침범과 오류를 확인한다.</a:t>
             </a:r>
           </a:p>
         </p:txBody>
@@ -13048,7 +13113,7 @@
         <p:spPr>
           <a:xfrm>
             <a:off x="233172" y="960120"/>
-            <a:ext cx="8778240" cy="620324"/>
+            <a:ext cx="8778240" cy="576580"/>
           </a:xfrm>
         </p:spPr>
         <p:txBody>
@@ -13097,8 +13162,8 @@
         </p:nvSpPr>
         <p:spPr>
           <a:xfrm>
-            <a:off x="4572000" y="1580444"/>
-            <a:ext cx="4439412" cy="4732021"/>
+            <a:off x="4572000" y="1536700"/>
+            <a:ext cx="4439412" cy="4775765"/>
           </a:xfrm>
         </p:spPr>
         <p:txBody>
@@ -13124,7 +13189,7 @@
                 <a:latin typeface="맑은 고딕"/>
                 <a:ea typeface="맑은 고딕"/>
               </a:rPr>
-              <a:t>4. </a:t>
+              <a:t>5. </a:t>
             </a:r>
             <a:r>
               <a:rPr sz="1000" b="1">
@@ -13134,7 +13199,7 @@
                 <a:latin typeface="맑은 고딕"/>
                 <a:ea typeface="맑은 고딕"/>
               </a:rPr>
-              <a:t>확정 범위 코드 구현</a:t>
+              <a:t>검사 작성·실행</a:t>
             </a:r>
           </a:p>
           <a:p>
@@ -13177,7 +13242,7 @@
                 <a:latin typeface="맑은 고딕"/>
                 <a:ea typeface="맑은 고딕"/>
               </a:rPr>
-              <a:t>확정 조건만 구현하고 미정 분기를 정책화하지 않아야 함 / 절차—설계와 구현 절차가 없음 / 자동 확인—완료 조건과 자동 검사가 아직 없음 / 되돌림—작은 로컬 변경으로 Git 복구 가능</a:t>
+              <a:t>확인 대상과 기대 결과가 아직 정해지지 않음 / 절차—작성·실행 절차가 없음 / 자동 확인—검사를 마련하고 실제 오류를 잡는지 사람의 확인이 필요함 / 되돌림—Git으로 쉬움</a:t>
             </a:r>
           </a:p>
           <a:p>
@@ -13210,7 +13275,7 @@
                 <a:latin typeface="맑은 고딕"/>
                 <a:ea typeface="맑은 고딕"/>
               </a:rPr>
-              <a:t> 현재는 </a:t>
+              <a:t> 현재 검사 초안은 </a:t>
             </a:r>
             <a:r>
               <a:rPr sz="1000" b="1">
@@ -13230,7 +13295,7 @@
                 <a:latin typeface="맑은 고딕"/>
                 <a:ea typeface="맑은 고딕"/>
               </a:rPr>
-              <a:t>. 담당자가 LLM의 답마다 정책 침범과 오류를 확인한다.</a:t>
+              <a:t> 대상이다. 담당자가 LLM의 답마다 확인한다.</a:t>
             </a:r>
           </a:p>
           <a:p>
@@ -13251,7 +13316,7 @@
                 <a:latin typeface="맑은 고딕"/>
                 <a:ea typeface="맑은 고딕"/>
               </a:rPr>
-              <a:t>5. </a:t>
+              <a:t>6. </a:t>
             </a:r>
             <a:r>
               <a:rPr sz="1000" b="1">
@@ -13261,7 +13326,7 @@
                 <a:latin typeface="맑은 고딕"/>
                 <a:ea typeface="맑은 고딕"/>
               </a:rPr>
-              <a:t>검사 작성·실행</a:t>
+              <a:t>릴리스 설명</a:t>
             </a:r>
           </a:p>
           <a:p>
@@ -13304,7 +13369,7 @@
                 <a:latin typeface="맑은 고딕"/>
                 <a:ea typeface="맑은 고딕"/>
               </a:rPr>
-              <a:t>확인 대상과 기대 결과가 아직 정해지지 않음 / 절차—작성·실행 절차가 없음 / 자동 확인—검사를 마련하고 실제 오류를 잡는지 사람의 확인이 필요함 / 되돌림—Git으로 쉬움</a:t>
+              <a:t>확정 범위·제외 범위·미정 사항을 구분해야 함 / 절차—작성·승인 절차가 없음 / 자동 확인—실제 변경 내역과 검사 결과가 필요함 / 되돌림—Git으로 쉬움</a:t>
             </a:r>
           </a:p>
           <a:p>
@@ -13337,7 +13402,7 @@
                 <a:latin typeface="맑은 고딕"/>
                 <a:ea typeface="맑은 고딕"/>
               </a:rPr>
-              <a:t> 현재 검사 초안은 </a:t>
+              <a:t> 현재는 </a:t>
             </a:r>
             <a:r>
               <a:rPr sz="1000" b="1">
@@ -13357,11 +13422,31 @@
                 <a:latin typeface="맑은 고딕"/>
                 <a:ea typeface="맑은 고딕"/>
               </a:rPr>
-              <a:t> 대상이다. 담당자가 LLM의 답마다 확인한다.</a:t>
-            </a:r>
-          </a:p>
-          <a:p>
-            <a:pPr lvl="2" marL="551180" indent="-139700">
+              <a:t>, 최종 확인과 승인은 </a:t>
+            </a:r>
+            <a:r>
+              <a:rPr sz="1000" b="1">
+                <a:solidFill>
+                  <a:srgbClr val="000000"/>
+                </a:solidFill>
+                <a:latin typeface="맑은 고딕"/>
+                <a:ea typeface="맑은 고딕"/>
+              </a:rPr>
+              <a:t>수작업</a:t>
+            </a:r>
+            <a:r>
+              <a:rPr sz="1000" b="0">
+                <a:solidFill>
+                  <a:srgbClr val="000000"/>
+                </a:solidFill>
+                <a:latin typeface="맑은 고딕"/>
+                <a:ea typeface="맑은 고딕"/>
+              </a:rPr>
+              <a:t>이다. 초안은 답마다, 승인은 공개 전에 확인한다.</a:t>
+            </a:r>
+          </a:p>
+          <a:p>
+            <a:pPr marL="182880" indent="0">
               <a:spcBef>
                 <a:spcPts val="300"/>
               </a:spcBef>
@@ -13371,16 +13456,6 @@
               <a:buNone/>
             </a:pPr>
             <a:r>
-              <a:rPr sz="1000" b="0">
-                <a:solidFill>
-                  <a:srgbClr val="000000"/>
-                </a:solidFill>
-                <a:latin typeface="맑은 고딕"/>
-                <a:ea typeface="맑은 고딕"/>
-              </a:rPr>
-              <a:t>6. </a:t>
-            </a:r>
-            <a:r>
               <a:rPr sz="1000" b="1">
                 <a:solidFill>
                   <a:srgbClr val="000000"/>
@@ -13388,11 +13463,11 @@
                 <a:latin typeface="맑은 고딕"/>
                 <a:ea typeface="맑은 고딕"/>
               </a:rPr>
-              <a:t>릴리스 설명</a:t>
-            </a:r>
-          </a:p>
-          <a:p>
-            <a:pPr lvl="3" marL="731520" indent="-137160">
+              <a:t>공통 전환 조건</a:t>
+            </a:r>
+          </a:p>
+          <a:p>
+            <a:pPr lvl="2" marL="411480" indent="-137160">
               <a:spcBef>
                 <a:spcPts val="300"/>
               </a:spcBef>
@@ -13401,19 +13476,9 @@
               </a:spcAft>
               <a:buSzPct val="90000"/>
               <a:buFont typeface="Wingdings" pitchFamily="2" charset="2"/>
-              <a:buChar char=""/>
+              <a:buChar char=""/>
             </a:pPr>
             <a:r>
-              <a:rPr sz="1000" b="1">
-                <a:solidFill>
-                  <a:srgbClr val="000000"/>
-                </a:solidFill>
-                <a:latin typeface="맑은 고딕"/>
-                <a:ea typeface="맑은 고딕"/>
-              </a:rPr>
-              <a:t>특성:</a:t>
-            </a:r>
-            <a:r>
               <a:rPr sz="1000" b="0">
                 <a:solidFill>
                   <a:srgbClr val="000000"/>
@@ -13421,21 +13486,11 @@
                 <a:latin typeface="맑은 고딕"/>
                 <a:ea typeface="맑은 고딕"/>
               </a:rPr>
-              <a:t> 업무 규칙—</a:t>
-            </a:r>
-            <a:r>
-              <a:rPr sz="1000" b="0">
-                <a:solidFill>
-                  <a:srgbClr val="000000"/>
-                </a:solidFill>
-                <a:latin typeface="맑은 고딕"/>
-                <a:ea typeface="맑은 고딕"/>
-              </a:rPr>
-              <a:t>확정 범위·제외 범위·미정 사항을 구분해야 함 / 절차—작성·승인 절차가 없음 / 자동 확인—실제 변경 내역과 검사 결과가 필요함 / 되돌림—Git으로 쉬움</a:t>
-            </a:r>
-          </a:p>
-          <a:p>
-            <a:pPr lvl="3" marL="731520" indent="-137160">
+              <a:t>현재는 담당자의 수작업 결정과 LLM 대화형 보조가 가장 단순하고 충분하다. 비용은 아직 계측하지 않았으며, 별도 실행 체계 구성과 검토 비용을 줄이는 선택이다.</a:t>
+            </a:r>
+          </a:p>
+          <a:p>
+            <a:pPr lvl="2" marL="411480" indent="-137160">
               <a:spcBef>
                 <a:spcPts val="300"/>
               </a:spcBef>
@@ -13444,19 +13499,9 @@
               </a:spcAft>
               <a:buSzPct val="90000"/>
               <a:buFont typeface="Wingdings" pitchFamily="2" charset="2"/>
-              <a:buChar char=""/>
+              <a:buChar char=""/>
             </a:pPr>
             <a:r>
-              <a:rPr sz="1000" b="1">
-                <a:solidFill>
-                  <a:srgbClr val="000000"/>
-                </a:solidFill>
-                <a:latin typeface="맑은 고딕"/>
-                <a:ea typeface="맑은 고딕"/>
-              </a:rPr>
-              <a:t>선택·근거와 사람 확인 시점:</a:t>
-            </a:r>
-            <a:r>
               <a:rPr sz="1000" b="0">
                 <a:solidFill>
                   <a:srgbClr val="000000"/>
@@ -13464,47 +13509,7 @@
                 <a:latin typeface="맑은 고딕"/>
                 <a:ea typeface="맑은 고딕"/>
               </a:rPr>
-              <a:t> 현재는 </a:t>
-            </a:r>
-            <a:r>
-              <a:rPr sz="1000" b="1">
-                <a:solidFill>
-                  <a:srgbClr val="000000"/>
-                </a:solidFill>
-                <a:latin typeface="맑은 고딕"/>
-                <a:ea typeface="맑은 고딕"/>
-              </a:rPr>
-              <a:t>대화형 보조</a:t>
-            </a:r>
-            <a:r>
-              <a:rPr sz="1000" b="0">
-                <a:solidFill>
-                  <a:srgbClr val="000000"/>
-                </a:solidFill>
-                <a:latin typeface="맑은 고딕"/>
-                <a:ea typeface="맑은 고딕"/>
-              </a:rPr>
-              <a:t>, 최종 확인과 승인은 </a:t>
-            </a:r>
-            <a:r>
-              <a:rPr sz="1000" b="1">
-                <a:solidFill>
-                  <a:srgbClr val="000000"/>
-                </a:solidFill>
-                <a:latin typeface="맑은 고딕"/>
-                <a:ea typeface="맑은 고딕"/>
-              </a:rPr>
-              <a:t>수작업</a:t>
-            </a:r>
-            <a:r>
-              <a:rPr sz="1000" b="0">
-                <a:solidFill>
-                  <a:srgbClr val="000000"/>
-                </a:solidFill>
-                <a:latin typeface="맑은 고딕"/>
-                <a:ea typeface="맑은 고딕"/>
-              </a:rPr>
-              <a:t>이다. 초안은 답마다, 승인은 공개 전에 확인한다.</a:t>
+              <a:t>절차를 고정할 수 있으면 일반 자동화 또는 워크플로를 사용한다. 명확한 완료 조건을 자동 검사로 판정할 수 있고, 그 검사가 실제 오류를 잡는다고 사람이 확인한 뒤에도 실행 결과에 따라 다음 행동을 정해야 하여 절차를 사전에 고정하기 어려울 때만 에이전트를 검토한다. 사람은 대화형 보조에서는 답마다, 워크플로에서는 정한 단계마다, 에이전트에서는 종료·중단 시점에 확인한다.</a:t>
             </a:r>
           </a:p>
         </p:txBody>
@@ -13948,303 +13953,6 @@
                 <a:ea typeface="맑은 고딕"/>
               </a:rPr>
               <a:t>와 실행 기록의 비교 한계를 설명한다.</a:t>
-            </a:r>
-          </a:p>
-        </p:txBody>
-      </p:sp>
-    </p:spTree>
-    <p:extLst>
-      <p:ext uri="{BB962C8B-B14F-4D97-AF65-F5344CB8AC3E}">
-        <p14:creationId xmlns:p14="http://schemas.microsoft.com/office/powerpoint/2010/main" val="3555436673"/>
-      </p:ext>
-    </p:extLst>
-  </p:cSld>
-  <p:clrMapOvr>
-    <a:masterClrMapping/>
-  </p:clrMapOvr>
-</p:sld>
-</file>
-
-<file path=ppt/slides/slide20.xml><?xml version="1.0" encoding="utf-8"?>
-<p:sld xmlns:a="http://schemas.openxmlformats.org/drawingml/2006/main" xmlns:r="http://schemas.openxmlformats.org/officeDocument/2006/relationships" xmlns:p="http://schemas.openxmlformats.org/presentationml/2006/main">
-  <p:cSld>
-    <p:spTree>
-      <p:nvGrpSpPr>
-        <p:cNvPr id="1" name="">
-          <a:extLst>
-            <a:ext uri="{FF2B5EF4-FFF2-40B4-BE49-F238E27FC236}">
-              <a16:creationId xmlns:a16="http://schemas.microsoft.com/office/drawing/2014/main" id="{8E4F1F13-426B-086B-7D8C-9A58A0F879DB}"/>
-            </a:ext>
-          </a:extLst>
-        </p:cNvPr>
-        <p:cNvGrpSpPr/>
-        <p:nvPr/>
-      </p:nvGrpSpPr>
-      <p:grpSpPr>
-        <a:xfrm>
-          <a:off x="0" y="0"/>
-          <a:ext cx="0" cy="0"/>
-          <a:chOff x="0" y="0"/>
-          <a:chExt cx="0" cy="0"/>
-        </a:xfrm>
-      </p:grpSpPr>
-      <p:sp>
-        <p:nvSpPr>
-          <p:cNvPr id="2" name="제목 1">
-            <a:extLst>
-              <a:ext uri="{FF2B5EF4-FFF2-40B4-BE49-F238E27FC236}">
-                <a16:creationId xmlns:a16="http://schemas.microsoft.com/office/drawing/2014/main" id="{AA26A92D-924E-0575-9551-F8FD7BFD3FAD}"/>
-              </a:ext>
-            </a:extLst>
-          </p:cNvPr>
-          <p:cNvSpPr>
-            <a:spLocks noGrp="1"/>
-          </p:cNvSpPr>
-          <p:nvPr>
-            <p:ph type="title"/>
-          </p:nvPr>
-        </p:nvSpPr>
-        <p:spPr/>
-        <p:txBody>
-          <a:bodyPr/>
-          <a:lstStyle/>
-          <a:p>
-            <a:r>
-              <a:rPr sz="2400" b="1">
-                <a:solidFill>
-                  <a:srgbClr val="000000"/>
-                </a:solidFill>
-                <a:latin typeface="맑은 고딕"/>
-                <a:ea typeface="맑은 고딕"/>
-              </a:rPr>
-              <a:t>공통 전환 조건</a:t>
-            </a:r>
-          </a:p>
-          <a:p>
-            <a:r>
-              <a:rPr sz="1100" b="1">
-                <a:solidFill>
-                  <a:srgbClr val="000000"/>
-                </a:solidFill>
-                <a:latin typeface="맑은 고딕"/>
-                <a:ea typeface="맑은 고딕"/>
-              </a:rPr>
-              <a:t>별첨. 실습 답</a:t>
-            </a:r>
-          </a:p>
-        </p:txBody>
-      </p:sp>
-      <p:sp>
-        <p:nvSpPr>
-          <p:cNvPr id="3" name="슬라이드 번호 개체 틀 2">
-            <a:extLst>
-              <a:ext uri="{FF2B5EF4-FFF2-40B4-BE49-F238E27FC236}">
-                <a16:creationId xmlns:a16="http://schemas.microsoft.com/office/drawing/2014/main" id="{12CF30EE-4DFD-8063-56B8-B8689E76DFCA}"/>
-              </a:ext>
-            </a:extLst>
-          </p:cNvPr>
-          <p:cNvSpPr>
-            <a:spLocks noGrp="1"/>
-          </p:cNvSpPr>
-          <p:nvPr>
-            <p:ph type="sldNum" sz="quarter" idx="10"/>
-          </p:nvPr>
-        </p:nvSpPr>
-        <p:spPr/>
-        <p:txBody>
-          <a:bodyPr/>
-          <a:lstStyle/>
-          <a:p>
-            <a:pPr>
-              <a:defRPr/>
-            </a:pPr>
-            <a:r>
-              <a:rPr lang="en-US" altLang="ko-KR">
-                <a:solidFill>
-                  <a:prstClr val="black"/>
-                </a:solidFill>
-              </a:rPr>
-              <a:t>- 20 -</a:t>
-            </a:r>
-          </a:p>
-        </p:txBody>
-      </p:sp>
-      <p:sp>
-        <p:nvSpPr>
-          <p:cNvPr id="5" name="텍스트 개체 틀 4">
-            <a:extLst>
-              <a:ext uri="{FF2B5EF4-FFF2-40B4-BE49-F238E27FC236}">
-                <a16:creationId xmlns:a16="http://schemas.microsoft.com/office/drawing/2014/main" id="{D66274C8-E16F-5AEB-614B-D8D32DA3E8C6}"/>
-              </a:ext>
-            </a:extLst>
-          </p:cNvPr>
-          <p:cNvSpPr>
-            <a:spLocks noGrp="1"/>
-          </p:cNvSpPr>
-          <p:nvPr>
-            <p:ph type="body" sz="quarter" idx="11"/>
-          </p:nvPr>
-        </p:nvSpPr>
-        <p:spPr/>
-        <p:txBody>
-          <a:bodyPr/>
-          <a:lstStyle/>
-          <a:p>
-            <a:r>
-              <a:rPr kumimoji="1" lang="en-US" altLang="ko-KR" sz="1400" dirty="0" err="1"/>
-              <a:t>별첨: 02. LLM이라는 재료</a:t>
-            </a:r>
-          </a:p>
-        </p:txBody>
-      </p:sp>
-      <p:sp>
-        <p:nvSpPr>
-          <p:cNvPr id="6" name="텍스트 개체 틀 5">
-            <a:extLst>
-              <a:ext uri="{FF2B5EF4-FFF2-40B4-BE49-F238E27FC236}">
-                <a16:creationId xmlns:a16="http://schemas.microsoft.com/office/drawing/2014/main" id="{A24E58E1-194B-A320-AEEE-24D08685BB67}"/>
-              </a:ext>
-            </a:extLst>
-          </p:cNvPr>
-          <p:cNvSpPr>
-            <a:spLocks noGrp="1"/>
-          </p:cNvSpPr>
-          <p:nvPr>
-            <p:ph type="body" sz="quarter" idx="12"/>
-          </p:nvPr>
-        </p:nvSpPr>
-        <p:spPr/>
-        <p:txBody>
-          <a:bodyPr/>
-          <a:lstStyle/>
-          <a:p>
-            <a:endParaRPr kumimoji="1" lang="ko-KR" altLang="en-US" dirty="0"/>
-          </a:p>
-        </p:txBody>
-      </p:sp>
-      <p:sp>
-        <p:nvSpPr>
-          <p:cNvPr id="7" name="텍스트 개체 틀 6">
-            <a:extLst>
-              <a:ext uri="{FF2B5EF4-FFF2-40B4-BE49-F238E27FC236}">
-                <a16:creationId xmlns:a16="http://schemas.microsoft.com/office/drawing/2014/main" id="{A219F420-613B-6234-45F6-0955A9A4505F}"/>
-              </a:ext>
-            </a:extLst>
-          </p:cNvPr>
-          <p:cNvSpPr>
-            <a:spLocks noGrp="1"/>
-          </p:cNvSpPr>
-          <p:nvPr>
-            <p:ph type="body" sz="quarter" idx="13"/>
-          </p:nvPr>
-        </p:nvSpPr>
-        <p:spPr/>
-        <p:txBody>
-          <a:bodyPr/>
-          <a:lstStyle/>
-          <a:p>
-            <a:endParaRPr kumimoji="1" lang="en-US" altLang="ko-KR" dirty="0"/>
-          </a:p>
-        </p:txBody>
-      </p:sp>
-      <p:sp>
-        <p:nvSpPr>
-          <p:cNvPr id="8" name="내용 개체 틀 7">
-            <a:extLst>
-              <a:ext uri="{FF2B5EF4-FFF2-40B4-BE49-F238E27FC236}">
-                <a16:creationId xmlns:a16="http://schemas.microsoft.com/office/drawing/2014/main" id="{BEBA2C4A-B0BF-F2E4-EA6E-614C99CBA184}"/>
-              </a:ext>
-            </a:extLst>
-          </p:cNvPr>
-          <p:cNvSpPr>
-            <a:spLocks noGrp="1"/>
-          </p:cNvSpPr>
-          <p:nvPr>
-            <p:ph idx="1"/>
-          </p:nvPr>
-        </p:nvSpPr>
-        <p:spPr>
-          <a:xfrm>
-            <a:off x="233172" y="1404056"/>
-            <a:ext cx="4338828" cy="4908409"/>
-          </a:xfrm>
-        </p:spPr>
-        <p:txBody>
-          <a:bodyPr>
-            <a:normAutofit/>
-          </a:bodyPr>
-          <a:lstStyle/>
-          <a:p>
-            <a:pPr lvl="2" marL="411480" indent="-137160">
-              <a:spcBef>
-                <a:spcPts val="300"/>
-              </a:spcBef>
-              <a:spcAft>
-                <a:spcPts val="300"/>
-              </a:spcAft>
-              <a:buSzPct val="90000"/>
-              <a:buFont typeface="Wingdings" pitchFamily="2" charset="2"/>
-              <a:buChar char=""/>
-            </a:pPr>
-            <a:r>
-              <a:rPr sz="1000" b="0">
-                <a:solidFill>
-                  <a:srgbClr val="000000"/>
-                </a:solidFill>
-                <a:latin typeface="맑은 고딕"/>
-                <a:ea typeface="맑은 고딕"/>
-              </a:rPr>
-              <a:t>절차를 고정할 수 있으면 일반 자동화 또는 워크플로를 사용한다. 명확한 완료 조건을 자동 검사로 판정할 수 있고, 그 검사가 실제 오류를 잡는다고 사람이 확인한 뒤에도 실행 결과에 따라 다음 행동을 정해야 하여 절차를 사전에 고정하기 어려울 때만 에이전트를 검토한다. 사람은 대화형 보조에서는 답마다, 워크플로에서는 정한 단계마다, 에이전트에서는 종료·중단 시점에 확인한다.</a:t>
-            </a:r>
-          </a:p>
-        </p:txBody>
-      </p:sp>
-      <p:sp>
-        <p:nvSpPr>
-          <p:cNvPr id="9" name="내용 개체 틀 7">
-            <a:extLst>
-              <a:ext uri="{FF2B5EF4-FFF2-40B4-BE49-F238E27FC236}">
-                <a16:creationId xmlns:a16="http://schemas.microsoft.com/office/drawing/2014/main" id="{BEBA2C4A-B0BF-F2E4-EA6E-614C99CBA184}"/>
-              </a:ext>
-            </a:extLst>
-          </p:cNvPr>
-          <p:cNvSpPr>
-            <a:spLocks noGrp="1"/>
-          </p:cNvSpPr>
-          <p:nvPr>
-            <p:ph idx="1"/>
-          </p:nvPr>
-        </p:nvSpPr>
-        <p:spPr>
-          <a:xfrm>
-            <a:off x="233172" y="960120"/>
-            <a:ext cx="8778240" cy="443936"/>
-          </a:xfrm>
-        </p:spPr>
-        <p:txBody>
-          <a:bodyPr>
-            <a:normAutofit/>
-          </a:bodyPr>
-          <a:lstStyle/>
-          <a:p>
-            <a:pPr marL="182880" indent="0">
-              <a:spcBef>
-                <a:spcPts val="300"/>
-              </a:spcBef>
-              <a:spcAft>
-                <a:spcPts val="300"/>
-              </a:spcAft>
-              <a:buNone/>
-            </a:pPr>
-            <a:r>
-              <a:rPr sz="1000" b="0">
-                <a:solidFill>
-                  <a:srgbClr val="000000"/>
-                </a:solidFill>
-                <a:latin typeface="맑은 고딕"/>
-                <a:ea typeface="맑은 고딕"/>
-              </a:rPr>
-              <a:t>현재는 담당자의 수작업 결정과 LLM 대화형 보조가 가장 단순하고 충분하다. 비용은 아직 계측하지 않았으며, 별도 실행 체계 구성과 검토 비용을 줄이는 선택이다.</a:t>
             </a:r>
           </a:p>
         </p:txBody>
@@ -18715,7 +18423,7 @@
         <p:spPr>
           <a:xfrm>
             <a:off x="365760" y="4891745"/>
-            <a:ext cx="8412480" cy="1038316"/>
+            <a:ext cx="8412480" cy="975360"/>
           </a:xfrm>
           <a:prstGeom prst="rect">
             <a:avLst/>
@@ -18963,7 +18671,7 @@
           </p:nvPr>
         </p:nvGraphicFramePr>
         <p:xfrm>
-          <a:off x="1900746" y="4103188"/>
+          <a:off x="1900746" y="3960294"/>
           <a:ext cx="5328920" cy="3873500"/>
         </p:xfrm>
         <a:graphic>
@@ -20087,7 +19795,7 @@
         </p:nvSpPr>
         <p:spPr>
           <a:xfrm>
-            <a:off x="365760" y="3804738"/>
+            <a:off x="365760" y="3661844"/>
             <a:ext cx="8412480" cy="222250"/>
           </a:xfrm>
           <a:prstGeom prst="rect">
@@ -20187,8 +19895,8 @@
         </p:blipFill>
         <p:spPr>
           <a:xfrm>
-            <a:off x="3264882" y="2911394"/>
-            <a:ext cx="2600647" cy="555016"/>
+            <a:off x="3630007" y="2911394"/>
+            <a:ext cx="1870397" cy="412121"/>
           </a:xfrm>
           <a:prstGeom prst="rect">
             <a:avLst/>
@@ -20644,8 +20352,8 @@
         </p:blipFill>
         <p:spPr>
           <a:xfrm>
-            <a:off x="2662039" y="3698332"/>
-            <a:ext cx="3819922" cy="2652371"/>
+            <a:off x="2851299" y="3698332"/>
+            <a:ext cx="3441402" cy="2069599"/>
           </a:xfrm>
           <a:prstGeom prst="rect">
             <a:avLst/>

--- a/courses/ai-native/sessions/s02.pptx
+++ b/courses/ai-native/sessions/s02.pptx
@@ -917,14 +917,14 @@
             <a:pPr lvl="0"/>
             <a:r>
               <a:rPr lang="ko-KR" sz="1200"/>
-              <a:t>학습자에게 "다시 해 봐" 전에 무엇을 바꿀지 묻는다. 문장 재작성보다 빈 결정과 실패를 재는 검사가 먼저다.</a:t>
+              <a:t>학습자에게 "다시 해 봐" 전에 무엇을 바꿀지 묻는다. 문장 재작성보다 빈 결정과 실패를 확인하는 검사가 먼저다.</a:t>
             </a:r>
           </a:p>
           <a:p>
             <a:pPr lvl="0"/>
             <a:r>
               <a:rPr lang="ko-KR" sz="1200"/>
-              <a:t>여러 실행으로 성능을 재는 구체적인 평가 구성은 "세션 10. 비용과 평가"로 연결한다.</a:t>
+              <a:t>여러 실행으로 성능을 측정하는 구체적인 평가 구성은 "세션 10. 비용과 평가"로 연결한다.</a:t>
             </a:r>
           </a:p>
         </p:txBody>
@@ -1060,6 +1060,13 @@
             <a:pPr lvl="0"/>
             <a:r>
               <a:rPr lang="ko-KR" sz="1200"/>
+              <a:t>모델에서 보완된 것 — 없다. 이 세션이 남기는 것은 활용 방식의 판단이며, 모델은 다음 세션부터 쌓인다.</a:t>
+            </a:r>
+          </a:p>
+          <a:p>
+            <a:pPr lvl="0"/>
+            <a:r>
+              <a:rPr lang="ko-KR" sz="1200"/>
               <a:t>형식을 고른 뒤에는 무엇을 만들어야 하는지의 합의가 필요하다. 실습 2의 판단은 뒤 실습에서 검사·설계가 생기며 바뀔 수 있다.</a:t>
             </a:r>
           </a:p>
@@ -1143,6 +1150,305 @@
             <a:r>
               <a:rPr lang="ko-KR" sz="1200"/>
               <a:t>실습 1의 업무 조건은 input-s01.md에 그대로 보존했다. 강의의 여섯 일과 실습의 여섯 일은 같지 않아도 된다. 빈 저장소 실습에는 운영 이관이 없다.</a:t>
+            </a:r>
+          </a:p>
+          <a:p>
+            <a:pPr lvl="0"/>
+            <a:r>
+              <a:rPr lang="ko-KR" sz="1200"/>
+              <a:t>실제로 실행한 프롬프트 — 아래가 이 별첨을 만든 입력 그대로다. 본문 실습의 ①~⑤는 수강생용 문구이고, 실제 실행은 앞 응답을 읽고 답한 내용이 붙어 길다. 원본은 code/s02/exercise-conversation/order/prompt-NN.txt다.</a:t>
+            </a:r>
+          </a:p>
+          <a:p>
+            <a:pPr lvl="1"/>
+            <a:r>
+              <a:rPr lang="ko-KR" sz="1200"/>
+              <a:t>1. 실제 프롬프트 1</a:t>
+            </a:r>
+          </a:p>
+          <a:p>
+            <a:pPr lvl="0">
+              <a:buNone/>
+            </a:pPr>
+            <a:r>
+              <a:rPr lang="ko-KR" sz="1200"/>
+              <a:t>    실습 1에서 합의한 업무 조건으로 쇼핑몰의 첫 주문 기능을 개발한다. 개발에 필요한 일 목록을 만들고 각 일의 업무 규칙 확정·절차 확정·결과의 자동 확인·되돌리기 쉬움을 살펴, 수작업·대화형 보조·워크플로·에이전트 중 충분한 가장 단순한 활용 방식을 제안해라. 아직 정하지 않은 조건은 질문하고 정책을 대신 정하지 마라. 대화창에서 검토할 간결한 초안으로 답해라.</a:t>
+            </a:r>
+          </a:p>
+          <a:p>
+            <a:pPr lvl="0">
+              <a:buNone/>
+            </a:pPr>
+            <a:r>
+              <a:rPr lang="ko-KR" sz="1200"/>
+              <a:t>    [실습 1의 업무 조건] # "주문한다" 업무 조건</a:t>
+            </a:r>
+          </a:p>
+          <a:p>
+            <a:pPr lvl="0">
+              <a:buNone/>
+            </a:pPr>
+            <a:r>
+              <a:rPr lang="ko-KR" sz="1200"/>
+              <a:t>    ## 범위</a:t>
+            </a:r>
+          </a:p>
+          <a:p>
+            <a:pPr lvl="2"/>
+            <a:r>
+              <a:rPr lang="ko-KR" sz="1200"/>
+              <a:t>대상: 고객이 장바구니에서 주문을 시작하고, 배송지를 확정한 뒤 카드 결제 승인을 받아 주문이 성립할 때까지다.</a:t>
+            </a:r>
+          </a:p>
+          <a:p>
+            <a:pPr lvl="2"/>
+            <a:r>
+              <a:rPr lang="ko-KR" sz="1200"/>
+              <a:t>연계 대상(이미 운영 중인 외부 시스템): 상품 시스템(판매가, 재고), 결제 시스템(카드 승인), 배송 시스템(배송 요청 수신).</a:t>
+            </a:r>
+          </a:p>
+          <a:p>
+            <a:pPr lvl="2"/>
+            <a:r>
+              <a:rPr lang="ko-KR" sz="1200"/>
+              <a:t>제외: 화면, 기술 설계, 결제 이후 운영(취소, 환불, 반품, 교환, 배송 진행), 카드 외 결제 수단, 배송비, 쿠폰과 할인.</a:t>
+            </a:r>
+          </a:p>
+          <a:p>
+            <a:pPr lvl="0">
+              <a:buNone/>
+            </a:pPr>
+            <a:r>
+              <a:rPr lang="ko-KR" sz="1200"/>
+              <a:t>    ## 주문 생성</a:t>
+            </a:r>
+          </a:p>
+          <a:p>
+            <a:pPr lvl="2"/>
+            <a:r>
+              <a:rPr lang="ko-KR" sz="1200"/>
+              <a:t>고객이 배송지를 확정하면 주문이 생기고, 주문 상태는 결제대기가 된다.</a:t>
+            </a:r>
+          </a:p>
+          <a:p>
+            <a:pPr lvl="2"/>
+            <a:r>
+              <a:rPr lang="ko-KR" sz="1200"/>
+              <a:t>주문자와 수령인은 같은 사람으로 본다.</a:t>
+            </a:r>
+          </a:p>
+          <a:p>
+            <a:pPr lvl="2"/>
+            <a:r>
+              <a:rPr lang="ko-KR" sz="1200"/>
+              <a:t>[미정 H] 비회원 주문을 허용하는지, 허용한다면 결제대기 주문을 다시 찾을 때 본인을 어떻게 확인하는지 정해지지 않았다.</a:t>
+            </a:r>
+          </a:p>
+          <a:p>
+            <a:pPr lvl="0">
+              <a:buNone/>
+            </a:pPr>
+            <a:r>
+              <a:rPr lang="ko-KR" sz="1200"/>
+              <a:t>    ## 주문 금액</a:t>
+            </a:r>
+          </a:p>
+          <a:p>
+            <a:pPr lvl="2"/>
+            <a:r>
+              <a:rPr lang="ko-KR" sz="1200"/>
+              <a:t>주문 금액은 항목마다 주문 생성 시점의 판매가(단가)에 수량을 곱해 모두 더한 값이다.</a:t>
+            </a:r>
+          </a:p>
+          <a:p>
+            <a:pPr lvl="2"/>
+            <a:r>
+              <a:rPr lang="ko-KR" sz="1200"/>
+              <a:t>주문이 생긴 뒤 판매가가 오르거나 내려도 주문 금액은 바뀌지 않으며, 그 금액을 청구한다.</a:t>
+            </a:r>
+          </a:p>
+          <a:p>
+            <a:pPr lvl="0">
+              <a:buNone/>
+            </a:pPr>
+            <a:r>
+              <a:rPr lang="ko-KR" sz="1200"/>
+              <a:t>    ## 결제대기</a:t>
+            </a:r>
+          </a:p>
+          <a:p>
+            <a:pPr lvl="2"/>
+            <a:r>
+              <a:rPr lang="ko-KR" sz="1200"/>
+              <a:t>결제대기 중에는 상품, 수량, 배송지를 바꿀 수 없다. 바꾸려면 새로 주문한다.</a:t>
+            </a:r>
+          </a:p>
+          <a:p>
+            <a:pPr lvl="2"/>
+            <a:r>
+              <a:rPr lang="ko-KR" sz="1200"/>
+              <a:t>카드 결제가 거절되면 주문을 취소하지 않고 결제대기로 남겨, 고객이 다른 카드로 다시 결제할 수 있게 한다.</a:t>
+            </a:r>
+          </a:p>
+          <a:p>
+            <a:pPr lvl="2"/>
+            <a:r>
+              <a:rPr lang="ko-KR" sz="1200"/>
+              <a:t>[미정 B] 결제대기의 기한과 기한이 지난 뒤의 처리가 정해지지 않았다. 구현에서 만료, 취소, 삭제, 결제 차단을 임의로 정하지 않는다.</a:t>
+            </a:r>
+          </a:p>
+          <a:p>
+            <a:pPr lvl="0">
+              <a:buNone/>
+            </a:pPr>
+            <a:r>
+              <a:rPr lang="ko-KR" sz="1200"/>
+              <a:t>    ## 결제와 주문 성립</a:t>
+            </a:r>
+          </a:p>
+          <a:p>
+            <a:pPr lvl="2"/>
+            <a:r>
+              <a:rPr lang="ko-KR" sz="1200"/>
+              <a:t>결제 수단은 카드뿐이다.</a:t>
+            </a:r>
+          </a:p>
+          <a:p>
+            <a:pPr lvl="2"/>
+            <a:r>
+              <a:rPr lang="ko-KR" sz="1200"/>
+              <a:t>카드 승인이 완료된 때 주문이 성립한다.</a:t>
+            </a:r>
+          </a:p>
+          <a:p>
+            <a:pPr lvl="2"/>
+            <a:r>
+              <a:rPr lang="ko-KR" sz="1200"/>
+              <a:t>결제 시스템의 응답을 확정할 수 없으면 그 응답을 실패로 바꾸지 않는다.</a:t>
+            </a:r>
+          </a:p>
+          <a:p>
+            <a:pPr lvl="2"/>
+            <a:r>
+              <a:rPr lang="ko-KR" sz="1200"/>
+              <a:t>[미정 F] 응답을 확정할 수 없을 때 이후 처리(재결제 허용 여부 포함)가 정해지지 않았다. 구현에서 성공이나 실패를 임의로 확정하지 않는다.</a:t>
+            </a:r>
+          </a:p>
+          <a:p>
+            <a:pPr lvl="0">
+              <a:buNone/>
+            </a:pPr>
+            <a:r>
+              <a:rPr lang="ko-KR" sz="1200"/>
+              <a:t>    ## 재고</a:t>
+            </a:r>
+          </a:p>
+          <a:p>
+            <a:pPr lvl="2"/>
+            <a:r>
+              <a:rPr lang="ko-KR" sz="1200"/>
+              <a:t>재고는 상품 시스템의 판단을 그대로 따르며, 주문 쪽에서 재고를 따로 확보하지 않는다.</a:t>
+            </a:r>
+          </a:p>
+          <a:p>
+            <a:pPr lvl="2"/>
+            <a:r>
+              <a:rPr lang="ko-KR" sz="1200"/>
+              <a:t>[미정 E] 승인 뒤 재고가 없을 때의 처리가 정해지지 않았다. 구현에서 승인 취소나 주문 상태 변경을 임의로 하지 않는다.</a:t>
+            </a:r>
+          </a:p>
+          <a:p>
+            <a:pPr lvl="0">
+              <a:buNone/>
+            </a:pPr>
+            <a:r>
+              <a:rPr lang="ko-KR" sz="1200"/>
+              <a:t>    ## 배송 요청</a:t>
+            </a:r>
+          </a:p>
+          <a:p>
+            <a:pPr lvl="2"/>
+            <a:r>
+              <a:rPr lang="ko-KR" sz="1200"/>
+              <a:t>배송 시스템에는 카드 승인 뒤에만 배송을 요청한다.</a:t>
+            </a:r>
+          </a:p>
+          <a:p>
+            <a:pPr lvl="2"/>
+            <a:r>
+              <a:rPr lang="ko-KR" sz="1200"/>
+              <a:t>[미정 G] 승인 뒤 배송 요청이 실패했을 때의 처리가 정해지지 않았다. 구현에서 승인 취소, 주문 상태 변경, 재요청 주체와 방식을 임의로 정하지 않는다.</a:t>
+            </a:r>
+          </a:p>
+          <a:p>
+            <a:pPr lvl="2"/>
+            <a:r>
+              <a:rPr lang="ko-KR" sz="1200"/>
+              <a:t>[미정 I] 주문 확인 통지를 이 시스템이 보내는지, 다른 시스템의 통지로 대신하는지 정해지지 않았다.</a:t>
+            </a:r>
+          </a:p>
+          <a:p>
+            <a:pPr lvl="1"/>
+            <a:r>
+              <a:rPr lang="ko-KR" sz="1200"/>
+              <a:t>2. 실제 프롬프트 2</a:t>
+            </a:r>
+          </a:p>
+          <a:p>
+            <a:pPr lvl="0">
+              <a:buNone/>
+            </a:pPr>
+            <a:r>
+              <a:rPr lang="ko-KR" sz="1200"/>
+              <a:t>    [앞선 질문에 대한 답] H·B·F·E·G·I는 실습 1에서 의도적으로 미정으로 남겼으므로 지금 결정하지 않는다. 재고 판단 시점과 중복 처리도 이번 활용 방식 판단에서 새로 정하지 않는다. 개발할 일은 확정된 범위와 미정 분기를 구분하면 된다. 운영 결제·배송 호출과 실제 고객 데이터는 쓰지 않고 인터페이스와 테스트 대역만 쓴다. 실습은 빈 로컬 저장소라 데이터 이관은 없다. [추가 질문·수정 요청] 목록이 기능 흐름의 분기와 미정 질문 위주다. 업무 규칙의 결정·초안 작성·코드 구현·운영 실행을 구분해 첫 기능 개발에 필요한 일 목록으로 고쳐라. 필요한 일은 업무 조건 확인, 요구와 수용 기준, 모델·설계, 저장소 골격, 코드 구현과 검사, 릴리스 설명의 수준에서 간결하게 묶어라. 업무 담당자의 결정은 수작업이고 LLM은 질문·초안을 돕는다고 구분해라. 미정을 자동화해 워크플로로 전환한다고 쓰지 마라. 아직 없는 테스트를 이미 있다고 판정하지 말고 준비 조건으로 표시해라. 개발 절차와 주문 실행 흐름을 혼동하지 말고 도식은 생략해라.</a:t>
+            </a:r>
+          </a:p>
+          <a:p>
+            <a:pPr lvl="1"/>
+            <a:r>
+              <a:rPr lang="ko-KR" sz="1200"/>
+              <a:t>3. 실제 프롬프트 3</a:t>
+            </a:r>
+          </a:p>
+          <a:p>
+            <a:pPr lvl="0">
+              <a:buNone/>
+            </a:pPr>
+            <a:r>
+              <a:rPr lang="ko-KR" sz="1200"/>
+              <a:t>    [앞선 질문에 대한 답] 검사·설계·완료条件은 뒤 실습에서 만든다. 지금은 활용 방식 선택을 위한 준비 조건만 적는다. 업무 정책은 미정으로 유지하며 미정 분기의 반환값·새 상태·실패 처리도 여기서 설계하지 않는다. 구현은 로컬의 작은 변경이고 Git으로 되돌릴 수 있다. [추가 질문·수정 요청] 에이전트로 고른 일이 없다면 억지로 추가하지 마라. 다만 '범위가 작아서 에이전트가 불필요'라는 일반화는 고쳐라. 자동 검사와 되돌림이 준비되면 작은 코드 작업도 에이전트에 맡길 수 있다. 현재와 준비 후의 선택을 구분해라. 반대로 gradle check 같은 결정적인 검사 명령 자체는 LLM 워크플로가 아니라 일반 자동화다. 워크플로는 LLM과 도구를 미리 정한 코드 경로로 조율할 때만 쓰는 용어다. 일이 너무 세분됐다. 업무 조건 결정, 요구·모델·설계 초안, 저장소 골격, 확정 범위 코드 구현, 검사 작성·실행, 릴리스 설명 수준으로 묶고 업무 규칙·절차·자동 확인·되돌림 네 특성을 빠뜨리지 마라. 뒤 실습의 요구사항·모델·인터페이스를 지금 만들지는 마라.</a:t>
+            </a:r>
+          </a:p>
+          <a:p>
+            <a:pPr lvl="1"/>
+            <a:r>
+              <a:rPr lang="ko-KR" sz="1200"/>
+              <a:t>4. 실제 프롬프트 4</a:t>
+            </a:r>
+          </a:p>
+          <a:p>
+            <a:pPr lvl="0">
+              <a:buNone/>
+            </a:pPr>
+            <a:r>
+              <a:rPr lang="ko-KR" sz="1200"/>
+              <a:t>    [앞선 질문에 대한 답] 현재는 담당자가 결정하고 LLM 초안을 매번 확인하는 방식으로 충분하다. 지금 에이전트를 쓸 필요는 없다. 뒤 실습에서 검사가 생겨도 실제로 오류를 잡는지 사람이 확인한 뒤 전환 여부를 판단한다. 코드 변경은 Git으로 되돌리되 외부 부작용은 이 실습에 없다. [추가 질문·수정 요청] 표현을 고쳐라. '완료 조건이 결정적' 대신 '완료 조건이 명확하고 자동 검사로 판정 가능'이라고 해라. 에이전트는 절차를 사전에 고정할 수 없어 실행 결과로 다음 행동을 정해야 할 때 검토한다. 절차를 고정할 수 있으면 워크플로 또는 일반 자동화로 충분하다. 자율성이 높다고 좋은 것이 아니다. 현재 선택의 근거에 비용과 사람의 확인 시점을 짧게 더해라. 대화형 보조는 답마다, 워크플로는 정한 단계마다, 에이전트는 종료·중단 시점에 사람이 확인한다. 단가·횟수·시간은 아직 재지 않았으니 수치를 만들지 마라. 최종 문서는 여섯 일만 남기고 준비 후 선택은 조건부로 써라. 표 대신 일별 짧은 목록으로 정리할 수 있다. 요구·모델·코드 내용은 만들지 마라.</a:t>
+            </a:r>
+          </a:p>
+          <a:p>
+            <a:pPr lvl="1"/>
+            <a:r>
+              <a:rPr lang="ko-KR" sz="1200"/>
+              <a:t>5. 실제 프롬프트 5</a:t>
+            </a:r>
+          </a:p>
+          <a:p>
+            <a:pPr lvl="0">
+              <a:buNone/>
+            </a:pPr>
+            <a:r>
+              <a:rPr lang="ko-KR" sz="1200"/>
+              <a:t>    합의한 첫 주문 기능 개발의 일 목록과 작업 특성·활용 방식·근거를 간결한 Markdown 파일로 생성해라. 새 정책·구현을 추가하지 말고 미정과 자율성을 올릴 조건은 필요한 일에만 짧게 남겨라. 마지막 초안의 여섯 일과 현재 선택을 그대로 유지해라. 지금은 요구·모델·설계·코드·검사 내용을 만들지 않는다는 범위를 유지해라. 실습 1에서 미정으로 남긴 조건을 확정하지 마라. 문서는 짧은 전제 한 문단, 여섯 일의 번호 목록, 공통 전환 조건만 남겨라. 각 일은 '특성: 업무 규칙 / 절차 / 자동 확인 / 되돌림', '선택·근거와 사람 확인 시점'의 짧은 두 항목으로 묶어라. 같은 조건을 각 일마다 반복하지 말고 공통 조건에 한 번만 써라. 비용은 계측 전이라 수치를 쓰지 말고 현재는 실행 체계 구성과 검토 비용을 줄이는 선택임을 짧게 밝힌다. 도식이나 큰 표, 부가 체크리스트, 다음 실습의 실제 산출물을 추가하지 마라. 앞에서 합의한 내용만 파일화해라.</a:t>
             </a:r>
           </a:p>
         </p:txBody>
@@ -3160,7 +3466,7 @@
                 <a:latin typeface="맑은 고딕"/>
                 <a:ea typeface="맑은 고딕"/>
               </a:rPr>
-              <a:t>09. 실습 —</a:t>
+              <a:t>09. 실습 2 —</a:t>
             </a:r>
             <a:r>
               <a:rPr sz="1400" b="0">
@@ -7053,7 +7359,7 @@
                 <a:latin typeface="맑은 고딕"/>
                 <a:ea typeface="맑은 고딕"/>
               </a:rPr>
-              <a:t>을 치르는 경우가 많으므로 그 교환이 언제 맞는지 따져야 한다</a:t>
+              <a:t>을 치르는 경우가 많으므로 그 득실이 언제 맞는지 따져야 한다</a:t>
             </a:r>
             <a:r>
               <a:rPr sz="1000" b="0">
@@ -11099,7 +11405,7 @@
                 <a:latin typeface="맑은 고딕"/>
                 <a:ea typeface="맑은 고딕"/>
               </a:rPr>
-              <a:t>09. 실습 — 활용 방식 고르기</a:t>
+              <a:t>09. 실습 2 — 활용 방식 고르기</a:t>
             </a:r>
           </a:p>
         </p:txBody>
@@ -11235,8 +11541,8 @@
         </p:nvSpPr>
         <p:spPr>
           <a:xfrm>
-            <a:off x="365760" y="960120"/>
-            <a:ext cx="8412480" cy="5257800"/>
+            <a:off x="365760" y="1441450"/>
+            <a:ext cx="4069080" cy="4776470"/>
           </a:xfrm>
         </p:spPr>
         <p:txBody>
@@ -11244,57 +11550,6 @@
             <a:normAutofit/>
           </a:bodyPr>
           <a:lstStyle/>
-          <a:p>
-            <a:pPr marL="0" indent="0">
-              <a:spcBef>
-                <a:spcPts val="300"/>
-              </a:spcBef>
-              <a:spcAft>
-                <a:spcPts val="300"/>
-              </a:spcAft>
-              <a:buNone/>
-            </a:pPr>
-            <a:r>
-              <a:rPr sz="1400" b="1">
-                <a:solidFill>
-                  <a:srgbClr val="000000"/>
-                </a:solidFill>
-                <a:latin typeface="맑은 고딕"/>
-                <a:ea typeface="맑은 고딕"/>
-              </a:rPr>
-              <a:t>실습 1의 업무 조건</a:t>
-            </a:r>
-            <a:r>
-              <a:rPr sz="1400" b="0">
-                <a:solidFill>
-                  <a:srgbClr val="000000"/>
-                </a:solidFill>
-                <a:latin typeface="맑은 고딕"/>
-                <a:ea typeface="맑은 고딕"/>
-              </a:rPr>
-              <a:t>을 주고 방식과 근거를 검토한다. ①로 시작하고 ②~④에는 </a:t>
-            </a:r>
-            <a:r>
-              <a:rPr sz="1400" b="1">
-                <a:solidFill>
-                  <a:srgbClr val="000000"/>
-                </a:solidFill>
-                <a:latin typeface="맑은 고딕"/>
-                <a:ea typeface="맑은 고딕"/>
-              </a:rPr>
-              <a:t>받은 질문의 답과 수정 요청</a:t>
-            </a:r>
-            <a:r>
-              <a:rPr sz="1400" b="0">
-                <a:solidFill>
-                  <a:srgbClr val="000000"/>
-                </a:solidFill>
-                <a:latin typeface="맑은 고딕"/>
-                <a:ea typeface="맑은 고딕"/>
-              </a:rPr>
-              <a:t>을 함께 적는다.</a:t>
-            </a:r>
-          </a:p>
           <a:p>
             <a:pPr lvl="2" marL="723900" indent="-368300">
               <a:spcBef>
@@ -11315,29 +11570,18 @@
                 <a:latin typeface="맑은 고딕"/>
                 <a:ea typeface="맑은 고딕"/>
               </a:rPr>
-              <a:t>프롬프트 —</a:t>
-            </a:r>
-            <a:r>
-              <a:rPr sz="1200" b="1">
-                <a:solidFill>
-                  <a:srgbClr val="000000"/>
-                </a:solidFill>
-                <a:latin typeface="맑은 고딕"/>
-                <a:ea typeface="맑은 고딕"/>
-              </a:rPr>
-              <a:t> 요청사항 포함</a:t>
-            </a:r>
-          </a:p>
-          <a:p>
-            <a:pPr lvl="3" marL="981075" indent="-268288">
+              <a:t>투입물</a:t>
+            </a:r>
+          </a:p>
+          <a:p>
+            <a:pPr lvl="3" marL="723900" indent="0">
               <a:spcBef>
                 <a:spcPts val="300"/>
               </a:spcBef>
               <a:spcAft>
                 <a:spcPts val="300"/>
               </a:spcAft>
-              <a:buFont typeface="+mj-ea"/>
-              <a:buAutoNum type="circleNumDbPlain" startAt="1"/>
+              <a:buNone/>
             </a:pPr>
             <a:r>
               <a:rPr sz="1200" b="0">
@@ -11347,7 +11591,7 @@
                 <a:latin typeface="맑은 고딕"/>
                 <a:ea typeface="맑은 고딕"/>
               </a:rPr>
-              <a:t>"실습 1의 업무 조건을 읽고 첫 주문 기능 개발의 일 목록을 만들어라. </a:t>
+              <a:t>실습 1의 </a:t>
             </a:r>
             <a:r>
               <a:rPr sz="1200" b="1">
@@ -11357,7 +11601,7 @@
                 <a:latin typeface="맑은 고딕"/>
                 <a:ea typeface="맑은 고딕"/>
               </a:rPr>
-              <a:t>작업 특성 네 가지</a:t>
+              <a:t>업무 조건</a:t>
             </a:r>
             <a:r>
               <a:rPr sz="1200" b="0">
@@ -11367,20 +11611,8 @@
                 <a:latin typeface="맑은 고딕"/>
                 <a:ea typeface="맑은 고딕"/>
               </a:rPr>
-              <a:t>로 나누고 가장 단순한 충분한 활용 방식과 근거를 제안해라. 미정인 조건은 질문해라."</a:t>
-            </a:r>
-          </a:p>
-          <a:p>
-            <a:pPr lvl="3" marL="981075" indent="-268288">
-              <a:spcBef>
-                <a:spcPts val="300"/>
-              </a:spcBef>
-              <a:spcAft>
-                <a:spcPts val="300"/>
-              </a:spcAft>
-              <a:buFont typeface="+mj-ea"/>
-              <a:buAutoNum type="circleNumDbPlain" startAt="2"/>
-            </a:pPr>
+              <a:t>(</a:t>
+            </a:r>
             <a:r>
               <a:rPr sz="1200" b="0">
                 <a:solidFill>
@@ -11389,17 +11621,7 @@
                 <a:latin typeface="맑은 고딕"/>
                 <a:ea typeface="맑은 고딕"/>
               </a:rPr>
-              <a:t>"[앞선 질문에 대한 답]과 [추가 질문·수정 요청]을 적는다. </a:t>
-            </a:r>
-            <a:r>
-              <a:rPr sz="1200" b="1">
-                <a:solidFill>
-                  <a:srgbClr val="000000"/>
-                </a:solidFill>
-                <a:latin typeface="맑은 고딕"/>
-                <a:ea typeface="맑은 고딕"/>
-              </a:rPr>
-              <a:t>업무 규칙의 결정·초안 작성·운영 실행</a:t>
+              <a:t>주문한다-업무조건.md</a:t>
             </a:r>
             <a:r>
               <a:rPr sz="1200" b="0">
@@ -11409,133 +11631,7 @@
                 <a:latin typeface="맑은 고딕"/>
                 <a:ea typeface="맑은 고딕"/>
               </a:rPr>
-              <a:t>을 한 일로 묶지 마라."</a:t>
-            </a:r>
-          </a:p>
-          <a:p>
-            <a:pPr lvl="3" marL="981075" indent="-268288">
-              <a:spcBef>
-                <a:spcPts val="300"/>
-              </a:spcBef>
-              <a:spcAft>
-                <a:spcPts val="300"/>
-              </a:spcAft>
-              <a:buFont typeface="+mj-ea"/>
-              <a:buAutoNum type="circleNumDbPlain" startAt="3"/>
-            </a:pPr>
-            <a:r>
-              <a:rPr sz="1200" b="0">
-                <a:solidFill>
-                  <a:srgbClr val="000000"/>
-                </a:solidFill>
-                <a:latin typeface="맑은 고딕"/>
-                <a:ea typeface="맑은 고딕"/>
-              </a:rPr>
-              <a:t>"[앞선 질문에 대한 답]과 [추가 질문·수정 요청]을 적는다. 에이전트로 고른 일은 </a:t>
-            </a:r>
-            <a:r>
-              <a:rPr sz="1200" b="1">
-                <a:solidFill>
-                  <a:srgbClr val="000000"/>
-                </a:solidFill>
-                <a:latin typeface="맑은 고딕"/>
-                <a:ea typeface="맑은 고딕"/>
-              </a:rPr>
-              <a:t>자동 검사와 되돌림</a:t>
-            </a:r>
-            <a:r>
-              <a:rPr sz="1200" b="0">
-                <a:solidFill>
-                  <a:srgbClr val="000000"/>
-                </a:solidFill>
-                <a:latin typeface="맑은 고딕"/>
-                <a:ea typeface="맑은 고딕"/>
-              </a:rPr>
-              <a:t>이 가능한지, 워크플로면 충분하지 않은지 다시 따져라."</a:t>
-            </a:r>
-          </a:p>
-          <a:p>
-            <a:pPr lvl="3" marL="981075" indent="-268288">
-              <a:spcBef>
-                <a:spcPts val="300"/>
-              </a:spcBef>
-              <a:spcAft>
-                <a:spcPts val="300"/>
-              </a:spcAft>
-              <a:buFont typeface="+mj-ea"/>
-              <a:buAutoNum type="circleNumDbPlain" startAt="4"/>
-            </a:pPr>
-            <a:r>
-              <a:rPr sz="1200" b="0">
-                <a:solidFill>
-                  <a:srgbClr val="000000"/>
-                </a:solidFill>
-                <a:latin typeface="맑은 고딕"/>
-                <a:ea typeface="맑은 고딕"/>
-              </a:rPr>
-              <a:t>"[앞선 질문에 대한 답]과 [추가 질문·수정 요청]을 적는다. </a:t>
-            </a:r>
-            <a:r>
-              <a:rPr sz="1200" b="1">
-                <a:solidFill>
-                  <a:srgbClr val="000000"/>
-                </a:solidFill>
-                <a:latin typeface="맑은 고딕"/>
-                <a:ea typeface="맑은 고딕"/>
-              </a:rPr>
-              <a:t>비용과 사람의 확인 시점</a:t>
-            </a:r>
-            <a:r>
-              <a:rPr sz="1200" b="0">
-                <a:solidFill>
-                  <a:srgbClr val="000000"/>
-                </a:solidFill>
-                <a:latin typeface="맑은 고딕"/>
-                <a:ea typeface="맑은 고딕"/>
-              </a:rPr>
-              <a:t>을 비교하고 충분한 방식에서 멈춰라."</a:t>
-            </a:r>
-          </a:p>
-          <a:p>
-            <a:pPr lvl="3" marL="981075" indent="-268288">
-              <a:spcBef>
-                <a:spcPts val="300"/>
-              </a:spcBef>
-              <a:spcAft>
-                <a:spcPts val="300"/>
-              </a:spcAft>
-              <a:buFont typeface="+mj-ea"/>
-              <a:buAutoNum type="circleNumDbPlain" startAt="5"/>
-            </a:pPr>
-            <a:r>
-              <a:rPr sz="1200" b="0">
-                <a:solidFill>
-                  <a:srgbClr val="000000"/>
-                </a:solidFill>
-                <a:latin typeface="맑은 고딕"/>
-                <a:ea typeface="맑은 고딕"/>
-              </a:rPr>
-              <a:t>"합의한 일 목록과 작업 특성·활용 방식·근거를 간결한 </a:t>
-            </a:r>
-            <a:r>
-              <a:rPr sz="1200" b="1">
-                <a:solidFill>
-                  <a:srgbClr val="000000"/>
-                </a:solidFill>
-                <a:latin typeface="맑은 고딕"/>
-                <a:ea typeface="맑은 고딕"/>
-              </a:rPr>
-              <a:t>Markdown 파일</a:t>
-            </a:r>
-            <a:r>
-              <a:rPr sz="1200" b="0">
-                <a:solidFill>
-                  <a:srgbClr val="000000"/>
-                </a:solidFill>
-                <a:latin typeface="맑은 고딕"/>
-                <a:ea typeface="맑은 고딕"/>
-              </a:rPr>
-              <a:t>로 생성해라. 새 정책·구현을 추가하지 말고, 미정과 자율성을 올릴 조건은 필요한 일에만 짧게 남겨라."</a:t>
+              <a:t>)</a:t>
             </a:r>
           </a:p>
           <a:p>
@@ -11558,19 +11654,29 @@
                 <a:latin typeface="맑은 고딕"/>
                 <a:ea typeface="맑은 고딕"/>
               </a:rPr>
-              <a:t>점검 항목</a:t>
-            </a:r>
-          </a:p>
-          <a:p>
-            <a:pPr lvl="3" marL="1028700" indent="-304800">
+              <a:t>프롬프트 —</a:t>
+            </a:r>
+            <a:r>
+              <a:rPr sz="1200" b="1">
+                <a:solidFill>
+                  <a:srgbClr val="000000"/>
+                </a:solidFill>
+                <a:latin typeface="맑은 고딕"/>
+                <a:ea typeface="맑은 고딕"/>
+              </a:rPr>
+              <a:t> 요청사항 포함</a:t>
+            </a:r>
+          </a:p>
+          <a:p>
+            <a:pPr lvl="3" marL="981075" indent="-268288">
               <a:spcBef>
                 <a:spcPts val="300"/>
               </a:spcBef>
               <a:spcAft>
                 <a:spcPts val="300"/>
               </a:spcAft>
-              <a:buFont typeface="+mj-lt"/>
-              <a:buAutoNum type="arabicPeriod" startAt="1"/>
+              <a:buFont typeface="+mj-ea"/>
+              <a:buAutoNum type="circleNumDbPlain" startAt="1"/>
             </a:pPr>
             <a:r>
               <a:rPr sz="1200" b="0">
@@ -11580,7 +11686,7 @@
                 <a:latin typeface="맑은 고딕"/>
                 <a:ea typeface="맑은 고딕"/>
               </a:rPr>
-              <a:t/>
+              <a:t>"실습 1의 업무 조건을 읽고 첫 주문 기능 개발의 일 목록을 만들어라. </a:t>
             </a:r>
             <a:r>
               <a:rPr sz="1200" b="1">
@@ -11590,7 +11696,7 @@
                 <a:latin typeface="맑은 고딕"/>
                 <a:ea typeface="맑은 고딕"/>
               </a:rPr>
-              <a:t>범위</a:t>
+              <a:t>작업 특성 네 가지</a:t>
             </a:r>
             <a:r>
               <a:rPr sz="1200" b="0">
@@ -11600,29 +11706,19 @@
                 <a:latin typeface="맑은 고딕"/>
                 <a:ea typeface="맑은 고딕"/>
               </a:rPr>
-              <a:t> —</a:t>
-            </a:r>
-            <a:r>
-              <a:rPr sz="1000" b="0">
-                <a:solidFill>
-                  <a:srgbClr val="000000"/>
-                </a:solidFill>
-                <a:latin typeface="맑은 고딕"/>
-                <a:ea typeface="맑은 고딕"/>
-              </a:rPr>
-              <a:t> 첫 주문 기능에 필요한 일인가?</a:t>
-            </a:r>
-          </a:p>
-          <a:p>
-            <a:pPr lvl="3" marL="1028700" indent="-304800">
+              <a:t>로 나누고 가장 단순한 충분한 활용 방식과 근거를 제안해라. 미정인 조건은 질문해라."</a:t>
+            </a:r>
+          </a:p>
+          <a:p>
+            <a:pPr lvl="3" marL="981075" indent="-268288">
               <a:spcBef>
                 <a:spcPts val="300"/>
               </a:spcBef>
               <a:spcAft>
                 <a:spcPts val="300"/>
               </a:spcAft>
-              <a:buFont typeface="+mj-lt"/>
-              <a:buAutoNum type="arabicPeriod" startAt="2"/>
+              <a:buFont typeface="+mj-ea"/>
+              <a:buAutoNum type="circleNumDbPlain" startAt="2"/>
             </a:pPr>
             <a:r>
               <a:rPr sz="1200" b="0">
@@ -11632,7 +11728,7 @@
                 <a:latin typeface="맑은 고딕"/>
                 <a:ea typeface="맑은 고딕"/>
               </a:rPr>
-              <a:t/>
+              <a:t>"[앞선 질문에 대한 답]과 [추가 질문·수정 요청]을 적는다. </a:t>
             </a:r>
             <a:r>
               <a:rPr sz="1200" b="1">
@@ -11642,7 +11738,7 @@
                 <a:latin typeface="맑은 고딕"/>
                 <a:ea typeface="맑은 고딕"/>
               </a:rPr>
-              <a:t>분리</a:t>
+              <a:t>업무 규칙의 결정·초안 작성·운영 실행</a:t>
             </a:r>
             <a:r>
               <a:rPr sz="1200" b="0">
@@ -11652,29 +11748,19 @@
                 <a:latin typeface="맑은 고딕"/>
                 <a:ea typeface="맑은 고딕"/>
               </a:rPr>
-              <a:t> —</a:t>
-            </a:r>
-            <a:r>
-              <a:rPr sz="1000" b="0">
-                <a:solidFill>
-                  <a:srgbClr val="000000"/>
-                </a:solidFill>
-                <a:latin typeface="맑은 고딕"/>
-                <a:ea typeface="맑은 고딕"/>
-              </a:rPr>
-              <a:t> 규칙의 결정과 초안·운영 실행을 나눴는가?</a:t>
-            </a:r>
-          </a:p>
-          <a:p>
-            <a:pPr lvl="3" marL="1028700" indent="-304800">
+              <a:t>을 한 일로 묶지 마라."</a:t>
+            </a:r>
+          </a:p>
+          <a:p>
+            <a:pPr lvl="3" marL="981075" indent="-268288">
               <a:spcBef>
                 <a:spcPts val="300"/>
               </a:spcBef>
               <a:spcAft>
                 <a:spcPts val="300"/>
               </a:spcAft>
-              <a:buFont typeface="+mj-lt"/>
-              <a:buAutoNum type="arabicPeriod" startAt="3"/>
+              <a:buFont typeface="+mj-ea"/>
+              <a:buAutoNum type="circleNumDbPlain" startAt="3"/>
             </a:pPr>
             <a:r>
               <a:rPr sz="1200" b="0">
@@ -11684,7 +11770,7 @@
                 <a:latin typeface="맑은 고딕"/>
                 <a:ea typeface="맑은 고딕"/>
               </a:rPr>
-              <a:t/>
+              <a:t>"[앞선 질문에 대한 답]과 [추가 질문·수정 요청]을 적는다. 에이전트로 고른 일은 </a:t>
             </a:r>
             <a:r>
               <a:rPr sz="1200" b="1">
@@ -11694,7 +11780,7 @@
                 <a:latin typeface="맑은 고딕"/>
                 <a:ea typeface="맑은 고딕"/>
               </a:rPr>
-              <a:t>검사</a:t>
+              <a:t>자동 검사와 되돌림</a:t>
             </a:r>
             <a:r>
               <a:rPr sz="1200" b="0">
@@ -11704,29 +11790,19 @@
                 <a:latin typeface="맑은 고딕"/>
                 <a:ea typeface="맑은 고딕"/>
               </a:rPr>
-              <a:t> —</a:t>
-            </a:r>
-            <a:r>
-              <a:rPr sz="1000" b="0">
-                <a:solidFill>
-                  <a:srgbClr val="000000"/>
-                </a:solidFill>
-                <a:latin typeface="맑은 고딕"/>
-                <a:ea typeface="맑은 고딕"/>
-              </a:rPr>
-              <a:t> 자동 확인과 되돌림의 근거가 있는가?</a:t>
-            </a:r>
-          </a:p>
-          <a:p>
-            <a:pPr lvl="3" marL="1028700" indent="-304800">
+              <a:t>이 가능한지, 워크플로면 충분하지 않은지 다시 따져라."</a:t>
+            </a:r>
+          </a:p>
+          <a:p>
+            <a:pPr lvl="3" marL="981075" indent="-268288">
               <a:spcBef>
                 <a:spcPts val="300"/>
               </a:spcBef>
               <a:spcAft>
                 <a:spcPts val="300"/>
               </a:spcAft>
-              <a:buFont typeface="+mj-lt"/>
-              <a:buAutoNum type="arabicPeriod" startAt="4"/>
+              <a:buFont typeface="+mj-ea"/>
+              <a:buAutoNum type="circleNumDbPlain" startAt="4"/>
             </a:pPr>
             <a:r>
               <a:rPr sz="1200" b="0">
@@ -11736,7 +11812,7 @@
                 <a:latin typeface="맑은 고딕"/>
                 <a:ea typeface="맑은 고딕"/>
               </a:rPr>
-              <a:t/>
+              <a:t>"[앞선 질문에 대한 답]과 [추가 질문·수정 요청]을 적는다. </a:t>
             </a:r>
             <a:r>
               <a:rPr sz="1200" b="1">
@@ -11746,7 +11822,7 @@
                 <a:latin typeface="맑은 고딕"/>
                 <a:ea typeface="맑은 고딕"/>
               </a:rPr>
-              <a:t>선택</a:t>
+              <a:t>비용과 사람의 확인 시점</a:t>
             </a:r>
             <a:r>
               <a:rPr sz="1200" b="0">
@@ -11756,29 +11832,19 @@
                 <a:latin typeface="맑은 고딕"/>
                 <a:ea typeface="맑은 고딕"/>
               </a:rPr>
-              <a:t> —</a:t>
-            </a:r>
-            <a:r>
-              <a:rPr sz="1000" b="0">
-                <a:solidFill>
-                  <a:srgbClr val="000000"/>
-                </a:solidFill>
-                <a:latin typeface="맑은 고딕"/>
-                <a:ea typeface="맑은 고딕"/>
-              </a:rPr>
-              <a:t> 더 단순한 방식으로 충분하지 않은가?</a:t>
-            </a:r>
-          </a:p>
-          <a:p>
-            <a:pPr lvl="3" marL="1028700" indent="-304800">
+              <a:t>을 비교하고 충분한 방식에서 멈춰라."</a:t>
+            </a:r>
+          </a:p>
+          <a:p>
+            <a:pPr lvl="3" marL="981075" indent="-268288">
               <a:spcBef>
                 <a:spcPts val="300"/>
               </a:spcBef>
               <a:spcAft>
                 <a:spcPts val="300"/>
               </a:spcAft>
-              <a:buFont typeface="+mj-lt"/>
-              <a:buAutoNum type="arabicPeriod" startAt="5"/>
+              <a:buFont typeface="+mj-ea"/>
+              <a:buAutoNum type="circleNumDbPlain" startAt="5"/>
             </a:pPr>
             <a:r>
               <a:rPr sz="1200" b="0">
@@ -11788,7 +11854,7 @@
                 <a:latin typeface="맑은 고딕"/>
                 <a:ea typeface="맑은 고딕"/>
               </a:rPr>
-              <a:t/>
+              <a:t>"합의한 일 목록과 작업 특성·활용 방식·근거를 간결한 </a:t>
             </a:r>
             <a:r>
               <a:rPr sz="1200" b="1">
@@ -11798,7 +11864,7 @@
                 <a:latin typeface="맑은 고딕"/>
                 <a:ea typeface="맑은 고딕"/>
               </a:rPr>
-              <a:t>대가</a:t>
+              <a:t>Markdown 파일</a:t>
             </a:r>
             <a:r>
               <a:rPr sz="1200" b="0">
@@ -11808,19 +11874,108 @@
                 <a:latin typeface="맑은 고딕"/>
                 <a:ea typeface="맑은 고딕"/>
               </a:rPr>
-              <a:t> —</a:t>
-            </a:r>
-            <a:r>
-              <a:rPr sz="1000" b="0">
-                <a:solidFill>
-                  <a:srgbClr val="000000"/>
-                </a:solidFill>
-                <a:latin typeface="맑은 고딕"/>
-                <a:ea typeface="맑은 고딕"/>
-              </a:rPr>
-              <a:t> 비용과 사람의 확인 시점을 함께 따졌는가?</a:t>
-            </a:r>
-          </a:p>
+              <a:t>로 생성해라. 새 정책·구현을 추가하지 말고, 미정과 자율성을 올릴 조건은 필요한 일에만 짧게 남겨라."</a:t>
+            </a:r>
+          </a:p>
+        </p:txBody>
+      </p:sp>
+      <p:sp>
+        <p:nvSpPr>
+          <p:cNvPr id="9" name="내용 개체 틀 7">
+            <a:extLst>
+              <a:ext uri="{FF2B5EF4-FFF2-40B4-BE49-F238E27FC236}">
+                <a16:creationId xmlns:a16="http://schemas.microsoft.com/office/drawing/2014/main" id="{BEBA2C4A-B0BF-F2E4-EA6E-614C99CBA184}"/>
+              </a:ext>
+            </a:extLst>
+          </p:cNvPr>
+          <p:cNvSpPr>
+            <a:spLocks noGrp="1"/>
+          </p:cNvSpPr>
+          <p:nvPr>
+            <p:ph idx="1"/>
+          </p:nvPr>
+        </p:nvSpPr>
+        <p:spPr>
+          <a:xfrm>
+            <a:off x="365760" y="960120"/>
+            <a:ext cx="8412480" cy="481330"/>
+          </a:xfrm>
+        </p:spPr>
+        <p:txBody>
+          <a:bodyPr>
+            <a:normAutofit/>
+          </a:bodyPr>
+          <a:lstStyle/>
+          <a:p>
+            <a:pPr marL="0" indent="0">
+              <a:spcBef>
+                <a:spcPts val="300"/>
+              </a:spcBef>
+              <a:spcAft>
+                <a:spcPts val="300"/>
+              </a:spcAft>
+              <a:buNone/>
+            </a:pPr>
+            <a:r>
+              <a:rPr sz="1400" b="0">
+                <a:solidFill>
+                  <a:srgbClr val="000000"/>
+                </a:solidFill>
+                <a:latin typeface="맑은 고딕"/>
+                <a:ea typeface="맑은 고딕"/>
+              </a:rPr>
+              <a:t>①로 시작하고 ②~④에는 </a:t>
+            </a:r>
+            <a:r>
+              <a:rPr sz="1400" b="1">
+                <a:solidFill>
+                  <a:srgbClr val="000000"/>
+                </a:solidFill>
+                <a:latin typeface="맑은 고딕"/>
+                <a:ea typeface="맑은 고딕"/>
+              </a:rPr>
+              <a:t>받은 질문의 답과 수정 요청</a:t>
+            </a:r>
+            <a:r>
+              <a:rPr sz="1400" b="0">
+                <a:solidFill>
+                  <a:srgbClr val="000000"/>
+                </a:solidFill>
+                <a:latin typeface="맑은 고딕"/>
+                <a:ea typeface="맑은 고딕"/>
+              </a:rPr>
+              <a:t>을 함께 적어 방식과 근거를 검토한다.</a:t>
+            </a:r>
+          </a:p>
+        </p:txBody>
+      </p:sp>
+      <p:sp>
+        <p:nvSpPr>
+          <p:cNvPr id="10" name="내용 개체 틀 7">
+            <a:extLst>
+              <a:ext uri="{FF2B5EF4-FFF2-40B4-BE49-F238E27FC236}">
+                <a16:creationId xmlns:a16="http://schemas.microsoft.com/office/drawing/2014/main" id="{BEBA2C4A-B0BF-F2E4-EA6E-614C99CBA184}"/>
+              </a:ext>
+            </a:extLst>
+          </p:cNvPr>
+          <p:cNvSpPr>
+            <a:spLocks noGrp="1"/>
+          </p:cNvSpPr>
+          <p:nvPr>
+            <p:ph idx="1"/>
+          </p:nvPr>
+        </p:nvSpPr>
+        <p:spPr>
+          <a:xfrm>
+            <a:off x="4709160" y="1441450"/>
+            <a:ext cx="4069080" cy="4776470"/>
+          </a:xfrm>
+        </p:spPr>
+        <p:txBody>
+          <a:bodyPr>
+            <a:normAutofit/>
+          </a:bodyPr>
+          <a:lstStyle/>
           <a:p>
             <a:pPr lvl="2" marL="723900" indent="-368300">
               <a:spcBef>
@@ -11841,6 +11996,289 @@
                 <a:latin typeface="맑은 고딕"/>
                 <a:ea typeface="맑은 고딕"/>
               </a:rPr>
+              <a:t>점검 항목</a:t>
+            </a:r>
+          </a:p>
+          <a:p>
+            <a:pPr lvl="3" marL="1028700" indent="-304800">
+              <a:spcBef>
+                <a:spcPts val="300"/>
+              </a:spcBef>
+              <a:spcAft>
+                <a:spcPts val="300"/>
+              </a:spcAft>
+              <a:buFont typeface="+mj-lt"/>
+              <a:buAutoNum type="arabicPeriod" startAt="1"/>
+            </a:pPr>
+            <a:r>
+              <a:rPr sz="1200" b="0">
+                <a:solidFill>
+                  <a:srgbClr val="000000"/>
+                </a:solidFill>
+                <a:latin typeface="맑은 고딕"/>
+                <a:ea typeface="맑은 고딕"/>
+              </a:rPr>
+              <a:t/>
+            </a:r>
+            <a:r>
+              <a:rPr sz="1200" b="1">
+                <a:solidFill>
+                  <a:srgbClr val="000000"/>
+                </a:solidFill>
+                <a:latin typeface="맑은 고딕"/>
+                <a:ea typeface="맑은 고딕"/>
+              </a:rPr>
+              <a:t>범위</a:t>
+            </a:r>
+            <a:r>
+              <a:rPr sz="1200" b="0">
+                <a:solidFill>
+                  <a:srgbClr val="000000"/>
+                </a:solidFill>
+                <a:latin typeface="맑은 고딕"/>
+                <a:ea typeface="맑은 고딕"/>
+              </a:rPr>
+              <a:t> —</a:t>
+            </a:r>
+            <a:r>
+              <a:rPr sz="1000" b="0">
+                <a:solidFill>
+                  <a:srgbClr val="000000"/>
+                </a:solidFill>
+                <a:latin typeface="맑은 고딕"/>
+                <a:ea typeface="맑은 고딕"/>
+              </a:rPr>
+              <a:t> 첫 주문 기능에 필요한 일인가?</a:t>
+            </a:r>
+          </a:p>
+          <a:p>
+            <a:pPr lvl="3" marL="1028700" indent="-304800">
+              <a:spcBef>
+                <a:spcPts val="300"/>
+              </a:spcBef>
+              <a:spcAft>
+                <a:spcPts val="300"/>
+              </a:spcAft>
+              <a:buFont typeface="+mj-lt"/>
+              <a:buAutoNum type="arabicPeriod" startAt="2"/>
+            </a:pPr>
+            <a:r>
+              <a:rPr sz="1200" b="0">
+                <a:solidFill>
+                  <a:srgbClr val="000000"/>
+                </a:solidFill>
+                <a:latin typeface="맑은 고딕"/>
+                <a:ea typeface="맑은 고딕"/>
+              </a:rPr>
+              <a:t/>
+            </a:r>
+            <a:r>
+              <a:rPr sz="1200" b="1">
+                <a:solidFill>
+                  <a:srgbClr val="000000"/>
+                </a:solidFill>
+                <a:latin typeface="맑은 고딕"/>
+                <a:ea typeface="맑은 고딕"/>
+              </a:rPr>
+              <a:t>분리</a:t>
+            </a:r>
+            <a:r>
+              <a:rPr sz="1200" b="0">
+                <a:solidFill>
+                  <a:srgbClr val="000000"/>
+                </a:solidFill>
+                <a:latin typeface="맑은 고딕"/>
+                <a:ea typeface="맑은 고딕"/>
+              </a:rPr>
+              <a:t> —</a:t>
+            </a:r>
+            <a:r>
+              <a:rPr sz="1000" b="0">
+                <a:solidFill>
+                  <a:srgbClr val="000000"/>
+                </a:solidFill>
+                <a:latin typeface="맑은 고딕"/>
+                <a:ea typeface="맑은 고딕"/>
+              </a:rPr>
+              <a:t> 규칙의 결정과 초안·운영 실행을 나눴는가?</a:t>
+            </a:r>
+          </a:p>
+          <a:p>
+            <a:pPr lvl="3" marL="1028700" indent="-304800">
+              <a:spcBef>
+                <a:spcPts val="300"/>
+              </a:spcBef>
+              <a:spcAft>
+                <a:spcPts val="300"/>
+              </a:spcAft>
+              <a:buFont typeface="+mj-lt"/>
+              <a:buAutoNum type="arabicPeriod" startAt="3"/>
+            </a:pPr>
+            <a:r>
+              <a:rPr sz="1200" b="0">
+                <a:solidFill>
+                  <a:srgbClr val="000000"/>
+                </a:solidFill>
+                <a:latin typeface="맑은 고딕"/>
+                <a:ea typeface="맑은 고딕"/>
+              </a:rPr>
+              <a:t/>
+            </a:r>
+            <a:r>
+              <a:rPr sz="1200" b="1">
+                <a:solidFill>
+                  <a:srgbClr val="000000"/>
+                </a:solidFill>
+                <a:latin typeface="맑은 고딕"/>
+                <a:ea typeface="맑은 고딕"/>
+              </a:rPr>
+              <a:t>검사</a:t>
+            </a:r>
+            <a:r>
+              <a:rPr sz="1200" b="0">
+                <a:solidFill>
+                  <a:srgbClr val="000000"/>
+                </a:solidFill>
+                <a:latin typeface="맑은 고딕"/>
+                <a:ea typeface="맑은 고딕"/>
+              </a:rPr>
+              <a:t> —</a:t>
+            </a:r>
+            <a:r>
+              <a:rPr sz="1000" b="0">
+                <a:solidFill>
+                  <a:srgbClr val="000000"/>
+                </a:solidFill>
+                <a:latin typeface="맑은 고딕"/>
+                <a:ea typeface="맑은 고딕"/>
+              </a:rPr>
+              <a:t> 자동 확인과 되돌림의 근거가 있는가?</a:t>
+            </a:r>
+          </a:p>
+          <a:p>
+            <a:pPr lvl="3" marL="1028700" indent="-304800">
+              <a:spcBef>
+                <a:spcPts val="300"/>
+              </a:spcBef>
+              <a:spcAft>
+                <a:spcPts val="300"/>
+              </a:spcAft>
+              <a:buFont typeface="+mj-lt"/>
+              <a:buAutoNum type="arabicPeriod" startAt="4"/>
+            </a:pPr>
+            <a:r>
+              <a:rPr sz="1200" b="0">
+                <a:solidFill>
+                  <a:srgbClr val="000000"/>
+                </a:solidFill>
+                <a:latin typeface="맑은 고딕"/>
+                <a:ea typeface="맑은 고딕"/>
+              </a:rPr>
+              <a:t/>
+            </a:r>
+            <a:r>
+              <a:rPr sz="1200" b="1">
+                <a:solidFill>
+                  <a:srgbClr val="000000"/>
+                </a:solidFill>
+                <a:latin typeface="맑은 고딕"/>
+                <a:ea typeface="맑은 고딕"/>
+              </a:rPr>
+              <a:t>선택</a:t>
+            </a:r>
+            <a:r>
+              <a:rPr sz="1200" b="0">
+                <a:solidFill>
+                  <a:srgbClr val="000000"/>
+                </a:solidFill>
+                <a:latin typeface="맑은 고딕"/>
+                <a:ea typeface="맑은 고딕"/>
+              </a:rPr>
+              <a:t> —</a:t>
+            </a:r>
+            <a:r>
+              <a:rPr sz="1000" b="0">
+                <a:solidFill>
+                  <a:srgbClr val="000000"/>
+                </a:solidFill>
+                <a:latin typeface="맑은 고딕"/>
+                <a:ea typeface="맑은 고딕"/>
+              </a:rPr>
+              <a:t> 더 단순한 방식으로 충분하지 않은가?</a:t>
+            </a:r>
+          </a:p>
+          <a:p>
+            <a:pPr lvl="3" marL="1028700" indent="-304800">
+              <a:spcBef>
+                <a:spcPts val="300"/>
+              </a:spcBef>
+              <a:spcAft>
+                <a:spcPts val="300"/>
+              </a:spcAft>
+              <a:buFont typeface="+mj-lt"/>
+              <a:buAutoNum type="arabicPeriod" startAt="5"/>
+            </a:pPr>
+            <a:r>
+              <a:rPr sz="1200" b="0">
+                <a:solidFill>
+                  <a:srgbClr val="000000"/>
+                </a:solidFill>
+                <a:latin typeface="맑은 고딕"/>
+                <a:ea typeface="맑은 고딕"/>
+              </a:rPr>
+              <a:t/>
+            </a:r>
+            <a:r>
+              <a:rPr sz="1200" b="1">
+                <a:solidFill>
+                  <a:srgbClr val="000000"/>
+                </a:solidFill>
+                <a:latin typeface="맑은 고딕"/>
+                <a:ea typeface="맑은 고딕"/>
+              </a:rPr>
+              <a:t>대가</a:t>
+            </a:r>
+            <a:r>
+              <a:rPr sz="1200" b="0">
+                <a:solidFill>
+                  <a:srgbClr val="000000"/>
+                </a:solidFill>
+                <a:latin typeface="맑은 고딕"/>
+                <a:ea typeface="맑은 고딕"/>
+              </a:rPr>
+              <a:t> —</a:t>
+            </a:r>
+            <a:r>
+              <a:rPr sz="1000" b="0">
+                <a:solidFill>
+                  <a:srgbClr val="000000"/>
+                </a:solidFill>
+                <a:latin typeface="맑은 고딕"/>
+                <a:ea typeface="맑은 고딕"/>
+              </a:rPr>
+              <a:t> 비용과 사람의 확인 시점을 함께 따졌는가?</a:t>
+            </a:r>
+          </a:p>
+          <a:p>
+            <a:pPr lvl="2" marL="723900" indent="-368300">
+              <a:spcBef>
+                <a:spcPts val="300"/>
+              </a:spcBef>
+              <a:spcAft>
+                <a:spcPts val="300"/>
+              </a:spcAft>
+              <a:buSzPct val="90000"/>
+              <a:buFont typeface="Wingdings" pitchFamily="2" charset="2"/>
+              <a:buChar char=""/>
+            </a:pPr>
+            <a:r>
+              <a:rPr sz="1400" b="1">
+                <a:solidFill>
+                  <a:srgbClr val="000000"/>
+                </a:solidFill>
+                <a:latin typeface="맑은 고딕"/>
+                <a:ea typeface="맑은 고딕"/>
+              </a:rPr>
               <a:t>결과물</a:t>
             </a:r>
           </a:p>
@@ -11855,16 +12293,6 @@
               <a:buNone/>
             </a:pPr>
             <a:r>
-              <a:rPr sz="1200" b="1">
-                <a:solidFill>
-                  <a:srgbClr val="000000"/>
-                </a:solidFill>
-                <a:latin typeface="맑은 고딕"/>
-                <a:ea typeface="맑은 고딕"/>
-              </a:rPr>
-              <a:t>활용 방식 판단의 최종 MD 파일</a:t>
-            </a:r>
-            <a:r>
               <a:rPr sz="1200" b="0">
                 <a:solidFill>
                   <a:srgbClr val="000000"/>
@@ -11872,7 +12300,7 @@
                 <a:latin typeface="맑은 고딕"/>
                 <a:ea typeface="맑은 고딕"/>
               </a:rPr>
-              <a:t>을 저장소의 </a:t>
+              <a:t>활용-방식-판단.md</a:t>
             </a:r>
             <a:r>
               <a:rPr sz="1200" b="0">
@@ -11882,17 +12310,57 @@
                 <a:latin typeface="맑은 고딕"/>
                 <a:ea typeface="맑은 고딕"/>
               </a:rPr>
+              <a:t> —</a:t>
+            </a:r>
+            <a:r>
+              <a:rPr sz="1000" b="0">
+                <a:solidFill>
+                  <a:srgbClr val="000000"/>
+                </a:solidFill>
+                <a:latin typeface="맑은 고딕"/>
+                <a:ea typeface="맑은 고딕"/>
+              </a:rPr>
+              <a:t> 저장소의 </a:t>
+            </a:r>
+            <a:r>
+              <a:rPr sz="1000" b="0">
+                <a:solidFill>
+                  <a:srgbClr val="000000"/>
+                </a:solidFill>
+                <a:latin typeface="맑은 고딕"/>
+                <a:ea typeface="맑은 고딕"/>
+              </a:rPr>
               <a:t>docs</a:t>
             </a:r>
             <a:r>
-              <a:rPr sz="1200" b="0">
-                <a:solidFill>
-                  <a:srgbClr val="000000"/>
-                </a:solidFill>
-                <a:latin typeface="맑은 고딕"/>
-                <a:ea typeface="맑은 고딕"/>
-              </a:rPr>
-              <a:t>에 두고 커밋한다. 실습 3에서는 실습 1의 업무 조건과 함께 읽는다.</a:t>
+              <a:rPr sz="1000" b="0">
+                <a:solidFill>
+                  <a:srgbClr val="000000"/>
+                </a:solidFill>
+                <a:latin typeface="맑은 고딕"/>
+                <a:ea typeface="맑은 고딕"/>
+              </a:rPr>
+              <a:t>에 두고 커밋한다. </a:t>
+            </a:r>
+            <a:r>
+              <a:rPr sz="1000" b="1">
+                <a:solidFill>
+                  <a:srgbClr val="000000"/>
+                </a:solidFill>
+                <a:latin typeface="맑은 고딕"/>
+                <a:ea typeface="맑은 고딕"/>
+              </a:rPr>
+              <a:t>실습 3의 투입물</a:t>
+            </a:r>
+            <a:r>
+              <a:rPr sz="1000" b="0">
+                <a:solidFill>
+                  <a:srgbClr val="000000"/>
+                </a:solidFill>
+                <a:latin typeface="맑은 고딕"/>
+                <a:ea typeface="맑은 고딕"/>
+              </a:rPr>
+              <a:t>이며 실습 1의 업무 조건과 함께 읽는다</a:t>
             </a:r>
           </a:p>
         </p:txBody>
@@ -18216,7 +18684,7 @@
                 <a:latin typeface="맑은 고딕"/>
                 <a:ea typeface="맑은 고딕"/>
               </a:rPr>
-              <a:t>은 그 작업을 맡겨도 되는지, 맡긴다면 어떤 방식으로 맡길지를 가르는 성질이다.</a:t>
+              <a:t>은 그 작업을 맡겨도 되는지, 맡긴다면 어떤 방식으로 맡길지를 구분하는 성질이다.</a:t>
             </a:r>
           </a:p>
           <a:p>
@@ -20289,7 +20757,7 @@
                 <a:latin typeface="맑은 고딕"/>
                 <a:ea typeface="맑은 고딕"/>
               </a:rPr>
-              <a:t>도 미리 코드로 정하면 워크플로다. 반복 여부만으로 두 형태를 가르지 않는다.</a:t>
+              <a:t>도 미리 코드로 정하면 워크플로다. 반복 여부만으로 두 형태를 구분하지 않는다.</a:t>
             </a:r>
           </a:p>
         </p:txBody>

--- a/courses/ai-native/sessions/s02.pptx
+++ b/courses/ai-native/sessions/s02.pptx
@@ -624,7 +624,7 @@
             <a:pPr lvl="0"/>
             <a:r>
               <a:rPr lang="ko-KR" sz="1200"/>
-              <a:t>여섯 일은 방식 선택을 설명하는 교육용 작업 목록이다. "세션 07. 설계 — 책임과 협력"에서 나누는 주문한다의 구현 작업 단위 네 가지와 범위가 다르다.</a:t>
+              <a:t>여섯 일은 방식 선택을 설명하는 교육용 작업 목록이다. "세션 07. 설계 — 책임과 협력"에서 나누는 주문한다의 구현 작업 단위 4가지와 범위가 다르다.</a:t>
             </a:r>
           </a:p>
           <a:p>
@@ -1877,7 +1877,7 @@
             <a:pPr lvl="0"/>
             <a:r>
               <a:rPr lang="ko-KR" sz="1200"/>
-              <a:t>네 특성은 course-design.md가 정한 활용 방식 판단 기준이다. Anthropic이 이 네 가지로 분류했다는 뜻이 아니다.</a:t>
+              <a:t>네 특성은 course-design.md가 정한 활용 방식 판단 기준이다. Anthropic이 이 4가지로 분류했다는 뜻이 아니다.</a:t>
             </a:r>
           </a:p>
           <a:p>
@@ -4451,7 +4451,7 @@
                 <a:latin typeface="맑은 고딕"/>
                 <a:ea typeface="맑은 고딕"/>
               </a:rPr>
-              <a:t>주문 첫 릴리스의 여섯 가지 일</a:t>
+              <a:t>주문 첫 릴리스의 6가지 일</a:t>
             </a:r>
           </a:p>
           <a:p>
@@ -4602,7 +4602,7 @@
                       </a:r>
                     </a:p>
                   </a:txBody>
-                  <a:tcPr marL="6750" marR="6750" marT="6750" marB="0" anchor="ctr">
+                  <a:tcPr marL="6750" marR="6750" marT="6750" marB="6750" anchor="ctr">
                     <a:lnL>
                       <a:noFill/>
                     </a:lnL>
@@ -4664,7 +4664,7 @@
                       </a:r>
                     </a:p>
                   </a:txBody>
-                  <a:tcPr marL="6750" marR="6750" marT="6750" marB="0" anchor="ctr">
+                  <a:tcPr marL="6750" marR="6750" marT="6750" marB="6750" anchor="ctr">
                     <a:lnL w="9525" cap="flat" cmpd="sng" algn="ctr">
                       <a:solidFill>
                         <a:schemeClr val="bg1">
@@ -4734,7 +4734,7 @@
                       </a:r>
                     </a:p>
                   </a:txBody>
-                  <a:tcPr marL="6750" marR="6750" marT="6750" marB="0" anchor="ctr">
+                  <a:tcPr marL="6750" marR="6750" marT="6750" marB="6750" anchor="ctr">
                     <a:lnL w="9525" cap="flat" cmpd="sng" algn="ctr">
                       <a:solidFill>
                         <a:schemeClr val="bg1">
@@ -4806,7 +4806,7 @@
                       </a:r>
                     </a:p>
                   </a:txBody>
-                  <a:tcPr marL="81005" marR="6750" marT="6750" marB="0" anchor="ctr">
+                  <a:tcPr marL="81005" marR="6750" marT="6750" marB="6750" anchor="ctr">
                     <a:lnL>
                       <a:noFill/>
                     </a:lnL>
@@ -4860,7 +4860,7 @@
                       </a:r>
                     </a:p>
                   </a:txBody>
-                  <a:tcPr marL="81005" marR="6750" marT="6750" marB="0" anchor="ctr">
+                  <a:tcPr marL="81005" marR="6750" marT="6750" marB="6750" anchor="ctr">
                     <a:lnL>
                       <a:noFill/>
                     </a:lnL>
@@ -4916,7 +4916,7 @@
                       </a:r>
                     </a:p>
                   </a:txBody>
-                  <a:tcPr marL="81005" marR="6750" marT="6750" marB="0" anchor="ctr">
+                  <a:tcPr marL="81005" marR="6750" marT="6750" marB="6750" anchor="ctr">
                     <a:lnL>
                       <a:noFill/>
                     </a:lnL>
@@ -4974,7 +4974,7 @@
                       </a:r>
                     </a:p>
                   </a:txBody>
-                  <a:tcPr marL="81005" marR="6750" marT="6750" marB="0" anchor="ctr">
+                  <a:tcPr marL="81005" marR="6750" marT="6750" marB="6750" anchor="ctr">
                     <a:lnL>
                       <a:noFill/>
                     </a:lnL>
@@ -5028,7 +5028,7 @@
                       </a:r>
                     </a:p>
                   </a:txBody>
-                  <a:tcPr marL="81005" marR="6750" marT="6750" marB="0" anchor="ctr">
+                  <a:tcPr marL="81005" marR="6750" marT="6750" marB="6750" anchor="ctr">
                     <a:lnL>
                       <a:noFill/>
                     </a:lnL>
@@ -5084,7 +5084,7 @@
                       </a:r>
                     </a:p>
                   </a:txBody>
-                  <a:tcPr marL="81005" marR="6750" marT="6750" marB="0" anchor="ctr">
+                  <a:tcPr marL="81005" marR="6750" marT="6750" marB="6750" anchor="ctr">
                     <a:lnL>
                       <a:noFill/>
                     </a:lnL>
@@ -5142,7 +5142,7 @@
                       </a:r>
                     </a:p>
                   </a:txBody>
-                  <a:tcPr marL="81005" marR="6750" marT="6750" marB="0" anchor="ctr">
+                  <a:tcPr marL="81005" marR="6750" marT="6750" marB="6750" anchor="ctr">
                     <a:lnL>
                       <a:noFill/>
                     </a:lnL>
@@ -5196,7 +5196,7 @@
                       </a:r>
                     </a:p>
                   </a:txBody>
-                  <a:tcPr marL="81005" marR="6750" marT="6750" marB="0" anchor="ctr">
+                  <a:tcPr marL="81005" marR="6750" marT="6750" marB="6750" anchor="ctr">
                     <a:lnL>
                       <a:noFill/>
                     </a:lnL>
@@ -5252,7 +5252,7 @@
                       </a:r>
                     </a:p>
                   </a:txBody>
-                  <a:tcPr marL="81005" marR="6750" marT="6750" marB="0" anchor="ctr">
+                  <a:tcPr marL="81005" marR="6750" marT="6750" marB="6750" anchor="ctr">
                     <a:lnL>
                       <a:noFill/>
                     </a:lnL>
@@ -5310,7 +5310,7 @@
                       </a:r>
                     </a:p>
                   </a:txBody>
-                  <a:tcPr marL="81005" marR="6750" marT="6750" marB="0" anchor="ctr">
+                  <a:tcPr marL="81005" marR="6750" marT="6750" marB="6750" anchor="ctr">
                     <a:lnL>
                       <a:noFill/>
                     </a:lnL>
@@ -5364,7 +5364,7 @@
                       </a:r>
                     </a:p>
                   </a:txBody>
-                  <a:tcPr marL="81005" marR="6750" marT="6750" marB="0" anchor="ctr">
+                  <a:tcPr marL="81005" marR="6750" marT="6750" marB="6750" anchor="ctr">
                     <a:lnL>
                       <a:noFill/>
                     </a:lnL>
@@ -5420,7 +5420,7 @@
                       </a:r>
                     </a:p>
                   </a:txBody>
-                  <a:tcPr marL="81005" marR="6750" marT="6750" marB="0" anchor="ctr">
+                  <a:tcPr marL="81005" marR="6750" marT="6750" marB="6750" anchor="ctr">
                     <a:lnL>
                       <a:noFill/>
                     </a:lnL>
@@ -5478,7 +5478,7 @@
                       </a:r>
                     </a:p>
                   </a:txBody>
-                  <a:tcPr marL="81005" marR="6750" marT="6750" marB="0" anchor="ctr">
+                  <a:tcPr marL="81005" marR="6750" marT="6750" marB="6750" anchor="ctr">
                     <a:lnL>
                       <a:noFill/>
                     </a:lnL>
@@ -5532,7 +5532,7 @@
                       </a:r>
                     </a:p>
                   </a:txBody>
-                  <a:tcPr marL="81005" marR="6750" marT="6750" marB="0" anchor="ctr">
+                  <a:tcPr marL="81005" marR="6750" marT="6750" marB="6750" anchor="ctr">
                     <a:lnL>
                       <a:noFill/>
                     </a:lnL>
@@ -5588,7 +5588,7 @@
                       </a:r>
                     </a:p>
                   </a:txBody>
-                  <a:tcPr marL="81005" marR="6750" marT="6750" marB="0" anchor="ctr">
+                  <a:tcPr marL="81005" marR="6750" marT="6750" marB="6750" anchor="ctr">
                     <a:lnL>
                       <a:noFill/>
                     </a:lnL>
@@ -5646,7 +5646,7 @@
                       </a:r>
                     </a:p>
                   </a:txBody>
-                  <a:tcPr marL="81005" marR="6750" marT="6750" marB="0" anchor="ctr">
+                  <a:tcPr marL="81005" marR="6750" marT="6750" marB="6750" anchor="ctr">
                     <a:lnL>
                       <a:noFill/>
                     </a:lnL>
@@ -5700,7 +5700,7 @@
                       </a:r>
                     </a:p>
                   </a:txBody>
-                  <a:tcPr marL="81005" marR="6750" marT="6750" marB="0" anchor="ctr">
+                  <a:tcPr marL="81005" marR="6750" marT="6750" marB="6750" anchor="ctr">
                     <a:lnL>
                       <a:noFill/>
                     </a:lnL>
@@ -5756,7 +5756,7 @@
                       </a:r>
                     </a:p>
                   </a:txBody>
-                  <a:tcPr marL="81005" marR="6750" marT="6750" marB="0" anchor="ctr">
+                  <a:tcPr marL="81005" marR="6750" marT="6750" marB="6750" anchor="ctr">
                     <a:lnL>
                       <a:noFill/>
                     </a:lnL>
@@ -5840,7 +5840,7 @@
                 <a:latin typeface="맑은 고딕"/>
                 <a:ea typeface="맑은 고딕"/>
               </a:rPr>
-              <a:t>첫 릴리스의 일 여섯 가지를 따져 보면 </a:t>
+              <a:t>첫 릴리스의 일 6가지를 따져 보면 </a:t>
             </a:r>
             <a:r>
               <a:rPr sz="1800" b="1">
@@ -6291,7 +6291,7 @@
                       </a:r>
                     </a:p>
                   </a:txBody>
-                  <a:tcPr marL="6750" marR="6750" marT="6750" marB="0" anchor="ctr">
+                  <a:tcPr marL="6750" marR="6750" marT="6750" marB="6750" anchor="ctr">
                     <a:lnL>
                       <a:noFill/>
                     </a:lnL>
@@ -6353,7 +6353,7 @@
                       </a:r>
                     </a:p>
                   </a:txBody>
-                  <a:tcPr marL="6750" marR="6750" marT="6750" marB="0" anchor="ctr">
+                  <a:tcPr marL="6750" marR="6750" marT="6750" marB="6750" anchor="ctr">
                     <a:lnL w="9525" cap="flat" cmpd="sng" algn="ctr">
                       <a:solidFill>
                         <a:schemeClr val="bg1">
@@ -6423,7 +6423,7 @@
                       </a:r>
                     </a:p>
                   </a:txBody>
-                  <a:tcPr marL="6750" marR="6750" marT="6750" marB="0" anchor="ctr">
+                  <a:tcPr marL="6750" marR="6750" marT="6750" marB="6750" anchor="ctr">
                     <a:lnL w="9525" cap="flat" cmpd="sng" algn="ctr">
                       <a:solidFill>
                         <a:schemeClr val="bg1">
@@ -6493,7 +6493,7 @@
                       </a:r>
                     </a:p>
                   </a:txBody>
-                  <a:tcPr marL="6750" marR="6750" marT="6750" marB="0" anchor="ctr">
+                  <a:tcPr marL="6750" marR="6750" marT="6750" marB="6750" anchor="ctr">
                     <a:lnL w="9525" cap="flat" cmpd="sng" algn="ctr">
                       <a:solidFill>
                         <a:schemeClr val="bg1">
@@ -6565,7 +6565,7 @@
                       </a:r>
                     </a:p>
                   </a:txBody>
-                  <a:tcPr marL="81005" marR="6750" marT="6750" marB="0" anchor="ctr">
+                  <a:tcPr marL="81005" marR="6750" marT="6750" marB="6750" anchor="ctr">
                     <a:lnL>
                       <a:noFill/>
                     </a:lnL>
@@ -6619,7 +6619,7 @@
                       </a:r>
                     </a:p>
                   </a:txBody>
-                  <a:tcPr marL="81005" marR="6750" marT="6750" marB="0" anchor="ctr">
+                  <a:tcPr marL="81005" marR="6750" marT="6750" marB="6750" anchor="ctr">
                     <a:lnL>
                       <a:noFill/>
                     </a:lnL>
@@ -6675,7 +6675,7 @@
                       </a:r>
                     </a:p>
                   </a:txBody>
-                  <a:tcPr marL="81005" marR="6750" marT="6750" marB="0" anchor="ctr">
+                  <a:tcPr marL="81005" marR="6750" marT="6750" marB="6750" anchor="ctr">
                     <a:lnL>
                       <a:noFill/>
                     </a:lnL>
@@ -6731,7 +6731,7 @@
                       </a:r>
                     </a:p>
                   </a:txBody>
-                  <a:tcPr marL="81005" marR="6750" marT="6750" marB="0" anchor="ctr">
+                  <a:tcPr marL="81005" marR="6750" marT="6750" marB="6750" anchor="ctr">
                     <a:lnL>
                       <a:noFill/>
                     </a:lnL>
@@ -6789,7 +6789,7 @@
                       </a:r>
                     </a:p>
                   </a:txBody>
-                  <a:tcPr marL="81005" marR="6750" marT="6750" marB="0" anchor="ctr">
+                  <a:tcPr marL="81005" marR="6750" marT="6750" marB="6750" anchor="ctr">
                     <a:lnL>
                       <a:noFill/>
                     </a:lnL>
@@ -6843,7 +6843,7 @@
                       </a:r>
                     </a:p>
                   </a:txBody>
-                  <a:tcPr marL="81005" marR="6750" marT="6750" marB="0" anchor="ctr">
+                  <a:tcPr marL="81005" marR="6750" marT="6750" marB="6750" anchor="ctr">
                     <a:lnL>
                       <a:noFill/>
                     </a:lnL>
@@ -6899,7 +6899,7 @@
                       </a:r>
                     </a:p>
                   </a:txBody>
-                  <a:tcPr marL="81005" marR="6750" marT="6750" marB="0" anchor="ctr">
+                  <a:tcPr marL="81005" marR="6750" marT="6750" marB="6750" anchor="ctr">
                     <a:lnL>
                       <a:noFill/>
                     </a:lnL>
@@ -6955,7 +6955,7 @@
                       </a:r>
                     </a:p>
                   </a:txBody>
-                  <a:tcPr marL="81005" marR="6750" marT="6750" marB="0" anchor="ctr">
+                  <a:tcPr marL="81005" marR="6750" marT="6750" marB="6750" anchor="ctr">
                     <a:lnL>
                       <a:noFill/>
                     </a:lnL>
@@ -7013,7 +7013,7 @@
                       </a:r>
                     </a:p>
                   </a:txBody>
-                  <a:tcPr marL="81005" marR="6750" marT="6750" marB="0" anchor="ctr">
+                  <a:tcPr marL="81005" marR="6750" marT="6750" marB="6750" anchor="ctr">
                     <a:lnL>
                       <a:noFill/>
                     </a:lnL>
@@ -7067,7 +7067,7 @@
                       </a:r>
                     </a:p>
                   </a:txBody>
-                  <a:tcPr marL="81005" marR="6750" marT="6750" marB="0" anchor="ctr">
+                  <a:tcPr marL="81005" marR="6750" marT="6750" marB="6750" anchor="ctr">
                     <a:lnL>
                       <a:noFill/>
                     </a:lnL>
@@ -7123,7 +7123,7 @@
                       </a:r>
                     </a:p>
                   </a:txBody>
-                  <a:tcPr marL="81005" marR="6750" marT="6750" marB="0" anchor="ctr">
+                  <a:tcPr marL="81005" marR="6750" marT="6750" marB="6750" anchor="ctr">
                     <a:lnL>
                       <a:noFill/>
                     </a:lnL>
@@ -7179,7 +7179,7 @@
                       </a:r>
                     </a:p>
                   </a:txBody>
-                  <a:tcPr marL="81005" marR="6750" marT="6750" marB="0" anchor="ctr">
+                  <a:tcPr marL="81005" marR="6750" marT="6750" marB="6750" anchor="ctr">
                     <a:lnL>
                       <a:noFill/>
                     </a:lnL>
@@ -8353,7 +8353,7 @@
                       </a:r>
                     </a:p>
                   </a:txBody>
-                  <a:tcPr marL="6750" marR="6750" marT="6750" marB="0" anchor="ctr">
+                  <a:tcPr marL="6750" marR="6750" marT="6750" marB="6750" anchor="ctr">
                     <a:lnL>
                       <a:noFill/>
                     </a:lnL>
@@ -8415,7 +8415,7 @@
                       </a:r>
                     </a:p>
                   </a:txBody>
-                  <a:tcPr marL="6750" marR="6750" marT="6750" marB="0" anchor="ctr">
+                  <a:tcPr marL="6750" marR="6750" marT="6750" marB="6750" anchor="ctr">
                     <a:lnL w="9525" cap="flat" cmpd="sng" algn="ctr">
                       <a:solidFill>
                         <a:schemeClr val="bg1">
@@ -8485,7 +8485,7 @@
                       </a:r>
                     </a:p>
                   </a:txBody>
-                  <a:tcPr marL="6750" marR="6750" marT="6750" marB="0" anchor="ctr">
+                  <a:tcPr marL="6750" marR="6750" marT="6750" marB="6750" anchor="ctr">
                     <a:lnL w="9525" cap="flat" cmpd="sng" algn="ctr">
                       <a:solidFill>
                         <a:schemeClr val="bg1">
@@ -8555,7 +8555,7 @@
                       </a:r>
                     </a:p>
                   </a:txBody>
-                  <a:tcPr marL="6750" marR="6750" marT="6750" marB="0" anchor="ctr">
+                  <a:tcPr marL="6750" marR="6750" marT="6750" marB="6750" anchor="ctr">
                     <a:lnL w="9525" cap="flat" cmpd="sng" algn="ctr">
                       <a:solidFill>
                         <a:schemeClr val="bg1">
@@ -8625,7 +8625,7 @@
                       </a:r>
                     </a:p>
                   </a:txBody>
-                  <a:tcPr marL="6750" marR="6750" marT="6750" marB="0" anchor="ctr">
+                  <a:tcPr marL="6750" marR="6750" marT="6750" marB="6750" anchor="ctr">
                     <a:lnL w="9525" cap="flat" cmpd="sng" algn="ctr">
                       <a:solidFill>
                         <a:schemeClr val="bg1">
@@ -8689,7 +8689,7 @@
                       </a:r>
                     </a:p>
                   </a:txBody>
-                  <a:tcPr marL="81005" marR="6750" marT="6750" marB="0" anchor="ctr">
+                  <a:tcPr marL="81005" marR="6750" marT="6750" marB="6750" anchor="ctr">
                     <a:lnL>
                       <a:noFill/>
                     </a:lnL>
@@ -8743,7 +8743,7 @@
                       </a:r>
                     </a:p>
                   </a:txBody>
-                  <a:tcPr marL="81005" marR="6750" marT="6750" marB="0" anchor="ctr">
+                  <a:tcPr marL="81005" marR="6750" marT="6750" marB="6750" anchor="ctr">
                     <a:lnL>
                       <a:noFill/>
                     </a:lnL>
@@ -8799,7 +8799,7 @@
                       </a:r>
                     </a:p>
                   </a:txBody>
-                  <a:tcPr marL="81005" marR="6750" marT="6750" marB="0" anchor="ctr">
+                  <a:tcPr marL="81005" marR="6750" marT="6750" marB="6750" anchor="ctr">
                     <a:lnL>
                       <a:noFill/>
                     </a:lnL>
@@ -8855,7 +8855,7 @@
                       </a:r>
                     </a:p>
                   </a:txBody>
-                  <a:tcPr marL="81005" marR="6750" marT="6750" marB="0" anchor="ctr">
+                  <a:tcPr marL="81005" marR="6750" marT="6750" marB="6750" anchor="ctr">
                     <a:lnL>
                       <a:noFill/>
                     </a:lnL>
@@ -8911,7 +8911,7 @@
                       </a:r>
                     </a:p>
                   </a:txBody>
-                  <a:tcPr marL="81005" marR="6750" marT="6750" marB="0" anchor="ctr">
+                  <a:tcPr marL="81005" marR="6750" marT="6750" marB="6750" anchor="ctr">
                     <a:lnL>
                       <a:noFill/>
                     </a:lnL>
@@ -8969,7 +8969,7 @@
                       </a:r>
                     </a:p>
                   </a:txBody>
-                  <a:tcPr marL="81005" marR="6750" marT="6750" marB="0" anchor="ctr">
+                  <a:tcPr marL="81005" marR="6750" marT="6750" marB="6750" anchor="ctr">
                     <a:lnL>
                       <a:noFill/>
                     </a:lnL>
@@ -9023,7 +9023,7 @@
                       </a:r>
                     </a:p>
                   </a:txBody>
-                  <a:tcPr marL="81005" marR="6750" marT="6750" marB="0" anchor="ctr">
+                  <a:tcPr marL="81005" marR="6750" marT="6750" marB="6750" anchor="ctr">
                     <a:lnL>
                       <a:noFill/>
                     </a:lnL>
@@ -9079,7 +9079,7 @@
                       </a:r>
                     </a:p>
                   </a:txBody>
-                  <a:tcPr marL="81005" marR="6750" marT="6750" marB="0" anchor="ctr">
+                  <a:tcPr marL="81005" marR="6750" marT="6750" marB="6750" anchor="ctr">
                     <a:lnL>
                       <a:noFill/>
                     </a:lnL>
@@ -9135,7 +9135,7 @@
                       </a:r>
                     </a:p>
                   </a:txBody>
-                  <a:tcPr marL="81005" marR="6750" marT="6750" marB="0" anchor="ctr">
+                  <a:tcPr marL="81005" marR="6750" marT="6750" marB="6750" anchor="ctr">
                     <a:lnL>
                       <a:noFill/>
                     </a:lnL>
@@ -9191,7 +9191,7 @@
                       </a:r>
                     </a:p>
                   </a:txBody>
-                  <a:tcPr marL="81005" marR="6750" marT="6750" marB="0" anchor="ctr">
+                  <a:tcPr marL="81005" marR="6750" marT="6750" marB="6750" anchor="ctr">
                     <a:lnL>
                       <a:noFill/>
                     </a:lnL>
@@ -9249,7 +9249,7 @@
                       </a:r>
                     </a:p>
                   </a:txBody>
-                  <a:tcPr marL="81005" marR="6750" marT="6750" marB="0" anchor="ctr">
+                  <a:tcPr marL="81005" marR="6750" marT="6750" marB="6750" anchor="ctr">
                     <a:lnL>
                       <a:noFill/>
                     </a:lnL>
@@ -9303,7 +9303,7 @@
                       </a:r>
                     </a:p>
                   </a:txBody>
-                  <a:tcPr marL="81005" marR="6750" marT="6750" marB="0" anchor="ctr">
+                  <a:tcPr marL="81005" marR="6750" marT="6750" marB="6750" anchor="ctr">
                     <a:lnL>
                       <a:noFill/>
                     </a:lnL>
@@ -9359,7 +9359,7 @@
                       </a:r>
                     </a:p>
                   </a:txBody>
-                  <a:tcPr marL="81005" marR="6750" marT="6750" marB="0" anchor="ctr">
+                  <a:tcPr marL="81005" marR="6750" marT="6750" marB="6750" anchor="ctr">
                     <a:lnL>
                       <a:noFill/>
                     </a:lnL>
@@ -9415,7 +9415,7 @@
                       </a:r>
                     </a:p>
                   </a:txBody>
-                  <a:tcPr marL="81005" marR="6750" marT="6750" marB="0" anchor="ctr">
+                  <a:tcPr marL="81005" marR="6750" marT="6750" marB="6750" anchor="ctr">
                     <a:lnL>
                       <a:noFill/>
                     </a:lnL>
@@ -9471,7 +9471,7 @@
                       </a:r>
                     </a:p>
                   </a:txBody>
-                  <a:tcPr marL="81005" marR="6750" marT="6750" marB="0" anchor="ctr">
+                  <a:tcPr marL="81005" marR="6750" marT="6750" marB="6750" anchor="ctr">
                     <a:lnL>
                       <a:noFill/>
                     </a:lnL>
@@ -10059,7 +10059,7 @@
                       </a:r>
                     </a:p>
                   </a:txBody>
-                  <a:tcPr marL="6750" marR="6750" marT="6750" marB="0" anchor="ctr">
+                  <a:tcPr marL="6750" marR="6750" marT="6750" marB="6750" anchor="ctr">
                     <a:lnL>
                       <a:noFill/>
                     </a:lnL>
@@ -10121,7 +10121,7 @@
                       </a:r>
                     </a:p>
                   </a:txBody>
-                  <a:tcPr marL="6750" marR="6750" marT="6750" marB="0" anchor="ctr">
+                  <a:tcPr marL="6750" marR="6750" marT="6750" marB="6750" anchor="ctr">
                     <a:lnL w="9525" cap="flat" cmpd="sng" algn="ctr">
                       <a:solidFill>
                         <a:schemeClr val="bg1">
@@ -10191,7 +10191,7 @@
                       </a:r>
                     </a:p>
                   </a:txBody>
-                  <a:tcPr marL="6750" marR="6750" marT="6750" marB="0" anchor="ctr">
+                  <a:tcPr marL="6750" marR="6750" marT="6750" marB="6750" anchor="ctr">
                     <a:lnL w="9525" cap="flat" cmpd="sng" algn="ctr">
                       <a:solidFill>
                         <a:schemeClr val="bg1">
@@ -10263,7 +10263,7 @@
                       </a:r>
                     </a:p>
                   </a:txBody>
-                  <a:tcPr marL="81005" marR="6750" marT="6750" marB="0" anchor="ctr">
+                  <a:tcPr marL="81005" marR="6750" marT="6750" marB="6750" anchor="ctr">
                     <a:lnL>
                       <a:noFill/>
                     </a:lnL>
@@ -10317,7 +10317,7 @@
                       </a:r>
                     </a:p>
                   </a:txBody>
-                  <a:tcPr marL="81005" marR="6750" marT="6750" marB="0" anchor="ctr">
+                  <a:tcPr marL="81005" marR="6750" marT="6750" marB="6750" anchor="ctr">
                     <a:lnL>
                       <a:noFill/>
                     </a:lnL>
@@ -10373,7 +10373,7 @@
                       </a:r>
                     </a:p>
                   </a:txBody>
-                  <a:tcPr marL="81005" marR="6750" marT="6750" marB="0" anchor="ctr">
+                  <a:tcPr marL="81005" marR="6750" marT="6750" marB="6750" anchor="ctr">
                     <a:lnL>
                       <a:noFill/>
                     </a:lnL>
@@ -10431,7 +10431,7 @@
                       </a:r>
                     </a:p>
                   </a:txBody>
-                  <a:tcPr marL="81005" marR="6750" marT="6750" marB="0" anchor="ctr">
+                  <a:tcPr marL="81005" marR="6750" marT="6750" marB="6750" anchor="ctr">
                     <a:lnL>
                       <a:noFill/>
                     </a:lnL>
@@ -10485,7 +10485,7 @@
                       </a:r>
                     </a:p>
                   </a:txBody>
-                  <a:tcPr marL="81005" marR="6750" marT="6750" marB="0" anchor="ctr">
+                  <a:tcPr marL="81005" marR="6750" marT="6750" marB="6750" anchor="ctr">
                     <a:lnL>
                       <a:noFill/>
                     </a:lnL>
@@ -10541,7 +10541,7 @@
                       </a:r>
                     </a:p>
                   </a:txBody>
-                  <a:tcPr marL="81005" marR="6750" marT="6750" marB="0" anchor="ctr">
+                  <a:tcPr marL="81005" marR="6750" marT="6750" marB="6750" anchor="ctr">
                     <a:lnL>
                       <a:noFill/>
                     </a:lnL>
@@ -10599,7 +10599,7 @@
                       </a:r>
                     </a:p>
                   </a:txBody>
-                  <a:tcPr marL="81005" marR="6750" marT="6750" marB="0" anchor="ctr">
+                  <a:tcPr marL="81005" marR="6750" marT="6750" marB="6750" anchor="ctr">
                     <a:lnL>
                       <a:noFill/>
                     </a:lnL>
@@ -10653,7 +10653,7 @@
                       </a:r>
                     </a:p>
                   </a:txBody>
-                  <a:tcPr marL="81005" marR="6750" marT="6750" marB="0" anchor="ctr">
+                  <a:tcPr marL="81005" marR="6750" marT="6750" marB="6750" anchor="ctr">
                     <a:lnL>
                       <a:noFill/>
                     </a:lnL>
@@ -10709,7 +10709,7 @@
                       </a:r>
                     </a:p>
                   </a:txBody>
-                  <a:tcPr marL="81005" marR="6750" marT="6750" marB="0" anchor="ctr">
+                  <a:tcPr marL="81005" marR="6750" marT="6750" marB="6750" anchor="ctr">
                     <a:lnL>
                       <a:noFill/>
                     </a:lnL>
@@ -10767,7 +10767,7 @@
                       </a:r>
                     </a:p>
                   </a:txBody>
-                  <a:tcPr marL="81005" marR="6750" marT="6750" marB="0" anchor="ctr">
+                  <a:tcPr marL="81005" marR="6750" marT="6750" marB="6750" anchor="ctr">
                     <a:lnL>
                       <a:noFill/>
                     </a:lnL>
@@ -10821,7 +10821,7 @@
                       </a:r>
                     </a:p>
                   </a:txBody>
-                  <a:tcPr marL="81005" marR="6750" marT="6750" marB="0" anchor="ctr">
+                  <a:tcPr marL="81005" marR="6750" marT="6750" marB="6750" anchor="ctr">
                     <a:lnL>
                       <a:noFill/>
                     </a:lnL>
@@ -10877,7 +10877,7 @@
                       </a:r>
                     </a:p>
                   </a:txBody>
-                  <a:tcPr marL="81005" marR="6750" marT="6750" marB="0" anchor="ctr">
+                  <a:tcPr marL="81005" marR="6750" marT="6750" marB="6750" anchor="ctr">
                     <a:lnL>
                       <a:noFill/>
                     </a:lnL>
@@ -10935,7 +10935,7 @@
                       </a:r>
                     </a:p>
                   </a:txBody>
-                  <a:tcPr marL="81005" marR="6750" marT="6750" marB="0" anchor="ctr">
+                  <a:tcPr marL="81005" marR="6750" marT="6750" marB="6750" anchor="ctr">
                     <a:lnL>
                       <a:noFill/>
                     </a:lnL>
@@ -10989,7 +10989,7 @@
                       </a:r>
                     </a:p>
                   </a:txBody>
-                  <a:tcPr marL="81005" marR="6750" marT="6750" marB="0" anchor="ctr">
+                  <a:tcPr marL="81005" marR="6750" marT="6750" marB="6750" anchor="ctr">
                     <a:lnL>
                       <a:noFill/>
                     </a:lnL>
@@ -11045,7 +11045,7 @@
                       </a:r>
                     </a:p>
                   </a:txBody>
-                  <a:tcPr marL="81005" marR="6750" marT="6750" marB="0" anchor="ctr">
+                  <a:tcPr marL="81005" marR="6750" marT="6750" marB="6750" anchor="ctr">
                     <a:lnL>
                       <a:noFill/>
                     </a:lnL>
@@ -11159,7 +11159,7 @@
                 <a:latin typeface="맑은 고딕"/>
                 <a:ea typeface="맑은 고딕"/>
               </a:rPr>
-              <a:t>, 같은 요청을 다시 보내는 것이 이 재료를 잘못 쓰는 방식이다.</a:t>
+              <a:t>, 같은 요청을 다시 보내는 것이 이 재료를 잘못 사용하는 방식이다.</a:t>
             </a:r>
           </a:p>
         </p:txBody>
@@ -11273,7 +11273,7 @@
                 <a:latin typeface="맑은 고딕"/>
                 <a:ea typeface="맑은 고딕"/>
               </a:rPr>
-              <a:t>LLM을 재료로 쓸 때의 잘못된 관행</a:t>
+              <a:t>LLM을 재료로 사용할 때의 잘못된 관행</a:t>
             </a:r>
           </a:p>
         </p:txBody>
@@ -12708,7 +12708,7 @@
                 <a:latin typeface="맑은 고딕"/>
                 <a:ea typeface="맑은 고딕"/>
               </a:rPr>
-              <a:t>작업 특성 네 가지</a:t>
+              <a:t>작업 특성 4가지</a:t>
             </a:r>
             <a:r>
               <a:rPr sz="1800" b="0">
@@ -14334,7 +14334,7 @@
                 <a:latin typeface="맑은 고딕"/>
                 <a:ea typeface="맑은 고딕"/>
               </a:rPr>
-              <a:t>작업 특성 네 가지</a:t>
+              <a:t>작업 특성 4가지</a:t>
             </a:r>
             <a:r>
               <a:rPr sz="1800" b="0">
@@ -14892,7 +14892,7 @@
                 <a:latin typeface="맑은 고딕"/>
                 <a:ea typeface="맑은 고딕"/>
               </a:rPr>
-              <a:t>를 쓰면 금액은 2,000원이다.</a:t>
+              <a:t>를 사용하면 금액은 2,000원이다.</a:t>
             </a:r>
           </a:p>
           <a:p>
@@ -14925,7 +14925,7 @@
                 <a:latin typeface="맑은 고딕"/>
                 <a:ea typeface="맑은 고딕"/>
               </a:rPr>
-              <a:t>는 업무 규칙의 정확성을 보장하지 않는다. 잘못 추측한 규칙으로 테스트까지 쓰면 둘이 함께 틀린다.</a:t>
+              <a:t>는 업무 규칙의 정확성을 보장하지 않는다. 잘못 추측한 규칙으로 테스트까지 작성하면 둘이 함께 틀린다.</a:t>
             </a:r>
           </a:p>
         </p:txBody>
@@ -16358,7 +16358,7 @@
                       </a:r>
                     </a:p>
                   </a:txBody>
-                  <a:tcPr marL="6750" marR="6750" marT="6750" marB="0" anchor="ctr">
+                  <a:tcPr marL="6750" marR="6750" marT="6750" marB="6750" anchor="ctr">
                     <a:lnL>
                       <a:noFill/>
                     </a:lnL>
@@ -16420,7 +16420,7 @@
                       </a:r>
                     </a:p>
                   </a:txBody>
-                  <a:tcPr marL="6750" marR="6750" marT="6750" marB="0" anchor="ctr">
+                  <a:tcPr marL="6750" marR="6750" marT="6750" marB="6750" anchor="ctr">
                     <a:lnL w="9525" cap="flat" cmpd="sng" algn="ctr">
                       <a:solidFill>
                         <a:schemeClr val="bg1">
@@ -16490,7 +16490,7 @@
                       </a:r>
                     </a:p>
                   </a:txBody>
-                  <a:tcPr marL="6750" marR="6750" marT="6750" marB="0" anchor="ctr">
+                  <a:tcPr marL="6750" marR="6750" marT="6750" marB="6750" anchor="ctr">
                     <a:lnL w="9525" cap="flat" cmpd="sng" algn="ctr">
                       <a:solidFill>
                         <a:schemeClr val="bg1">
@@ -16562,7 +16562,7 @@
                       </a:r>
                     </a:p>
                   </a:txBody>
-                  <a:tcPr marL="81005" marR="6750" marT="6750" marB="0" anchor="ctr">
+                  <a:tcPr marL="81005" marR="6750" marT="6750" marB="6750" anchor="ctr">
                     <a:lnL>
                       <a:noFill/>
                     </a:lnL>
@@ -16616,7 +16616,7 @@
                       </a:r>
                     </a:p>
                   </a:txBody>
-                  <a:tcPr marL="81005" marR="6750" marT="6750" marB="0" anchor="ctr">
+                  <a:tcPr marL="81005" marR="6750" marT="6750" marB="6750" anchor="ctr">
                     <a:lnL>
                       <a:noFill/>
                     </a:lnL>
@@ -16672,7 +16672,7 @@
                       </a:r>
                     </a:p>
                   </a:txBody>
-                  <a:tcPr marL="81005" marR="6750" marT="6750" marB="0" anchor="ctr">
+                  <a:tcPr marL="81005" marR="6750" marT="6750" marB="6750" anchor="ctr">
                     <a:lnL>
                       <a:noFill/>
                     </a:lnL>
@@ -16730,7 +16730,7 @@
                       </a:r>
                     </a:p>
                   </a:txBody>
-                  <a:tcPr marL="81005" marR="6750" marT="6750" marB="0" anchor="ctr">
+                  <a:tcPr marL="81005" marR="6750" marT="6750" marB="6750" anchor="ctr">
                     <a:lnL>
                       <a:noFill/>
                     </a:lnL>
@@ -16784,7 +16784,7 @@
                       </a:r>
                     </a:p>
                   </a:txBody>
-                  <a:tcPr marL="81005" marR="6750" marT="6750" marB="0" anchor="ctr">
+                  <a:tcPr marL="81005" marR="6750" marT="6750" marB="6750" anchor="ctr">
                     <a:lnL>
                       <a:noFill/>
                     </a:lnL>
@@ -16840,7 +16840,7 @@
                       </a:r>
                     </a:p>
                   </a:txBody>
-                  <a:tcPr marL="81005" marR="6750" marT="6750" marB="0" anchor="ctr">
+                  <a:tcPr marL="81005" marR="6750" marT="6750" marB="6750" anchor="ctr">
                     <a:lnL>
                       <a:noFill/>
                     </a:lnL>
@@ -16898,7 +16898,7 @@
                       </a:r>
                     </a:p>
                   </a:txBody>
-                  <a:tcPr marL="81005" marR="6750" marT="6750" marB="0" anchor="ctr">
+                  <a:tcPr marL="81005" marR="6750" marT="6750" marB="6750" anchor="ctr">
                     <a:lnL>
                       <a:noFill/>
                     </a:lnL>
@@ -16952,7 +16952,7 @@
                       </a:r>
                     </a:p>
                   </a:txBody>
-                  <a:tcPr marL="81005" marR="6750" marT="6750" marB="0" anchor="ctr">
+                  <a:tcPr marL="81005" marR="6750" marT="6750" marB="6750" anchor="ctr">
                     <a:lnL>
                       <a:noFill/>
                     </a:lnL>
@@ -17008,7 +17008,7 @@
                       </a:r>
                     </a:p>
                   </a:txBody>
-                  <a:tcPr marL="81005" marR="6750" marT="6750" marB="0" anchor="ctr">
+                  <a:tcPr marL="81005" marR="6750" marT="6750" marB="6750" anchor="ctr">
                     <a:lnL>
                       <a:noFill/>
                     </a:lnL>
@@ -17066,7 +17066,7 @@
                       </a:r>
                     </a:p>
                   </a:txBody>
-                  <a:tcPr marL="81005" marR="6750" marT="6750" marB="0" anchor="ctr">
+                  <a:tcPr marL="81005" marR="6750" marT="6750" marB="6750" anchor="ctr">
                     <a:lnL>
                       <a:noFill/>
                     </a:lnL>
@@ -17120,7 +17120,7 @@
                       </a:r>
                     </a:p>
                   </a:txBody>
-                  <a:tcPr marL="81005" marR="6750" marT="6750" marB="0" anchor="ctr">
+                  <a:tcPr marL="81005" marR="6750" marT="6750" marB="6750" anchor="ctr">
                     <a:lnL>
                       <a:noFill/>
                     </a:lnL>
@@ -17176,7 +17176,7 @@
                       </a:r>
                     </a:p>
                   </a:txBody>
-                  <a:tcPr marL="81005" marR="6750" marT="6750" marB="0" anchor="ctr">
+                  <a:tcPr marL="81005" marR="6750" marT="6750" marB="6750" anchor="ctr">
                     <a:lnL>
                       <a:noFill/>
                     </a:lnL>
@@ -17772,7 +17772,7 @@
                       </a:r>
                     </a:p>
                   </a:txBody>
-                  <a:tcPr marL="6750" marR="6750" marT="6750" marB="0" anchor="ctr">
+                  <a:tcPr marL="6750" marR="6750" marT="6750" marB="6750" anchor="ctr">
                     <a:lnL>
                       <a:noFill/>
                     </a:lnL>
@@ -17834,7 +17834,7 @@
                       </a:r>
                     </a:p>
                   </a:txBody>
-                  <a:tcPr marL="6750" marR="6750" marT="6750" marB="0" anchor="ctr">
+                  <a:tcPr marL="6750" marR="6750" marT="6750" marB="6750" anchor="ctr">
                     <a:lnL w="9525" cap="flat" cmpd="sng" algn="ctr">
                       <a:solidFill>
                         <a:schemeClr val="bg1">
@@ -17904,7 +17904,7 @@
                       </a:r>
                     </a:p>
                   </a:txBody>
-                  <a:tcPr marL="6750" marR="6750" marT="6750" marB="0" anchor="ctr">
+                  <a:tcPr marL="6750" marR="6750" marT="6750" marB="6750" anchor="ctr">
                     <a:lnL w="9525" cap="flat" cmpd="sng" algn="ctr">
                       <a:solidFill>
                         <a:schemeClr val="bg1">
@@ -17976,7 +17976,7 @@
                       </a:r>
                     </a:p>
                   </a:txBody>
-                  <a:tcPr marL="81005" marR="6750" marT="6750" marB="0" anchor="ctr">
+                  <a:tcPr marL="81005" marR="6750" marT="6750" marB="6750" anchor="ctr">
                     <a:lnL>
                       <a:noFill/>
                     </a:lnL>
@@ -18030,7 +18030,7 @@
                       </a:r>
                     </a:p>
                   </a:txBody>
-                  <a:tcPr marL="81005" marR="6750" marT="6750" marB="0" anchor="ctr">
+                  <a:tcPr marL="81005" marR="6750" marT="6750" marB="6750" anchor="ctr">
                     <a:lnL>
                       <a:noFill/>
                     </a:lnL>
@@ -18086,7 +18086,7 @@
                       </a:r>
                     </a:p>
                   </a:txBody>
-                  <a:tcPr marL="81005" marR="6750" marT="6750" marB="0" anchor="ctr">
+                  <a:tcPr marL="81005" marR="6750" marT="6750" marB="6750" anchor="ctr">
                     <a:lnL>
                       <a:noFill/>
                     </a:lnL>
@@ -18144,7 +18144,7 @@
                       </a:r>
                     </a:p>
                   </a:txBody>
-                  <a:tcPr marL="81005" marR="6750" marT="6750" marB="0" anchor="ctr">
+                  <a:tcPr marL="81005" marR="6750" marT="6750" marB="6750" anchor="ctr">
                     <a:lnL>
                       <a:noFill/>
                     </a:lnL>
@@ -18198,7 +18198,7 @@
                       </a:r>
                     </a:p>
                   </a:txBody>
-                  <a:tcPr marL="81005" marR="6750" marT="6750" marB="0" anchor="ctr">
+                  <a:tcPr marL="81005" marR="6750" marT="6750" marB="6750" anchor="ctr">
                     <a:lnL>
                       <a:noFill/>
                     </a:lnL>
@@ -18254,7 +18254,7 @@
                       </a:r>
                     </a:p>
                   </a:txBody>
-                  <a:tcPr marL="81005" marR="6750" marT="6750" marB="0" anchor="ctr">
+                  <a:tcPr marL="81005" marR="6750" marT="6750" marB="6750" anchor="ctr">
                     <a:lnL>
                       <a:noFill/>
                     </a:lnL>
@@ -18312,7 +18312,7 @@
                       </a:r>
                     </a:p>
                   </a:txBody>
-                  <a:tcPr marL="81005" marR="6750" marT="6750" marB="0" anchor="ctr">
+                  <a:tcPr marL="81005" marR="6750" marT="6750" marB="6750" anchor="ctr">
                     <a:lnL>
                       <a:noFill/>
                     </a:lnL>
@@ -18366,7 +18366,7 @@
                       </a:r>
                     </a:p>
                   </a:txBody>
-                  <a:tcPr marL="81005" marR="6750" marT="6750" marB="0" anchor="ctr">
+                  <a:tcPr marL="81005" marR="6750" marT="6750" marB="6750" anchor="ctr">
                     <a:lnL>
                       <a:noFill/>
                     </a:lnL>
@@ -18422,7 +18422,7 @@
                       </a:r>
                     </a:p>
                   </a:txBody>
-                  <a:tcPr marL="81005" marR="6750" marT="6750" marB="0" anchor="ctr">
+                  <a:tcPr marL="81005" marR="6750" marT="6750" marB="6750" anchor="ctr">
                     <a:lnL>
                       <a:noFill/>
                     </a:lnL>
@@ -18480,7 +18480,7 @@
                       </a:r>
                     </a:p>
                   </a:txBody>
-                  <a:tcPr marL="81005" marR="6750" marT="6750" marB="0" anchor="ctr">
+                  <a:tcPr marL="81005" marR="6750" marT="6750" marB="6750" anchor="ctr">
                     <a:lnL>
                       <a:noFill/>
                     </a:lnL>
@@ -18534,7 +18534,7 @@
                       </a:r>
                     </a:p>
                   </a:txBody>
-                  <a:tcPr marL="81005" marR="6750" marT="6750" marB="0" anchor="ctr">
+                  <a:tcPr marL="81005" marR="6750" marT="6750" marB="6750" anchor="ctr">
                     <a:lnL>
                       <a:noFill/>
                     </a:lnL>
@@ -18590,7 +18590,7 @@
                       </a:r>
                     </a:p>
                   </a:txBody>
-                  <a:tcPr marL="81005" marR="6750" marT="6750" marB="0" anchor="ctr">
+                  <a:tcPr marL="81005" marR="6750" marT="6750" marB="6750" anchor="ctr">
                     <a:lnL>
                       <a:noFill/>
                     </a:lnL>
@@ -18871,7 +18871,7 @@
                 <a:latin typeface="맑은 고딕"/>
                 <a:ea typeface="맑은 고딕"/>
               </a:rPr>
-              <a:t>작업 특성 네 가지</a:t>
+              <a:t>작업 특성 4가지</a:t>
             </a:r>
           </a:p>
         </p:txBody>
@@ -19174,7 +19174,7 @@
                       </a:r>
                     </a:p>
                   </a:txBody>
-                  <a:tcPr marL="6750" marR="6750" marT="6750" marB="0" anchor="ctr">
+                  <a:tcPr marL="6750" marR="6750" marT="6750" marB="6750" anchor="ctr">
                     <a:lnL>
                       <a:noFill/>
                     </a:lnL>
@@ -19236,7 +19236,7 @@
                       </a:r>
                     </a:p>
                   </a:txBody>
-                  <a:tcPr marL="6750" marR="6750" marT="6750" marB="0" anchor="ctr">
+                  <a:tcPr marL="6750" marR="6750" marT="6750" marB="6750" anchor="ctr">
                     <a:lnL w="9525" cap="flat" cmpd="sng" algn="ctr">
                       <a:solidFill>
                         <a:schemeClr val="bg1">
@@ -19306,7 +19306,7 @@
                       </a:r>
                     </a:p>
                   </a:txBody>
-                  <a:tcPr marL="6750" marR="6750" marT="6750" marB="0" anchor="ctr">
+                  <a:tcPr marL="6750" marR="6750" marT="6750" marB="6750" anchor="ctr">
                     <a:lnL w="9525" cap="flat" cmpd="sng" algn="ctr">
                       <a:solidFill>
                         <a:schemeClr val="bg1">
@@ -19378,7 +19378,7 @@
                       </a:r>
                     </a:p>
                   </a:txBody>
-                  <a:tcPr marL="81005" marR="6750" marT="6750" marB="0" anchor="ctr">
+                  <a:tcPr marL="81005" marR="6750" marT="6750" marB="6750" anchor="ctr">
                     <a:lnL>
                       <a:noFill/>
                     </a:lnL>
@@ -19432,7 +19432,7 @@
                       </a:r>
                     </a:p>
                   </a:txBody>
-                  <a:tcPr marL="81005" marR="6750" marT="6750" marB="0" anchor="ctr">
+                  <a:tcPr marL="81005" marR="6750" marT="6750" marB="6750" anchor="ctr">
                     <a:lnL>
                       <a:noFill/>
                     </a:lnL>
@@ -19488,7 +19488,7 @@
                       </a:r>
                     </a:p>
                   </a:txBody>
-                  <a:tcPr marL="81005" marR="6750" marT="6750" marB="0" anchor="ctr">
+                  <a:tcPr marL="81005" marR="6750" marT="6750" marB="6750" anchor="ctr">
                     <a:lnL>
                       <a:noFill/>
                     </a:lnL>
@@ -19546,7 +19546,7 @@
                       </a:r>
                     </a:p>
                   </a:txBody>
-                  <a:tcPr marL="81005" marR="6750" marT="6750" marB="0" anchor="ctr">
+                  <a:tcPr marL="81005" marR="6750" marT="6750" marB="6750" anchor="ctr">
                     <a:lnL>
                       <a:noFill/>
                     </a:lnL>
@@ -19600,7 +19600,7 @@
                       </a:r>
                     </a:p>
                   </a:txBody>
-                  <a:tcPr marL="81005" marR="6750" marT="6750" marB="0" anchor="ctr">
+                  <a:tcPr marL="81005" marR="6750" marT="6750" marB="6750" anchor="ctr">
                     <a:lnL>
                       <a:noFill/>
                     </a:lnL>
@@ -19656,7 +19656,7 @@
                       </a:r>
                     </a:p>
                   </a:txBody>
-                  <a:tcPr marL="81005" marR="6750" marT="6750" marB="0" anchor="ctr">
+                  <a:tcPr marL="81005" marR="6750" marT="6750" marB="6750" anchor="ctr">
                     <a:lnL>
                       <a:noFill/>
                     </a:lnL>
@@ -19714,7 +19714,7 @@
                       </a:r>
                     </a:p>
                   </a:txBody>
-                  <a:tcPr marL="81005" marR="6750" marT="6750" marB="0" anchor="ctr">
+                  <a:tcPr marL="81005" marR="6750" marT="6750" marB="6750" anchor="ctr">
                     <a:lnL>
                       <a:noFill/>
                     </a:lnL>
@@ -19768,7 +19768,7 @@
                       </a:r>
                     </a:p>
                   </a:txBody>
-                  <a:tcPr marL="81005" marR="6750" marT="6750" marB="0" anchor="ctr">
+                  <a:tcPr marL="81005" marR="6750" marT="6750" marB="6750" anchor="ctr">
                     <a:lnL>
                       <a:noFill/>
                     </a:lnL>
@@ -19824,7 +19824,7 @@
                       </a:r>
                     </a:p>
                   </a:txBody>
-                  <a:tcPr marL="81005" marR="6750" marT="6750" marB="0" anchor="ctr">
+                  <a:tcPr marL="81005" marR="6750" marT="6750" marB="6750" anchor="ctr">
                     <a:lnL>
                       <a:noFill/>
                     </a:lnL>
@@ -19882,7 +19882,7 @@
                       </a:r>
                     </a:p>
                   </a:txBody>
-                  <a:tcPr marL="81005" marR="6750" marT="6750" marB="0" anchor="ctr">
+                  <a:tcPr marL="81005" marR="6750" marT="6750" marB="6750" anchor="ctr">
                     <a:lnL>
                       <a:noFill/>
                     </a:lnL>
@@ -19936,7 +19936,7 @@
                       </a:r>
                     </a:p>
                   </a:txBody>
-                  <a:tcPr marL="81005" marR="6750" marT="6750" marB="0" anchor="ctr">
+                  <a:tcPr marL="81005" marR="6750" marT="6750" marB="6750" anchor="ctr">
                     <a:lnL>
                       <a:noFill/>
                     </a:lnL>
@@ -19992,7 +19992,7 @@
                       </a:r>
                     </a:p>
                   </a:txBody>
-                  <a:tcPr marL="81005" marR="6750" marT="6750" marB="0" anchor="ctr">
+                  <a:tcPr marL="81005" marR="6750" marT="6750" marB="6750" anchor="ctr">
                     <a:lnL>
                       <a:noFill/>
                     </a:lnL>
@@ -20293,7 +20293,7 @@
                 <a:latin typeface="맑은 고딕"/>
                 <a:ea typeface="맑은 고딕"/>
               </a:rPr>
-              <a:t>AI 활용 방식 네 가지</a:t>
+              <a:t>AI 활용 방식 4가지</a:t>
             </a:r>
           </a:p>
         </p:txBody>

--- a/courses/ai-native/sessions/s02.pptx
+++ b/courses/ai-native/sessions/s02.pptx
@@ -27,6 +27,7 @@
     <p:sldId id="272" r:id="javaLecture17"/>
     <p:sldId id="273" r:id="javaLecture18"/>
     <p:sldId id="274" r:id="javaLecture19"/>
+    <p:sldId id="275" r:id="javaLecture20"/>
   </p:sldIdLst>
   <p:sldSz cx="9144000" cy="6858000" type="screen4x3"/>
   <p:notesSz cx="6858000" cy="9144000"/>
@@ -651,74 +652,6 @@
 </p:notes>
 </file>
 
-<file path=ppt/notesSlides/notesSlide13.xml><?xml version="1.0" encoding="utf-8"?>
-<p:notes xmlns:a="http://schemas.openxmlformats.org/drawingml/2006/main" xmlns:r="http://schemas.openxmlformats.org/officeDocument/2006/relationships" xmlns:p="http://schemas.openxmlformats.org/presentationml/2006/main">
-  <p:cSld>
-    <p:spTree>
-      <p:nvGrpSpPr>
-        <p:cNvPr id="1" name=""/>
-        <p:cNvGrpSpPr/>
-        <p:nvPr/>
-      </p:nvGrpSpPr>
-      <p:grpSpPr>
-        <a:xfrm>
-          <a:off x="0" y="0"/>
-          <a:ext cx="0" cy="0"/>
-          <a:chOff x="0" y="0"/>
-          <a:chExt cx="0" cy="0"/>
-        </a:xfrm>
-      </p:grpSpPr>
-      <p:sp>
-        <p:nvSpPr>
-          <p:cNvPr id="2" name="슬라이드 이미지 개체 틀"/>
-          <p:cNvSpPr/>
-          <p:nvPr>
-            <p:ph type="sldImg" idx="2"/>
-          </p:nvPr>
-        </p:nvSpPr>
-        <p:spPr/>
-        <p:txBody>
-          <a:bodyPr/>
-          <a:lstStyle/>
-          <a:p/>
-        </p:txBody>
-      </p:sp>
-      <p:sp>
-        <p:nvSpPr>
-          <p:cNvPr id="3" name="슬라이드 노트 개체 틀"/>
-          <p:cNvSpPr/>
-          <p:nvPr>
-            <p:ph type="body" idx="3"/>
-          </p:nvPr>
-        </p:nvSpPr>
-        <p:spPr/>
-        <p:txBody>
-          <a:bodyPr/>
-          <a:lstStyle/>
-          <a:p>
-            <a:pPr lvl="0"/>
-            <a:r>
-              <a:rPr lang="ko-KR" sz="1200"/>
-              <a:t>사람의 확인 시점은 설계에 따라 앞당길 수 있다. 자율성의 대가는 중간 검사가 없는 무제한 실행을 뜻하지 않는다.</a:t>
-            </a:r>
-          </a:p>
-          <a:p>
-            <a:pPr lvl="0"/>
-            <a:r>
-              <a:rPr lang="ko-KR" sz="1200"/>
-              <a:t>수작업은 LLM 자율성이 없으므로 비교에서 뺐다. 전체 비용에는 사람의 검토·재작업 시간도 포함한다.</a:t>
-            </a:r>
-          </a:p>
-        </p:txBody>
-      </p:sp>
-    </p:spTree>
-  </p:cSld>
-  <p:clrMapOvr>
-    <a:masterClrMapping/>
-  </p:clrMapOvr>
-</p:notes>
-</file>
-
 <file path=ppt/notesSlides/notesSlide14.xml><?xml version="1.0" encoding="utf-8"?>
 <p:notes xmlns:a="http://schemas.openxmlformats.org/drawingml/2006/main" xmlns:r="http://schemas.openxmlformats.org/officeDocument/2006/relationships" xmlns:p="http://schemas.openxmlformats.org/presentationml/2006/main">
   <p:cSld>
@@ -767,14 +700,14 @@
             <a:pPr lvl="0"/>
             <a:r>
               <a:rPr lang="ko-KR" sz="1200"/>
-              <a:t>[Blount 외 2026]는 능력이 쌓이는 단계라는 보완 관점으로 승인됐다. Google 원전의 단계 이름을 네 활용 방식으로 번역한 것이 아니다. 도식은 수업의 적용이다.</a:t>
+              <a:t>사람의 확인 시점은 설계에 따라 앞당길 수 있다. 자율성의 대가는 중간 검사가 없는 무제한 실행을 뜻하지 않는다.</a:t>
             </a:r>
           </a:p>
           <a:p>
             <a:pPr lvl="0"/>
             <a:r>
               <a:rPr lang="ko-KR" sz="1200"/>
-              <a:t>계단은 반드시 끝까지 올라가는 성숙도 점수가 아니다. 충분한 방식에서 멈춘다. 승인·금지·중단 조건의 구체화는 "세션 08. 위임"이 맡는다.</a:t>
+              <a:t>수작업은 LLM 자율성이 없으므로 비교에서 뺐다. 전체 비용에는 사람의 검토·재작업 시간도 포함한다.</a:t>
             </a:r>
           </a:p>
         </p:txBody>
@@ -835,28 +768,14 @@
             <a:pPr lvl="0"/>
             <a:r>
               <a:rPr lang="ko-KR" sz="1200"/>
-              <a:t>실행 일자: 2026-10-07. 도구: Claude Code 2.1.292(claude -p), 모델: claude-opus-5-5, OpenJDK 26. 교재 작성 월 2026-10을 본문에 표기했다. 시연을 재실행한 날짜라는 뜻은 아니다.</a:t>
+              <a:t>[Blount 외 2026]는 능력이 쌓이는 단계라는 보완 관점으로 승인됐다. Google 원전의 단계 이름을 네 활용 방식으로 번역한 것이 아니다. 도식은 수업의 적용이다.</a:t>
             </a:r>
           </a:p>
           <a:p>
             <a:pPr lvl="0"/>
             <a:r>
               <a:rPr lang="ko-KR" sz="1200"/>
-              <a:t>원본: code/s01/demo/demo-results/README.md와 results.json. 같은 규칙·수용 테스트를 둔 저장소 사본 세 벌에서 실행했다. 일반 입력·캐시 생성·캐시 읽기를 합친 입력 집계다.</a:t>
-            </a:r>
-          </a:p>
-          <a:p>
-            <a:pPr lvl="0"/>
-            <a:r>
-              <a:rPr lang="ko-KR" sz="1200"/>
-              <a:t>호출은 시연 실행기가 보낸 요청 횟수이고 턴은 CLI가 보고한 num_turns의 합이다. 워크플로 단계 안에서도 도구를 쓰는 여러 턴이 있었다. 형태는 턴 수가 아니라 상위 경로를 누가 정했는지로 구분한다.</a:t>
-            </a:r>
-          </a:p>
-          <a:p>
-            <a:pPr lvl="0"/>
-            <a:r>
-              <a:rPr lang="ko-KR" sz="1200"/>
-              <a:t>"규칙을 지켰다"는 제공한 수용 테스트가 통과했다는 범위다. 운영 품질 전체의 증거는 아니다. 토큰 단가가 달라 입력·출력 토큰을 단순 합산한 값을 비용으로 읽지 않는다.</a:t>
+              <a:t>계단은 반드시 끝까지 올라가는 성숙도 점수가 아니다. 충분한 방식에서 멈춘다. 승인·금지·중단 조건의 구체화는 "세션 08. 위임"이 맡는다.</a:t>
             </a:r>
           </a:p>
         </p:txBody>
@@ -917,14 +836,28 @@
             <a:pPr lvl="0"/>
             <a:r>
               <a:rPr lang="ko-KR" sz="1200"/>
-              <a:t>학습자에게 "다시 해 봐" 전에 무엇을 바꿀지 묻는다. 문장 재작성보다 빈 결정과 실패를 확인하는 검사가 먼저다.</a:t>
+              <a:t>실행 일자: 2026-10-07. 도구: Claude Code 2.1.292(claude -p), 모델: claude-opus-5-5, OpenJDK 26. 교재 작성 월 2026-10을 본문에 표기했다. 시연을 재실행한 날짜라는 뜻은 아니다.</a:t>
             </a:r>
           </a:p>
           <a:p>
             <a:pPr lvl="0"/>
             <a:r>
               <a:rPr lang="ko-KR" sz="1200"/>
-              <a:t>여러 실행으로 성능을 측정하는 구체적인 평가 구성은 "세션 10. 비용과 평가"로 연결한다.</a:t>
+              <a:t>원본: code/s01/demo/demo-results/README.md와 results.json. 같은 규칙·수용 테스트를 둔 저장소 사본 세 벌에서 실행했다. 일반 입력·캐시 생성·캐시 읽기를 합친 입력 집계다.</a:t>
+            </a:r>
+          </a:p>
+          <a:p>
+            <a:pPr lvl="0"/>
+            <a:r>
+              <a:rPr lang="ko-KR" sz="1200"/>
+              <a:t>호출은 시연 실행기가 보낸 요청 횟수이고 턴은 CLI가 보고한 num_turns의 합이다. 워크플로 단계 안에서도 도구를 사용하는 여러 턴이 있었다. 활용 방식은 턴 수가 아니라 상위 경로를 누가 정했는지로 구분한다.</a:t>
+            </a:r>
+          </a:p>
+          <a:p>
+            <a:pPr lvl="0"/>
+            <a:r>
+              <a:rPr lang="ko-KR" sz="1200"/>
+              <a:t>"규칙을 지켰다"는 제공한 수용 테스트가 통과했다는 범위다. 운영 품질 전체의 증거는 아니다. 토큰 단가가 달라 입력·출력 토큰을 단순 합산한 값을 비용으로 읽지 않는다.</a:t>
             </a:r>
           </a:p>
         </p:txBody>
@@ -985,21 +918,14 @@
             <a:pPr lvl="0"/>
             <a:r>
               <a:rPr lang="ko-KR" sz="1200"/>
-              <a:t>①에는 실제 실습 1의 MD를 함께 제공한다. ②~④는 고정 횟수가 아니라 보완 단계다. 질문이 없으면 검토 결과와 수정 요청만 적고 ⑤로 파일화한다. 필요하면 보완하고 다시 생성한다.</a:t>
+              <a:t>학습자에게 "다시 해 봐" 전에 무엇을 바꿀지 묻는다. 문장 재작성보다 빈 결정과 실패를 확인하는 검사가 먼저다.</a:t>
             </a:r>
           </a:p>
           <a:p>
             <a:pPr lvl="0"/>
             <a:r>
               <a:rPr lang="ko-KR" sz="1200"/>
-              <a:t>강사 예시는 code/s02/exercise-conversation/order/에 실제 입력·응답·실행 근거를 남긴다. 강의의 여섯 일을 실습에 강제하지 않는다. 빈 저장소 실습에는 운영 이관이 필요 없다.</a:t>
-            </a:r>
-          </a:p>
-          <a:p>
-            <a:pPr lvl="0"/>
-            <a:r>
-              <a:rPr lang="ko-KR" sz="1200"/>
-              <a:t>실제 질문에 답한 뒤 다음 요청을 작성한다. 미정 H·B·F·E·G·I를 에이전트가 정책으로 정하지 않게 확인한다.</a:t>
+              <a:t>여러 실행으로 성능을 측정하는 구체적인 평가 구성은 "세션 10. 비용과 평가"로 연결한다.</a:t>
             </a:r>
           </a:p>
         </p:txBody>
@@ -1060,14 +986,21 @@
             <a:pPr lvl="0"/>
             <a:r>
               <a:rPr lang="ko-KR" sz="1200"/>
-              <a:t>모델에서 보완된 것 — 없다. 이 세션이 남기는 것은 활용 방식의 판단이며, 모델은 다음 세션부터 쌓인다.</a:t>
+              <a:t>①에는 실제 실습 1의 MD를 함께 제공한다. ②~④는 고정 횟수가 아니라 보완 단계다. 질문이 없으면 검토 결과와 수정 요청만 적고 ⑤로 파일화한다. 필요하면 보완하고 다시 생성한다.</a:t>
             </a:r>
           </a:p>
           <a:p>
             <a:pPr lvl="0"/>
             <a:r>
               <a:rPr lang="ko-KR" sz="1200"/>
-              <a:t>형식을 고른 뒤에는 무엇을 만들어야 하는지의 합의가 필요하다. 실습 2의 판단은 뒤 실습에서 검사·설계가 생기며 바뀔 수 있다.</a:t>
+              <a:t>강사 예시는 code/s02/exercise-conversation/order/에 실제 입력·응답·실행 근거를 남긴다. 강의의 여섯 일을 실습에 강제하지 않는다. 빈 저장소 실습에는 운영 이관이 필요 없다.</a:t>
+            </a:r>
+          </a:p>
+          <a:p>
+            <a:pPr lvl="0"/>
+            <a:r>
+              <a:rPr lang="ko-KR" sz="1200"/>
+              <a:t>실제 질문에 답한 뒤 다음 요청을 작성한다. 미정 H·B·F·E·G·I를 에이전트가 정책으로 정하지 않게 확인한다.</a:t>
             </a:r>
           </a:p>
         </p:txBody>
@@ -1128,327 +1061,14 @@
             <a:pPr lvl="0"/>
             <a:r>
               <a:rPr lang="ko-KR" sz="1200"/>
-              <a:t>실제 최종 응답 code/s02/exercise-conversation/order/codex-response-05.md의 전제와 여섯 일, 이어지는 「공통 전환 조건」까지가 원본 문서 전체다. 배포 MD인 활용-방식-판단.md는 응답과 바이트가 같다. 제목 단계와 목록 들여쓰기만 Session Source에 대응했고 문장·순서·강조는 바꾸지 않았다.</a:t>
+              <a:t>모델에서 보완된 것 — 없다. 이 세션이 남기는 것은 활용 방식의 판단이며, 모델은 다음 세션부터 쌓인다.</a:t>
             </a:r>
           </a:p>
           <a:p>
             <a:pPr lvl="0"/>
             <a:r>
               <a:rPr lang="ko-KR" sz="1200"/>
-              <a:t>2026-10-22에 tools/run-exercise-turn.py로 Codex CLI의 ①~⑤를 실제 실행했다. ④에서 요청 제한(429)이 두 차례 발생했고 Claude CLI도 세션 한도로 실패했다. 실패 근거와 이후 성공한 실행을 함께 남겼다.</a:t>
-            </a:r>
-          </a:p>
-          <a:p>
-            <a:pPr lvl="0"/>
-            <a:r>
-              <a:rPr lang="ko-KR" sz="1200"/>
-              <a:t>초기 초안은 주문 실행 흐름과 개발 작업을 혼동하고 검사 실행을 LLM 워크플로로 분류했다. ②~④에서 이를 고쳤다. 요구·모델·검사가 아직 없는 현재 선택과 준비 후의 조건부 선택을 나눈 결과다.</a:t>
-            </a:r>
-          </a:p>
-          <a:p>
-            <a:pPr lvl="0"/>
-            <a:r>
-              <a:rPr lang="ko-KR" sz="1200"/>
-              <a:t>실습 1의 업무 조건은 input-s01.md에 그대로 보존했다. 강의의 여섯 일과 실습의 여섯 일은 같지 않아도 된다. 빈 저장소 실습에는 운영 이관이 없다.</a:t>
-            </a:r>
-          </a:p>
-          <a:p>
-            <a:pPr lvl="0"/>
-            <a:r>
-              <a:rPr lang="ko-KR" sz="1200"/>
-              <a:t>실제로 실행한 프롬프트 — 아래가 이 별첨을 만든 입력 그대로다. 본문 실습의 ①~⑤는 수강생용 문구이고, 실제 실행은 앞 응답을 읽고 답한 내용이 붙어 길다. 원본은 code/s02/exercise-conversation/order/prompt-NN.txt다.</a:t>
-            </a:r>
-          </a:p>
-          <a:p>
-            <a:pPr lvl="1"/>
-            <a:r>
-              <a:rPr lang="ko-KR" sz="1200"/>
-              <a:t>1. 실제 프롬프트 1</a:t>
-            </a:r>
-          </a:p>
-          <a:p>
-            <a:pPr lvl="0">
-              <a:buNone/>
-            </a:pPr>
-            <a:r>
-              <a:rPr lang="ko-KR" sz="1200"/>
-              <a:t>    실습 1에서 합의한 업무 조건으로 쇼핑몰의 첫 주문 기능을 개발한다. 개발에 필요한 일 목록을 만들고 각 일의 업무 규칙 확정·절차 확정·결과의 자동 확인·되돌리기 쉬움을 살펴, 수작업·대화형 보조·워크플로·에이전트 중 충분한 가장 단순한 활용 방식을 제안해라. 아직 정하지 않은 조건은 질문하고 정책을 대신 정하지 마라. 대화창에서 검토할 간결한 초안으로 답해라.</a:t>
-            </a:r>
-          </a:p>
-          <a:p>
-            <a:pPr lvl="0">
-              <a:buNone/>
-            </a:pPr>
-            <a:r>
-              <a:rPr lang="ko-KR" sz="1200"/>
-              <a:t>    [실습 1의 업무 조건] # "주문한다" 업무 조건</a:t>
-            </a:r>
-          </a:p>
-          <a:p>
-            <a:pPr lvl="0">
-              <a:buNone/>
-            </a:pPr>
-            <a:r>
-              <a:rPr lang="ko-KR" sz="1200"/>
-              <a:t>    ## 범위</a:t>
-            </a:r>
-          </a:p>
-          <a:p>
-            <a:pPr lvl="2"/>
-            <a:r>
-              <a:rPr lang="ko-KR" sz="1200"/>
-              <a:t>대상: 고객이 장바구니에서 주문을 시작하고, 배송지를 확정한 뒤 카드 결제 승인을 받아 주문이 성립할 때까지다.</a:t>
-            </a:r>
-          </a:p>
-          <a:p>
-            <a:pPr lvl="2"/>
-            <a:r>
-              <a:rPr lang="ko-KR" sz="1200"/>
-              <a:t>연계 대상(이미 운영 중인 외부 시스템): 상품 시스템(판매가, 재고), 결제 시스템(카드 승인), 배송 시스템(배송 요청 수신).</a:t>
-            </a:r>
-          </a:p>
-          <a:p>
-            <a:pPr lvl="2"/>
-            <a:r>
-              <a:rPr lang="ko-KR" sz="1200"/>
-              <a:t>제외: 화면, 기술 설계, 결제 이후 운영(취소, 환불, 반품, 교환, 배송 진행), 카드 외 결제 수단, 배송비, 쿠폰과 할인.</a:t>
-            </a:r>
-          </a:p>
-          <a:p>
-            <a:pPr lvl="0">
-              <a:buNone/>
-            </a:pPr>
-            <a:r>
-              <a:rPr lang="ko-KR" sz="1200"/>
-              <a:t>    ## 주문 생성</a:t>
-            </a:r>
-          </a:p>
-          <a:p>
-            <a:pPr lvl="2"/>
-            <a:r>
-              <a:rPr lang="ko-KR" sz="1200"/>
-              <a:t>고객이 배송지를 확정하면 주문이 생기고, 주문 상태는 결제대기가 된다.</a:t>
-            </a:r>
-          </a:p>
-          <a:p>
-            <a:pPr lvl="2"/>
-            <a:r>
-              <a:rPr lang="ko-KR" sz="1200"/>
-              <a:t>주문자와 수령인은 같은 사람으로 본다.</a:t>
-            </a:r>
-          </a:p>
-          <a:p>
-            <a:pPr lvl="2"/>
-            <a:r>
-              <a:rPr lang="ko-KR" sz="1200"/>
-              <a:t>[미정 H] 비회원 주문을 허용하는지, 허용한다면 결제대기 주문을 다시 찾을 때 본인을 어떻게 확인하는지 정해지지 않았다.</a:t>
-            </a:r>
-          </a:p>
-          <a:p>
-            <a:pPr lvl="0">
-              <a:buNone/>
-            </a:pPr>
-            <a:r>
-              <a:rPr lang="ko-KR" sz="1200"/>
-              <a:t>    ## 주문 금액</a:t>
-            </a:r>
-          </a:p>
-          <a:p>
-            <a:pPr lvl="2"/>
-            <a:r>
-              <a:rPr lang="ko-KR" sz="1200"/>
-              <a:t>주문 금액은 항목마다 주문 생성 시점의 판매가(단가)에 수량을 곱해 모두 더한 값이다.</a:t>
-            </a:r>
-          </a:p>
-          <a:p>
-            <a:pPr lvl="2"/>
-            <a:r>
-              <a:rPr lang="ko-KR" sz="1200"/>
-              <a:t>주문이 생긴 뒤 판매가가 오르거나 내려도 주문 금액은 바뀌지 않으며, 그 금액을 청구한다.</a:t>
-            </a:r>
-          </a:p>
-          <a:p>
-            <a:pPr lvl="0">
-              <a:buNone/>
-            </a:pPr>
-            <a:r>
-              <a:rPr lang="ko-KR" sz="1200"/>
-              <a:t>    ## 결제대기</a:t>
-            </a:r>
-          </a:p>
-          <a:p>
-            <a:pPr lvl="2"/>
-            <a:r>
-              <a:rPr lang="ko-KR" sz="1200"/>
-              <a:t>결제대기 중에는 상품, 수량, 배송지를 바꿀 수 없다. 바꾸려면 새로 주문한다.</a:t>
-            </a:r>
-          </a:p>
-          <a:p>
-            <a:pPr lvl="2"/>
-            <a:r>
-              <a:rPr lang="ko-KR" sz="1200"/>
-              <a:t>카드 결제가 거절되면 주문을 취소하지 않고 결제대기로 남겨, 고객이 다른 카드로 다시 결제할 수 있게 한다.</a:t>
-            </a:r>
-          </a:p>
-          <a:p>
-            <a:pPr lvl="2"/>
-            <a:r>
-              <a:rPr lang="ko-KR" sz="1200"/>
-              <a:t>[미정 B] 결제대기의 기한과 기한이 지난 뒤의 처리가 정해지지 않았다. 구현에서 만료, 취소, 삭제, 결제 차단을 임의로 정하지 않는다.</a:t>
-            </a:r>
-          </a:p>
-          <a:p>
-            <a:pPr lvl="0">
-              <a:buNone/>
-            </a:pPr>
-            <a:r>
-              <a:rPr lang="ko-KR" sz="1200"/>
-              <a:t>    ## 결제와 주문 성립</a:t>
-            </a:r>
-          </a:p>
-          <a:p>
-            <a:pPr lvl="2"/>
-            <a:r>
-              <a:rPr lang="ko-KR" sz="1200"/>
-              <a:t>결제 수단은 카드뿐이다.</a:t>
-            </a:r>
-          </a:p>
-          <a:p>
-            <a:pPr lvl="2"/>
-            <a:r>
-              <a:rPr lang="ko-KR" sz="1200"/>
-              <a:t>카드 승인이 완료된 때 주문이 성립한다.</a:t>
-            </a:r>
-          </a:p>
-          <a:p>
-            <a:pPr lvl="2"/>
-            <a:r>
-              <a:rPr lang="ko-KR" sz="1200"/>
-              <a:t>결제 시스템의 응답을 확정할 수 없으면 그 응답을 실패로 바꾸지 않는다.</a:t>
-            </a:r>
-          </a:p>
-          <a:p>
-            <a:pPr lvl="2"/>
-            <a:r>
-              <a:rPr lang="ko-KR" sz="1200"/>
-              <a:t>[미정 F] 응답을 확정할 수 없을 때 이후 처리(재결제 허용 여부 포함)가 정해지지 않았다. 구현에서 성공이나 실패를 임의로 확정하지 않는다.</a:t>
-            </a:r>
-          </a:p>
-          <a:p>
-            <a:pPr lvl="0">
-              <a:buNone/>
-            </a:pPr>
-            <a:r>
-              <a:rPr lang="ko-KR" sz="1200"/>
-              <a:t>    ## 재고</a:t>
-            </a:r>
-          </a:p>
-          <a:p>
-            <a:pPr lvl="2"/>
-            <a:r>
-              <a:rPr lang="ko-KR" sz="1200"/>
-              <a:t>재고는 상품 시스템의 판단을 그대로 따르며, 주문 쪽에서 재고를 따로 확보하지 않는다.</a:t>
-            </a:r>
-          </a:p>
-          <a:p>
-            <a:pPr lvl="2"/>
-            <a:r>
-              <a:rPr lang="ko-KR" sz="1200"/>
-              <a:t>[미정 E] 승인 뒤 재고가 없을 때의 처리가 정해지지 않았다. 구현에서 승인 취소나 주문 상태 변경을 임의로 하지 않는다.</a:t>
-            </a:r>
-          </a:p>
-          <a:p>
-            <a:pPr lvl="0">
-              <a:buNone/>
-            </a:pPr>
-            <a:r>
-              <a:rPr lang="ko-KR" sz="1200"/>
-              <a:t>    ## 배송 요청</a:t>
-            </a:r>
-          </a:p>
-          <a:p>
-            <a:pPr lvl="2"/>
-            <a:r>
-              <a:rPr lang="ko-KR" sz="1200"/>
-              <a:t>배송 시스템에는 카드 승인 뒤에만 배송을 요청한다.</a:t>
-            </a:r>
-          </a:p>
-          <a:p>
-            <a:pPr lvl="2"/>
-            <a:r>
-              <a:rPr lang="ko-KR" sz="1200"/>
-              <a:t>[미정 G] 승인 뒤 배송 요청이 실패했을 때의 처리가 정해지지 않았다. 구현에서 승인 취소, 주문 상태 변경, 재요청 주체와 방식을 임의로 정하지 않는다.</a:t>
-            </a:r>
-          </a:p>
-          <a:p>
-            <a:pPr lvl="2"/>
-            <a:r>
-              <a:rPr lang="ko-KR" sz="1200"/>
-              <a:t>[미정 I] 주문 확인 통지를 이 시스템이 보내는지, 다른 시스템의 통지로 대신하는지 정해지지 않았다.</a:t>
-            </a:r>
-          </a:p>
-          <a:p>
-            <a:pPr lvl="1"/>
-            <a:r>
-              <a:rPr lang="ko-KR" sz="1200"/>
-              <a:t>2. 실제 프롬프트 2</a:t>
-            </a:r>
-          </a:p>
-          <a:p>
-            <a:pPr lvl="0">
-              <a:buNone/>
-            </a:pPr>
-            <a:r>
-              <a:rPr lang="ko-KR" sz="1200"/>
-              <a:t>    [앞선 질문에 대한 답] H·B·F·E·G·I는 실습 1에서 의도적으로 미정으로 남겼으므로 지금 결정하지 않는다. 재고 판단 시점과 중복 처리도 이번 활용 방식 판단에서 새로 정하지 않는다. 개발할 일은 확정된 범위와 미정 분기를 구분하면 된다. 운영 결제·배송 호출과 실제 고객 데이터는 쓰지 않고 인터페이스와 테스트 대역만 쓴다. 실습은 빈 로컬 저장소라 데이터 이관은 없다. [추가 질문·수정 요청] 목록이 기능 흐름의 분기와 미정 질문 위주다. 업무 규칙의 결정·초안 작성·코드 구현·운영 실행을 구분해 첫 기능 개발에 필요한 일 목록으로 고쳐라. 필요한 일은 업무 조건 확인, 요구와 수용 기준, 모델·설계, 저장소 골격, 코드 구현과 검사, 릴리스 설명의 수준에서 간결하게 묶어라. 업무 담당자의 결정은 수작업이고 LLM은 질문·초안을 돕는다고 구분해라. 미정을 자동화해 워크플로로 전환한다고 쓰지 마라. 아직 없는 테스트를 이미 있다고 판정하지 말고 준비 조건으로 표시해라. 개발 절차와 주문 실행 흐름을 혼동하지 말고 도식은 생략해라.</a:t>
-            </a:r>
-          </a:p>
-          <a:p>
-            <a:pPr lvl="1"/>
-            <a:r>
-              <a:rPr lang="ko-KR" sz="1200"/>
-              <a:t>3. 실제 프롬프트 3</a:t>
-            </a:r>
-          </a:p>
-          <a:p>
-            <a:pPr lvl="0">
-              <a:buNone/>
-            </a:pPr>
-            <a:r>
-              <a:rPr lang="ko-KR" sz="1200"/>
-              <a:t>    [앞선 질문에 대한 답] 검사·설계·완료条件은 뒤 실습에서 만든다. 지금은 활용 방식 선택을 위한 준비 조건만 적는다. 업무 정책은 미정으로 유지하며 미정 분기의 반환값·새 상태·실패 처리도 여기서 설계하지 않는다. 구현은 로컬의 작은 변경이고 Git으로 되돌릴 수 있다. [추가 질문·수정 요청] 에이전트로 고른 일이 없다면 억지로 추가하지 마라. 다만 '범위가 작아서 에이전트가 불필요'라는 일반화는 고쳐라. 자동 검사와 되돌림이 준비되면 작은 코드 작업도 에이전트에 맡길 수 있다. 현재와 준비 후의 선택을 구분해라. 반대로 gradle check 같은 결정적인 검사 명령 자체는 LLM 워크플로가 아니라 일반 자동화다. 워크플로는 LLM과 도구를 미리 정한 코드 경로로 조율할 때만 쓰는 용어다. 일이 너무 세분됐다. 업무 조건 결정, 요구·모델·설계 초안, 저장소 골격, 확정 범위 코드 구현, 검사 작성·실행, 릴리스 설명 수준으로 묶고 업무 규칙·절차·자동 확인·되돌림 네 특성을 빠뜨리지 마라. 뒤 실습의 요구사항·모델·인터페이스를 지금 만들지는 마라.</a:t>
-            </a:r>
-          </a:p>
-          <a:p>
-            <a:pPr lvl="1"/>
-            <a:r>
-              <a:rPr lang="ko-KR" sz="1200"/>
-              <a:t>4. 실제 프롬프트 4</a:t>
-            </a:r>
-          </a:p>
-          <a:p>
-            <a:pPr lvl="0">
-              <a:buNone/>
-            </a:pPr>
-            <a:r>
-              <a:rPr lang="ko-KR" sz="1200"/>
-              <a:t>    [앞선 질문에 대한 답] 현재는 담당자가 결정하고 LLM 초안을 매번 확인하는 방식으로 충분하다. 지금 에이전트를 쓸 필요는 없다. 뒤 실습에서 검사가 생겨도 실제로 오류를 잡는지 사람이 확인한 뒤 전환 여부를 판단한다. 코드 변경은 Git으로 되돌리되 외부 부작용은 이 실습에 없다. [추가 질문·수정 요청] 표현을 고쳐라. '완료 조건이 결정적' 대신 '완료 조건이 명확하고 자동 검사로 판정 가능'이라고 해라. 에이전트는 절차를 사전에 고정할 수 없어 실행 결과로 다음 행동을 정해야 할 때 검토한다. 절차를 고정할 수 있으면 워크플로 또는 일반 자동화로 충분하다. 자율성이 높다고 좋은 것이 아니다. 현재 선택의 근거에 비용과 사람의 확인 시점을 짧게 더해라. 대화형 보조는 답마다, 워크플로는 정한 단계마다, 에이전트는 종료·중단 시점에 사람이 확인한다. 단가·횟수·시간은 아직 재지 않았으니 수치를 만들지 마라. 최종 문서는 여섯 일만 남기고 준비 후 선택은 조건부로 써라. 표 대신 일별 짧은 목록으로 정리할 수 있다. 요구·모델·코드 내용은 만들지 마라.</a:t>
-            </a:r>
-          </a:p>
-          <a:p>
-            <a:pPr lvl="1"/>
-            <a:r>
-              <a:rPr lang="ko-KR" sz="1200"/>
-              <a:t>5. 실제 프롬프트 5</a:t>
-            </a:r>
-          </a:p>
-          <a:p>
-            <a:pPr lvl="0">
-              <a:buNone/>
-            </a:pPr>
-            <a:r>
-              <a:rPr lang="ko-KR" sz="1200"/>
-              <a:t>    합의한 첫 주문 기능 개발의 일 목록과 작업 특성·활용 방식·근거를 간결한 Markdown 파일로 생성해라. 새 정책·구현을 추가하지 말고 미정과 자율성을 올릴 조건은 필요한 일에만 짧게 남겨라. 마지막 초안의 여섯 일과 현재 선택을 그대로 유지해라. 지금은 요구·모델·설계·코드·검사 내용을 만들지 않는다는 범위를 유지해라. 실습 1에서 미정으로 남긴 조건을 확정하지 마라. 문서는 짧은 전제 한 문단, 여섯 일의 번호 목록, 공통 전환 조건만 남겨라. 각 일은 '특성: 업무 규칙 / 절차 / 자동 확인 / 되돌림', '선택·근거와 사람 확인 시점'의 짧은 두 항목으로 묶어라. 같은 조건을 각 일마다 반복하지 말고 공통 조건에 한 번만 써라. 비용은 계측 전이라 수치를 쓰지 말고 현재는 실행 체계 구성과 검토 비용을 줄이는 선택임을 짧게 밝힌다. 도식이나 큰 표, 부가 체크리스트, 다음 실습의 실제 산출물을 추가하지 마라. 앞에서 합의한 내용만 파일화해라.</a:t>
+              <a:t>활용 방식을 고른 뒤에는 무엇을 만들어야 하는지의 합의가 필요하다. 실습 2의 판단은 뒤 실습에서 검사·설계가 생기며 바뀔 수 있다.</a:t>
             </a:r>
           </a:p>
         </p:txBody>
@@ -1516,7 +1136,395 @@
             <a:pPr lvl="0"/>
             <a:r>
               <a:rPr lang="ko-KR" sz="1200"/>
-              <a:t>"세션 01. 사람의 일과 AI의 일"의 첫 시도를 재료의 성질로 다시 설명한다. 새 구현 코드는 넣지 않는다.</a:t>
+              <a:t>"세션 01. 사람의 일과 AI의 일"의 첫 시도를 도구의 성질로 다시 설명한다. 새 구현 코드는 넣지 않는다.</a:t>
+            </a:r>
+          </a:p>
+          <a:p>
+            <a:pPr lvl="0"/>
+            <a:r>
+              <a:rPr lang="ko-KR" sz="1200"/>
+              <a:t>도구라는 말을 쓰는 근거는 [Fowler 2025]의 "non-deterministic tools"다. 이 세션 뒤쪽의 도구(검색·도구·기억, 도구 실행)는 LLM이 호출하는 기능을 뜻하므로 처음 나올 때 구분해 말한다.</a:t>
+            </a:r>
+          </a:p>
+        </p:txBody>
+      </p:sp>
+    </p:spTree>
+  </p:cSld>
+  <p:clrMapOvr>
+    <a:masterClrMapping/>
+  </p:clrMapOvr>
+</p:notes>
+</file>
+
+<file path=ppt/notesSlides/notesSlide20.xml><?xml version="1.0" encoding="utf-8"?>
+<p:notes xmlns:a="http://schemas.openxmlformats.org/drawingml/2006/main" xmlns:r="http://schemas.openxmlformats.org/officeDocument/2006/relationships" xmlns:p="http://schemas.openxmlformats.org/presentationml/2006/main">
+  <p:cSld>
+    <p:spTree>
+      <p:nvGrpSpPr>
+        <p:cNvPr id="1" name=""/>
+        <p:cNvGrpSpPr/>
+        <p:nvPr/>
+      </p:nvGrpSpPr>
+      <p:grpSpPr>
+        <a:xfrm>
+          <a:off x="0" y="0"/>
+          <a:ext cx="0" cy="0"/>
+          <a:chOff x="0" y="0"/>
+          <a:chExt cx="0" cy="0"/>
+        </a:xfrm>
+      </p:grpSpPr>
+      <p:sp>
+        <p:nvSpPr>
+          <p:cNvPr id="2" name="슬라이드 이미지 개체 틀"/>
+          <p:cNvSpPr/>
+          <p:nvPr>
+            <p:ph type="sldImg" idx="2"/>
+          </p:nvPr>
+        </p:nvSpPr>
+        <p:spPr/>
+        <p:txBody>
+          <a:bodyPr/>
+          <a:lstStyle/>
+          <a:p/>
+        </p:txBody>
+      </p:sp>
+      <p:sp>
+        <p:nvSpPr>
+          <p:cNvPr id="3" name="슬라이드 노트 개체 틀"/>
+          <p:cNvSpPr/>
+          <p:nvPr>
+            <p:ph type="body" idx="3"/>
+          </p:nvPr>
+        </p:nvSpPr>
+        <p:spPr/>
+        <p:txBody>
+          <a:bodyPr/>
+          <a:lstStyle/>
+          <a:p>
+            <a:pPr lvl="0"/>
+            <a:r>
+              <a:rPr lang="ko-KR" sz="1200"/>
+              <a:t>실제 최종 응답 code/s02/exercise-conversation/order/codex-response-05.md의 전제와 여섯 일, 이어지는 「공통 전환 조건」까지가 원본 문서 전체다. 배포 MD인 활용-방식-판단.md는 응답과 바이트가 같다. 제목 단계와 목록 들여쓰기만 Session Source에 대응했고 문장·순서·강조는 바꾸지 않았다.</a:t>
+            </a:r>
+          </a:p>
+          <a:p>
+            <a:pPr lvl="0"/>
+            <a:r>
+              <a:rPr lang="ko-KR" sz="1200"/>
+              <a:t>2026-10-22에 tools/run-exercise-turn.py로 Codex CLI의 ①~⑤를 실제 실행했다. ④에서 요청 제한(429)이 두 차례 발생했고 Claude CLI도 세션 한도로 실패했다. 실패 근거와 이후 성공한 실행을 함께 남겼다.</a:t>
+            </a:r>
+          </a:p>
+          <a:p>
+            <a:pPr lvl="0"/>
+            <a:r>
+              <a:rPr lang="ko-KR" sz="1200"/>
+              <a:t>초기 초안은 주문 실행 흐름과 개발 작업을 혼동하고 검사 실행을 LLM 워크플로로 분류했다. ②~④에서 이를 고쳤다. 요구·모델·검사가 아직 없는 현재 선택과 준비 후의 조건부 선택을 나눈 결과다.</a:t>
+            </a:r>
+          </a:p>
+          <a:p>
+            <a:pPr lvl="0"/>
+            <a:r>
+              <a:rPr lang="ko-KR" sz="1200"/>
+              <a:t>실습 1의 업무 조건은 input-s01.md에 그대로 보존했다. 강의의 여섯 일과 실습의 여섯 일은 같지 않아도 된다. 빈 저장소 실습에는 운영 이관이 없다.</a:t>
+            </a:r>
+          </a:p>
+          <a:p>
+            <a:pPr lvl="0"/>
+            <a:r>
+              <a:rPr lang="ko-KR" sz="1200"/>
+              <a:t>실제로 실행한 프롬프트 — 아래가 이 별첨을 만든 입력 그대로다. 본문 실습의 ①~⑤는 수강생용 문구이고, 실제 실행은 앞 응답을 읽고 답한 내용이 붙어 길다. 원본은 code/s02/exercise-conversation/order/prompt-NN.txt다.</a:t>
+            </a:r>
+          </a:p>
+          <a:p>
+            <a:pPr lvl="1"/>
+            <a:r>
+              <a:rPr lang="ko-KR" sz="1200"/>
+              <a:t>1. 실제 프롬프트 1</a:t>
+            </a:r>
+          </a:p>
+          <a:p>
+            <a:pPr lvl="0">
+              <a:buNone/>
+            </a:pPr>
+            <a:r>
+              <a:rPr lang="ko-KR" sz="1200"/>
+              <a:t>    실습 1에서 합의한 업무 조건으로 쇼핑몰의 첫 주문 기능을 개발한다. 개발에 필요한 일 목록을 만들고 각 일의 업무 규칙 확정·절차 확정·결과의 자동 확인·되돌리기 쉬움을 살펴, 수작업·대화형 보조·워크플로·에이전트 중 충분한 가장 단순한 활용 방식을 제안해라. 아직 정하지 않은 조건은 질문하고 정책을 대신 정하지 마라. 대화창에서 검토할 간결한 초안으로 답해라.</a:t>
+            </a:r>
+          </a:p>
+          <a:p>
+            <a:pPr lvl="0">
+              <a:buNone/>
+            </a:pPr>
+            <a:r>
+              <a:rPr lang="ko-KR" sz="1200"/>
+              <a:t>    [실습 1의 업무 조건] # "주문한다" 업무 조건</a:t>
+            </a:r>
+          </a:p>
+          <a:p>
+            <a:pPr lvl="0">
+              <a:buNone/>
+            </a:pPr>
+            <a:r>
+              <a:rPr lang="ko-KR" sz="1200"/>
+              <a:t>    ## 범위</a:t>
+            </a:r>
+          </a:p>
+          <a:p>
+            <a:pPr lvl="2"/>
+            <a:r>
+              <a:rPr lang="ko-KR" sz="1200"/>
+              <a:t>대상: 고객이 장바구니에서 주문을 시작하고, 배송지를 확정한 뒤 카드 결제 승인을 받아 주문이 성립할 때까지다.</a:t>
+            </a:r>
+          </a:p>
+          <a:p>
+            <a:pPr lvl="2"/>
+            <a:r>
+              <a:rPr lang="ko-KR" sz="1200"/>
+              <a:t>연계 대상(이미 운영 중인 외부 시스템): 상품 시스템(판매가, 재고), 결제 시스템(카드 승인), 배송 시스템(배송 요청 수신).</a:t>
+            </a:r>
+          </a:p>
+          <a:p>
+            <a:pPr lvl="2"/>
+            <a:r>
+              <a:rPr lang="ko-KR" sz="1200"/>
+              <a:t>제외: 화면, 기술 설계, 결제 이후 운영(취소, 환불, 반품, 교환, 배송 진행), 카드 외 결제 수단, 배송비, 쿠폰과 할인.</a:t>
+            </a:r>
+          </a:p>
+          <a:p>
+            <a:pPr lvl="0">
+              <a:buNone/>
+            </a:pPr>
+            <a:r>
+              <a:rPr lang="ko-KR" sz="1200"/>
+              <a:t>    ## 주문 생성</a:t>
+            </a:r>
+          </a:p>
+          <a:p>
+            <a:pPr lvl="2"/>
+            <a:r>
+              <a:rPr lang="ko-KR" sz="1200"/>
+              <a:t>고객이 배송지를 확정하면 주문이 생기고, 주문 상태는 결제대기가 된다.</a:t>
+            </a:r>
+          </a:p>
+          <a:p>
+            <a:pPr lvl="2"/>
+            <a:r>
+              <a:rPr lang="ko-KR" sz="1200"/>
+              <a:t>주문자와 수령인은 같은 사람으로 본다.</a:t>
+            </a:r>
+          </a:p>
+          <a:p>
+            <a:pPr lvl="2"/>
+            <a:r>
+              <a:rPr lang="ko-KR" sz="1200"/>
+              <a:t>[미정 H] 비회원 주문을 허용하는지, 허용한다면 결제대기 주문을 다시 찾을 때 본인을 어떻게 확인하는지 정해지지 않았다.</a:t>
+            </a:r>
+          </a:p>
+          <a:p>
+            <a:pPr lvl="0">
+              <a:buNone/>
+            </a:pPr>
+            <a:r>
+              <a:rPr lang="ko-KR" sz="1200"/>
+              <a:t>    ## 주문 금액</a:t>
+            </a:r>
+          </a:p>
+          <a:p>
+            <a:pPr lvl="2"/>
+            <a:r>
+              <a:rPr lang="ko-KR" sz="1200"/>
+              <a:t>주문 금액은 항목마다 주문 생성 시점의 판매가(단가)에 수량을 곱해 모두 더한 값이다.</a:t>
+            </a:r>
+          </a:p>
+          <a:p>
+            <a:pPr lvl="2"/>
+            <a:r>
+              <a:rPr lang="ko-KR" sz="1200"/>
+              <a:t>주문이 생긴 뒤 판매가가 오르거나 내려도 주문 금액은 바뀌지 않으며, 그 금액을 청구한다.</a:t>
+            </a:r>
+          </a:p>
+          <a:p>
+            <a:pPr lvl="0">
+              <a:buNone/>
+            </a:pPr>
+            <a:r>
+              <a:rPr lang="ko-KR" sz="1200"/>
+              <a:t>    ## 결제대기</a:t>
+            </a:r>
+          </a:p>
+          <a:p>
+            <a:pPr lvl="2"/>
+            <a:r>
+              <a:rPr lang="ko-KR" sz="1200"/>
+              <a:t>결제대기 중에는 상품, 수량, 배송지를 바꿀 수 없다. 바꾸려면 새로 주문한다.</a:t>
+            </a:r>
+          </a:p>
+          <a:p>
+            <a:pPr lvl="2"/>
+            <a:r>
+              <a:rPr lang="ko-KR" sz="1200"/>
+              <a:t>카드 결제가 거절되면 주문을 취소하지 않고 결제대기로 남겨, 고객이 다른 카드로 다시 결제할 수 있게 한다.</a:t>
+            </a:r>
+          </a:p>
+          <a:p>
+            <a:pPr lvl="2"/>
+            <a:r>
+              <a:rPr lang="ko-KR" sz="1200"/>
+              <a:t>[미정 B] 결제대기의 기한과 기한이 지난 뒤의 처리가 정해지지 않았다. 구현에서 만료, 취소, 삭제, 결제 차단을 임의로 정하지 않는다.</a:t>
+            </a:r>
+          </a:p>
+          <a:p>
+            <a:pPr lvl="0">
+              <a:buNone/>
+            </a:pPr>
+            <a:r>
+              <a:rPr lang="ko-KR" sz="1200"/>
+              <a:t>    ## 결제와 주문 성립</a:t>
+            </a:r>
+          </a:p>
+          <a:p>
+            <a:pPr lvl="2"/>
+            <a:r>
+              <a:rPr lang="ko-KR" sz="1200"/>
+              <a:t>결제 수단은 카드뿐이다.</a:t>
+            </a:r>
+          </a:p>
+          <a:p>
+            <a:pPr lvl="2"/>
+            <a:r>
+              <a:rPr lang="ko-KR" sz="1200"/>
+              <a:t>카드 승인이 완료된 때 주문이 성립한다.</a:t>
+            </a:r>
+          </a:p>
+          <a:p>
+            <a:pPr lvl="2"/>
+            <a:r>
+              <a:rPr lang="ko-KR" sz="1200"/>
+              <a:t>결제 시스템의 응답을 확정할 수 없으면 그 응답을 실패로 바꾸지 않는다.</a:t>
+            </a:r>
+          </a:p>
+          <a:p>
+            <a:pPr lvl="2"/>
+            <a:r>
+              <a:rPr lang="ko-KR" sz="1200"/>
+              <a:t>[미정 F] 응답을 확정할 수 없을 때 이후 처리(재결제 허용 여부 포함)가 정해지지 않았다. 구현에서 성공이나 실패를 임의로 확정하지 않는다.</a:t>
+            </a:r>
+          </a:p>
+          <a:p>
+            <a:pPr lvl="0">
+              <a:buNone/>
+            </a:pPr>
+            <a:r>
+              <a:rPr lang="ko-KR" sz="1200"/>
+              <a:t>    ## 재고</a:t>
+            </a:r>
+          </a:p>
+          <a:p>
+            <a:pPr lvl="2"/>
+            <a:r>
+              <a:rPr lang="ko-KR" sz="1200"/>
+              <a:t>재고는 상품 시스템의 판단을 그대로 따르며, 주문 쪽에서 재고를 따로 확보하지 않는다.</a:t>
+            </a:r>
+          </a:p>
+          <a:p>
+            <a:pPr lvl="2"/>
+            <a:r>
+              <a:rPr lang="ko-KR" sz="1200"/>
+              <a:t>[미정 E] 승인 뒤 재고가 없을 때의 처리가 정해지지 않았다. 구현에서 승인 취소나 주문 상태 변경을 임의로 하지 않는다.</a:t>
+            </a:r>
+          </a:p>
+          <a:p>
+            <a:pPr lvl="0">
+              <a:buNone/>
+            </a:pPr>
+            <a:r>
+              <a:rPr lang="ko-KR" sz="1200"/>
+              <a:t>    ## 배송 요청</a:t>
+            </a:r>
+          </a:p>
+          <a:p>
+            <a:pPr lvl="2"/>
+            <a:r>
+              <a:rPr lang="ko-KR" sz="1200"/>
+              <a:t>배송 시스템에는 카드 승인 뒤에만 배송을 요청한다.</a:t>
+            </a:r>
+          </a:p>
+          <a:p>
+            <a:pPr lvl="2"/>
+            <a:r>
+              <a:rPr lang="ko-KR" sz="1200"/>
+              <a:t>[미정 G] 승인 뒤 배송 요청이 실패했을 때의 처리가 정해지지 않았다. 구현에서 승인 취소, 주문 상태 변경, 재요청 주체와 방식을 임의로 정하지 않는다.</a:t>
+            </a:r>
+          </a:p>
+          <a:p>
+            <a:pPr lvl="2"/>
+            <a:r>
+              <a:rPr lang="ko-KR" sz="1200"/>
+              <a:t>[미정 I] 주문 확인 통지를 이 시스템이 보내는지, 다른 시스템의 통지로 대신하는지 정해지지 않았다.</a:t>
+            </a:r>
+          </a:p>
+          <a:p>
+            <a:pPr lvl="1"/>
+            <a:r>
+              <a:rPr lang="ko-KR" sz="1200"/>
+              <a:t>2. 실제 프롬프트 2</a:t>
+            </a:r>
+          </a:p>
+          <a:p>
+            <a:pPr lvl="0">
+              <a:buNone/>
+            </a:pPr>
+            <a:r>
+              <a:rPr lang="ko-KR" sz="1200"/>
+              <a:t>    [앞선 질문에 대한 답] H·B·F·E·G·I는 실습 1에서 의도적으로 미정으로 남겼으므로 지금 결정하지 않는다. 재고 판단 시점과 중복 처리도 이번 활용 방식 판단에서 새로 정하지 않는다. 개발할 일은 확정된 범위와 미정 분기를 구분하면 된다. 운영 결제·배송 호출과 실제 고객 데이터는 쓰지 않고 인터페이스와 테스트 대역만 쓴다. 실습은 빈 로컬 저장소라 데이터 이관은 없다. [추가 질문·수정 요청] 목록이 기능 흐름의 분기와 미정 질문 위주다. 업무 규칙의 결정·초안 작성·코드 구현·운영 실행을 구분해 첫 기능 개발에 필요한 일 목록으로 고쳐라. 필요한 일은 업무 조건 확인, 요구와 수용 기준, 모델·설계, 저장소 골격, 코드 구현과 검사, 릴리스 설명의 수준에서 간결하게 묶어라. 업무 담당자의 결정은 수작업이고 LLM은 질문·초안을 돕는다고 구분해라. 미정을 자동화해 워크플로로 전환한다고 쓰지 마라. 아직 없는 테스트를 이미 있다고 판정하지 말고 준비 조건으로 표시해라. 개발 절차와 주문 실행 흐름을 혼동하지 말고 도식은 생략해라.</a:t>
+            </a:r>
+          </a:p>
+          <a:p>
+            <a:pPr lvl="1"/>
+            <a:r>
+              <a:rPr lang="ko-KR" sz="1200"/>
+              <a:t>3. 실제 프롬프트 3</a:t>
+            </a:r>
+          </a:p>
+          <a:p>
+            <a:pPr lvl="0">
+              <a:buNone/>
+            </a:pPr>
+            <a:r>
+              <a:rPr lang="ko-KR" sz="1200"/>
+              <a:t>    [앞선 질문에 대한 답] 검사·설계·완료条件은 뒤 실습에서 만든다. 지금은 활용 방식 선택을 위한 준비 조건만 적는다. 업무 정책은 미정으로 유지하며 미정 분기의 반환값·새 상태·실패 처리도 여기서 설계하지 않는다. 구현은 로컬의 작은 변경이고 Git으로 되돌릴 수 있다. [추가 질문·수정 요청] 에이전트로 고른 일이 없다면 억지로 추가하지 마라. 다만 '범위가 작아서 에이전트가 불필요'라는 일반화는 고쳐라. 자동 검사와 되돌림이 준비되면 작은 코드 작업도 에이전트에 맡길 수 있다. 현재와 준비 후의 선택을 구분해라. 반대로 gradle check 같은 결정적인 검사 명령 자체는 LLM 워크플로가 아니라 일반 자동화다. 워크플로는 LLM과 도구를 미리 정한 코드 경로로 조율할 때만 쓰는 용어다. 일이 너무 세분됐다. 업무 조건 결정, 요구·모델·설계 초안, 저장소 골격, 확정 범위 코드 구현, 검사 작성·실행, 릴리스 설명 수준으로 묶고 업무 규칙·절차·자동 확인·되돌림 네 특성을 빠뜨리지 마라. 뒤 실습의 요구사항·모델·인터페이스를 지금 만들지는 마라.</a:t>
+            </a:r>
+          </a:p>
+          <a:p>
+            <a:pPr lvl="1"/>
+            <a:r>
+              <a:rPr lang="ko-KR" sz="1200"/>
+              <a:t>4. 실제 프롬프트 4</a:t>
+            </a:r>
+          </a:p>
+          <a:p>
+            <a:pPr lvl="0">
+              <a:buNone/>
+            </a:pPr>
+            <a:r>
+              <a:rPr lang="ko-KR" sz="1200"/>
+              <a:t>    [앞선 질문에 대한 답] 현재는 담당자가 결정하고 LLM 초안을 매번 확인하는 방식으로 충분하다. 지금 에이전트를 쓸 필요는 없다. 뒤 실습에서 검사가 생겨도 실제로 오류를 잡는지 사람이 확인한 뒤 전환 여부를 판단한다. 코드 변경은 Git으로 되돌리되 외부 부작용은 이 실습에 없다. [추가 질문·수정 요청] 표현을 고쳐라. '완료 조건이 결정적' 대신 '완료 조건이 명확하고 자동 검사로 판정 가능'이라고 해라. 에이전트는 절차를 사전에 고정할 수 없어 실행 결과로 다음 행동을 정해야 할 때 검토한다. 절차를 고정할 수 있으면 워크플로 또는 일반 자동화로 충분하다. 자율성이 높다고 좋은 것이 아니다. 현재 선택의 근거에 비용과 사람의 확인 시점을 짧게 더해라. 대화형 보조는 답마다, 워크플로는 정한 단계마다, 에이전트는 종료·중단 시점에 사람이 확인한다. 단가·횟수·시간은 아직 재지 않았으니 수치를 만들지 마라. 최종 문서는 여섯 일만 남기고 준비 후 선택은 조건부로 써라. 표 대신 일별 짧은 목록으로 정리할 수 있다. 요구·모델·코드 내용은 만들지 마라.</a:t>
+            </a:r>
+          </a:p>
+          <a:p>
+            <a:pPr lvl="1"/>
+            <a:r>
+              <a:rPr lang="ko-KR" sz="1200"/>
+              <a:t>5. 실제 프롬프트 5</a:t>
+            </a:r>
+          </a:p>
+          <a:p>
+            <a:pPr lvl="0">
+              <a:buNone/>
+            </a:pPr>
+            <a:r>
+              <a:rPr lang="ko-KR" sz="1200"/>
+              <a:t>    합의한 첫 주문 기능 개발의 일 목록과 작업 특성·활용 방식·근거를 간결한 Markdown 파일로 생성해라. 새 정책·구현을 추가하지 말고 미정과 자율성을 올릴 조건은 필요한 일에만 짧게 남겨라. 마지막 초안의 여섯 일과 현재 선택을 그대로 유지해라. 지금은 요구·모델·설계·코드·검사 내용을 만들지 않는다는 범위를 유지해라. 실습 1에서 미정으로 남긴 조건을 확정하지 마라. 문서는 짧은 전제 한 문단, 여섯 일의 번호 목록, 공통 전환 조건만 남겨라. 각 일은 '특성: 업무 규칙 / 절차 / 자동 확인 / 되돌림', '선택·근거와 사람 확인 시점'의 짧은 두 항목으로 묶어라. 같은 조건을 각 일마다 반복하지 말고 공통 조건에 한 번만 써라. 비용은 계측 전이라 수치를 쓰지 말고 현재는 실행 체계 구성과 검토 비용을 줄이는 선택임을 짧게 밝힌다. 도식이나 큰 표, 부가 체크리스트, 다음 실습의 실제 산출물을 추가하지 마라. 앞에서 합의한 내용만 파일화해라.</a:t>
             </a:r>
           </a:p>
         </p:txBody>
@@ -1584,6 +1592,13 @@
             <a:pPr lvl="0"/>
             <a:r>
               <a:rPr lang="ko-KR" sz="1200"/>
+              <a:t>인용 근거: Martin Fowler, "LLMs bring new nature of abstraction"(2025) 원문 확인. 추상 수준이 올라가는 한편 비결정적 도구로 프로그래밍하게 됐다는 대목이며, 이 과정이 LLM을 도구라고 부르는 근거다. 원전에 "material"이라고 부르는 자료는 없다.</a:t>
+            </a:r>
+          </a:p>
+          <a:p>
+            <a:pPr lvl="0"/>
+            <a:r>
+              <a:rPr lang="ko-KR" sz="1200"/>
               <a:t>"세션 01. 사람의 일과 AI의 일"의 「02. 첫 시도」 코드를 다시 읽히지 말고 2,400원과 2,000원의 차이를 묻는다.</a:t>
             </a:r>
           </a:p>
@@ -2034,7 +2049,7 @@
             <a:pPr lvl="0"/>
             <a:r>
               <a:rPr lang="ko-KR" sz="1200"/>
-              <a:t>첫 시도는 과제만 준 에이전트였다. 에이전트라는 형태 자체가 실패 원인이 아니라 비어 있던 결정·검사가 문제였다.</a:t>
+              <a:t>첫 시도는 과제만 준 에이전트였다. 에이전트라는 방식 자체가 실패 원인이 아니라 비어 있던 결정·검사가 문제였다.</a:t>
             </a:r>
           </a:p>
         </p:txBody>
@@ -3213,7 +3228,7 @@
                 <a:latin typeface="맑은 고딕"/>
                 <a:ea typeface="맑은 고딕"/>
               </a:rPr>
-              <a:t>02. LLM이라는 재료 목차</a:t>
+              <a:t>02. LLM이라는 도구 목차</a:t>
             </a:r>
           </a:p>
         </p:txBody>
@@ -3424,7 +3439,7 @@
                 <a:latin typeface="맑은 고딕"/>
                 <a:ea typeface="맑은 고딕"/>
               </a:rPr>
-              <a:t>07. 세 방식의 실행 기록</a:t>
+              <a:t>07. 3가지 방식의 실행 기록</a:t>
             </a:r>
           </a:p>
           <a:p>
@@ -3757,7 +3772,7 @@
           <a:p>
             <a:r>
               <a:rPr kumimoji="1" lang="en-US" altLang="ko-KR" sz="1400" dirty="0" err="1"/>
-              <a:t>02. LLM이라는 재료</a:t>
+              <a:t>02. LLM이라는 도구</a:t>
             </a:r>
           </a:p>
         </p:txBody>
@@ -4171,7 +4186,7 @@
           <a:p>
             <a:r>
               <a:rPr kumimoji="1" lang="en-US" altLang="ko-KR" sz="1400" dirty="0" err="1"/>
-              <a:t>02. LLM이라는 재료</a:t>
+              <a:t>02. LLM이라는 도구</a:t>
             </a:r>
           </a:p>
         </p:txBody>
@@ -4249,7 +4264,7 @@
           </a:bodyPr>
           <a:lstStyle/>
           <a:p>
-            <a:pPr lvl="3" marL="1077913" indent="-354013">
+            <a:pPr lvl="2" marL="723900" indent="-368300">
               <a:spcBef>
                 <a:spcPts val="600"/>
               </a:spcBef>
@@ -4258,10 +4273,10 @@
               </a:spcAft>
               <a:buSzPct val="90000"/>
               <a:buFont typeface="Wingdings" pitchFamily="2" charset="2"/>
-              <a:buChar char=""/>
+              <a:buChar char=""/>
             </a:pPr>
             <a:r>
-              <a:rPr sz="1600" b="0">
+              <a:rPr sz="1800" b="0">
                 <a:solidFill>
                   <a:srgbClr val="000000"/>
                 </a:solidFill>
@@ -4271,7 +4286,7 @@
               <a:t>에이전트는 필요한 단계 수를 예측하기 어렵고 </a:t>
             </a:r>
             <a:r>
-              <a:rPr sz="1600" b="1">
+              <a:rPr sz="1800" b="1">
                 <a:solidFill>
                   <a:srgbClr val="000000"/>
                 </a:solidFill>
@@ -4281,7 +4296,7 @@
               <a:t>고정 경로를 코드로 정할 수 없는 열린 문제</a:t>
             </a:r>
             <a:r>
-              <a:rPr sz="1600" b="0">
+              <a:rPr sz="1800" b="0">
                 <a:solidFill>
                   <a:srgbClr val="000000"/>
                 </a:solidFill>
@@ -4451,7 +4466,17 @@
                 <a:latin typeface="맑은 고딕"/>
                 <a:ea typeface="맑은 고딕"/>
               </a:rPr>
-              <a:t>주문 첫 릴리스의 6가지 일</a:t>
+              <a:t>주문 첫 릴리스의 6가지 일 </a:t>
+            </a:r>
+            <a:r>
+              <a:rPr sz="2000" b="1">
+                <a:solidFill>
+                  <a:srgbClr val="000000"/>
+                </a:solidFill>
+                <a:latin typeface="맑은 고딕"/>
+                <a:ea typeface="맑은 고딕"/>
+              </a:rPr>
+              <a:t>(1/2)</a:t>
             </a:r>
           </a:p>
           <a:p>
@@ -4491,7 +4516,7 @@
           <a:p>
             <a:r>
               <a:rPr kumimoji="1" lang="en-US" altLang="ko-KR" sz="1400" dirty="0" err="1"/>
-              <a:t>02. LLM이라는 재료</a:t>
+              <a:t>02. LLM이라는 도구</a:t>
             </a:r>
           </a:p>
         </p:txBody>
@@ -5840,7 +5865,7 @@
                 <a:latin typeface="맑은 고딕"/>
                 <a:ea typeface="맑은 고딕"/>
               </a:rPr>
-              <a:t>첫 릴리스의 일 6가지를 따져 보면 </a:t>
+              <a:t>첫 릴리스의 일 6가지 가운데 </a:t>
             </a:r>
             <a:r>
               <a:rPr sz="1800" b="1">
@@ -5850,7 +5875,7 @@
                 <a:latin typeface="맑은 고딕"/>
                 <a:ea typeface="맑은 고딕"/>
               </a:rPr>
-              <a:t>에이전트에게 맡긴 것은 하나뿐</a:t>
+              <a:t>에이전트에게 맡긴 것은 주문 금액 구현 하나</a:t>
             </a:r>
             <a:r>
               <a:rPr sz="1800" b="0">
@@ -5860,7 +5885,7 @@
                 <a:latin typeface="맑은 고딕"/>
                 <a:ea typeface="맑은 고딕"/>
               </a:rPr>
-              <a:t>이다.</a:t>
+              <a:t>이고, 나머지 5가지는 수작업·워크플로·대화형 보조로 한다.</a:t>
             </a:r>
           </a:p>
         </p:txBody>
@@ -5979,101 +6004,6 @@
           </a:p>
         </p:txBody>
       </p:sp>
-      <p:sp>
-        <p:nvSpPr>
-          <p:cNvPr id="15" name="TextBox 12">
-            <a:extLst>
-              <a:ext uri="{FF2B5EF4-FFF2-40B4-BE49-F238E27FC236}">
-                <a16:creationId xmlns:a16="http://schemas.microsoft.com/office/drawing/2014/main" id="{654EDDB4-901F-3D48-A715-17D163E8A7AC}"/>
-              </a:ext>
-            </a:extLst>
-          </p:cNvPr>
-          <p:cNvSpPr txBox="1"/>
-          <p:nvPr/>
-        </p:nvSpPr>
-        <p:spPr>
-          <a:xfrm>
-            <a:off x="365760" y="4356610"/>
-            <a:ext cx="8412480" cy="1325880"/>
-          </a:xfrm>
-          <a:prstGeom prst="rect">
-            <a:avLst/>
-          </a:prstGeom>
-          <a:noFill/>
-        </p:spPr>
-        <p:txBody>
-          <a:bodyPr wrap="square">
-            <a:spAutoFit/>
-          </a:bodyPr>
-          <a:lstStyle/>
-          <a:p>
-            <a:pPr lvl="2" marL="723900" indent="-368300">
-              <a:spcBef>
-                <a:spcPts val="600"/>
-              </a:spcBef>
-              <a:spcAft>
-                <a:spcPts val="600"/>
-              </a:spcAft>
-              <a:buSzPct val="90000"/>
-              <a:buFont typeface="Wingdings" pitchFamily="2" charset="2"/>
-              <a:buChar char=""/>
-            </a:pPr>
-            <a:r>
-              <a:rPr sz="1800" b="1">
-                <a:solidFill>
-                  <a:srgbClr val="000000"/>
-                </a:solidFill>
-                <a:latin typeface="맑은 고딕"/>
-                <a:ea typeface="맑은 고딕"/>
-              </a:rPr>
-              <a:t>한 일 전체를 한 방식으로 고정하지 않는다.</a:t>
-            </a:r>
-            <a:r>
-              <a:rPr sz="1800" b="0">
-                <a:solidFill>
-                  <a:srgbClr val="000000"/>
-                </a:solidFill>
-                <a:latin typeface="맑은 고딕"/>
-                <a:ea typeface="맑은 고딕"/>
-              </a:rPr>
-              <a:t> 데이터 이관의 실행은 사람이 하면서 스크립트 초안은 LLM의 도움으로 만들 수 있다.</a:t>
-            </a:r>
-          </a:p>
-          <a:p>
-            <a:pPr lvl="2" marL="723900" indent="-368300">
-              <a:spcBef>
-                <a:spcPts val="600"/>
-              </a:spcBef>
-              <a:spcAft>
-                <a:spcPts val="600"/>
-              </a:spcAft>
-              <a:buSzPct val="90000"/>
-              <a:buFont typeface="Wingdings" pitchFamily="2" charset="2"/>
-              <a:buChar char=""/>
-            </a:pPr>
-            <a:r>
-              <a:rPr sz="1800" b="1">
-                <a:solidFill>
-                  <a:srgbClr val="000000"/>
-                </a:solidFill>
-                <a:latin typeface="맑은 고딕"/>
-                <a:ea typeface="맑은 고딕"/>
-              </a:rPr>
-              <a:t>첫 릴리스의 조건</a:t>
-            </a:r>
-            <a:r>
-              <a:rPr sz="1800" b="0">
-                <a:solidFill>
-                  <a:srgbClr val="000000"/>
-                </a:solidFill>
-                <a:latin typeface="맑은 고딕"/>
-                <a:ea typeface="맑은 고딕"/>
-              </a:rPr>
-              <a:t>이 달라지면 선택도 바뀐다. 저장소 골격은 검증된 생성 절차가 있고, 연동 코드는 규격이 제공된 경우다.</a:t>
-            </a:r>
-          </a:p>
-        </p:txBody>
-      </p:sp>
     </p:spTree>
     <p:extLst>
       <p:ext uri="{BB962C8B-B14F-4D97-AF65-F5344CB8AC3E}">
@@ -6088,6 +6018,397 @@
 </file>
 
 <file path=ppt/slides/slide13.xml><?xml version="1.0" encoding="utf-8"?>
+<p:sld xmlns:a="http://schemas.openxmlformats.org/drawingml/2006/main" xmlns:r="http://schemas.openxmlformats.org/officeDocument/2006/relationships" xmlns:p="http://schemas.openxmlformats.org/presentationml/2006/main">
+  <p:cSld>
+    <p:spTree>
+      <p:nvGrpSpPr>
+        <p:cNvPr id="1" name="">
+          <a:extLst>
+            <a:ext uri="{FF2B5EF4-FFF2-40B4-BE49-F238E27FC236}">
+              <a16:creationId xmlns:a16="http://schemas.microsoft.com/office/drawing/2014/main" id="{8E4F1F13-426B-086B-7D8C-9A58A0F879DB}"/>
+            </a:ext>
+          </a:extLst>
+        </p:cNvPr>
+        <p:cNvGrpSpPr/>
+        <p:nvPr/>
+      </p:nvGrpSpPr>
+      <p:grpSpPr>
+        <a:xfrm>
+          <a:off x="0" y="0"/>
+          <a:ext cx="0" cy="0"/>
+          <a:chOff x="0" y="0"/>
+          <a:chExt cx="0" cy="0"/>
+        </a:xfrm>
+      </p:grpSpPr>
+      <p:sp>
+        <p:nvSpPr>
+          <p:cNvPr id="2" name="제목 1">
+            <a:extLst>
+              <a:ext uri="{FF2B5EF4-FFF2-40B4-BE49-F238E27FC236}">
+                <a16:creationId xmlns:a16="http://schemas.microsoft.com/office/drawing/2014/main" id="{AA26A92D-924E-0575-9551-F8FD7BFD3FAD}"/>
+              </a:ext>
+            </a:extLst>
+          </p:cNvPr>
+          <p:cNvSpPr>
+            <a:spLocks noGrp="1"/>
+          </p:cNvSpPr>
+          <p:nvPr>
+            <p:ph type="title"/>
+          </p:nvPr>
+        </p:nvSpPr>
+        <p:spPr/>
+        <p:txBody>
+          <a:bodyPr/>
+          <a:lstStyle/>
+          <a:p>
+            <a:r>
+              <a:rPr sz="2400" b="1">
+                <a:solidFill>
+                  <a:srgbClr val="000000"/>
+                </a:solidFill>
+                <a:latin typeface="맑은 고딕"/>
+                <a:ea typeface="맑은 고딕"/>
+              </a:rPr>
+              <a:t>주문 첫 릴리스의 6가지 일 </a:t>
+            </a:r>
+            <a:r>
+              <a:rPr sz="2000" b="1">
+                <a:solidFill>
+                  <a:srgbClr val="000000"/>
+                </a:solidFill>
+                <a:latin typeface="맑은 고딕"/>
+                <a:ea typeface="맑은 고딕"/>
+              </a:rPr>
+              <a:t>(2/2)</a:t>
+            </a:r>
+          </a:p>
+          <a:p>
+            <a:r>
+              <a:rPr sz="1100" b="1">
+                <a:solidFill>
+                  <a:srgbClr val="000000"/>
+                </a:solidFill>
+                <a:latin typeface="맑은 고딕"/>
+                <a:ea typeface="맑은 고딕"/>
+              </a:rPr>
+              <a:t>05. 활용 방식</a:t>
+            </a:r>
+          </a:p>
+        </p:txBody>
+      </p:sp>
+      <p:sp>
+        <p:nvSpPr>
+          <p:cNvPr id="3" name="슬라이드 번호 개체 틀 2">
+            <a:extLst>
+              <a:ext uri="{FF2B5EF4-FFF2-40B4-BE49-F238E27FC236}">
+                <a16:creationId xmlns:a16="http://schemas.microsoft.com/office/drawing/2014/main" id="{12CF30EE-4DFD-8063-56B8-B8689E76DFCA}"/>
+              </a:ext>
+            </a:extLst>
+          </p:cNvPr>
+          <p:cNvSpPr>
+            <a:spLocks noGrp="1"/>
+          </p:cNvSpPr>
+          <p:nvPr>
+            <p:ph type="sldNum" sz="quarter" idx="10"/>
+          </p:nvPr>
+        </p:nvSpPr>
+        <p:spPr/>
+        <p:txBody>
+          <a:bodyPr/>
+          <a:lstStyle/>
+          <a:p>
+            <a:pPr>
+              <a:defRPr/>
+            </a:pPr>
+            <a:r>
+              <a:rPr lang="en-US" altLang="ko-KR">
+                <a:solidFill>
+                  <a:prstClr val="black"/>
+                </a:solidFill>
+              </a:rPr>
+              <a:t>- 13 -</a:t>
+            </a:r>
+          </a:p>
+        </p:txBody>
+      </p:sp>
+      <p:sp>
+        <p:nvSpPr>
+          <p:cNvPr id="5" name="텍스트 개체 틀 4">
+            <a:extLst>
+              <a:ext uri="{FF2B5EF4-FFF2-40B4-BE49-F238E27FC236}">
+                <a16:creationId xmlns:a16="http://schemas.microsoft.com/office/drawing/2014/main" id="{D66274C8-E16F-5AEB-614B-D8D32DA3E8C6}"/>
+              </a:ext>
+            </a:extLst>
+          </p:cNvPr>
+          <p:cNvSpPr>
+            <a:spLocks noGrp="1"/>
+          </p:cNvSpPr>
+          <p:nvPr>
+            <p:ph type="body" sz="quarter" idx="11"/>
+          </p:nvPr>
+        </p:nvSpPr>
+        <p:spPr/>
+        <p:txBody>
+          <a:bodyPr/>
+          <a:lstStyle/>
+          <a:p>
+            <a:r>
+              <a:rPr kumimoji="1" lang="en-US" altLang="ko-KR" sz="1400" dirty="0" err="1"/>
+              <a:t>02. LLM이라는 도구</a:t>
+            </a:r>
+          </a:p>
+        </p:txBody>
+      </p:sp>
+      <p:sp>
+        <p:nvSpPr>
+          <p:cNvPr id="6" name="텍스트 개체 틀 5">
+            <a:extLst>
+              <a:ext uri="{FF2B5EF4-FFF2-40B4-BE49-F238E27FC236}">
+                <a16:creationId xmlns:a16="http://schemas.microsoft.com/office/drawing/2014/main" id="{A24E58E1-194B-A320-AEEE-24D08685BB67}"/>
+              </a:ext>
+            </a:extLst>
+          </p:cNvPr>
+          <p:cNvSpPr>
+            <a:spLocks noGrp="1"/>
+          </p:cNvSpPr>
+          <p:nvPr>
+            <p:ph type="body" sz="quarter" idx="12"/>
+          </p:nvPr>
+        </p:nvSpPr>
+        <p:spPr/>
+        <p:txBody>
+          <a:bodyPr/>
+          <a:lstStyle/>
+          <a:p>
+            <a:endParaRPr kumimoji="1" lang="ko-KR" altLang="en-US" dirty="0"/>
+          </a:p>
+        </p:txBody>
+      </p:sp>
+      <p:sp>
+        <p:nvSpPr>
+          <p:cNvPr id="7" name="텍스트 개체 틀 6">
+            <a:extLst>
+              <a:ext uri="{FF2B5EF4-FFF2-40B4-BE49-F238E27FC236}">
+                <a16:creationId xmlns:a16="http://schemas.microsoft.com/office/drawing/2014/main" id="{A219F420-613B-6234-45F6-0955A9A4505F}"/>
+              </a:ext>
+            </a:extLst>
+          </p:cNvPr>
+          <p:cNvSpPr>
+            <a:spLocks noGrp="1"/>
+          </p:cNvSpPr>
+          <p:nvPr>
+            <p:ph type="body" sz="quarter" idx="13"/>
+          </p:nvPr>
+        </p:nvSpPr>
+        <p:spPr/>
+        <p:txBody>
+          <a:bodyPr/>
+          <a:lstStyle/>
+          <a:p>
+            <a:endParaRPr kumimoji="1" lang="en-US" altLang="ko-KR" dirty="0"/>
+          </a:p>
+        </p:txBody>
+      </p:sp>
+      <p:sp>
+        <p:nvSpPr>
+          <p:cNvPr id="8" name="내용 개체 틀 7">
+            <a:extLst>
+              <a:ext uri="{FF2B5EF4-FFF2-40B4-BE49-F238E27FC236}">
+                <a16:creationId xmlns:a16="http://schemas.microsoft.com/office/drawing/2014/main" id="{BEBA2C4A-B0BF-F2E4-EA6E-614C99CBA184}"/>
+              </a:ext>
+            </a:extLst>
+          </p:cNvPr>
+          <p:cNvSpPr>
+            <a:spLocks noGrp="1"/>
+          </p:cNvSpPr>
+          <p:nvPr>
+            <p:ph idx="1"/>
+          </p:nvPr>
+        </p:nvSpPr>
+        <p:spPr/>
+        <p:txBody>
+          <a:bodyPr>
+            <a:normAutofit/>
+          </a:bodyPr>
+          <a:lstStyle/>
+          <a:p>
+            <a:pPr lvl="2" marL="723900" indent="-368300">
+              <a:spcBef>
+                <a:spcPts val="600"/>
+              </a:spcBef>
+              <a:spcAft>
+                <a:spcPts val="600"/>
+              </a:spcAft>
+              <a:buSzPct val="90000"/>
+              <a:buFont typeface="Wingdings" pitchFamily="2" charset="2"/>
+              <a:buChar char=""/>
+            </a:pPr>
+            <a:r>
+              <a:rPr sz="1800" b="1">
+                <a:solidFill>
+                  <a:srgbClr val="000000"/>
+                </a:solidFill>
+                <a:latin typeface="맑은 고딕"/>
+                <a:ea typeface="맑은 고딕"/>
+              </a:rPr>
+              <a:t>일 하나를 한 방식으로 고정하지 않는다.</a:t>
+            </a:r>
+          </a:p>
+          <a:p>
+            <a:pPr lvl="3" marL="1077913" indent="-354013">
+              <a:spcBef>
+                <a:spcPts val="600"/>
+              </a:spcBef>
+              <a:spcAft>
+                <a:spcPts val="600"/>
+              </a:spcAft>
+              <a:buSzPct val="90000"/>
+              <a:buFont typeface="Wingdings" pitchFamily="2" charset="2"/>
+              <a:buChar char=""/>
+            </a:pPr>
+            <a:r>
+              <a:rPr sz="1600" b="0">
+                <a:solidFill>
+                  <a:srgbClr val="000000"/>
+                </a:solidFill>
+                <a:latin typeface="맑은 고딕"/>
+                <a:ea typeface="맑은 고딕"/>
+              </a:rPr>
+              <a:t>데이터 이관의 실행은 사람이 하면서 </a:t>
+            </a:r>
+            <a:r>
+              <a:rPr sz="1600" b="1">
+                <a:solidFill>
+                  <a:srgbClr val="000000"/>
+                </a:solidFill>
+                <a:latin typeface="맑은 고딕"/>
+                <a:ea typeface="맑은 고딕"/>
+              </a:rPr>
+              <a:t>스크립트 초안</a:t>
+            </a:r>
+            <a:r>
+              <a:rPr sz="1600" b="0">
+                <a:solidFill>
+                  <a:srgbClr val="000000"/>
+                </a:solidFill>
+                <a:latin typeface="맑은 고딕"/>
+                <a:ea typeface="맑은 고딕"/>
+              </a:rPr>
+              <a:t>은 LLM의 도움으로 만들 수 있다.</a:t>
+            </a:r>
+          </a:p>
+          <a:p>
+            <a:pPr lvl="2" marL="723900" indent="-368300">
+              <a:spcBef>
+                <a:spcPts val="600"/>
+              </a:spcBef>
+              <a:spcAft>
+                <a:spcPts val="600"/>
+              </a:spcAft>
+              <a:buSzPct val="90000"/>
+              <a:buFont typeface="Wingdings" pitchFamily="2" charset="2"/>
+              <a:buChar char=""/>
+            </a:pPr>
+            <a:r>
+              <a:rPr sz="1800" b="1">
+                <a:solidFill>
+                  <a:srgbClr val="000000"/>
+                </a:solidFill>
+                <a:latin typeface="맑은 고딕"/>
+                <a:ea typeface="맑은 고딕"/>
+              </a:rPr>
+              <a:t>첫 릴리스의 조건</a:t>
+            </a:r>
+            <a:r>
+              <a:rPr sz="1800" b="0">
+                <a:solidFill>
+                  <a:srgbClr val="000000"/>
+                </a:solidFill>
+                <a:latin typeface="맑은 고딕"/>
+                <a:ea typeface="맑은 고딕"/>
+              </a:rPr>
+              <a:t>이 달라지면 선택도 바뀐다.</a:t>
+            </a:r>
+          </a:p>
+          <a:p>
+            <a:pPr lvl="3" marL="1077913" indent="-354013">
+              <a:spcBef>
+                <a:spcPts val="600"/>
+              </a:spcBef>
+              <a:spcAft>
+                <a:spcPts val="600"/>
+              </a:spcAft>
+              <a:buSzPct val="90000"/>
+              <a:buFont typeface="Wingdings" pitchFamily="2" charset="2"/>
+              <a:buChar char=""/>
+            </a:pPr>
+            <a:r>
+              <a:rPr sz="1600" b="0">
+                <a:solidFill>
+                  <a:srgbClr val="000000"/>
+                </a:solidFill>
+                <a:latin typeface="맑은 고딕"/>
+                <a:ea typeface="맑은 고딕"/>
+              </a:rPr>
+              <a:t>저장소 골격은 </a:t>
+            </a:r>
+            <a:r>
+              <a:rPr sz="1600" b="1">
+                <a:solidFill>
+                  <a:srgbClr val="000000"/>
+                </a:solidFill>
+                <a:latin typeface="맑은 고딕"/>
+                <a:ea typeface="맑은 고딕"/>
+              </a:rPr>
+              <a:t>검증된 생성 절차</a:t>
+            </a:r>
+            <a:r>
+              <a:rPr sz="1600" b="0">
+                <a:solidFill>
+                  <a:srgbClr val="000000"/>
+                </a:solidFill>
+                <a:latin typeface="맑은 고딕"/>
+                <a:ea typeface="맑은 고딕"/>
+              </a:rPr>
+              <a:t>가 있고, 연동 코드는 </a:t>
+            </a:r>
+            <a:r>
+              <a:rPr sz="1600" b="1">
+                <a:solidFill>
+                  <a:srgbClr val="000000"/>
+                </a:solidFill>
+                <a:latin typeface="맑은 고딕"/>
+                <a:ea typeface="맑은 고딕"/>
+              </a:rPr>
+              <a:t>규격이 제공된</a:t>
+            </a:r>
+            <a:r>
+              <a:rPr sz="1600" b="0">
+                <a:solidFill>
+                  <a:srgbClr val="000000"/>
+                </a:solidFill>
+                <a:latin typeface="맑은 고딕"/>
+                <a:ea typeface="맑은 고딕"/>
+              </a:rPr>
+              <a:t> 경우다.</a:t>
+            </a:r>
+          </a:p>
+        </p:txBody>
+      </p:sp>
+    </p:spTree>
+    <p:extLst>
+      <p:ext uri="{BB962C8B-B14F-4D97-AF65-F5344CB8AC3E}">
+        <p14:creationId xmlns:p14="http://schemas.microsoft.com/office/powerpoint/2010/main" val="3555436673"/>
+      </p:ext>
+    </p:extLst>
+  </p:cSld>
+  <p:clrMapOvr>
+    <a:masterClrMapping/>
+  </p:clrMapOvr>
+</p:sld>
+</file>
+
+<file path=ppt/slides/slide14.xml><?xml version="1.0" encoding="utf-8"?>
 <p:sld xmlns:a="http://schemas.openxmlformats.org/drawingml/2006/main" xmlns:r="http://schemas.openxmlformats.org/officeDocument/2006/relationships" xmlns:p="http://schemas.openxmlformats.org/presentationml/2006/main">
   <p:cSld>
     <p:spTree>
@@ -6179,7 +6500,7 @@
           <a:p>
             <a:r>
               <a:rPr kumimoji="1" lang="en-US" altLang="ko-KR" sz="1400" dirty="0" err="1"/>
-              <a:t>02. LLM이라는 재료</a:t>
+              <a:t>02. LLM이라는 도구</a:t>
             </a:r>
           </a:p>
         </p:txBody>
@@ -7580,7 +7901,7 @@
                 <a:ea typeface="맑은 고딕" panose="020B0503020000020004" pitchFamily="34" charset="-127"/>
                 <a:cs typeface="+mn-cs"/>
               </a:rPr>
-              <a:t>- 13 -</a:t>
+              <a:t>- 14 -</a:t>
             </a:r>
           </a:p>
         </p:txBody>
@@ -7647,7 +7968,7 @@
 </p:sld>
 </file>
 
-<file path=ppt/slides/slide14.xml><?xml version="1.0" encoding="utf-8"?>
+<file path=ppt/slides/slide15.xml><?xml version="1.0" encoding="utf-8"?>
 <p:sld xmlns:a="http://schemas.openxmlformats.org/drawingml/2006/main" xmlns:r="http://schemas.openxmlformats.org/officeDocument/2006/relationships" xmlns:p="http://schemas.openxmlformats.org/presentationml/2006/main">
   <p:cSld>
     <p:spTree>
@@ -7746,7 +8067,7 @@
                   <a:prstClr val="black"/>
                 </a:solidFill>
               </a:rPr>
-              <a:t>- 14 -</a:t>
+              <a:t>- 15 -</a:t>
             </a:r>
           </a:p>
         </p:txBody>
@@ -7774,7 +8095,7 @@
           <a:p>
             <a:r>
               <a:rPr kumimoji="1" lang="en-US" altLang="ko-KR" sz="1400" dirty="0" err="1"/>
-              <a:t>02. LLM이라는 재료</a:t>
+              <a:t>02. LLM이라는 도구</a:t>
             </a:r>
           </a:p>
         </p:txBody>
@@ -7908,7 +8229,7 @@
             </a:r>
           </a:p>
           <a:p>
-            <a:pPr lvl="3" marL="1077913" indent="-354013">
+            <a:pPr lvl="2" marL="723900" indent="-368300">
               <a:spcBef>
                 <a:spcPts val="600"/>
               </a:spcBef>
@@ -7917,10 +8238,10 @@
               </a:spcAft>
               <a:buSzPct val="90000"/>
               <a:buFont typeface="Wingdings" pitchFamily="2" charset="2"/>
-              <a:buChar char=""/>
+              <a:buChar char=""/>
             </a:pPr>
             <a:r>
-              <a:rPr sz="1600" b="0">
+              <a:rPr sz="1800" b="0">
                 <a:solidFill>
                   <a:srgbClr val="000000"/>
                 </a:solidFill>
@@ -7930,7 +8251,7 @@
               <a:t>에이전트 시스템을 몇 가지 넓은 단계로 나눌 수 있으며 각 단계는 </a:t>
             </a:r>
             <a:r>
-              <a:rPr sz="1600" b="1">
+              <a:rPr sz="1800" b="1">
                 <a:solidFill>
                   <a:srgbClr val="000000"/>
                 </a:solidFill>
@@ -8160,7 +8481,7 @@
 </p:sld>
 </file>
 
-<file path=ppt/slides/slide15.xml><?xml version="1.0" encoding="utf-8"?>
+<file path=ppt/slides/slide16.xml><?xml version="1.0" encoding="utf-8"?>
 <p:sld xmlns:a="http://schemas.openxmlformats.org/drawingml/2006/main" xmlns:r="http://schemas.openxmlformats.org/officeDocument/2006/relationships" xmlns:p="http://schemas.openxmlformats.org/presentationml/2006/main">
   <p:cSld>
     <p:spTree>
@@ -8212,7 +8533,7 @@
                 <a:latin typeface="맑은 고딕"/>
                 <a:ea typeface="맑은 고딕"/>
               </a:rPr>
-              <a:t>07. 세 방식의 실행 기록</a:t>
+              <a:t>07. 3가지 방식의 실행 기록</a:t>
             </a:r>
           </a:p>
         </p:txBody>
@@ -8240,7 +8561,7 @@
           <a:p>
             <a:r>
               <a:rPr kumimoji="1" lang="en-US" altLang="ko-KR" sz="1400" dirty="0" err="1"/>
-              <a:t>02. LLM이라는 재료</a:t>
+              <a:t>02. LLM이라는 도구</a:t>
             </a:r>
           </a:p>
         </p:txBody>
@@ -9555,7 +9876,7 @@
                 <a:latin typeface="맑은 고딕"/>
                 <a:ea typeface="맑은 고딕"/>
               </a:rPr>
-              <a:t>같은 업무 규칙과 수용 테스트를 준 이번 실행에서 세 방식 모두 통과했고, 달랐던 것은 </a:t>
+              <a:t>같은 업무 규칙과 수용 테스트를 3가지 방식 모두 통과했다. 달랐던 것은 </a:t>
             </a:r>
             <a:r>
               <a:rPr sz="1800" b="1">
@@ -9565,7 +9886,7 @@
                 <a:latin typeface="맑은 고딕"/>
                 <a:ea typeface="맑은 고딕"/>
               </a:rPr>
-              <a:t>사람이 개입한 자리와 쓴 토큰</a:t>
+              <a:t>사람이 개입한 자리와 사용한 토큰</a:t>
             </a:r>
             <a:r>
               <a:rPr sz="1800" b="0">
@@ -9640,7 +9961,7 @@
                 <a:ea typeface="맑은 고딕" panose="020B0503020000020004" pitchFamily="34" charset="-127"/>
                 <a:cs typeface="+mn-cs"/>
               </a:rPr>
-              <a:t>- 15 -</a:t>
+              <a:t>- 16 -</a:t>
             </a:r>
           </a:p>
         </p:txBody>
@@ -9868,7 +10189,7 @@
 </p:sld>
 </file>
 
-<file path=ppt/slides/slide16.xml><?xml version="1.0" encoding="utf-8"?>
+<file path=ppt/slides/slide17.xml><?xml version="1.0" encoding="utf-8"?>
 <p:sld xmlns:a="http://schemas.openxmlformats.org/drawingml/2006/main" xmlns:r="http://schemas.openxmlformats.org/officeDocument/2006/relationships" xmlns:p="http://schemas.openxmlformats.org/presentationml/2006/main">
   <p:cSld>
     <p:spTree>
@@ -9948,7 +10269,7 @@
           <a:p>
             <a:r>
               <a:rPr kumimoji="1" lang="en-US" altLang="ko-KR" sz="1400" dirty="0" err="1"/>
-              <a:t>02. LLM이라는 재료</a:t>
+              <a:t>02. LLM이라는 도구</a:t>
             </a:r>
           </a:p>
         </p:txBody>
@@ -10024,8 +10345,8 @@
           </p:nvPr>
         </p:nvGraphicFramePr>
         <p:xfrm>
-          <a:off x="1300036" y="2112010"/>
-          <a:ext cx="6530340" cy="3873500"/>
+          <a:off x="1230186" y="2112010"/>
+          <a:ext cx="6670040" cy="3873500"/>
         </p:xfrm>
         <a:graphic>
           <a:graphicData uri="http://schemas.openxmlformats.org/drawingml/2006/table">
@@ -10034,7 +10355,7 @@
               <a:tblGrid>
                 <a:gridCol w="1813560"/>
                 <a:gridCol w="2456180"/>
-                <a:gridCol w="2260600"/>
+                <a:gridCol w="2400300"/>
               </a:tblGrid>
               <a:tr h="288000">
                 <a:tc>
@@ -10873,7 +11194,7 @@
                           <a:ea typeface="맑은 고딕" panose="020B0503020000020004" pitchFamily="34" charset="-127"/>
                           <a:cs typeface="맑은 고딕"/>
                         </a:rPr>
-                        <a:t>가장 단순한 충분한 방식</a:t>
+                        <a:t>충분한 것 중 가장 단순한 방식</a:t>
                       </a:r>
                     </a:p>
                   </a:txBody>
@@ -11122,6 +11443,16 @@
               <a:buNone/>
             </a:pPr>
             <a:r>
+              <a:rPr sz="1800" b="0">
+                <a:solidFill>
+                  <a:srgbClr val="000000"/>
+                </a:solidFill>
+                <a:latin typeface="맑은 고딕"/>
+                <a:ea typeface="맑은 고딕"/>
+              </a:rPr>
+              <a:t>잘못된 관행은 모두 </a:t>
+            </a:r>
+            <a:r>
               <a:rPr sz="1800" b="1">
                 <a:solidFill>
                   <a:srgbClr val="000000"/>
@@ -11129,7 +11460,7 @@
                 <a:latin typeface="맑은 고딕"/>
                 <a:ea typeface="맑은 고딕"/>
               </a:rPr>
-              <a:t>한 번 맞은 결과</a:t>
+              <a:t>빈 결정을 보완하지 않고 입력과 실행만 늘린다</a:t>
             </a:r>
             <a:r>
               <a:rPr sz="1800" b="0">
@@ -11139,27 +11470,7 @@
                 <a:latin typeface="맑은 고딕"/>
                 <a:ea typeface="맑은 고딕"/>
               </a:rPr>
-              <a:t>를 증거로 삼고, </a:t>
-            </a:r>
-            <a:r>
-              <a:rPr sz="1800" b="1">
-                <a:solidFill>
-                  <a:srgbClr val="000000"/>
-                </a:solidFill>
-                <a:latin typeface="맑은 고딕"/>
-                <a:ea typeface="맑은 고딕"/>
-              </a:rPr>
-              <a:t>맥락을 통째로 넣고</a:t>
-            </a:r>
-            <a:r>
-              <a:rPr sz="1800" b="0">
-                <a:solidFill>
-                  <a:srgbClr val="000000"/>
-                </a:solidFill>
-                <a:latin typeface="맑은 고딕"/>
-                <a:ea typeface="맑은 고딕"/>
-              </a:rPr>
-              <a:t>, 같은 요청을 다시 보내는 것이 이 재료를 잘못 사용하는 방식이다.</a:t>
+              <a:t>. 넣는 양과 시도 횟수로는 정하지 않은 규칙이 채워지지 않는다.</a:t>
             </a:r>
           </a:p>
         </p:txBody>
@@ -11224,7 +11535,7 @@
                 <a:ea typeface="맑은 고딕" panose="020B0503020000020004" pitchFamily="34" charset="-127"/>
                 <a:cs typeface="+mn-cs"/>
               </a:rPr>
-              <a:t>- 16 -</a:t>
+              <a:t>- 17 -</a:t>
             </a:r>
           </a:p>
         </p:txBody>
@@ -11273,7 +11584,7 @@
                 <a:latin typeface="맑은 고딕"/>
                 <a:ea typeface="맑은 고딕"/>
               </a:rPr>
-              <a:t>LLM을 재료로 사용할 때의 잘못된 관행</a:t>
+              <a:t>LLM을 사용할 때의 잘못된 관행</a:t>
             </a:r>
           </a:p>
         </p:txBody>
@@ -11293,7 +11604,7 @@
         <p:spPr>
           <a:xfrm>
             <a:off x="365760" y="4068610"/>
-            <a:ext cx="8412480" cy="701040"/>
+            <a:ext cx="8412480" cy="1325880"/>
           </a:xfrm>
           <a:prstGeom prst="rect">
             <a:avLst/>
@@ -11325,7 +11636,7 @@
                 <a:latin typeface="맑은 고딕"/>
                 <a:ea typeface="맑은 고딕"/>
               </a:rPr>
-              <a:t>2,400원 청구</a:t>
+              <a:t>같은 요청을 다시 보내</a:t>
             </a:r>
             <a:r>
               <a:rPr sz="1800" b="0">
@@ -11335,7 +11646,40 @@
                 <a:latin typeface="맑은 고딕"/>
                 <a:ea typeface="맑은 고딕"/>
               </a:rPr>
-              <a:t>를 새 실행에서 우연히 2,000원으로 고쳐도 근거가 생긴 것은 아니다. 주문 시점 단가라는 규칙과 가격 변경 예를 제공한다.</a:t>
+              <a:t> 2,400원이 2,000원으로 바뀌어도 규칙이 정해진 것은 아니다.</a:t>
+            </a:r>
+          </a:p>
+          <a:p>
+            <a:pPr lvl="3" marL="1077913" indent="-354013">
+              <a:spcBef>
+                <a:spcPts val="600"/>
+              </a:spcBef>
+              <a:spcAft>
+                <a:spcPts val="600"/>
+              </a:spcAft>
+              <a:buSzPct val="90000"/>
+              <a:buFont typeface="Wingdings" pitchFamily="2" charset="2"/>
+              <a:buChar char=""/>
+            </a:pPr>
+            <a:r>
+              <a:rPr sz="1600" b="1">
+                <a:solidFill>
+                  <a:srgbClr val="000000"/>
+                </a:solidFill>
+                <a:latin typeface="맑은 고딕"/>
+                <a:ea typeface="맑은 고딕"/>
+              </a:rPr>
+              <a:t>주문 시점 단가</a:t>
+            </a:r>
+            <a:r>
+              <a:rPr sz="1600" b="0">
+                <a:solidFill>
+                  <a:srgbClr val="000000"/>
+                </a:solidFill>
+                <a:latin typeface="맑은 고딕"/>
+                <a:ea typeface="맑은 고딕"/>
+              </a:rPr>
+              <a:t>라는 규칙과 가격이 바뀐 예를 주어야 다음 실행에서도 2,000원이 나온다.</a:t>
             </a:r>
           </a:p>
         </p:txBody>
@@ -11344,1031 +11688,6 @@
     <p:extLst>
       <p:ext uri="{BB962C8B-B14F-4D97-AF65-F5344CB8AC3E}">
         <p14:creationId xmlns:p14="http://schemas.microsoft.com/office/powerpoint/2010/main" val="2789569477"/>
-      </p:ext>
-    </p:extLst>
-  </p:cSld>
-  <p:clrMapOvr>
-    <a:masterClrMapping/>
-  </p:clrMapOvr>
-</p:sld>
-</file>
-
-<file path=ppt/slides/slide17.xml><?xml version="1.0" encoding="utf-8"?>
-<p:sld xmlns:a="http://schemas.openxmlformats.org/drawingml/2006/main" xmlns:r="http://schemas.openxmlformats.org/officeDocument/2006/relationships" xmlns:p="http://schemas.openxmlformats.org/presentationml/2006/main">
-  <p:cSld>
-    <p:spTree>
-      <p:nvGrpSpPr>
-        <p:cNvPr id="1" name="">
-          <a:extLst>
-            <a:ext uri="{FF2B5EF4-FFF2-40B4-BE49-F238E27FC236}">
-              <a16:creationId xmlns:a16="http://schemas.microsoft.com/office/drawing/2014/main" id="{8E4F1F13-426B-086B-7D8C-9A58A0F879DB}"/>
-            </a:ext>
-          </a:extLst>
-        </p:cNvPr>
-        <p:cNvGrpSpPr/>
-        <p:nvPr/>
-      </p:nvGrpSpPr>
-      <p:grpSpPr>
-        <a:xfrm>
-          <a:off x="0" y="0"/>
-          <a:ext cx="0" cy="0"/>
-          <a:chOff x="0" y="0"/>
-          <a:chExt cx="0" cy="0"/>
-        </a:xfrm>
-      </p:grpSpPr>
-      <p:sp>
-        <p:nvSpPr>
-          <p:cNvPr id="2" name="제목 1">
-            <a:extLst>
-              <a:ext uri="{FF2B5EF4-FFF2-40B4-BE49-F238E27FC236}">
-                <a16:creationId xmlns:a16="http://schemas.microsoft.com/office/drawing/2014/main" id="{AA26A92D-924E-0575-9551-F8FD7BFD3FAD}"/>
-              </a:ext>
-            </a:extLst>
-          </p:cNvPr>
-          <p:cNvSpPr>
-            <a:spLocks noGrp="1"/>
-          </p:cNvSpPr>
-          <p:nvPr>
-            <p:ph type="title"/>
-          </p:nvPr>
-        </p:nvSpPr>
-        <p:spPr/>
-        <p:txBody>
-          <a:bodyPr/>
-          <a:lstStyle/>
-          <a:p>
-            <a:r>
-              <a:rPr sz="2400" b="1">
-                <a:solidFill>
-                  <a:srgbClr val="000000"/>
-                </a:solidFill>
-                <a:latin typeface="맑은 고딕"/>
-                <a:ea typeface="맑은 고딕"/>
-              </a:rPr>
-              <a:t>09. 실습 2 — 활용 방식 고르기</a:t>
-            </a:r>
-          </a:p>
-        </p:txBody>
-      </p:sp>
-      <p:sp>
-        <p:nvSpPr>
-          <p:cNvPr id="3" name="슬라이드 번호 개체 틀 2">
-            <a:extLst>
-              <a:ext uri="{FF2B5EF4-FFF2-40B4-BE49-F238E27FC236}">
-                <a16:creationId xmlns:a16="http://schemas.microsoft.com/office/drawing/2014/main" id="{12CF30EE-4DFD-8063-56B8-B8689E76DFCA}"/>
-              </a:ext>
-            </a:extLst>
-          </p:cNvPr>
-          <p:cNvSpPr>
-            <a:spLocks noGrp="1"/>
-          </p:cNvSpPr>
-          <p:nvPr>
-            <p:ph type="sldNum" sz="quarter" idx="10"/>
-          </p:nvPr>
-        </p:nvSpPr>
-        <p:spPr/>
-        <p:txBody>
-          <a:bodyPr/>
-          <a:lstStyle/>
-          <a:p>
-            <a:pPr>
-              <a:defRPr/>
-            </a:pPr>
-            <a:r>
-              <a:rPr lang="en-US" altLang="ko-KR">
-                <a:solidFill>
-                  <a:prstClr val="black"/>
-                </a:solidFill>
-              </a:rPr>
-              <a:t>- 17 -</a:t>
-            </a:r>
-          </a:p>
-        </p:txBody>
-      </p:sp>
-      <p:sp>
-        <p:nvSpPr>
-          <p:cNvPr id="5" name="텍스트 개체 틀 4">
-            <a:extLst>
-              <a:ext uri="{FF2B5EF4-FFF2-40B4-BE49-F238E27FC236}">
-                <a16:creationId xmlns:a16="http://schemas.microsoft.com/office/drawing/2014/main" id="{D66274C8-E16F-5AEB-614B-D8D32DA3E8C6}"/>
-              </a:ext>
-            </a:extLst>
-          </p:cNvPr>
-          <p:cNvSpPr>
-            <a:spLocks noGrp="1"/>
-          </p:cNvSpPr>
-          <p:nvPr>
-            <p:ph type="body" sz="quarter" idx="11"/>
-          </p:nvPr>
-        </p:nvSpPr>
-        <p:spPr/>
-        <p:txBody>
-          <a:bodyPr/>
-          <a:lstStyle/>
-          <a:p>
-            <a:r>
-              <a:rPr kumimoji="1" lang="en-US" altLang="ko-KR" sz="1400" dirty="0" err="1"/>
-              <a:t>02. LLM이라는 재료</a:t>
-            </a:r>
-          </a:p>
-        </p:txBody>
-      </p:sp>
-      <p:sp>
-        <p:nvSpPr>
-          <p:cNvPr id="6" name="텍스트 개체 틀 5">
-            <a:extLst>
-              <a:ext uri="{FF2B5EF4-FFF2-40B4-BE49-F238E27FC236}">
-                <a16:creationId xmlns:a16="http://schemas.microsoft.com/office/drawing/2014/main" id="{A24E58E1-194B-A320-AEEE-24D08685BB67}"/>
-              </a:ext>
-            </a:extLst>
-          </p:cNvPr>
-          <p:cNvSpPr>
-            <a:spLocks noGrp="1"/>
-          </p:cNvSpPr>
-          <p:nvPr>
-            <p:ph type="body" sz="quarter" idx="12"/>
-          </p:nvPr>
-        </p:nvSpPr>
-        <p:spPr/>
-        <p:txBody>
-          <a:bodyPr/>
-          <a:lstStyle/>
-          <a:p>
-            <a:endParaRPr kumimoji="1" lang="ko-KR" altLang="en-US" dirty="0"/>
-          </a:p>
-        </p:txBody>
-      </p:sp>
-      <p:sp>
-        <p:nvSpPr>
-          <p:cNvPr id="7" name="텍스트 개체 틀 6">
-            <a:extLst>
-              <a:ext uri="{FF2B5EF4-FFF2-40B4-BE49-F238E27FC236}">
-                <a16:creationId xmlns:a16="http://schemas.microsoft.com/office/drawing/2014/main" id="{A219F420-613B-6234-45F6-0955A9A4505F}"/>
-              </a:ext>
-            </a:extLst>
-          </p:cNvPr>
-          <p:cNvSpPr>
-            <a:spLocks noGrp="1"/>
-          </p:cNvSpPr>
-          <p:nvPr>
-            <p:ph type="body" sz="quarter" idx="13"/>
-          </p:nvPr>
-        </p:nvSpPr>
-        <p:spPr/>
-        <p:txBody>
-          <a:bodyPr/>
-          <a:lstStyle/>
-          <a:p>
-            <a:endParaRPr kumimoji="1" lang="en-US" altLang="ko-KR" dirty="0"/>
-          </a:p>
-        </p:txBody>
-      </p:sp>
-      <p:sp>
-        <p:nvSpPr>
-          <p:cNvPr id="8" name="내용 개체 틀 7">
-            <a:extLst>
-              <a:ext uri="{FF2B5EF4-FFF2-40B4-BE49-F238E27FC236}">
-                <a16:creationId xmlns:a16="http://schemas.microsoft.com/office/drawing/2014/main" id="{BEBA2C4A-B0BF-F2E4-EA6E-614C99CBA184}"/>
-              </a:ext>
-            </a:extLst>
-          </p:cNvPr>
-          <p:cNvSpPr>
-            <a:spLocks noGrp="1"/>
-          </p:cNvSpPr>
-          <p:nvPr>
-            <p:ph idx="1"/>
-          </p:nvPr>
-        </p:nvSpPr>
-        <p:spPr>
-          <a:xfrm>
-            <a:off x="365760" y="1441450"/>
-            <a:ext cx="4069080" cy="4776470"/>
-          </a:xfrm>
-        </p:spPr>
-        <p:txBody>
-          <a:bodyPr>
-            <a:normAutofit/>
-          </a:bodyPr>
-          <a:lstStyle/>
-          <a:p>
-            <a:pPr lvl="2" marL="723900" indent="-368300">
-              <a:spcBef>
-                <a:spcPts val="300"/>
-              </a:spcBef>
-              <a:spcAft>
-                <a:spcPts val="300"/>
-              </a:spcAft>
-              <a:buSzPct val="90000"/>
-              <a:buFont typeface="Wingdings" pitchFamily="2" charset="2"/>
-              <a:buChar char=""/>
-            </a:pPr>
-            <a:r>
-              <a:rPr sz="1400" b="1">
-                <a:solidFill>
-                  <a:srgbClr val="000000"/>
-                </a:solidFill>
-                <a:latin typeface="맑은 고딕"/>
-                <a:ea typeface="맑은 고딕"/>
-              </a:rPr>
-              <a:t>투입물</a:t>
-            </a:r>
-          </a:p>
-          <a:p>
-            <a:pPr lvl="3" marL="723900" indent="0">
-              <a:spcBef>
-                <a:spcPts val="300"/>
-              </a:spcBef>
-              <a:spcAft>
-                <a:spcPts val="300"/>
-              </a:spcAft>
-              <a:buNone/>
-            </a:pPr>
-            <a:r>
-              <a:rPr sz="1200" b="0">
-                <a:solidFill>
-                  <a:srgbClr val="000000"/>
-                </a:solidFill>
-                <a:latin typeface="맑은 고딕"/>
-                <a:ea typeface="맑은 고딕"/>
-              </a:rPr>
-              <a:t>실습 1의 </a:t>
-            </a:r>
-            <a:r>
-              <a:rPr sz="1200" b="1">
-                <a:solidFill>
-                  <a:srgbClr val="000000"/>
-                </a:solidFill>
-                <a:latin typeface="맑은 고딕"/>
-                <a:ea typeface="맑은 고딕"/>
-              </a:rPr>
-              <a:t>업무 조건</a:t>
-            </a:r>
-            <a:r>
-              <a:rPr sz="1200" b="0">
-                <a:solidFill>
-                  <a:srgbClr val="000000"/>
-                </a:solidFill>
-                <a:latin typeface="맑은 고딕"/>
-                <a:ea typeface="맑은 고딕"/>
-              </a:rPr>
-              <a:t>(</a:t>
-            </a:r>
-            <a:r>
-              <a:rPr sz="1200" b="0">
-                <a:solidFill>
-                  <a:srgbClr val="000000"/>
-                </a:solidFill>
-                <a:latin typeface="맑은 고딕"/>
-                <a:ea typeface="맑은 고딕"/>
-              </a:rPr>
-              <a:t>주문한다-업무조건.md</a:t>
-            </a:r>
-            <a:r>
-              <a:rPr sz="1200" b="0">
-                <a:solidFill>
-                  <a:srgbClr val="000000"/>
-                </a:solidFill>
-                <a:latin typeface="맑은 고딕"/>
-                <a:ea typeface="맑은 고딕"/>
-              </a:rPr>
-              <a:t>)</a:t>
-            </a:r>
-          </a:p>
-          <a:p>
-            <a:pPr lvl="2" marL="723900" indent="-368300">
-              <a:spcBef>
-                <a:spcPts val="300"/>
-              </a:spcBef>
-              <a:spcAft>
-                <a:spcPts val="300"/>
-              </a:spcAft>
-              <a:buSzPct val="90000"/>
-              <a:buFont typeface="Wingdings" pitchFamily="2" charset="2"/>
-              <a:buChar char=""/>
-            </a:pPr>
-            <a:r>
-              <a:rPr sz="1400" b="1">
-                <a:solidFill>
-                  <a:srgbClr val="000000"/>
-                </a:solidFill>
-                <a:latin typeface="맑은 고딕"/>
-                <a:ea typeface="맑은 고딕"/>
-              </a:rPr>
-              <a:t>프롬프트 —</a:t>
-            </a:r>
-            <a:r>
-              <a:rPr sz="1200" b="1">
-                <a:solidFill>
-                  <a:srgbClr val="000000"/>
-                </a:solidFill>
-                <a:latin typeface="맑은 고딕"/>
-                <a:ea typeface="맑은 고딕"/>
-              </a:rPr>
-              <a:t> 요청사항 포함</a:t>
-            </a:r>
-          </a:p>
-          <a:p>
-            <a:pPr lvl="3" marL="981075" indent="-268288">
-              <a:spcBef>
-                <a:spcPts val="300"/>
-              </a:spcBef>
-              <a:spcAft>
-                <a:spcPts val="300"/>
-              </a:spcAft>
-              <a:buFont typeface="+mj-ea"/>
-              <a:buAutoNum type="circleNumDbPlain" startAt="1"/>
-            </a:pPr>
-            <a:r>
-              <a:rPr sz="1200" b="0">
-                <a:solidFill>
-                  <a:srgbClr val="000000"/>
-                </a:solidFill>
-                <a:latin typeface="맑은 고딕"/>
-                <a:ea typeface="맑은 고딕"/>
-              </a:rPr>
-              <a:t>"실습 1의 업무 조건을 읽고 첫 주문 기능 개발의 일 목록을 만들어라. </a:t>
-            </a:r>
-            <a:r>
-              <a:rPr sz="1200" b="1">
-                <a:solidFill>
-                  <a:srgbClr val="000000"/>
-                </a:solidFill>
-                <a:latin typeface="맑은 고딕"/>
-                <a:ea typeface="맑은 고딕"/>
-              </a:rPr>
-              <a:t>작업 특성 네 가지</a:t>
-            </a:r>
-            <a:r>
-              <a:rPr sz="1200" b="0">
-                <a:solidFill>
-                  <a:srgbClr val="000000"/>
-                </a:solidFill>
-                <a:latin typeface="맑은 고딕"/>
-                <a:ea typeface="맑은 고딕"/>
-              </a:rPr>
-              <a:t>로 나누고 가장 단순한 충분한 활용 방식과 근거를 제안해라. 미정인 조건은 질문해라."</a:t>
-            </a:r>
-          </a:p>
-          <a:p>
-            <a:pPr lvl="3" marL="981075" indent="-268288">
-              <a:spcBef>
-                <a:spcPts val="300"/>
-              </a:spcBef>
-              <a:spcAft>
-                <a:spcPts val="300"/>
-              </a:spcAft>
-              <a:buFont typeface="+mj-ea"/>
-              <a:buAutoNum type="circleNumDbPlain" startAt="2"/>
-            </a:pPr>
-            <a:r>
-              <a:rPr sz="1200" b="0">
-                <a:solidFill>
-                  <a:srgbClr val="000000"/>
-                </a:solidFill>
-                <a:latin typeface="맑은 고딕"/>
-                <a:ea typeface="맑은 고딕"/>
-              </a:rPr>
-              <a:t>"[앞선 질문에 대한 답]과 [추가 질문·수정 요청]을 적는다. </a:t>
-            </a:r>
-            <a:r>
-              <a:rPr sz="1200" b="1">
-                <a:solidFill>
-                  <a:srgbClr val="000000"/>
-                </a:solidFill>
-                <a:latin typeface="맑은 고딕"/>
-                <a:ea typeface="맑은 고딕"/>
-              </a:rPr>
-              <a:t>업무 규칙의 결정·초안 작성·운영 실행</a:t>
-            </a:r>
-            <a:r>
-              <a:rPr sz="1200" b="0">
-                <a:solidFill>
-                  <a:srgbClr val="000000"/>
-                </a:solidFill>
-                <a:latin typeface="맑은 고딕"/>
-                <a:ea typeface="맑은 고딕"/>
-              </a:rPr>
-              <a:t>을 한 일로 묶지 마라."</a:t>
-            </a:r>
-          </a:p>
-          <a:p>
-            <a:pPr lvl="3" marL="981075" indent="-268288">
-              <a:spcBef>
-                <a:spcPts val="300"/>
-              </a:spcBef>
-              <a:spcAft>
-                <a:spcPts val="300"/>
-              </a:spcAft>
-              <a:buFont typeface="+mj-ea"/>
-              <a:buAutoNum type="circleNumDbPlain" startAt="3"/>
-            </a:pPr>
-            <a:r>
-              <a:rPr sz="1200" b="0">
-                <a:solidFill>
-                  <a:srgbClr val="000000"/>
-                </a:solidFill>
-                <a:latin typeface="맑은 고딕"/>
-                <a:ea typeface="맑은 고딕"/>
-              </a:rPr>
-              <a:t>"[앞선 질문에 대한 답]과 [추가 질문·수정 요청]을 적는다. 에이전트로 고른 일은 </a:t>
-            </a:r>
-            <a:r>
-              <a:rPr sz="1200" b="1">
-                <a:solidFill>
-                  <a:srgbClr val="000000"/>
-                </a:solidFill>
-                <a:latin typeface="맑은 고딕"/>
-                <a:ea typeface="맑은 고딕"/>
-              </a:rPr>
-              <a:t>자동 검사와 되돌림</a:t>
-            </a:r>
-            <a:r>
-              <a:rPr sz="1200" b="0">
-                <a:solidFill>
-                  <a:srgbClr val="000000"/>
-                </a:solidFill>
-                <a:latin typeface="맑은 고딕"/>
-                <a:ea typeface="맑은 고딕"/>
-              </a:rPr>
-              <a:t>이 가능한지, 워크플로면 충분하지 않은지 다시 따져라."</a:t>
-            </a:r>
-          </a:p>
-          <a:p>
-            <a:pPr lvl="3" marL="981075" indent="-268288">
-              <a:spcBef>
-                <a:spcPts val="300"/>
-              </a:spcBef>
-              <a:spcAft>
-                <a:spcPts val="300"/>
-              </a:spcAft>
-              <a:buFont typeface="+mj-ea"/>
-              <a:buAutoNum type="circleNumDbPlain" startAt="4"/>
-            </a:pPr>
-            <a:r>
-              <a:rPr sz="1200" b="0">
-                <a:solidFill>
-                  <a:srgbClr val="000000"/>
-                </a:solidFill>
-                <a:latin typeface="맑은 고딕"/>
-                <a:ea typeface="맑은 고딕"/>
-              </a:rPr>
-              <a:t>"[앞선 질문에 대한 답]과 [추가 질문·수정 요청]을 적는다. </a:t>
-            </a:r>
-            <a:r>
-              <a:rPr sz="1200" b="1">
-                <a:solidFill>
-                  <a:srgbClr val="000000"/>
-                </a:solidFill>
-                <a:latin typeface="맑은 고딕"/>
-                <a:ea typeface="맑은 고딕"/>
-              </a:rPr>
-              <a:t>비용과 사람의 확인 시점</a:t>
-            </a:r>
-            <a:r>
-              <a:rPr sz="1200" b="0">
-                <a:solidFill>
-                  <a:srgbClr val="000000"/>
-                </a:solidFill>
-                <a:latin typeface="맑은 고딕"/>
-                <a:ea typeface="맑은 고딕"/>
-              </a:rPr>
-              <a:t>을 비교하고 충분한 방식에서 멈춰라."</a:t>
-            </a:r>
-          </a:p>
-          <a:p>
-            <a:pPr lvl="3" marL="981075" indent="-268288">
-              <a:spcBef>
-                <a:spcPts val="300"/>
-              </a:spcBef>
-              <a:spcAft>
-                <a:spcPts val="300"/>
-              </a:spcAft>
-              <a:buFont typeface="+mj-ea"/>
-              <a:buAutoNum type="circleNumDbPlain" startAt="5"/>
-            </a:pPr>
-            <a:r>
-              <a:rPr sz="1200" b="0">
-                <a:solidFill>
-                  <a:srgbClr val="000000"/>
-                </a:solidFill>
-                <a:latin typeface="맑은 고딕"/>
-                <a:ea typeface="맑은 고딕"/>
-              </a:rPr>
-              <a:t>"합의한 일 목록과 작업 특성·활용 방식·근거를 간결한 </a:t>
-            </a:r>
-            <a:r>
-              <a:rPr sz="1200" b="1">
-                <a:solidFill>
-                  <a:srgbClr val="000000"/>
-                </a:solidFill>
-                <a:latin typeface="맑은 고딕"/>
-                <a:ea typeface="맑은 고딕"/>
-              </a:rPr>
-              <a:t>Markdown 파일</a:t>
-            </a:r>
-            <a:r>
-              <a:rPr sz="1200" b="0">
-                <a:solidFill>
-                  <a:srgbClr val="000000"/>
-                </a:solidFill>
-                <a:latin typeface="맑은 고딕"/>
-                <a:ea typeface="맑은 고딕"/>
-              </a:rPr>
-              <a:t>로 생성해라. 새 정책·구현을 추가하지 말고, 미정과 자율성을 올릴 조건은 필요한 일에만 짧게 남겨라."</a:t>
-            </a:r>
-          </a:p>
-        </p:txBody>
-      </p:sp>
-      <p:sp>
-        <p:nvSpPr>
-          <p:cNvPr id="9" name="내용 개체 틀 7">
-            <a:extLst>
-              <a:ext uri="{FF2B5EF4-FFF2-40B4-BE49-F238E27FC236}">
-                <a16:creationId xmlns:a16="http://schemas.microsoft.com/office/drawing/2014/main" id="{BEBA2C4A-B0BF-F2E4-EA6E-614C99CBA184}"/>
-              </a:ext>
-            </a:extLst>
-          </p:cNvPr>
-          <p:cNvSpPr>
-            <a:spLocks noGrp="1"/>
-          </p:cNvSpPr>
-          <p:nvPr>
-            <p:ph idx="1"/>
-          </p:nvPr>
-        </p:nvSpPr>
-        <p:spPr>
-          <a:xfrm>
-            <a:off x="365760" y="960120"/>
-            <a:ext cx="8412480" cy="481330"/>
-          </a:xfrm>
-        </p:spPr>
-        <p:txBody>
-          <a:bodyPr>
-            <a:normAutofit/>
-          </a:bodyPr>
-          <a:lstStyle/>
-          <a:p>
-            <a:pPr marL="0" indent="0">
-              <a:spcBef>
-                <a:spcPts val="300"/>
-              </a:spcBef>
-              <a:spcAft>
-                <a:spcPts val="300"/>
-              </a:spcAft>
-              <a:buNone/>
-            </a:pPr>
-            <a:r>
-              <a:rPr sz="1400" b="0">
-                <a:solidFill>
-                  <a:srgbClr val="000000"/>
-                </a:solidFill>
-                <a:latin typeface="맑은 고딕"/>
-                <a:ea typeface="맑은 고딕"/>
-              </a:rPr>
-              <a:t>①로 시작하고 ②~④에는 </a:t>
-            </a:r>
-            <a:r>
-              <a:rPr sz="1400" b="1">
-                <a:solidFill>
-                  <a:srgbClr val="000000"/>
-                </a:solidFill>
-                <a:latin typeface="맑은 고딕"/>
-                <a:ea typeface="맑은 고딕"/>
-              </a:rPr>
-              <a:t>받은 질문의 답과 수정 요청</a:t>
-            </a:r>
-            <a:r>
-              <a:rPr sz="1400" b="0">
-                <a:solidFill>
-                  <a:srgbClr val="000000"/>
-                </a:solidFill>
-                <a:latin typeface="맑은 고딕"/>
-                <a:ea typeface="맑은 고딕"/>
-              </a:rPr>
-              <a:t>을 함께 적어 방식과 근거를 검토한다.</a:t>
-            </a:r>
-          </a:p>
-        </p:txBody>
-      </p:sp>
-      <p:sp>
-        <p:nvSpPr>
-          <p:cNvPr id="10" name="내용 개체 틀 7">
-            <a:extLst>
-              <a:ext uri="{FF2B5EF4-FFF2-40B4-BE49-F238E27FC236}">
-                <a16:creationId xmlns:a16="http://schemas.microsoft.com/office/drawing/2014/main" id="{BEBA2C4A-B0BF-F2E4-EA6E-614C99CBA184}"/>
-              </a:ext>
-            </a:extLst>
-          </p:cNvPr>
-          <p:cNvSpPr>
-            <a:spLocks noGrp="1"/>
-          </p:cNvSpPr>
-          <p:nvPr>
-            <p:ph idx="1"/>
-          </p:nvPr>
-        </p:nvSpPr>
-        <p:spPr>
-          <a:xfrm>
-            <a:off x="4709160" y="1441450"/>
-            <a:ext cx="4069080" cy="4776470"/>
-          </a:xfrm>
-        </p:spPr>
-        <p:txBody>
-          <a:bodyPr>
-            <a:normAutofit/>
-          </a:bodyPr>
-          <a:lstStyle/>
-          <a:p>
-            <a:pPr lvl="2" marL="723900" indent="-368300">
-              <a:spcBef>
-                <a:spcPts val="300"/>
-              </a:spcBef>
-              <a:spcAft>
-                <a:spcPts val="300"/>
-              </a:spcAft>
-              <a:buSzPct val="90000"/>
-              <a:buFont typeface="Wingdings" pitchFamily="2" charset="2"/>
-              <a:buChar char=""/>
-            </a:pPr>
-            <a:r>
-              <a:rPr sz="1400" b="1">
-                <a:solidFill>
-                  <a:srgbClr val="000000"/>
-                </a:solidFill>
-                <a:latin typeface="맑은 고딕"/>
-                <a:ea typeface="맑은 고딕"/>
-              </a:rPr>
-              <a:t>점검 항목</a:t>
-            </a:r>
-          </a:p>
-          <a:p>
-            <a:pPr lvl="3" marL="1028700" indent="-304800">
-              <a:spcBef>
-                <a:spcPts val="300"/>
-              </a:spcBef>
-              <a:spcAft>
-                <a:spcPts val="300"/>
-              </a:spcAft>
-              <a:buFont typeface="+mj-lt"/>
-              <a:buAutoNum type="arabicPeriod" startAt="1"/>
-            </a:pPr>
-            <a:r>
-              <a:rPr sz="1200" b="0">
-                <a:solidFill>
-                  <a:srgbClr val="000000"/>
-                </a:solidFill>
-                <a:latin typeface="맑은 고딕"/>
-                <a:ea typeface="맑은 고딕"/>
-              </a:rPr>
-              <a:t/>
-            </a:r>
-            <a:r>
-              <a:rPr sz="1200" b="1">
-                <a:solidFill>
-                  <a:srgbClr val="000000"/>
-                </a:solidFill>
-                <a:latin typeface="맑은 고딕"/>
-                <a:ea typeface="맑은 고딕"/>
-              </a:rPr>
-              <a:t>범위</a:t>
-            </a:r>
-            <a:r>
-              <a:rPr sz="1200" b="0">
-                <a:solidFill>
-                  <a:srgbClr val="000000"/>
-                </a:solidFill>
-                <a:latin typeface="맑은 고딕"/>
-                <a:ea typeface="맑은 고딕"/>
-              </a:rPr>
-              <a:t> —</a:t>
-            </a:r>
-            <a:r>
-              <a:rPr sz="1000" b="0">
-                <a:solidFill>
-                  <a:srgbClr val="000000"/>
-                </a:solidFill>
-                <a:latin typeface="맑은 고딕"/>
-                <a:ea typeface="맑은 고딕"/>
-              </a:rPr>
-              <a:t> 첫 주문 기능에 필요한 일인가?</a:t>
-            </a:r>
-          </a:p>
-          <a:p>
-            <a:pPr lvl="3" marL="1028700" indent="-304800">
-              <a:spcBef>
-                <a:spcPts val="300"/>
-              </a:spcBef>
-              <a:spcAft>
-                <a:spcPts val="300"/>
-              </a:spcAft>
-              <a:buFont typeface="+mj-lt"/>
-              <a:buAutoNum type="arabicPeriod" startAt="2"/>
-            </a:pPr>
-            <a:r>
-              <a:rPr sz="1200" b="0">
-                <a:solidFill>
-                  <a:srgbClr val="000000"/>
-                </a:solidFill>
-                <a:latin typeface="맑은 고딕"/>
-                <a:ea typeface="맑은 고딕"/>
-              </a:rPr>
-              <a:t/>
-            </a:r>
-            <a:r>
-              <a:rPr sz="1200" b="1">
-                <a:solidFill>
-                  <a:srgbClr val="000000"/>
-                </a:solidFill>
-                <a:latin typeface="맑은 고딕"/>
-                <a:ea typeface="맑은 고딕"/>
-              </a:rPr>
-              <a:t>분리</a:t>
-            </a:r>
-            <a:r>
-              <a:rPr sz="1200" b="0">
-                <a:solidFill>
-                  <a:srgbClr val="000000"/>
-                </a:solidFill>
-                <a:latin typeface="맑은 고딕"/>
-                <a:ea typeface="맑은 고딕"/>
-              </a:rPr>
-              <a:t> —</a:t>
-            </a:r>
-            <a:r>
-              <a:rPr sz="1000" b="0">
-                <a:solidFill>
-                  <a:srgbClr val="000000"/>
-                </a:solidFill>
-                <a:latin typeface="맑은 고딕"/>
-                <a:ea typeface="맑은 고딕"/>
-              </a:rPr>
-              <a:t> 규칙의 결정과 초안·운영 실행을 나눴는가?</a:t>
-            </a:r>
-          </a:p>
-          <a:p>
-            <a:pPr lvl="3" marL="1028700" indent="-304800">
-              <a:spcBef>
-                <a:spcPts val="300"/>
-              </a:spcBef>
-              <a:spcAft>
-                <a:spcPts val="300"/>
-              </a:spcAft>
-              <a:buFont typeface="+mj-lt"/>
-              <a:buAutoNum type="arabicPeriod" startAt="3"/>
-            </a:pPr>
-            <a:r>
-              <a:rPr sz="1200" b="0">
-                <a:solidFill>
-                  <a:srgbClr val="000000"/>
-                </a:solidFill>
-                <a:latin typeface="맑은 고딕"/>
-                <a:ea typeface="맑은 고딕"/>
-              </a:rPr>
-              <a:t/>
-            </a:r>
-            <a:r>
-              <a:rPr sz="1200" b="1">
-                <a:solidFill>
-                  <a:srgbClr val="000000"/>
-                </a:solidFill>
-                <a:latin typeface="맑은 고딕"/>
-                <a:ea typeface="맑은 고딕"/>
-              </a:rPr>
-              <a:t>검사</a:t>
-            </a:r>
-            <a:r>
-              <a:rPr sz="1200" b="0">
-                <a:solidFill>
-                  <a:srgbClr val="000000"/>
-                </a:solidFill>
-                <a:latin typeface="맑은 고딕"/>
-                <a:ea typeface="맑은 고딕"/>
-              </a:rPr>
-              <a:t> —</a:t>
-            </a:r>
-            <a:r>
-              <a:rPr sz="1000" b="0">
-                <a:solidFill>
-                  <a:srgbClr val="000000"/>
-                </a:solidFill>
-                <a:latin typeface="맑은 고딕"/>
-                <a:ea typeface="맑은 고딕"/>
-              </a:rPr>
-              <a:t> 자동 확인과 되돌림의 근거가 있는가?</a:t>
-            </a:r>
-          </a:p>
-          <a:p>
-            <a:pPr lvl="3" marL="1028700" indent="-304800">
-              <a:spcBef>
-                <a:spcPts val="300"/>
-              </a:spcBef>
-              <a:spcAft>
-                <a:spcPts val="300"/>
-              </a:spcAft>
-              <a:buFont typeface="+mj-lt"/>
-              <a:buAutoNum type="arabicPeriod" startAt="4"/>
-            </a:pPr>
-            <a:r>
-              <a:rPr sz="1200" b="0">
-                <a:solidFill>
-                  <a:srgbClr val="000000"/>
-                </a:solidFill>
-                <a:latin typeface="맑은 고딕"/>
-                <a:ea typeface="맑은 고딕"/>
-              </a:rPr>
-              <a:t/>
-            </a:r>
-            <a:r>
-              <a:rPr sz="1200" b="1">
-                <a:solidFill>
-                  <a:srgbClr val="000000"/>
-                </a:solidFill>
-                <a:latin typeface="맑은 고딕"/>
-                <a:ea typeface="맑은 고딕"/>
-              </a:rPr>
-              <a:t>선택</a:t>
-            </a:r>
-            <a:r>
-              <a:rPr sz="1200" b="0">
-                <a:solidFill>
-                  <a:srgbClr val="000000"/>
-                </a:solidFill>
-                <a:latin typeface="맑은 고딕"/>
-                <a:ea typeface="맑은 고딕"/>
-              </a:rPr>
-              <a:t> —</a:t>
-            </a:r>
-            <a:r>
-              <a:rPr sz="1000" b="0">
-                <a:solidFill>
-                  <a:srgbClr val="000000"/>
-                </a:solidFill>
-                <a:latin typeface="맑은 고딕"/>
-                <a:ea typeface="맑은 고딕"/>
-              </a:rPr>
-              <a:t> 더 단순한 방식으로 충분하지 않은가?</a:t>
-            </a:r>
-          </a:p>
-          <a:p>
-            <a:pPr lvl="3" marL="1028700" indent="-304800">
-              <a:spcBef>
-                <a:spcPts val="300"/>
-              </a:spcBef>
-              <a:spcAft>
-                <a:spcPts val="300"/>
-              </a:spcAft>
-              <a:buFont typeface="+mj-lt"/>
-              <a:buAutoNum type="arabicPeriod" startAt="5"/>
-            </a:pPr>
-            <a:r>
-              <a:rPr sz="1200" b="0">
-                <a:solidFill>
-                  <a:srgbClr val="000000"/>
-                </a:solidFill>
-                <a:latin typeface="맑은 고딕"/>
-                <a:ea typeface="맑은 고딕"/>
-              </a:rPr>
-              <a:t/>
-            </a:r>
-            <a:r>
-              <a:rPr sz="1200" b="1">
-                <a:solidFill>
-                  <a:srgbClr val="000000"/>
-                </a:solidFill>
-                <a:latin typeface="맑은 고딕"/>
-                <a:ea typeface="맑은 고딕"/>
-              </a:rPr>
-              <a:t>대가</a:t>
-            </a:r>
-            <a:r>
-              <a:rPr sz="1200" b="0">
-                <a:solidFill>
-                  <a:srgbClr val="000000"/>
-                </a:solidFill>
-                <a:latin typeface="맑은 고딕"/>
-                <a:ea typeface="맑은 고딕"/>
-              </a:rPr>
-              <a:t> —</a:t>
-            </a:r>
-            <a:r>
-              <a:rPr sz="1000" b="0">
-                <a:solidFill>
-                  <a:srgbClr val="000000"/>
-                </a:solidFill>
-                <a:latin typeface="맑은 고딕"/>
-                <a:ea typeface="맑은 고딕"/>
-              </a:rPr>
-              <a:t> 비용과 사람의 확인 시점을 함께 따졌는가?</a:t>
-            </a:r>
-          </a:p>
-          <a:p>
-            <a:pPr lvl="2" marL="723900" indent="-368300">
-              <a:spcBef>
-                <a:spcPts val="300"/>
-              </a:spcBef>
-              <a:spcAft>
-                <a:spcPts val="300"/>
-              </a:spcAft>
-              <a:buSzPct val="90000"/>
-              <a:buFont typeface="Wingdings" pitchFamily="2" charset="2"/>
-              <a:buChar char=""/>
-            </a:pPr>
-            <a:r>
-              <a:rPr sz="1400" b="1">
-                <a:solidFill>
-                  <a:srgbClr val="000000"/>
-                </a:solidFill>
-                <a:latin typeface="맑은 고딕"/>
-                <a:ea typeface="맑은 고딕"/>
-              </a:rPr>
-              <a:t>결과물</a:t>
-            </a:r>
-          </a:p>
-          <a:p>
-            <a:pPr lvl="3" marL="723900" indent="0">
-              <a:spcBef>
-                <a:spcPts val="300"/>
-              </a:spcBef>
-              <a:spcAft>
-                <a:spcPts val="300"/>
-              </a:spcAft>
-              <a:buNone/>
-            </a:pPr>
-            <a:r>
-              <a:rPr sz="1200" b="0">
-                <a:solidFill>
-                  <a:srgbClr val="000000"/>
-                </a:solidFill>
-                <a:latin typeface="맑은 고딕"/>
-                <a:ea typeface="맑은 고딕"/>
-              </a:rPr>
-              <a:t>활용-방식-판단.md</a:t>
-            </a:r>
-            <a:r>
-              <a:rPr sz="1200" b="0">
-                <a:solidFill>
-                  <a:srgbClr val="000000"/>
-                </a:solidFill>
-                <a:latin typeface="맑은 고딕"/>
-                <a:ea typeface="맑은 고딕"/>
-              </a:rPr>
-              <a:t> —</a:t>
-            </a:r>
-            <a:r>
-              <a:rPr sz="1000" b="0">
-                <a:solidFill>
-                  <a:srgbClr val="000000"/>
-                </a:solidFill>
-                <a:latin typeface="맑은 고딕"/>
-                <a:ea typeface="맑은 고딕"/>
-              </a:rPr>
-              <a:t> 저장소의 </a:t>
-            </a:r>
-            <a:r>
-              <a:rPr sz="1000" b="0">
-                <a:solidFill>
-                  <a:srgbClr val="000000"/>
-                </a:solidFill>
-                <a:latin typeface="맑은 고딕"/>
-                <a:ea typeface="맑은 고딕"/>
-              </a:rPr>
-              <a:t>docs</a:t>
-            </a:r>
-            <a:r>
-              <a:rPr sz="1000" b="0">
-                <a:solidFill>
-                  <a:srgbClr val="000000"/>
-                </a:solidFill>
-                <a:latin typeface="맑은 고딕"/>
-                <a:ea typeface="맑은 고딕"/>
-              </a:rPr>
-              <a:t>에 두고 커밋한다. </a:t>
-            </a:r>
-            <a:r>
-              <a:rPr sz="1000" b="1">
-                <a:solidFill>
-                  <a:srgbClr val="000000"/>
-                </a:solidFill>
-                <a:latin typeface="맑은 고딕"/>
-                <a:ea typeface="맑은 고딕"/>
-              </a:rPr>
-              <a:t>실습 3의 투입물</a:t>
-            </a:r>
-            <a:r>
-              <a:rPr sz="1000" b="0">
-                <a:solidFill>
-                  <a:srgbClr val="000000"/>
-                </a:solidFill>
-                <a:latin typeface="맑은 고딕"/>
-                <a:ea typeface="맑은 고딕"/>
-              </a:rPr>
-              <a:t>이며 실습 1의 업무 조건과 함께 읽는다</a:t>
-            </a:r>
-          </a:p>
-        </p:txBody>
-      </p:sp>
-    </p:spTree>
-    <p:extLst>
-      <p:ext uri="{BB962C8B-B14F-4D97-AF65-F5344CB8AC3E}">
-        <p14:creationId xmlns:p14="http://schemas.microsoft.com/office/powerpoint/2010/main" val="3555436673"/>
       </p:ext>
     </p:extLst>
   </p:cSld>
@@ -12430,7 +11749,7 @@
                 <a:latin typeface="맑은 고딕"/>
                 <a:ea typeface="맑은 고딕"/>
               </a:rPr>
-              <a:t>10. 요약</a:t>
+              <a:t>09. 실습 2 — 활용 방식 고르기</a:t>
             </a:r>
           </a:p>
         </p:txBody>
@@ -12493,7 +11812,7 @@
           <a:p>
             <a:r>
               <a:rPr kumimoji="1" lang="en-US" altLang="ko-KR" sz="1400" dirty="0" err="1"/>
-              <a:t>02. LLM이라는 재료</a:t>
+              <a:t>02. LLM이라는 도구</a:t>
             </a:r>
           </a:p>
         </p:txBody>
@@ -12564,268 +11883,828 @@
             <p:ph idx="1"/>
           </p:nvPr>
         </p:nvSpPr>
-        <p:spPr/>
+        <p:spPr>
+          <a:xfrm>
+            <a:off x="365760" y="1441450"/>
+            <a:ext cx="4069080" cy="4776470"/>
+          </a:xfrm>
+        </p:spPr>
         <p:txBody>
           <a:bodyPr>
             <a:normAutofit/>
           </a:bodyPr>
           <a:lstStyle/>
           <a:p>
-            <a:pPr marL="0" indent="0">
+            <a:pPr lvl="2" marL="723900" indent="-368300">
               <a:spcBef>
-                <a:spcPts val="600"/>
+                <a:spcPts val="300"/>
               </a:spcBef>
               <a:spcAft>
-                <a:spcPts val="600"/>
-              </a:spcAft>
-              <a:buNone/>
-            </a:pPr>
-            <a:r>
-              <a:rPr sz="1800" b="1">
-                <a:solidFill>
-                  <a:srgbClr val="000000"/>
-                </a:solidFill>
-                <a:latin typeface="맑은 고딕"/>
-                <a:ea typeface="맑은 고딕"/>
-              </a:rPr>
-              <a:t>형태는 작업이 고르고 비용이 그 선택을 제약한다</a:t>
-            </a:r>
-            <a:r>
-              <a:rPr sz="1800" b="0">
-                <a:solidFill>
-                  <a:srgbClr val="000000"/>
-                </a:solidFill>
-                <a:latin typeface="맑은 고딕"/>
-                <a:ea typeface="맑은 고딕"/>
-              </a:rPr>
-              <a:t>.</a:t>
-            </a:r>
-          </a:p>
-          <a:p>
-            <a:pPr marL="342900" indent="0">
-              <a:spcBef>
-                <a:spcPts val="600"/>
-              </a:spcBef>
-              <a:spcAft>
-                <a:spcPts val="600"/>
-              </a:spcAft>
-              <a:buNone/>
-            </a:pPr>
-            <a:r>
-              <a:rPr sz="1800" b="1">
-                <a:solidFill>
-                  <a:srgbClr val="000000"/>
-                </a:solidFill>
-                <a:latin typeface="맑은 고딕"/>
-                <a:ea typeface="맑은 고딕"/>
-              </a:rPr>
-              <a:t>LLM이라는 재료</a:t>
-            </a:r>
-          </a:p>
-          <a:p>
-            <a:pPr lvl="2" marL="723900" indent="-368300">
-              <a:spcBef>
-                <a:spcPts val="600"/>
-              </a:spcBef>
-              <a:spcAft>
-                <a:spcPts val="600"/>
+                <a:spcPts val="300"/>
               </a:spcAft>
               <a:buSzPct val="90000"/>
               <a:buFont typeface="Wingdings" pitchFamily="2" charset="2"/>
               <a:buChar char=""/>
             </a:pPr>
             <a:r>
-              <a:rPr sz="1800" b="1">
-                <a:solidFill>
-                  <a:srgbClr val="000000"/>
-                </a:solidFill>
-                <a:latin typeface="맑은 고딕"/>
-                <a:ea typeface="맑은 고딕"/>
-              </a:rPr>
-              <a:t>그럴듯한 추측·비결정성</a:t>
-            </a:r>
-            <a:r>
-              <a:rPr sz="1800" b="0">
-                <a:solidFill>
-                  <a:srgbClr val="000000"/>
-                </a:solidFill>
-                <a:latin typeface="맑은 고딕"/>
-                <a:ea typeface="맑은 고딕"/>
-              </a:rPr>
-              <a:t>에는 사람이 정한 규칙과 검사가 필요하다.</a:t>
+              <a:rPr sz="1400" b="1">
+                <a:solidFill>
+                  <a:srgbClr val="000000"/>
+                </a:solidFill>
+                <a:latin typeface="맑은 고딕"/>
+                <a:ea typeface="맑은 고딕"/>
+              </a:rPr>
+              <a:t>투입물</a:t>
+            </a:r>
+          </a:p>
+          <a:p>
+            <a:pPr lvl="3" marL="723900" indent="0">
+              <a:spcBef>
+                <a:spcPts val="300"/>
+              </a:spcBef>
+              <a:spcAft>
+                <a:spcPts val="300"/>
+              </a:spcAft>
+              <a:buNone/>
+            </a:pPr>
+            <a:r>
+              <a:rPr sz="1200" b="0">
+                <a:solidFill>
+                  <a:srgbClr val="000000"/>
+                </a:solidFill>
+                <a:latin typeface="맑은 고딕"/>
+                <a:ea typeface="맑은 고딕"/>
+              </a:rPr>
+              <a:t>실습 1의 </a:t>
+            </a:r>
+            <a:r>
+              <a:rPr sz="1200" b="1">
+                <a:solidFill>
+                  <a:srgbClr val="000000"/>
+                </a:solidFill>
+                <a:latin typeface="맑은 고딕"/>
+                <a:ea typeface="맑은 고딕"/>
+              </a:rPr>
+              <a:t>업무 조건</a:t>
+            </a:r>
+            <a:r>
+              <a:rPr sz="1200" b="0">
+                <a:solidFill>
+                  <a:srgbClr val="000000"/>
+                </a:solidFill>
+                <a:latin typeface="맑은 고딕"/>
+                <a:ea typeface="맑은 고딕"/>
+              </a:rPr>
+              <a:t>(</a:t>
+            </a:r>
+            <a:r>
+              <a:rPr sz="1200" b="0">
+                <a:solidFill>
+                  <a:srgbClr val="000000"/>
+                </a:solidFill>
+                <a:latin typeface="맑은 고딕"/>
+                <a:ea typeface="맑은 고딕"/>
+              </a:rPr>
+              <a:t>주문한다-업무조건.md</a:t>
+            </a:r>
+            <a:r>
+              <a:rPr sz="1200" b="0">
+                <a:solidFill>
+                  <a:srgbClr val="000000"/>
+                </a:solidFill>
+                <a:latin typeface="맑은 고딕"/>
+                <a:ea typeface="맑은 고딕"/>
+              </a:rPr>
+              <a:t>)</a:t>
             </a:r>
           </a:p>
           <a:p>
             <a:pPr lvl="2" marL="723900" indent="-368300">
               <a:spcBef>
-                <a:spcPts val="600"/>
+                <a:spcPts val="300"/>
               </a:spcBef>
               <a:spcAft>
-                <a:spcPts val="600"/>
+                <a:spcPts val="300"/>
               </a:spcAft>
               <a:buSzPct val="90000"/>
               <a:buFont typeface="Wingdings" pitchFamily="2" charset="2"/>
               <a:buChar char=""/>
             </a:pPr>
             <a:r>
-              <a:rPr sz="1800" b="1">
-                <a:solidFill>
-                  <a:srgbClr val="000000"/>
-                </a:solidFill>
-                <a:latin typeface="맑은 고딕"/>
-                <a:ea typeface="맑은 고딕"/>
-              </a:rPr>
-              <a:t>맥락은 한정</a:t>
-            </a:r>
-            <a:r>
-              <a:rPr sz="1800" b="0">
-                <a:solidFill>
-                  <a:srgbClr val="000000"/>
-                </a:solidFill>
-                <a:latin typeface="맑은 고딕"/>
-                <a:ea typeface="맑은 고딕"/>
-              </a:rPr>
-              <a:t>되고 매 턴 다시 들어간다. 긴 맥락·반복·재시도는 비용을 늘린다.</a:t>
-            </a:r>
-          </a:p>
+              <a:rPr sz="1400" b="1">
+                <a:solidFill>
+                  <a:srgbClr val="000000"/>
+                </a:solidFill>
+                <a:latin typeface="맑은 고딕"/>
+                <a:ea typeface="맑은 고딕"/>
+              </a:rPr>
+              <a:t>프롬프트 —</a:t>
+            </a:r>
+            <a:r>
+              <a:rPr sz="1200" b="1">
+                <a:solidFill>
+                  <a:srgbClr val="000000"/>
+                </a:solidFill>
+                <a:latin typeface="맑은 고딕"/>
+                <a:ea typeface="맑은 고딕"/>
+              </a:rPr>
+              <a:t> 요청사항 포함</a:t>
+            </a:r>
+          </a:p>
+          <a:p>
+            <a:pPr lvl="3" marL="981075" indent="-268288">
+              <a:spcBef>
+                <a:spcPts val="300"/>
+              </a:spcBef>
+              <a:spcAft>
+                <a:spcPts val="300"/>
+              </a:spcAft>
+              <a:buFont typeface="+mj-ea"/>
+              <a:buAutoNum type="circleNumDbPlain" startAt="1"/>
+            </a:pPr>
+            <a:r>
+              <a:rPr sz="1200" b="0">
+                <a:solidFill>
+                  <a:srgbClr val="000000"/>
+                </a:solidFill>
+                <a:latin typeface="맑은 고딕"/>
+                <a:ea typeface="맑은 고딕"/>
+              </a:rPr>
+              <a:t>"실습 1의 업무 조건을 읽고 첫 주문 기능 개발의 일 목록을 만들어라. </a:t>
+            </a:r>
+            <a:r>
+              <a:rPr sz="1200" b="1">
+                <a:solidFill>
+                  <a:srgbClr val="000000"/>
+                </a:solidFill>
+                <a:latin typeface="맑은 고딕"/>
+                <a:ea typeface="맑은 고딕"/>
+              </a:rPr>
+              <a:t>작업 특성 네 가지</a:t>
+            </a:r>
+            <a:r>
+              <a:rPr sz="1200" b="0">
+                <a:solidFill>
+                  <a:srgbClr val="000000"/>
+                </a:solidFill>
+                <a:latin typeface="맑은 고딕"/>
+                <a:ea typeface="맑은 고딕"/>
+              </a:rPr>
+              <a:t>로 나누고 가장 단순한 충분한 활용 방식과 근거를 제안해라. 미정인 조건은 질문해라."</a:t>
+            </a:r>
+          </a:p>
+          <a:p>
+            <a:pPr lvl="3" marL="981075" indent="-268288">
+              <a:spcBef>
+                <a:spcPts val="300"/>
+              </a:spcBef>
+              <a:spcAft>
+                <a:spcPts val="300"/>
+              </a:spcAft>
+              <a:buFont typeface="+mj-ea"/>
+              <a:buAutoNum type="circleNumDbPlain" startAt="2"/>
+            </a:pPr>
+            <a:r>
+              <a:rPr sz="1200" b="0">
+                <a:solidFill>
+                  <a:srgbClr val="000000"/>
+                </a:solidFill>
+                <a:latin typeface="맑은 고딕"/>
+                <a:ea typeface="맑은 고딕"/>
+              </a:rPr>
+              <a:t>"[앞선 질문에 대한 답]과 [추가 질문·수정 요청]을 적는다. </a:t>
+            </a:r>
+            <a:r>
+              <a:rPr sz="1200" b="1">
+                <a:solidFill>
+                  <a:srgbClr val="000000"/>
+                </a:solidFill>
+                <a:latin typeface="맑은 고딕"/>
+                <a:ea typeface="맑은 고딕"/>
+              </a:rPr>
+              <a:t>업무 규칙의 결정·초안 작성·운영 실행</a:t>
+            </a:r>
+            <a:r>
+              <a:rPr sz="1200" b="0">
+                <a:solidFill>
+                  <a:srgbClr val="000000"/>
+                </a:solidFill>
+                <a:latin typeface="맑은 고딕"/>
+                <a:ea typeface="맑은 고딕"/>
+              </a:rPr>
+              <a:t>을 한 일로 묶지 마라."</a:t>
+            </a:r>
+          </a:p>
+          <a:p>
+            <a:pPr lvl="3" marL="981075" indent="-268288">
+              <a:spcBef>
+                <a:spcPts val="300"/>
+              </a:spcBef>
+              <a:spcAft>
+                <a:spcPts val="300"/>
+              </a:spcAft>
+              <a:buFont typeface="+mj-ea"/>
+              <a:buAutoNum type="circleNumDbPlain" startAt="3"/>
+            </a:pPr>
+            <a:r>
+              <a:rPr sz="1200" b="0">
+                <a:solidFill>
+                  <a:srgbClr val="000000"/>
+                </a:solidFill>
+                <a:latin typeface="맑은 고딕"/>
+                <a:ea typeface="맑은 고딕"/>
+              </a:rPr>
+              <a:t>"[앞선 질문에 대한 답]과 [추가 질문·수정 요청]을 적는다. 에이전트로 고른 일은 </a:t>
+            </a:r>
+            <a:r>
+              <a:rPr sz="1200" b="1">
+                <a:solidFill>
+                  <a:srgbClr val="000000"/>
+                </a:solidFill>
+                <a:latin typeface="맑은 고딕"/>
+                <a:ea typeface="맑은 고딕"/>
+              </a:rPr>
+              <a:t>자동 검사와 되돌림</a:t>
+            </a:r>
+            <a:r>
+              <a:rPr sz="1200" b="0">
+                <a:solidFill>
+                  <a:srgbClr val="000000"/>
+                </a:solidFill>
+                <a:latin typeface="맑은 고딕"/>
+                <a:ea typeface="맑은 고딕"/>
+              </a:rPr>
+              <a:t>이 가능한지, 워크플로면 충분하지 않은지 다시 따져라."</a:t>
+            </a:r>
+          </a:p>
+          <a:p>
+            <a:pPr lvl="3" marL="981075" indent="-268288">
+              <a:spcBef>
+                <a:spcPts val="300"/>
+              </a:spcBef>
+              <a:spcAft>
+                <a:spcPts val="300"/>
+              </a:spcAft>
+              <a:buFont typeface="+mj-ea"/>
+              <a:buAutoNum type="circleNumDbPlain" startAt="4"/>
+            </a:pPr>
+            <a:r>
+              <a:rPr sz="1200" b="0">
+                <a:solidFill>
+                  <a:srgbClr val="000000"/>
+                </a:solidFill>
+                <a:latin typeface="맑은 고딕"/>
+                <a:ea typeface="맑은 고딕"/>
+              </a:rPr>
+              <a:t>"[앞선 질문에 대한 답]과 [추가 질문·수정 요청]을 적는다. </a:t>
+            </a:r>
+            <a:r>
+              <a:rPr sz="1200" b="1">
+                <a:solidFill>
+                  <a:srgbClr val="000000"/>
+                </a:solidFill>
+                <a:latin typeface="맑은 고딕"/>
+                <a:ea typeface="맑은 고딕"/>
+              </a:rPr>
+              <a:t>비용과 사람의 확인 시점</a:t>
+            </a:r>
+            <a:r>
+              <a:rPr sz="1200" b="0">
+                <a:solidFill>
+                  <a:srgbClr val="000000"/>
+                </a:solidFill>
+                <a:latin typeface="맑은 고딕"/>
+                <a:ea typeface="맑은 고딕"/>
+              </a:rPr>
+              <a:t>을 비교하고 충분한 방식에서 멈춰라."</a:t>
+            </a:r>
+          </a:p>
+          <a:p>
+            <a:pPr lvl="3" marL="981075" indent="-268288">
+              <a:spcBef>
+                <a:spcPts val="300"/>
+              </a:spcBef>
+              <a:spcAft>
+                <a:spcPts val="300"/>
+              </a:spcAft>
+              <a:buFont typeface="+mj-ea"/>
+              <a:buAutoNum type="circleNumDbPlain" startAt="5"/>
+            </a:pPr>
+            <a:r>
+              <a:rPr sz="1200" b="0">
+                <a:solidFill>
+                  <a:srgbClr val="000000"/>
+                </a:solidFill>
+                <a:latin typeface="맑은 고딕"/>
+                <a:ea typeface="맑은 고딕"/>
+              </a:rPr>
+              <a:t>"합의한 일 목록과 작업 특성·활용 방식·근거를 간결한 </a:t>
+            </a:r>
+            <a:r>
+              <a:rPr sz="1200" b="1">
+                <a:solidFill>
+                  <a:srgbClr val="000000"/>
+                </a:solidFill>
+                <a:latin typeface="맑은 고딕"/>
+                <a:ea typeface="맑은 고딕"/>
+              </a:rPr>
+              <a:t>Markdown 파일</a:t>
+            </a:r>
+            <a:r>
+              <a:rPr sz="1200" b="0">
+                <a:solidFill>
+                  <a:srgbClr val="000000"/>
+                </a:solidFill>
+                <a:latin typeface="맑은 고딕"/>
+                <a:ea typeface="맑은 고딕"/>
+              </a:rPr>
+              <a:t>로 생성해라. 새 정책·구현을 추가하지 말고, 미정과 자율성을 올릴 조건은 필요한 일에만 짧게 남겨라."</a:t>
+            </a:r>
+          </a:p>
+        </p:txBody>
+      </p:sp>
+      <p:sp>
+        <p:nvSpPr>
+          <p:cNvPr id="9" name="내용 개체 틀 7">
+            <a:extLst>
+              <a:ext uri="{FF2B5EF4-FFF2-40B4-BE49-F238E27FC236}">
+                <a16:creationId xmlns:a16="http://schemas.microsoft.com/office/drawing/2014/main" id="{BEBA2C4A-B0BF-F2E4-EA6E-614C99CBA184}"/>
+              </a:ext>
+            </a:extLst>
+          </p:cNvPr>
+          <p:cNvSpPr>
+            <a:spLocks noGrp="1"/>
+          </p:cNvSpPr>
+          <p:nvPr>
+            <p:ph idx="1"/>
+          </p:nvPr>
+        </p:nvSpPr>
+        <p:spPr>
+          <a:xfrm>
+            <a:off x="365760" y="960120"/>
+            <a:ext cx="8412480" cy="481330"/>
+          </a:xfrm>
+        </p:spPr>
+        <p:txBody>
+          <a:bodyPr>
+            <a:normAutofit/>
+          </a:bodyPr>
+          <a:lstStyle/>
+          <a:p>
+            <a:pPr marL="0" indent="0">
+              <a:spcBef>
+                <a:spcPts val="300"/>
+              </a:spcBef>
+              <a:spcAft>
+                <a:spcPts val="300"/>
+              </a:spcAft>
+              <a:buNone/>
+            </a:pPr>
+            <a:r>
+              <a:rPr sz="1400" b="0">
+                <a:solidFill>
+                  <a:srgbClr val="000000"/>
+                </a:solidFill>
+                <a:latin typeface="맑은 고딕"/>
+                <a:ea typeface="맑은 고딕"/>
+              </a:rPr>
+              <a:t>①로 시작하고 ②~④에는 </a:t>
+            </a:r>
+            <a:r>
+              <a:rPr sz="1400" b="1">
+                <a:solidFill>
+                  <a:srgbClr val="000000"/>
+                </a:solidFill>
+                <a:latin typeface="맑은 고딕"/>
+                <a:ea typeface="맑은 고딕"/>
+              </a:rPr>
+              <a:t>받은 질문의 답과 수정 요청</a:t>
+            </a:r>
+            <a:r>
+              <a:rPr sz="1400" b="0">
+                <a:solidFill>
+                  <a:srgbClr val="000000"/>
+                </a:solidFill>
+                <a:latin typeface="맑은 고딕"/>
+                <a:ea typeface="맑은 고딕"/>
+              </a:rPr>
+              <a:t>을 함께 적어 방식과 근거를 검토한다.</a:t>
+            </a:r>
+          </a:p>
+        </p:txBody>
+      </p:sp>
+      <p:sp>
+        <p:nvSpPr>
+          <p:cNvPr id="10" name="내용 개체 틀 7">
+            <a:extLst>
+              <a:ext uri="{FF2B5EF4-FFF2-40B4-BE49-F238E27FC236}">
+                <a16:creationId xmlns:a16="http://schemas.microsoft.com/office/drawing/2014/main" id="{BEBA2C4A-B0BF-F2E4-EA6E-614C99CBA184}"/>
+              </a:ext>
+            </a:extLst>
+          </p:cNvPr>
+          <p:cNvSpPr>
+            <a:spLocks noGrp="1"/>
+          </p:cNvSpPr>
+          <p:nvPr>
+            <p:ph idx="1"/>
+          </p:nvPr>
+        </p:nvSpPr>
+        <p:spPr>
+          <a:xfrm>
+            <a:off x="4709160" y="1441450"/>
+            <a:ext cx="4069080" cy="4776470"/>
+          </a:xfrm>
+        </p:spPr>
+        <p:txBody>
+          <a:bodyPr>
+            <a:normAutofit/>
+          </a:bodyPr>
+          <a:lstStyle/>
           <a:p>
             <a:pPr lvl="2" marL="723900" indent="-368300">
               <a:spcBef>
-                <a:spcPts val="600"/>
+                <a:spcPts val="300"/>
               </a:spcBef>
               <a:spcAft>
-                <a:spcPts val="600"/>
+                <a:spcPts val="300"/>
               </a:spcAft>
               <a:buSzPct val="90000"/>
               <a:buFont typeface="Wingdings" pitchFamily="2" charset="2"/>
               <a:buChar char=""/>
             </a:pPr>
             <a:r>
-              <a:rPr sz="1800" b="1">
-                <a:solidFill>
-                  <a:srgbClr val="000000"/>
-                </a:solidFill>
-                <a:latin typeface="맑은 고딕"/>
-                <a:ea typeface="맑은 고딕"/>
-              </a:rPr>
-              <a:t>작업 특성 4가지</a:t>
-            </a:r>
-            <a:r>
-              <a:rPr sz="1800" b="0">
-                <a:solidFill>
-                  <a:srgbClr val="000000"/>
-                </a:solidFill>
-                <a:latin typeface="맑은 고딕"/>
-                <a:ea typeface="맑은 고딕"/>
-              </a:rPr>
-              <a:t>로 가장 단순한 충분한 활용 방식을 고른다.</a:t>
+              <a:rPr sz="1400" b="1">
+                <a:solidFill>
+                  <a:srgbClr val="000000"/>
+                </a:solidFill>
+                <a:latin typeface="맑은 고딕"/>
+                <a:ea typeface="맑은 고딕"/>
+              </a:rPr>
+              <a:t>점검 항목</a:t>
+            </a:r>
+          </a:p>
+          <a:p>
+            <a:pPr lvl="3" marL="1028700" indent="-304800">
+              <a:spcBef>
+                <a:spcPts val="300"/>
+              </a:spcBef>
+              <a:spcAft>
+                <a:spcPts val="300"/>
+              </a:spcAft>
+              <a:buFont typeface="+mj-lt"/>
+              <a:buAutoNum type="arabicPeriod" startAt="1"/>
+            </a:pPr>
+            <a:r>
+              <a:rPr sz="1200" b="0">
+                <a:solidFill>
+                  <a:srgbClr val="000000"/>
+                </a:solidFill>
+                <a:latin typeface="맑은 고딕"/>
+                <a:ea typeface="맑은 고딕"/>
+              </a:rPr>
+              <a:t/>
+            </a:r>
+            <a:r>
+              <a:rPr sz="1200" b="1">
+                <a:solidFill>
+                  <a:srgbClr val="000000"/>
+                </a:solidFill>
+                <a:latin typeface="맑은 고딕"/>
+                <a:ea typeface="맑은 고딕"/>
+              </a:rPr>
+              <a:t>범위</a:t>
+            </a:r>
+            <a:r>
+              <a:rPr sz="1200" b="0">
+                <a:solidFill>
+                  <a:srgbClr val="000000"/>
+                </a:solidFill>
+                <a:latin typeface="맑은 고딕"/>
+                <a:ea typeface="맑은 고딕"/>
+              </a:rPr>
+              <a:t> —</a:t>
+            </a:r>
+            <a:r>
+              <a:rPr sz="1000" b="0">
+                <a:solidFill>
+                  <a:srgbClr val="000000"/>
+                </a:solidFill>
+                <a:latin typeface="맑은 고딕"/>
+                <a:ea typeface="맑은 고딕"/>
+              </a:rPr>
+              <a:t> 첫 주문 기능에 필요한 일인가?</a:t>
+            </a:r>
+          </a:p>
+          <a:p>
+            <a:pPr lvl="3" marL="1028700" indent="-304800">
+              <a:spcBef>
+                <a:spcPts val="300"/>
+              </a:spcBef>
+              <a:spcAft>
+                <a:spcPts val="300"/>
+              </a:spcAft>
+              <a:buFont typeface="+mj-lt"/>
+              <a:buAutoNum type="arabicPeriod" startAt="2"/>
+            </a:pPr>
+            <a:r>
+              <a:rPr sz="1200" b="0">
+                <a:solidFill>
+                  <a:srgbClr val="000000"/>
+                </a:solidFill>
+                <a:latin typeface="맑은 고딕"/>
+                <a:ea typeface="맑은 고딕"/>
+              </a:rPr>
+              <a:t/>
+            </a:r>
+            <a:r>
+              <a:rPr sz="1200" b="1">
+                <a:solidFill>
+                  <a:srgbClr val="000000"/>
+                </a:solidFill>
+                <a:latin typeface="맑은 고딕"/>
+                <a:ea typeface="맑은 고딕"/>
+              </a:rPr>
+              <a:t>분리</a:t>
+            </a:r>
+            <a:r>
+              <a:rPr sz="1200" b="0">
+                <a:solidFill>
+                  <a:srgbClr val="000000"/>
+                </a:solidFill>
+                <a:latin typeface="맑은 고딕"/>
+                <a:ea typeface="맑은 고딕"/>
+              </a:rPr>
+              <a:t> —</a:t>
+            </a:r>
+            <a:r>
+              <a:rPr sz="1000" b="0">
+                <a:solidFill>
+                  <a:srgbClr val="000000"/>
+                </a:solidFill>
+                <a:latin typeface="맑은 고딕"/>
+                <a:ea typeface="맑은 고딕"/>
+              </a:rPr>
+              <a:t> 규칙의 결정과 초안·운영 실행을 나눴는가?</a:t>
+            </a:r>
+          </a:p>
+          <a:p>
+            <a:pPr lvl="3" marL="1028700" indent="-304800">
+              <a:spcBef>
+                <a:spcPts val="300"/>
+              </a:spcBef>
+              <a:spcAft>
+                <a:spcPts val="300"/>
+              </a:spcAft>
+              <a:buFont typeface="+mj-lt"/>
+              <a:buAutoNum type="arabicPeriod" startAt="3"/>
+            </a:pPr>
+            <a:r>
+              <a:rPr sz="1200" b="0">
+                <a:solidFill>
+                  <a:srgbClr val="000000"/>
+                </a:solidFill>
+                <a:latin typeface="맑은 고딕"/>
+                <a:ea typeface="맑은 고딕"/>
+              </a:rPr>
+              <a:t/>
+            </a:r>
+            <a:r>
+              <a:rPr sz="1200" b="1">
+                <a:solidFill>
+                  <a:srgbClr val="000000"/>
+                </a:solidFill>
+                <a:latin typeface="맑은 고딕"/>
+                <a:ea typeface="맑은 고딕"/>
+              </a:rPr>
+              <a:t>검사</a:t>
+            </a:r>
+            <a:r>
+              <a:rPr sz="1200" b="0">
+                <a:solidFill>
+                  <a:srgbClr val="000000"/>
+                </a:solidFill>
+                <a:latin typeface="맑은 고딕"/>
+                <a:ea typeface="맑은 고딕"/>
+              </a:rPr>
+              <a:t> —</a:t>
+            </a:r>
+            <a:r>
+              <a:rPr sz="1000" b="0">
+                <a:solidFill>
+                  <a:srgbClr val="000000"/>
+                </a:solidFill>
+                <a:latin typeface="맑은 고딕"/>
+                <a:ea typeface="맑은 고딕"/>
+              </a:rPr>
+              <a:t> 자동 확인과 되돌림의 근거가 있는가?</a:t>
+            </a:r>
+          </a:p>
+          <a:p>
+            <a:pPr lvl="3" marL="1028700" indent="-304800">
+              <a:spcBef>
+                <a:spcPts val="300"/>
+              </a:spcBef>
+              <a:spcAft>
+                <a:spcPts val="300"/>
+              </a:spcAft>
+              <a:buFont typeface="+mj-lt"/>
+              <a:buAutoNum type="arabicPeriod" startAt="4"/>
+            </a:pPr>
+            <a:r>
+              <a:rPr sz="1200" b="0">
+                <a:solidFill>
+                  <a:srgbClr val="000000"/>
+                </a:solidFill>
+                <a:latin typeface="맑은 고딕"/>
+                <a:ea typeface="맑은 고딕"/>
+              </a:rPr>
+              <a:t/>
+            </a:r>
+            <a:r>
+              <a:rPr sz="1200" b="1">
+                <a:solidFill>
+                  <a:srgbClr val="000000"/>
+                </a:solidFill>
+                <a:latin typeface="맑은 고딕"/>
+                <a:ea typeface="맑은 고딕"/>
+              </a:rPr>
+              <a:t>선택</a:t>
+            </a:r>
+            <a:r>
+              <a:rPr sz="1200" b="0">
+                <a:solidFill>
+                  <a:srgbClr val="000000"/>
+                </a:solidFill>
+                <a:latin typeface="맑은 고딕"/>
+                <a:ea typeface="맑은 고딕"/>
+              </a:rPr>
+              <a:t> —</a:t>
+            </a:r>
+            <a:r>
+              <a:rPr sz="1000" b="0">
+                <a:solidFill>
+                  <a:srgbClr val="000000"/>
+                </a:solidFill>
+                <a:latin typeface="맑은 고딕"/>
+                <a:ea typeface="맑은 고딕"/>
+              </a:rPr>
+              <a:t> 더 단순한 방식으로 충분하지 않은가?</a:t>
+            </a:r>
+          </a:p>
+          <a:p>
+            <a:pPr lvl="3" marL="1028700" indent="-304800">
+              <a:spcBef>
+                <a:spcPts val="300"/>
+              </a:spcBef>
+              <a:spcAft>
+                <a:spcPts val="300"/>
+              </a:spcAft>
+              <a:buFont typeface="+mj-lt"/>
+              <a:buAutoNum type="arabicPeriod" startAt="5"/>
+            </a:pPr>
+            <a:r>
+              <a:rPr sz="1200" b="0">
+                <a:solidFill>
+                  <a:srgbClr val="000000"/>
+                </a:solidFill>
+                <a:latin typeface="맑은 고딕"/>
+                <a:ea typeface="맑은 고딕"/>
+              </a:rPr>
+              <a:t/>
+            </a:r>
+            <a:r>
+              <a:rPr sz="1200" b="1">
+                <a:solidFill>
+                  <a:srgbClr val="000000"/>
+                </a:solidFill>
+                <a:latin typeface="맑은 고딕"/>
+                <a:ea typeface="맑은 고딕"/>
+              </a:rPr>
+              <a:t>대가</a:t>
+            </a:r>
+            <a:r>
+              <a:rPr sz="1200" b="0">
+                <a:solidFill>
+                  <a:srgbClr val="000000"/>
+                </a:solidFill>
+                <a:latin typeface="맑은 고딕"/>
+                <a:ea typeface="맑은 고딕"/>
+              </a:rPr>
+              <a:t> —</a:t>
+            </a:r>
+            <a:r>
+              <a:rPr sz="1000" b="0">
+                <a:solidFill>
+                  <a:srgbClr val="000000"/>
+                </a:solidFill>
+                <a:latin typeface="맑은 고딕"/>
+                <a:ea typeface="맑은 고딕"/>
+              </a:rPr>
+              <a:t> 비용과 사람의 확인 시점을 함께 따졌는가?</a:t>
             </a:r>
           </a:p>
           <a:p>
             <a:pPr lvl="2" marL="723900" indent="-368300">
               <a:spcBef>
-                <a:spcPts val="600"/>
+                <a:spcPts val="300"/>
               </a:spcBef>
               <a:spcAft>
-                <a:spcPts val="600"/>
+                <a:spcPts val="300"/>
               </a:spcAft>
               <a:buSzPct val="90000"/>
               <a:buFont typeface="Wingdings" pitchFamily="2" charset="2"/>
               <a:buChar char=""/>
             </a:pPr>
             <a:r>
-              <a:rPr sz="1800" b="1">
-                <a:solidFill>
-                  <a:srgbClr val="000000"/>
-                </a:solidFill>
-                <a:latin typeface="맑은 고딕"/>
-                <a:ea typeface="맑은 고딕"/>
-              </a:rPr>
-              <a:t>자율성</a:t>
-            </a:r>
-            <a:r>
-              <a:rPr sz="1800" b="0">
-                <a:solidFill>
-                  <a:srgbClr val="000000"/>
-                </a:solidFill>
-                <a:latin typeface="맑은 고딕"/>
-                <a:ea typeface="맑은 고딕"/>
-              </a:rPr>
-              <a:t>은 자동 검사·되돌림·비용 효과의 증거가 있을 때 높인다.</a:t>
-            </a:r>
-          </a:p>
-          <a:p>
-            <a:pPr marL="342900" indent="0">
+              <a:rPr sz="1400" b="1">
+                <a:solidFill>
+                  <a:srgbClr val="000000"/>
+                </a:solidFill>
+                <a:latin typeface="맑은 고딕"/>
+                <a:ea typeface="맑은 고딕"/>
+              </a:rPr>
+              <a:t>결과물</a:t>
+            </a:r>
+          </a:p>
+          <a:p>
+            <a:pPr lvl="3" marL="723900" indent="0">
               <a:spcBef>
-                <a:spcPts val="600"/>
+                <a:spcPts val="300"/>
               </a:spcBef>
               <a:spcAft>
-                <a:spcPts val="600"/>
+                <a:spcPts val="300"/>
               </a:spcAft>
               <a:buNone/>
             </a:pPr>
             <a:r>
-              <a:rPr sz="1800" b="1">
-                <a:solidFill>
-                  <a:srgbClr val="000000"/>
-                </a:solidFill>
-                <a:latin typeface="맑은 고딕"/>
-                <a:ea typeface="맑은 고딕"/>
-              </a:rPr>
-              <a:t>다음 세션</a:t>
-            </a:r>
-          </a:p>
-          <a:p>
-            <a:pPr lvl="2" marL="723900" indent="-368300">
-              <a:spcBef>
-                <a:spcPts val="600"/>
-              </a:spcBef>
-              <a:spcAft>
-                <a:spcPts val="600"/>
-              </a:spcAft>
-              <a:buSzPct val="90000"/>
-              <a:buFont typeface="Wingdings" pitchFamily="2" charset="2"/>
-              <a:buChar char=""/>
-            </a:pPr>
-            <a:r>
-              <a:rPr sz="1800" b="0">
-                <a:solidFill>
-                  <a:srgbClr val="000000"/>
-                </a:solidFill>
-                <a:latin typeface="맑은 고딕"/>
-                <a:ea typeface="맑은 고딕"/>
-              </a:rPr>
-              <a:t>"세션 03. 요구와 수용 기준" —</a:t>
-            </a:r>
-            <a:r>
-              <a:rPr sz="1600" b="0">
-                <a:solidFill>
-                  <a:srgbClr val="000000"/>
-                </a:solidFill>
-                <a:latin typeface="맑은 고딕"/>
-                <a:ea typeface="맑은 고딕"/>
-              </a:rPr>
-              <a:t> 사람이 원하는 결과를 </a:t>
-            </a:r>
-            <a:r>
-              <a:rPr sz="1600" b="1">
-                <a:solidFill>
-                  <a:srgbClr val="000000"/>
-                </a:solidFill>
-                <a:latin typeface="맑은 고딕"/>
-                <a:ea typeface="맑은 고딕"/>
-              </a:rPr>
-              <a:t>요구사항과 수용 기준</a:t>
-            </a:r>
-            <a:r>
-              <a:rPr sz="1600" b="0">
-                <a:solidFill>
-                  <a:srgbClr val="000000"/>
-                </a:solidFill>
-                <a:latin typeface="맑은 고딕"/>
-                <a:ea typeface="맑은 고딕"/>
-              </a:rPr>
-              <a:t>으로 정한다.</a:t>
+              <a:rPr sz="1200" b="0">
+                <a:solidFill>
+                  <a:srgbClr val="000000"/>
+                </a:solidFill>
+                <a:latin typeface="맑은 고딕"/>
+                <a:ea typeface="맑은 고딕"/>
+              </a:rPr>
+              <a:t>활용-방식-판단.md</a:t>
+            </a:r>
+            <a:r>
+              <a:rPr sz="1200" b="0">
+                <a:solidFill>
+                  <a:srgbClr val="000000"/>
+                </a:solidFill>
+                <a:latin typeface="맑은 고딕"/>
+                <a:ea typeface="맑은 고딕"/>
+              </a:rPr>
+              <a:t> —</a:t>
+            </a:r>
+            <a:r>
+              <a:rPr sz="1000" b="0">
+                <a:solidFill>
+                  <a:srgbClr val="000000"/>
+                </a:solidFill>
+                <a:latin typeface="맑은 고딕"/>
+                <a:ea typeface="맑은 고딕"/>
+              </a:rPr>
+              <a:t> 저장소의 </a:t>
+            </a:r>
+            <a:r>
+              <a:rPr sz="1000" b="0">
+                <a:solidFill>
+                  <a:srgbClr val="000000"/>
+                </a:solidFill>
+                <a:latin typeface="맑은 고딕"/>
+                <a:ea typeface="맑은 고딕"/>
+              </a:rPr>
+              <a:t>docs</a:t>
+            </a:r>
+            <a:r>
+              <a:rPr sz="1000" b="0">
+                <a:solidFill>
+                  <a:srgbClr val="000000"/>
+                </a:solidFill>
+                <a:latin typeface="맑은 고딕"/>
+                <a:ea typeface="맑은 고딕"/>
+              </a:rPr>
+              <a:t>에 두고 커밋한다. </a:t>
+            </a:r>
+            <a:r>
+              <a:rPr sz="1000" b="1">
+                <a:solidFill>
+                  <a:srgbClr val="000000"/>
+                </a:solidFill>
+                <a:latin typeface="맑은 고딕"/>
+                <a:ea typeface="맑은 고딕"/>
+              </a:rPr>
+              <a:t>실습 3의 투입물</a:t>
+            </a:r>
+            <a:r>
+              <a:rPr sz="1000" b="0">
+                <a:solidFill>
+                  <a:srgbClr val="000000"/>
+                </a:solidFill>
+                <a:latin typeface="맑은 고딕"/>
+                <a:ea typeface="맑은 고딕"/>
+              </a:rPr>
+              <a:t>이며 실습 1의 업무 조건과 함께 읽는다</a:t>
             </a:r>
           </a:p>
         </p:txBody>
@@ -12895,19 +12774,7 @@
                 <a:latin typeface="맑은 고딕"/>
                 <a:ea typeface="맑은 고딕"/>
               </a:rPr>
-              <a:t>첫 주문 기능 개발 활용 방식</a:t>
-            </a:r>
-          </a:p>
-          <a:p>
-            <a:r>
-              <a:rPr sz="1100" b="1">
-                <a:solidFill>
-                  <a:srgbClr val="000000"/>
-                </a:solidFill>
-                <a:latin typeface="맑은 고딕"/>
-                <a:ea typeface="맑은 고딕"/>
-              </a:rPr>
-              <a:t>별첨. 실습 답</a:t>
+              <a:t>10. 요약</a:t>
             </a:r>
           </a:p>
         </p:txBody>
@@ -12970,7 +12837,7 @@
           <a:p>
             <a:r>
               <a:rPr kumimoji="1" lang="en-US" altLang="ko-KR" sz="1400" dirty="0" err="1"/>
-              <a:t>별첨: 02. LLM이라는 재료</a:t>
+              <a:t>02. LLM이라는 도구</a:t>
             </a:r>
           </a:p>
         </p:txBody>
@@ -13041,943 +12908,268 @@
             <p:ph idx="1"/>
           </p:nvPr>
         </p:nvSpPr>
-        <p:spPr>
-          <a:xfrm>
-            <a:off x="233172" y="1536700"/>
-            <a:ext cx="4338828" cy="4775765"/>
-          </a:xfrm>
-        </p:spPr>
+        <p:spPr/>
         <p:txBody>
           <a:bodyPr>
             <a:normAutofit/>
           </a:bodyPr>
           <a:lstStyle/>
           <a:p>
-            <a:pPr lvl="2" marL="551180" indent="-139700">
+            <a:pPr marL="0" indent="0">
               <a:spcBef>
-                <a:spcPts val="300"/>
+                <a:spcPts val="600"/>
               </a:spcBef>
               <a:spcAft>
-                <a:spcPts val="300"/>
+                <a:spcPts val="600"/>
               </a:spcAft>
               <a:buNone/>
             </a:pPr>
             <a:r>
-              <a:rPr sz="1000" b="0">
-                <a:solidFill>
-                  <a:srgbClr val="000000"/>
-                </a:solidFill>
-                <a:latin typeface="맑은 고딕"/>
-                <a:ea typeface="맑은 고딕"/>
-              </a:rPr>
-              <a:t>1. </a:t>
-            </a:r>
-            <a:r>
-              <a:rPr sz="1000" b="1">
-                <a:solidFill>
-                  <a:srgbClr val="000000"/>
-                </a:solidFill>
-                <a:latin typeface="맑은 고딕"/>
-                <a:ea typeface="맑은 고딕"/>
-              </a:rPr>
-              <a:t>업무 조건 결정</a:t>
-            </a:r>
-          </a:p>
-          <a:p>
-            <a:pPr lvl="3" marL="731520" indent="-137160">
+              <a:rPr sz="1800" b="1">
+                <a:solidFill>
+                  <a:srgbClr val="000000"/>
+                </a:solidFill>
+                <a:latin typeface="맑은 고딕"/>
+                <a:ea typeface="맑은 고딕"/>
+              </a:rPr>
+              <a:t>활용 방식은 작업 특성에 따라 선택하고 비용이 그 선택을 제약한다</a:t>
+            </a:r>
+            <a:r>
+              <a:rPr sz="1800" b="0">
+                <a:solidFill>
+                  <a:srgbClr val="000000"/>
+                </a:solidFill>
+                <a:latin typeface="맑은 고딕"/>
+                <a:ea typeface="맑은 고딕"/>
+              </a:rPr>
+              <a:t>.</a:t>
+            </a:r>
+          </a:p>
+          <a:p>
+            <a:pPr marL="342900" indent="0">
               <a:spcBef>
-                <a:spcPts val="300"/>
+                <a:spcPts val="600"/>
               </a:spcBef>
               <a:spcAft>
-                <a:spcPts val="300"/>
-              </a:spcAft>
-              <a:buSzPct val="90000"/>
-              <a:buFont typeface="Wingdings" pitchFamily="2" charset="2"/>
-              <a:buChar char=""/>
-            </a:pPr>
-            <a:r>
-              <a:rPr sz="1000" b="1">
-                <a:solidFill>
-                  <a:srgbClr val="000000"/>
-                </a:solidFill>
-                <a:latin typeface="맑은 고딕"/>
-                <a:ea typeface="맑은 고딕"/>
-              </a:rPr>
-              <a:t>특성:</a:t>
-            </a:r>
-            <a:r>
-              <a:rPr sz="1000" b="0">
-                <a:solidFill>
-                  <a:srgbClr val="000000"/>
-                </a:solidFill>
-                <a:latin typeface="맑은 고딕"/>
-                <a:ea typeface="맑은 고딕"/>
-              </a:rPr>
-              <a:t> 업무 규칙—</a:t>
-            </a:r>
-            <a:r>
-              <a:rPr sz="1000" b="0">
-                <a:solidFill>
-                  <a:srgbClr val="000000"/>
-                </a:solidFill>
-                <a:latin typeface="맑은 고딕"/>
-                <a:ea typeface="맑은 고딕"/>
-              </a:rPr>
-              <a:t>확정 조건과 의도적 미정이 구분됨 / 절차—담당자가 정책과 경계를 확인 / 자동 확인—정책 타당성은 자동 판정 불가 / 되돌림—문서 수정은 쉬우나 정책 결정은 사람의 책임</a:t>
-            </a:r>
-          </a:p>
-          <a:p>
-            <a:pPr lvl="3" marL="731520" indent="-137160">
-              <a:spcBef>
-                <a:spcPts val="300"/>
-              </a:spcBef>
-              <a:spcAft>
-                <a:spcPts val="300"/>
-              </a:spcAft>
-              <a:buSzPct val="90000"/>
-              <a:buFont typeface="Wingdings" pitchFamily="2" charset="2"/>
-              <a:buChar char=""/>
-            </a:pPr>
-            <a:r>
-              <a:rPr sz="1000" b="1">
-                <a:solidFill>
-                  <a:srgbClr val="000000"/>
-                </a:solidFill>
-                <a:latin typeface="맑은 고딕"/>
-                <a:ea typeface="맑은 고딕"/>
-              </a:rPr>
-              <a:t>선택·근거와 사람 확인 시점:</a:t>
-            </a:r>
-            <a:r>
-              <a:rPr sz="1000" b="0">
-                <a:solidFill>
-                  <a:srgbClr val="000000"/>
-                </a:solidFill>
-                <a:latin typeface="맑은 고딕"/>
-                <a:ea typeface="맑은 고딕"/>
-              </a:rPr>
-              <a:t> </a:t>
-            </a:r>
-            <a:r>
-              <a:rPr sz="1000" b="1">
-                <a:solidFill>
-                  <a:srgbClr val="000000"/>
-                </a:solidFill>
-                <a:latin typeface="맑은 고딕"/>
-                <a:ea typeface="맑은 고딕"/>
-              </a:rPr>
-              <a:t>수작업</a:t>
-            </a:r>
-            <a:r>
-              <a:rPr sz="1000" b="0">
-                <a:solidFill>
-                  <a:srgbClr val="000000"/>
-                </a:solidFill>
-                <a:latin typeface="맑은 고딕"/>
-                <a:ea typeface="맑은 고딕"/>
-              </a:rPr>
-              <a:t>. LLM은 질문·정리만 보조하며 담당자가 답마다 확인한다.</a:t>
-            </a:r>
-          </a:p>
-          <a:p>
-            <a:pPr lvl="2" marL="551180" indent="-139700">
-              <a:spcBef>
-                <a:spcPts val="300"/>
-              </a:spcBef>
-              <a:spcAft>
-                <a:spcPts val="300"/>
+                <a:spcPts val="600"/>
               </a:spcAft>
               <a:buNone/>
             </a:pPr>
             <a:r>
-              <a:rPr sz="1000" b="0">
-                <a:solidFill>
-                  <a:srgbClr val="000000"/>
-                </a:solidFill>
-                <a:latin typeface="맑은 고딕"/>
-                <a:ea typeface="맑은 고딕"/>
-              </a:rPr>
-              <a:t>2. </a:t>
-            </a:r>
-            <a:r>
-              <a:rPr sz="1000" b="1">
-                <a:solidFill>
-                  <a:srgbClr val="000000"/>
-                </a:solidFill>
-                <a:latin typeface="맑은 고딕"/>
-                <a:ea typeface="맑은 고딕"/>
-              </a:rPr>
-              <a:t>요구·모델·설계 초안</a:t>
-            </a:r>
-          </a:p>
-          <a:p>
-            <a:pPr lvl="3" marL="731520" indent="-137160">
+              <a:rPr sz="1800" b="1">
+                <a:solidFill>
+                  <a:srgbClr val="000000"/>
+                </a:solidFill>
+                <a:latin typeface="맑은 고딕"/>
+                <a:ea typeface="맑은 고딕"/>
+              </a:rPr>
+              <a:t>LLM이라는 도구</a:t>
+            </a:r>
+          </a:p>
+          <a:p>
+            <a:pPr lvl="2" marL="723900" indent="-368300">
               <a:spcBef>
-                <a:spcPts val="300"/>
+                <a:spcPts val="600"/>
               </a:spcBef>
               <a:spcAft>
-                <a:spcPts val="300"/>
-              </a:spcAft>
-              <a:buSzPct val="90000"/>
-              <a:buFont typeface="Wingdings" pitchFamily="2" charset="2"/>
-              <a:buChar char=""/>
-            </a:pPr>
-            <a:r>
-              <a:rPr sz="1000" b="1">
-                <a:solidFill>
-                  <a:srgbClr val="000000"/>
-                </a:solidFill>
-                <a:latin typeface="맑은 고딕"/>
-                <a:ea typeface="맑은 고딕"/>
-              </a:rPr>
-              <a:t>특성:</a:t>
-            </a:r>
-            <a:r>
-              <a:rPr sz="1000" b="0">
-                <a:solidFill>
-                  <a:srgbClr val="000000"/>
-                </a:solidFill>
-                <a:latin typeface="맑은 고딕"/>
-                <a:ea typeface="맑은 고딕"/>
-              </a:rPr>
-              <a:t> 업무 규칙—</a:t>
-            </a:r>
-            <a:r>
-              <a:rPr sz="1000" b="0">
-                <a:solidFill>
-                  <a:srgbClr val="000000"/>
-                </a:solidFill>
-                <a:latin typeface="맑은 고딕"/>
-                <a:ea typeface="맑은 고딕"/>
-              </a:rPr>
-              <a:t>확정 범위만 반영하고 미정 사항을 대신 결정하지 않아야 함 / 절차—아직 마련되지 않음 / 자동 확인—검사와 완료 조건이 없음 / 되돌림—Git으로 쉬움</a:t>
-            </a:r>
-          </a:p>
-          <a:p>
-            <a:pPr lvl="3" marL="731520" indent="-137160">
-              <a:spcBef>
-                <a:spcPts val="300"/>
-              </a:spcBef>
-              <a:spcAft>
-                <a:spcPts val="300"/>
-              </a:spcAft>
-              <a:buSzPct val="90000"/>
-              <a:buFont typeface="Wingdings" pitchFamily="2" charset="2"/>
-              <a:buChar char=""/>
-            </a:pPr>
-            <a:r>
-              <a:rPr sz="1000" b="1">
-                <a:solidFill>
-                  <a:srgbClr val="000000"/>
-                </a:solidFill>
-                <a:latin typeface="맑은 고딕"/>
-                <a:ea typeface="맑은 고딕"/>
-              </a:rPr>
-              <a:t>선택·근거와 사람 확인 시점:</a:t>
-            </a:r>
-            <a:r>
-              <a:rPr sz="1000" b="0">
-                <a:solidFill>
-                  <a:srgbClr val="000000"/>
-                </a:solidFill>
-                <a:latin typeface="맑은 고딕"/>
-                <a:ea typeface="맑은 고딕"/>
-              </a:rPr>
-              <a:t> </a:t>
-            </a:r>
-            <a:r>
-              <a:rPr sz="1000" b="1">
-                <a:solidFill>
-                  <a:srgbClr val="000000"/>
-                </a:solidFill>
-                <a:latin typeface="맑은 고딕"/>
-                <a:ea typeface="맑은 고딕"/>
-              </a:rPr>
-              <a:t>대화형 보조</a:t>
-            </a:r>
-            <a:r>
-              <a:rPr sz="1000" b="0">
-                <a:solidFill>
-                  <a:srgbClr val="000000"/>
-                </a:solidFill>
-                <a:latin typeface="맑은 고딕"/>
-                <a:ea typeface="맑은 고딕"/>
-              </a:rPr>
-              <a:t>. 담당자가 LLM의 답마다 검토한다.</a:t>
-            </a:r>
-          </a:p>
-          <a:p>
-            <a:pPr lvl="2" marL="551180" indent="-139700">
-              <a:spcBef>
-                <a:spcPts val="300"/>
-              </a:spcBef>
-              <a:spcAft>
-                <a:spcPts val="300"/>
-              </a:spcAft>
-              <a:buNone/>
-            </a:pPr>
-            <a:r>
-              <a:rPr sz="1000" b="0">
-                <a:solidFill>
-                  <a:srgbClr val="000000"/>
-                </a:solidFill>
-                <a:latin typeface="맑은 고딕"/>
-                <a:ea typeface="맑은 고딕"/>
-              </a:rPr>
-              <a:t>3. </a:t>
-            </a:r>
-            <a:r>
-              <a:rPr sz="1000" b="1">
-                <a:solidFill>
-                  <a:srgbClr val="000000"/>
-                </a:solidFill>
-                <a:latin typeface="맑은 고딕"/>
-                <a:ea typeface="맑은 고딕"/>
-              </a:rPr>
-              <a:t>저장소 골격</a:t>
-            </a:r>
-          </a:p>
-          <a:p>
-            <a:pPr lvl="3" marL="731520" indent="-137160">
-              <a:spcBef>
-                <a:spcPts val="300"/>
-              </a:spcBef>
-              <a:spcAft>
-                <a:spcPts val="300"/>
-              </a:spcAft>
-              <a:buSzPct val="90000"/>
-              <a:buFont typeface="Wingdings" pitchFamily="2" charset="2"/>
-              <a:buChar char=""/>
-            </a:pPr>
-            <a:r>
-              <a:rPr sz="1000" b="1">
-                <a:solidFill>
-                  <a:srgbClr val="000000"/>
-                </a:solidFill>
-                <a:latin typeface="맑은 고딕"/>
-                <a:ea typeface="맑은 고딕"/>
-              </a:rPr>
-              <a:t>특성:</a:t>
-            </a:r>
-            <a:r>
-              <a:rPr sz="1000" b="0">
-                <a:solidFill>
-                  <a:srgbClr val="000000"/>
-                </a:solidFill>
-                <a:latin typeface="맑은 고딕"/>
-                <a:ea typeface="맑은 고딕"/>
-              </a:rPr>
-              <a:t> 업무 규칙—</a:t>
-            </a:r>
-            <a:r>
-              <a:rPr sz="1000" b="0">
-                <a:solidFill>
-                  <a:srgbClr val="000000"/>
-                </a:solidFill>
-                <a:latin typeface="맑은 고딕"/>
-                <a:ea typeface="맑은 고딕"/>
-              </a:rPr>
-              <a:t>기술과 구성 규칙이 아직 정해지지 않음 / 절차—생성 순서와 명령이 없음 / 자동 확인—빌드·검사 환경이 필요함 / 되돌림—Git으로 쉬움</a:t>
-            </a:r>
-          </a:p>
-          <a:p>
-            <a:pPr lvl="3" marL="731520" indent="-137160">
-              <a:spcBef>
-                <a:spcPts val="300"/>
-              </a:spcBef>
-              <a:spcAft>
-                <a:spcPts val="300"/>
-              </a:spcAft>
-              <a:buSzPct val="90000"/>
-              <a:buFont typeface="Wingdings" pitchFamily="2" charset="2"/>
-              <a:buChar char=""/>
-            </a:pPr>
-            <a:r>
-              <a:rPr sz="1000" b="1">
-                <a:solidFill>
-                  <a:srgbClr val="000000"/>
-                </a:solidFill>
-                <a:latin typeface="맑은 고딕"/>
-                <a:ea typeface="맑은 고딕"/>
-              </a:rPr>
-              <a:t>선택·근거와 사람 확인 시점:</a:t>
-            </a:r>
-            <a:r>
-              <a:rPr sz="1000" b="0">
-                <a:solidFill>
-                  <a:srgbClr val="000000"/>
-                </a:solidFill>
-                <a:latin typeface="맑은 고딕"/>
-                <a:ea typeface="맑은 고딕"/>
-              </a:rPr>
-              <a:t> 현재는 </a:t>
-            </a:r>
-            <a:r>
-              <a:rPr sz="1000" b="1">
-                <a:solidFill>
-                  <a:srgbClr val="000000"/>
-                </a:solidFill>
-                <a:latin typeface="맑은 고딕"/>
-                <a:ea typeface="맑은 고딕"/>
-              </a:rPr>
-              <a:t>대화형 보조</a:t>
-            </a:r>
-            <a:r>
-              <a:rPr sz="1000" b="0">
-                <a:solidFill>
-                  <a:srgbClr val="000000"/>
-                </a:solidFill>
-                <a:latin typeface="맑은 고딕"/>
-                <a:ea typeface="맑은 고딕"/>
-              </a:rPr>
-              <a:t>. 담당자가 LLM의 답마다 확인한다.</a:t>
-            </a:r>
-          </a:p>
-          <a:p>
-            <a:pPr lvl="2" marL="551180" indent="-139700">
-              <a:spcBef>
-                <a:spcPts val="300"/>
-              </a:spcBef>
-              <a:spcAft>
-                <a:spcPts val="300"/>
-              </a:spcAft>
-              <a:buNone/>
-            </a:pPr>
-            <a:r>
-              <a:rPr sz="1000" b="0">
-                <a:solidFill>
-                  <a:srgbClr val="000000"/>
-                </a:solidFill>
-                <a:latin typeface="맑은 고딕"/>
-                <a:ea typeface="맑은 고딕"/>
-              </a:rPr>
-              <a:t>4. </a:t>
-            </a:r>
-            <a:r>
-              <a:rPr sz="1000" b="1">
-                <a:solidFill>
-                  <a:srgbClr val="000000"/>
-                </a:solidFill>
-                <a:latin typeface="맑은 고딕"/>
-                <a:ea typeface="맑은 고딕"/>
-              </a:rPr>
-              <a:t>확정 범위 코드 구현</a:t>
-            </a:r>
-          </a:p>
-          <a:p>
-            <a:pPr lvl="3" marL="731520" indent="-137160">
-              <a:spcBef>
-                <a:spcPts val="300"/>
-              </a:spcBef>
-              <a:spcAft>
-                <a:spcPts val="300"/>
-              </a:spcAft>
-              <a:buSzPct val="90000"/>
-              <a:buFont typeface="Wingdings" pitchFamily="2" charset="2"/>
-              <a:buChar char=""/>
-            </a:pPr>
-            <a:r>
-              <a:rPr sz="1000" b="1">
-                <a:solidFill>
-                  <a:srgbClr val="000000"/>
-                </a:solidFill>
-                <a:latin typeface="맑은 고딕"/>
-                <a:ea typeface="맑은 고딕"/>
-              </a:rPr>
-              <a:t>특성:</a:t>
-            </a:r>
-            <a:r>
-              <a:rPr sz="1000" b="0">
-                <a:solidFill>
-                  <a:srgbClr val="000000"/>
-                </a:solidFill>
-                <a:latin typeface="맑은 고딕"/>
-                <a:ea typeface="맑은 고딕"/>
-              </a:rPr>
-              <a:t> 업무 규칙—</a:t>
-            </a:r>
-            <a:r>
-              <a:rPr sz="1000" b="0">
-                <a:solidFill>
-                  <a:srgbClr val="000000"/>
-                </a:solidFill>
-                <a:latin typeface="맑은 고딕"/>
-                <a:ea typeface="맑은 고딕"/>
-              </a:rPr>
-              <a:t>확정 조건만 구현하고 미정 분기를 정책화하지 않아야 함 / 절차—설계와 구현 절차가 없음 / 자동 확인—완료 조건과 자동 검사가 아직 없음 / 되돌림—작은 로컬 변경으로 Git 복구 가능</a:t>
-            </a:r>
-          </a:p>
-          <a:p>
-            <a:pPr lvl="3" marL="731520" indent="-137160">
-              <a:spcBef>
-                <a:spcPts val="300"/>
-              </a:spcBef>
-              <a:spcAft>
-                <a:spcPts val="300"/>
-              </a:spcAft>
-              <a:buSzPct val="90000"/>
-              <a:buFont typeface="Wingdings" pitchFamily="2" charset="2"/>
-              <a:buChar char=""/>
-            </a:pPr>
-            <a:r>
-              <a:rPr sz="1000" b="1">
-                <a:solidFill>
-                  <a:srgbClr val="000000"/>
-                </a:solidFill>
-                <a:latin typeface="맑은 고딕"/>
-                <a:ea typeface="맑은 고딕"/>
-              </a:rPr>
-              <a:t>선택·근거와 사람 확인 시점:</a:t>
-            </a:r>
-            <a:r>
-              <a:rPr sz="1000" b="0">
-                <a:solidFill>
-                  <a:srgbClr val="000000"/>
-                </a:solidFill>
-                <a:latin typeface="맑은 고딕"/>
-                <a:ea typeface="맑은 고딕"/>
-              </a:rPr>
-              <a:t> 현재는 </a:t>
-            </a:r>
-            <a:r>
-              <a:rPr sz="1000" b="1">
-                <a:solidFill>
-                  <a:srgbClr val="000000"/>
-                </a:solidFill>
-                <a:latin typeface="맑은 고딕"/>
-                <a:ea typeface="맑은 고딕"/>
-              </a:rPr>
-              <a:t>대화형 보조</a:t>
-            </a:r>
-            <a:r>
-              <a:rPr sz="1000" b="0">
-                <a:solidFill>
-                  <a:srgbClr val="000000"/>
-                </a:solidFill>
-                <a:latin typeface="맑은 고딕"/>
-                <a:ea typeface="맑은 고딕"/>
-              </a:rPr>
-              <a:t>. 담당자가 LLM의 답마다 정책 침범과 오류를 확인한다.</a:t>
-            </a:r>
-          </a:p>
-        </p:txBody>
-      </p:sp>
-      <p:sp>
-        <p:nvSpPr>
-          <p:cNvPr id="9" name="내용 개체 틀 7">
-            <a:extLst>
-              <a:ext uri="{FF2B5EF4-FFF2-40B4-BE49-F238E27FC236}">
-                <a16:creationId xmlns:a16="http://schemas.microsoft.com/office/drawing/2014/main" id="{BEBA2C4A-B0BF-F2E4-EA6E-614C99CBA184}"/>
-              </a:ext>
-            </a:extLst>
-          </p:cNvPr>
-          <p:cNvSpPr>
-            <a:spLocks noGrp="1"/>
-          </p:cNvSpPr>
-          <p:nvPr>
-            <p:ph idx="1"/>
-          </p:nvPr>
-        </p:nvSpPr>
-        <p:spPr>
-          <a:xfrm>
-            <a:off x="233172" y="960120"/>
-            <a:ext cx="8778240" cy="576580"/>
-          </a:xfrm>
-        </p:spPr>
-        <p:txBody>
-          <a:bodyPr>
-            <a:normAutofit/>
-          </a:bodyPr>
-          <a:lstStyle/>
-          <a:p>
-            <a:pPr marL="182880" indent="0">
-              <a:spcBef>
-                <a:spcPts val="300"/>
-              </a:spcBef>
-              <a:spcAft>
-                <a:spcPts val="300"/>
-              </a:spcAft>
-              <a:buNone/>
-            </a:pPr>
-            <a:r>
-              <a:rPr sz="1000" b="0">
-                <a:solidFill>
-                  <a:srgbClr val="000000"/>
-                </a:solidFill>
-                <a:latin typeface="맑은 고딕"/>
-                <a:ea typeface="맑은 고딕"/>
-              </a:rPr>
-              <a:t>현재는 활용 방식만 선택한다. 요구·모델·설계·코드·검사·완료 조건의 내용은 만들지 않으며, 실습 1의 미정 정책도 확정하지 않는다. 운영 시스템과 실제 고객 데이터는 사용하지 않고 외부 부작용은 없으며, 로컬 변경은 Git으로 되돌릴 수 있다.</a:t>
-            </a:r>
-          </a:p>
-        </p:txBody>
-      </p:sp>
-      <p:sp>
-        <p:nvSpPr>
-          <p:cNvPr id="10" name="내용 개체 틀 7">
-            <a:extLst>
-              <a:ext uri="{FF2B5EF4-FFF2-40B4-BE49-F238E27FC236}">
-                <a16:creationId xmlns:a16="http://schemas.microsoft.com/office/drawing/2014/main" id="{BEBA2C4A-B0BF-F2E4-EA6E-614C99CBA184}"/>
-              </a:ext>
-            </a:extLst>
-          </p:cNvPr>
-          <p:cNvSpPr>
-            <a:spLocks noGrp="1"/>
-          </p:cNvSpPr>
-          <p:nvPr>
-            <p:ph idx="1"/>
-          </p:nvPr>
-        </p:nvSpPr>
-        <p:spPr>
-          <a:xfrm>
-            <a:off x="4572000" y="1536700"/>
-            <a:ext cx="4439412" cy="4775765"/>
-          </a:xfrm>
-        </p:spPr>
-        <p:txBody>
-          <a:bodyPr>
-            <a:normAutofit/>
-          </a:bodyPr>
-          <a:lstStyle/>
-          <a:p>
-            <a:pPr lvl="2" marL="551180" indent="-139700">
-              <a:spcBef>
-                <a:spcPts val="300"/>
-              </a:spcBef>
-              <a:spcAft>
-                <a:spcPts val="300"/>
-              </a:spcAft>
-              <a:buNone/>
-            </a:pPr>
-            <a:r>
-              <a:rPr sz="1000" b="0">
-                <a:solidFill>
-                  <a:srgbClr val="000000"/>
-                </a:solidFill>
-                <a:latin typeface="맑은 고딕"/>
-                <a:ea typeface="맑은 고딕"/>
-              </a:rPr>
-              <a:t>5. </a:t>
-            </a:r>
-            <a:r>
-              <a:rPr sz="1000" b="1">
-                <a:solidFill>
-                  <a:srgbClr val="000000"/>
-                </a:solidFill>
-                <a:latin typeface="맑은 고딕"/>
-                <a:ea typeface="맑은 고딕"/>
-              </a:rPr>
-              <a:t>검사 작성·실행</a:t>
-            </a:r>
-          </a:p>
-          <a:p>
-            <a:pPr lvl="3" marL="731520" indent="-137160">
-              <a:spcBef>
-                <a:spcPts val="300"/>
-              </a:spcBef>
-              <a:spcAft>
-                <a:spcPts val="300"/>
-              </a:spcAft>
-              <a:buSzPct val="90000"/>
-              <a:buFont typeface="Wingdings" pitchFamily="2" charset="2"/>
-              <a:buChar char=""/>
-            </a:pPr>
-            <a:r>
-              <a:rPr sz="1000" b="1">
-                <a:solidFill>
-                  <a:srgbClr val="000000"/>
-                </a:solidFill>
-                <a:latin typeface="맑은 고딕"/>
-                <a:ea typeface="맑은 고딕"/>
-              </a:rPr>
-              <a:t>특성:</a:t>
-            </a:r>
-            <a:r>
-              <a:rPr sz="1000" b="0">
-                <a:solidFill>
-                  <a:srgbClr val="000000"/>
-                </a:solidFill>
-                <a:latin typeface="맑은 고딕"/>
-                <a:ea typeface="맑은 고딕"/>
-              </a:rPr>
-              <a:t> 업무 규칙—</a:t>
-            </a:r>
-            <a:r>
-              <a:rPr sz="1000" b="0">
-                <a:solidFill>
-                  <a:srgbClr val="000000"/>
-                </a:solidFill>
-                <a:latin typeface="맑은 고딕"/>
-                <a:ea typeface="맑은 고딕"/>
-              </a:rPr>
-              <a:t>확인 대상과 기대 결과가 아직 정해지지 않음 / 절차—작성·실행 절차가 없음 / 자동 확인—검사를 마련하고 실제 오류를 잡는지 사람의 확인이 필요함 / 되돌림—Git으로 쉬움</a:t>
-            </a:r>
-          </a:p>
-          <a:p>
-            <a:pPr lvl="3" marL="731520" indent="-137160">
-              <a:spcBef>
-                <a:spcPts val="300"/>
-              </a:spcBef>
-              <a:spcAft>
-                <a:spcPts val="300"/>
-              </a:spcAft>
-              <a:buSzPct val="90000"/>
-              <a:buFont typeface="Wingdings" pitchFamily="2" charset="2"/>
-              <a:buChar char=""/>
-            </a:pPr>
-            <a:r>
-              <a:rPr sz="1000" b="1">
-                <a:solidFill>
-                  <a:srgbClr val="000000"/>
-                </a:solidFill>
-                <a:latin typeface="맑은 고딕"/>
-                <a:ea typeface="맑은 고딕"/>
-              </a:rPr>
-              <a:t>선택·근거와 사람 확인 시점:</a:t>
-            </a:r>
-            <a:r>
-              <a:rPr sz="1000" b="0">
-                <a:solidFill>
-                  <a:srgbClr val="000000"/>
-                </a:solidFill>
-                <a:latin typeface="맑은 고딕"/>
-                <a:ea typeface="맑은 고딕"/>
-              </a:rPr>
-              <a:t> 현재 검사 초안은 </a:t>
-            </a:r>
-            <a:r>
-              <a:rPr sz="1000" b="1">
-                <a:solidFill>
-                  <a:srgbClr val="000000"/>
-                </a:solidFill>
-                <a:latin typeface="맑은 고딕"/>
-                <a:ea typeface="맑은 고딕"/>
-              </a:rPr>
-              <a:t>대화형 보조</a:t>
-            </a:r>
-            <a:r>
-              <a:rPr sz="1000" b="0">
-                <a:solidFill>
-                  <a:srgbClr val="000000"/>
-                </a:solidFill>
-                <a:latin typeface="맑은 고딕"/>
-                <a:ea typeface="맑은 고딕"/>
-              </a:rPr>
-              <a:t> 대상이다. 담당자가 LLM의 답마다 확인한다.</a:t>
-            </a:r>
-          </a:p>
-          <a:p>
-            <a:pPr lvl="2" marL="551180" indent="-139700">
-              <a:spcBef>
-                <a:spcPts val="300"/>
-              </a:spcBef>
-              <a:spcAft>
-                <a:spcPts val="300"/>
-              </a:spcAft>
-              <a:buNone/>
-            </a:pPr>
-            <a:r>
-              <a:rPr sz="1000" b="0">
-                <a:solidFill>
-                  <a:srgbClr val="000000"/>
-                </a:solidFill>
-                <a:latin typeface="맑은 고딕"/>
-                <a:ea typeface="맑은 고딕"/>
-              </a:rPr>
-              <a:t>6. </a:t>
-            </a:r>
-            <a:r>
-              <a:rPr sz="1000" b="1">
-                <a:solidFill>
-                  <a:srgbClr val="000000"/>
-                </a:solidFill>
-                <a:latin typeface="맑은 고딕"/>
-                <a:ea typeface="맑은 고딕"/>
-              </a:rPr>
-              <a:t>릴리스 설명</a:t>
-            </a:r>
-          </a:p>
-          <a:p>
-            <a:pPr lvl="3" marL="731520" indent="-137160">
-              <a:spcBef>
-                <a:spcPts val="300"/>
-              </a:spcBef>
-              <a:spcAft>
-                <a:spcPts val="300"/>
-              </a:spcAft>
-              <a:buSzPct val="90000"/>
-              <a:buFont typeface="Wingdings" pitchFamily="2" charset="2"/>
-              <a:buChar char=""/>
-            </a:pPr>
-            <a:r>
-              <a:rPr sz="1000" b="1">
-                <a:solidFill>
-                  <a:srgbClr val="000000"/>
-                </a:solidFill>
-                <a:latin typeface="맑은 고딕"/>
-                <a:ea typeface="맑은 고딕"/>
-              </a:rPr>
-              <a:t>특성:</a:t>
-            </a:r>
-            <a:r>
-              <a:rPr sz="1000" b="0">
-                <a:solidFill>
-                  <a:srgbClr val="000000"/>
-                </a:solidFill>
-                <a:latin typeface="맑은 고딕"/>
-                <a:ea typeface="맑은 고딕"/>
-              </a:rPr>
-              <a:t> 업무 규칙—</a:t>
-            </a:r>
-            <a:r>
-              <a:rPr sz="1000" b="0">
-                <a:solidFill>
-                  <a:srgbClr val="000000"/>
-                </a:solidFill>
-                <a:latin typeface="맑은 고딕"/>
-                <a:ea typeface="맑은 고딕"/>
-              </a:rPr>
-              <a:t>확정 범위·제외 범위·미정 사항을 구분해야 함 / 절차—작성·승인 절차가 없음 / 자동 확인—실제 변경 내역과 검사 결과가 필요함 / 되돌림—Git으로 쉬움</a:t>
-            </a:r>
-          </a:p>
-          <a:p>
-            <a:pPr lvl="3" marL="731520" indent="-137160">
-              <a:spcBef>
-                <a:spcPts val="300"/>
-              </a:spcBef>
-              <a:spcAft>
-                <a:spcPts val="300"/>
-              </a:spcAft>
-              <a:buSzPct val="90000"/>
-              <a:buFont typeface="Wingdings" pitchFamily="2" charset="2"/>
-              <a:buChar char=""/>
-            </a:pPr>
-            <a:r>
-              <a:rPr sz="1000" b="1">
-                <a:solidFill>
-                  <a:srgbClr val="000000"/>
-                </a:solidFill>
-                <a:latin typeface="맑은 고딕"/>
-                <a:ea typeface="맑은 고딕"/>
-              </a:rPr>
-              <a:t>선택·근거와 사람 확인 시점:</a:t>
-            </a:r>
-            <a:r>
-              <a:rPr sz="1000" b="0">
-                <a:solidFill>
-                  <a:srgbClr val="000000"/>
-                </a:solidFill>
-                <a:latin typeface="맑은 고딕"/>
-                <a:ea typeface="맑은 고딕"/>
-              </a:rPr>
-              <a:t> 현재는 </a:t>
-            </a:r>
-            <a:r>
-              <a:rPr sz="1000" b="1">
-                <a:solidFill>
-                  <a:srgbClr val="000000"/>
-                </a:solidFill>
-                <a:latin typeface="맑은 고딕"/>
-                <a:ea typeface="맑은 고딕"/>
-              </a:rPr>
-              <a:t>대화형 보조</a:t>
-            </a:r>
-            <a:r>
-              <a:rPr sz="1000" b="0">
-                <a:solidFill>
-                  <a:srgbClr val="000000"/>
-                </a:solidFill>
-                <a:latin typeface="맑은 고딕"/>
-                <a:ea typeface="맑은 고딕"/>
-              </a:rPr>
-              <a:t>, 최종 확인과 승인은 </a:t>
-            </a:r>
-            <a:r>
-              <a:rPr sz="1000" b="1">
-                <a:solidFill>
-                  <a:srgbClr val="000000"/>
-                </a:solidFill>
-                <a:latin typeface="맑은 고딕"/>
-                <a:ea typeface="맑은 고딕"/>
-              </a:rPr>
-              <a:t>수작업</a:t>
-            </a:r>
-            <a:r>
-              <a:rPr sz="1000" b="0">
-                <a:solidFill>
-                  <a:srgbClr val="000000"/>
-                </a:solidFill>
-                <a:latin typeface="맑은 고딕"/>
-                <a:ea typeface="맑은 고딕"/>
-              </a:rPr>
-              <a:t>이다. 초안은 답마다, 승인은 공개 전에 확인한다.</a:t>
-            </a:r>
-          </a:p>
-          <a:p>
-            <a:pPr marL="182880" indent="0">
-              <a:spcBef>
-                <a:spcPts val="300"/>
-              </a:spcBef>
-              <a:spcAft>
-                <a:spcPts val="300"/>
-              </a:spcAft>
-              <a:buNone/>
-            </a:pPr>
-            <a:r>
-              <a:rPr sz="1000" b="1">
-                <a:solidFill>
-                  <a:srgbClr val="000000"/>
-                </a:solidFill>
-                <a:latin typeface="맑은 고딕"/>
-                <a:ea typeface="맑은 고딕"/>
-              </a:rPr>
-              <a:t>공통 전환 조건</a:t>
-            </a:r>
-          </a:p>
-          <a:p>
-            <a:pPr lvl="2" marL="411480" indent="-137160">
-              <a:spcBef>
-                <a:spcPts val="300"/>
-              </a:spcBef>
-              <a:spcAft>
-                <a:spcPts val="300"/>
+                <a:spcPts val="600"/>
               </a:spcAft>
               <a:buSzPct val="90000"/>
               <a:buFont typeface="Wingdings" pitchFamily="2" charset="2"/>
               <a:buChar char=""/>
             </a:pPr>
             <a:r>
-              <a:rPr sz="1000" b="0">
-                <a:solidFill>
-                  <a:srgbClr val="000000"/>
-                </a:solidFill>
-                <a:latin typeface="맑은 고딕"/>
-                <a:ea typeface="맑은 고딕"/>
-              </a:rPr>
-              <a:t>현재는 담당자의 수작업 결정과 LLM 대화형 보조가 가장 단순하고 충분하다. 비용은 아직 계측하지 않았으며, 별도 실행 체계 구성과 검토 비용을 줄이는 선택이다.</a:t>
-            </a:r>
-          </a:p>
-          <a:p>
-            <a:pPr lvl="2" marL="411480" indent="-137160">
+              <a:rPr sz="1800" b="1">
+                <a:solidFill>
+                  <a:srgbClr val="000000"/>
+                </a:solidFill>
+                <a:latin typeface="맑은 고딕"/>
+                <a:ea typeface="맑은 고딕"/>
+              </a:rPr>
+              <a:t>그럴듯한 추측·비결정성</a:t>
+            </a:r>
+            <a:r>
+              <a:rPr sz="1800" b="0">
+                <a:solidFill>
+                  <a:srgbClr val="000000"/>
+                </a:solidFill>
+                <a:latin typeface="맑은 고딕"/>
+                <a:ea typeface="맑은 고딕"/>
+              </a:rPr>
+              <a:t>에는 사람이 정한 규칙과 검사가 필요하다.</a:t>
+            </a:r>
+          </a:p>
+          <a:p>
+            <a:pPr lvl="2" marL="723900" indent="-368300">
               <a:spcBef>
-                <a:spcPts val="300"/>
+                <a:spcPts val="600"/>
               </a:spcBef>
               <a:spcAft>
-                <a:spcPts val="300"/>
+                <a:spcPts val="600"/>
               </a:spcAft>
               <a:buSzPct val="90000"/>
               <a:buFont typeface="Wingdings" pitchFamily="2" charset="2"/>
               <a:buChar char=""/>
             </a:pPr>
             <a:r>
-              <a:rPr sz="1000" b="0">
-                <a:solidFill>
-                  <a:srgbClr val="000000"/>
-                </a:solidFill>
-                <a:latin typeface="맑은 고딕"/>
-                <a:ea typeface="맑은 고딕"/>
-              </a:rPr>
-              <a:t>절차를 고정할 수 있으면 일반 자동화 또는 워크플로를 사용한다. 명확한 완료 조건을 자동 검사로 판정할 수 있고, 그 검사가 실제 오류를 잡는다고 사람이 확인한 뒤에도 실행 결과에 따라 다음 행동을 정해야 하여 절차를 사전에 고정하기 어려울 때만 에이전트를 검토한다. 사람은 대화형 보조에서는 답마다, 워크플로에서는 정한 단계마다, 에이전트에서는 종료·중단 시점에 확인한다.</a:t>
+              <a:rPr sz="1800" b="1">
+                <a:solidFill>
+                  <a:srgbClr val="000000"/>
+                </a:solidFill>
+                <a:latin typeface="맑은 고딕"/>
+                <a:ea typeface="맑은 고딕"/>
+              </a:rPr>
+              <a:t>맥락은 한정</a:t>
+            </a:r>
+            <a:r>
+              <a:rPr sz="1800" b="0">
+                <a:solidFill>
+                  <a:srgbClr val="000000"/>
+                </a:solidFill>
+                <a:latin typeface="맑은 고딕"/>
+                <a:ea typeface="맑은 고딕"/>
+              </a:rPr>
+              <a:t>되고 매 턴 다시 들어간다. 긴 맥락·반복·재시도는 비용을 늘린다.</a:t>
+            </a:r>
+          </a:p>
+          <a:p>
+            <a:pPr lvl="2" marL="723900" indent="-368300">
+              <a:spcBef>
+                <a:spcPts val="600"/>
+              </a:spcBef>
+              <a:spcAft>
+                <a:spcPts val="600"/>
+              </a:spcAft>
+              <a:buSzPct val="90000"/>
+              <a:buFont typeface="Wingdings" pitchFamily="2" charset="2"/>
+              <a:buChar char=""/>
+            </a:pPr>
+            <a:r>
+              <a:rPr sz="1800" b="1">
+                <a:solidFill>
+                  <a:srgbClr val="000000"/>
+                </a:solidFill>
+                <a:latin typeface="맑은 고딕"/>
+                <a:ea typeface="맑은 고딕"/>
+              </a:rPr>
+              <a:t>작업 특성 4가지</a:t>
+            </a:r>
+            <a:r>
+              <a:rPr sz="1800" b="0">
+                <a:solidFill>
+                  <a:srgbClr val="000000"/>
+                </a:solidFill>
+                <a:latin typeface="맑은 고딕"/>
+                <a:ea typeface="맑은 고딕"/>
+              </a:rPr>
+              <a:t>로 충분한 것 중 가장 단순한 활용 방식을 고른다.</a:t>
+            </a:r>
+          </a:p>
+          <a:p>
+            <a:pPr lvl="2" marL="723900" indent="-368300">
+              <a:spcBef>
+                <a:spcPts val="600"/>
+              </a:spcBef>
+              <a:spcAft>
+                <a:spcPts val="600"/>
+              </a:spcAft>
+              <a:buSzPct val="90000"/>
+              <a:buFont typeface="Wingdings" pitchFamily="2" charset="2"/>
+              <a:buChar char=""/>
+            </a:pPr>
+            <a:r>
+              <a:rPr sz="1800" b="1">
+                <a:solidFill>
+                  <a:srgbClr val="000000"/>
+                </a:solidFill>
+                <a:latin typeface="맑은 고딕"/>
+                <a:ea typeface="맑은 고딕"/>
+              </a:rPr>
+              <a:t>자율성</a:t>
+            </a:r>
+            <a:r>
+              <a:rPr sz="1800" b="0">
+                <a:solidFill>
+                  <a:srgbClr val="000000"/>
+                </a:solidFill>
+                <a:latin typeface="맑은 고딕"/>
+                <a:ea typeface="맑은 고딕"/>
+              </a:rPr>
+              <a:t>은 자동 검사·되돌림·비용 효과의 증거가 있을 때 높인다.</a:t>
+            </a:r>
+          </a:p>
+          <a:p>
+            <a:pPr marL="342900" indent="0">
+              <a:spcBef>
+                <a:spcPts val="600"/>
+              </a:spcBef>
+              <a:spcAft>
+                <a:spcPts val="600"/>
+              </a:spcAft>
+              <a:buNone/>
+            </a:pPr>
+            <a:r>
+              <a:rPr sz="1800" b="1">
+                <a:solidFill>
+                  <a:srgbClr val="000000"/>
+                </a:solidFill>
+                <a:latin typeface="맑은 고딕"/>
+                <a:ea typeface="맑은 고딕"/>
+              </a:rPr>
+              <a:t>다음 세션</a:t>
+            </a:r>
+          </a:p>
+          <a:p>
+            <a:pPr lvl="2" marL="723900" indent="-368300">
+              <a:spcBef>
+                <a:spcPts val="600"/>
+              </a:spcBef>
+              <a:spcAft>
+                <a:spcPts val="600"/>
+              </a:spcAft>
+              <a:buSzPct val="90000"/>
+              <a:buFont typeface="Wingdings" pitchFamily="2" charset="2"/>
+              <a:buChar char=""/>
+            </a:pPr>
+            <a:r>
+              <a:rPr sz="1800" b="0">
+                <a:solidFill>
+                  <a:srgbClr val="000000"/>
+                </a:solidFill>
+                <a:latin typeface="맑은 고딕"/>
+                <a:ea typeface="맑은 고딕"/>
+              </a:rPr>
+              <a:t>"세션 03. 요구와 수용 기준" —</a:t>
+            </a:r>
+            <a:r>
+              <a:rPr sz="1600" b="0">
+                <a:solidFill>
+                  <a:srgbClr val="000000"/>
+                </a:solidFill>
+                <a:latin typeface="맑은 고딕"/>
+                <a:ea typeface="맑은 고딕"/>
+              </a:rPr>
+              <a:t> 사람이 원하는 결과를 </a:t>
+            </a:r>
+            <a:r>
+              <a:rPr sz="1600" b="1">
+                <a:solidFill>
+                  <a:srgbClr val="000000"/>
+                </a:solidFill>
+                <a:latin typeface="맑은 고딕"/>
+                <a:ea typeface="맑은 고딕"/>
+              </a:rPr>
+              <a:t>요구사항과 수용 기준</a:t>
+            </a:r>
+            <a:r>
+              <a:rPr sz="1600" b="0">
+                <a:solidFill>
+                  <a:srgbClr val="000000"/>
+                </a:solidFill>
+                <a:latin typeface="맑은 고딕"/>
+                <a:ea typeface="맑은 고딕"/>
+              </a:rPr>
+              <a:t>으로 정한다.</a:t>
             </a:r>
           </a:p>
         </p:txBody>
@@ -14110,7 +13302,7 @@
           <a:p>
             <a:r>
               <a:rPr kumimoji="1" lang="en-US" altLang="ko-KR" sz="1400" dirty="0" err="1"/>
-              <a:t>02. LLM이라는 재료</a:t>
+              <a:t>02. LLM이라는 도구</a:t>
             </a:r>
           </a:p>
         </p:txBody>
@@ -14215,7 +13407,7 @@
                 <a:latin typeface="맑은 고딕"/>
                 <a:ea typeface="맑은 고딕"/>
               </a:rPr>
-              <a:t>비결정적 재료</a:t>
+              <a:t>비결정적 도구</a:t>
             </a:r>
             <a:r>
               <a:rPr sz="1800" b="0">
@@ -14235,7 +13427,7 @@
                 <a:latin typeface="맑은 고딕"/>
                 <a:ea typeface="맑은 고딕"/>
               </a:rPr>
-              <a:t>형태는 작업이 고르고 비용이 그 선택을 제약한다</a:t>
+              <a:t>활용 방식은 작업 특성에 따라 선택하고 비용이 그 선택을 제약한다</a:t>
             </a:r>
             <a:r>
               <a:rPr sz="1800" b="0">
@@ -14377,7 +13569,7 @@
                 <a:latin typeface="맑은 고딕"/>
                 <a:ea typeface="맑은 고딕"/>
               </a:rPr>
-              <a:t>가장 단순한 충분한 방식</a:t>
+              <a:t>충분한 것 가운데 가장 단순한 방식</a:t>
             </a:r>
             <a:r>
               <a:rPr sz="1800" b="0">
@@ -14420,7 +13612,1159 @@
                 <a:latin typeface="맑은 고딕"/>
                 <a:ea typeface="맑은 고딕"/>
               </a:rPr>
-              <a:t>와 실행 기록의 비교 한계를 설명한다.</a:t>
+              <a:t>를 말하고, 한 번의 실행 기록으로 우열을 가릴 수 없는 이유를 설명한다.</a:t>
+            </a:r>
+          </a:p>
+        </p:txBody>
+      </p:sp>
+    </p:spTree>
+    <p:extLst>
+      <p:ext uri="{BB962C8B-B14F-4D97-AF65-F5344CB8AC3E}">
+        <p14:creationId xmlns:p14="http://schemas.microsoft.com/office/powerpoint/2010/main" val="3555436673"/>
+      </p:ext>
+    </p:extLst>
+  </p:cSld>
+  <p:clrMapOvr>
+    <a:masterClrMapping/>
+  </p:clrMapOvr>
+</p:sld>
+</file>
+
+<file path=ppt/slides/slide20.xml><?xml version="1.0" encoding="utf-8"?>
+<p:sld xmlns:a="http://schemas.openxmlformats.org/drawingml/2006/main" xmlns:r="http://schemas.openxmlformats.org/officeDocument/2006/relationships" xmlns:p="http://schemas.openxmlformats.org/presentationml/2006/main">
+  <p:cSld>
+    <p:spTree>
+      <p:nvGrpSpPr>
+        <p:cNvPr id="1" name="">
+          <a:extLst>
+            <a:ext uri="{FF2B5EF4-FFF2-40B4-BE49-F238E27FC236}">
+              <a16:creationId xmlns:a16="http://schemas.microsoft.com/office/drawing/2014/main" id="{8E4F1F13-426B-086B-7D8C-9A58A0F879DB}"/>
+            </a:ext>
+          </a:extLst>
+        </p:cNvPr>
+        <p:cNvGrpSpPr/>
+        <p:nvPr/>
+      </p:nvGrpSpPr>
+      <p:grpSpPr>
+        <a:xfrm>
+          <a:off x="0" y="0"/>
+          <a:ext cx="0" cy="0"/>
+          <a:chOff x="0" y="0"/>
+          <a:chExt cx="0" cy="0"/>
+        </a:xfrm>
+      </p:grpSpPr>
+      <p:sp>
+        <p:nvSpPr>
+          <p:cNvPr id="2" name="제목 1">
+            <a:extLst>
+              <a:ext uri="{FF2B5EF4-FFF2-40B4-BE49-F238E27FC236}">
+                <a16:creationId xmlns:a16="http://schemas.microsoft.com/office/drawing/2014/main" id="{AA26A92D-924E-0575-9551-F8FD7BFD3FAD}"/>
+              </a:ext>
+            </a:extLst>
+          </p:cNvPr>
+          <p:cNvSpPr>
+            <a:spLocks noGrp="1"/>
+          </p:cNvSpPr>
+          <p:nvPr>
+            <p:ph type="title"/>
+          </p:nvPr>
+        </p:nvSpPr>
+        <p:spPr/>
+        <p:txBody>
+          <a:bodyPr/>
+          <a:lstStyle/>
+          <a:p>
+            <a:r>
+              <a:rPr sz="2400" b="1">
+                <a:solidFill>
+                  <a:srgbClr val="000000"/>
+                </a:solidFill>
+                <a:latin typeface="맑은 고딕"/>
+                <a:ea typeface="맑은 고딕"/>
+              </a:rPr>
+              <a:t>첫 주문 기능 개발 활용 방식</a:t>
+            </a:r>
+          </a:p>
+          <a:p>
+            <a:r>
+              <a:rPr sz="1100" b="1">
+                <a:solidFill>
+                  <a:srgbClr val="000000"/>
+                </a:solidFill>
+                <a:latin typeface="맑은 고딕"/>
+                <a:ea typeface="맑은 고딕"/>
+              </a:rPr>
+              <a:t>별첨. 실습 답</a:t>
+            </a:r>
+          </a:p>
+        </p:txBody>
+      </p:sp>
+      <p:sp>
+        <p:nvSpPr>
+          <p:cNvPr id="3" name="슬라이드 번호 개체 틀 2">
+            <a:extLst>
+              <a:ext uri="{FF2B5EF4-FFF2-40B4-BE49-F238E27FC236}">
+                <a16:creationId xmlns:a16="http://schemas.microsoft.com/office/drawing/2014/main" id="{12CF30EE-4DFD-8063-56B8-B8689E76DFCA}"/>
+              </a:ext>
+            </a:extLst>
+          </p:cNvPr>
+          <p:cNvSpPr>
+            <a:spLocks noGrp="1"/>
+          </p:cNvSpPr>
+          <p:nvPr>
+            <p:ph type="sldNum" sz="quarter" idx="10"/>
+          </p:nvPr>
+        </p:nvSpPr>
+        <p:spPr/>
+        <p:txBody>
+          <a:bodyPr/>
+          <a:lstStyle/>
+          <a:p>
+            <a:pPr>
+              <a:defRPr/>
+            </a:pPr>
+            <a:r>
+              <a:rPr lang="en-US" altLang="ko-KR">
+                <a:solidFill>
+                  <a:prstClr val="black"/>
+                </a:solidFill>
+              </a:rPr>
+              <a:t>- 20 -</a:t>
+            </a:r>
+          </a:p>
+        </p:txBody>
+      </p:sp>
+      <p:sp>
+        <p:nvSpPr>
+          <p:cNvPr id="5" name="텍스트 개체 틀 4">
+            <a:extLst>
+              <a:ext uri="{FF2B5EF4-FFF2-40B4-BE49-F238E27FC236}">
+                <a16:creationId xmlns:a16="http://schemas.microsoft.com/office/drawing/2014/main" id="{D66274C8-E16F-5AEB-614B-D8D32DA3E8C6}"/>
+              </a:ext>
+            </a:extLst>
+          </p:cNvPr>
+          <p:cNvSpPr>
+            <a:spLocks noGrp="1"/>
+          </p:cNvSpPr>
+          <p:nvPr>
+            <p:ph type="body" sz="quarter" idx="11"/>
+          </p:nvPr>
+        </p:nvSpPr>
+        <p:spPr/>
+        <p:txBody>
+          <a:bodyPr/>
+          <a:lstStyle/>
+          <a:p>
+            <a:r>
+              <a:rPr kumimoji="1" lang="en-US" altLang="ko-KR" sz="1400" dirty="0" err="1"/>
+              <a:t>별첨: 02. LLM이라는 도구</a:t>
+            </a:r>
+          </a:p>
+        </p:txBody>
+      </p:sp>
+      <p:sp>
+        <p:nvSpPr>
+          <p:cNvPr id="6" name="텍스트 개체 틀 5">
+            <a:extLst>
+              <a:ext uri="{FF2B5EF4-FFF2-40B4-BE49-F238E27FC236}">
+                <a16:creationId xmlns:a16="http://schemas.microsoft.com/office/drawing/2014/main" id="{A24E58E1-194B-A320-AEEE-24D08685BB67}"/>
+              </a:ext>
+            </a:extLst>
+          </p:cNvPr>
+          <p:cNvSpPr>
+            <a:spLocks noGrp="1"/>
+          </p:cNvSpPr>
+          <p:nvPr>
+            <p:ph type="body" sz="quarter" idx="12"/>
+          </p:nvPr>
+        </p:nvSpPr>
+        <p:spPr/>
+        <p:txBody>
+          <a:bodyPr/>
+          <a:lstStyle/>
+          <a:p>
+            <a:endParaRPr kumimoji="1" lang="ko-KR" altLang="en-US" dirty="0"/>
+          </a:p>
+        </p:txBody>
+      </p:sp>
+      <p:sp>
+        <p:nvSpPr>
+          <p:cNvPr id="7" name="텍스트 개체 틀 6">
+            <a:extLst>
+              <a:ext uri="{FF2B5EF4-FFF2-40B4-BE49-F238E27FC236}">
+                <a16:creationId xmlns:a16="http://schemas.microsoft.com/office/drawing/2014/main" id="{A219F420-613B-6234-45F6-0955A9A4505F}"/>
+              </a:ext>
+            </a:extLst>
+          </p:cNvPr>
+          <p:cNvSpPr>
+            <a:spLocks noGrp="1"/>
+          </p:cNvSpPr>
+          <p:nvPr>
+            <p:ph type="body" sz="quarter" idx="13"/>
+          </p:nvPr>
+        </p:nvSpPr>
+        <p:spPr/>
+        <p:txBody>
+          <a:bodyPr/>
+          <a:lstStyle/>
+          <a:p>
+            <a:endParaRPr kumimoji="1" lang="en-US" altLang="ko-KR" dirty="0"/>
+          </a:p>
+        </p:txBody>
+      </p:sp>
+      <p:sp>
+        <p:nvSpPr>
+          <p:cNvPr id="8" name="내용 개체 틀 7">
+            <a:extLst>
+              <a:ext uri="{FF2B5EF4-FFF2-40B4-BE49-F238E27FC236}">
+                <a16:creationId xmlns:a16="http://schemas.microsoft.com/office/drawing/2014/main" id="{BEBA2C4A-B0BF-F2E4-EA6E-614C99CBA184}"/>
+              </a:ext>
+            </a:extLst>
+          </p:cNvPr>
+          <p:cNvSpPr>
+            <a:spLocks noGrp="1"/>
+          </p:cNvSpPr>
+          <p:nvPr>
+            <p:ph idx="1"/>
+          </p:nvPr>
+        </p:nvSpPr>
+        <p:spPr>
+          <a:xfrm>
+            <a:off x="233172" y="1536700"/>
+            <a:ext cx="4338828" cy="4775765"/>
+          </a:xfrm>
+        </p:spPr>
+        <p:txBody>
+          <a:bodyPr>
+            <a:normAutofit/>
+          </a:bodyPr>
+          <a:lstStyle/>
+          <a:p>
+            <a:pPr lvl="2" marL="551180" indent="-139700">
+              <a:spcBef>
+                <a:spcPts val="300"/>
+              </a:spcBef>
+              <a:spcAft>
+                <a:spcPts val="300"/>
+              </a:spcAft>
+              <a:buNone/>
+            </a:pPr>
+            <a:r>
+              <a:rPr sz="1000" b="0">
+                <a:solidFill>
+                  <a:srgbClr val="000000"/>
+                </a:solidFill>
+                <a:latin typeface="맑은 고딕"/>
+                <a:ea typeface="맑은 고딕"/>
+              </a:rPr>
+              <a:t>1. </a:t>
+            </a:r>
+            <a:r>
+              <a:rPr sz="1000" b="1">
+                <a:solidFill>
+                  <a:srgbClr val="000000"/>
+                </a:solidFill>
+                <a:latin typeface="맑은 고딕"/>
+                <a:ea typeface="맑은 고딕"/>
+              </a:rPr>
+              <a:t>업무 조건 결정</a:t>
+            </a:r>
+          </a:p>
+          <a:p>
+            <a:pPr lvl="3" marL="731520" indent="-137160">
+              <a:spcBef>
+                <a:spcPts val="300"/>
+              </a:spcBef>
+              <a:spcAft>
+                <a:spcPts val="300"/>
+              </a:spcAft>
+              <a:buSzPct val="90000"/>
+              <a:buFont typeface="Wingdings" pitchFamily="2" charset="2"/>
+              <a:buChar char=""/>
+            </a:pPr>
+            <a:r>
+              <a:rPr sz="1000" b="1">
+                <a:solidFill>
+                  <a:srgbClr val="000000"/>
+                </a:solidFill>
+                <a:latin typeface="맑은 고딕"/>
+                <a:ea typeface="맑은 고딕"/>
+              </a:rPr>
+              <a:t>특성:</a:t>
+            </a:r>
+            <a:r>
+              <a:rPr sz="1000" b="0">
+                <a:solidFill>
+                  <a:srgbClr val="000000"/>
+                </a:solidFill>
+                <a:latin typeface="맑은 고딕"/>
+                <a:ea typeface="맑은 고딕"/>
+              </a:rPr>
+              <a:t> 업무 규칙—</a:t>
+            </a:r>
+            <a:r>
+              <a:rPr sz="1000" b="0">
+                <a:solidFill>
+                  <a:srgbClr val="000000"/>
+                </a:solidFill>
+                <a:latin typeface="맑은 고딕"/>
+                <a:ea typeface="맑은 고딕"/>
+              </a:rPr>
+              <a:t>확정 조건과 의도적 미정이 구분됨 / 절차—담당자가 정책과 경계를 확인 / 자동 확인—정책 타당성은 자동 판정 불가 / 되돌림—문서 수정은 쉬우나 정책 결정은 사람의 책임</a:t>
+            </a:r>
+          </a:p>
+          <a:p>
+            <a:pPr lvl="3" marL="731520" indent="-137160">
+              <a:spcBef>
+                <a:spcPts val="300"/>
+              </a:spcBef>
+              <a:spcAft>
+                <a:spcPts val="300"/>
+              </a:spcAft>
+              <a:buSzPct val="90000"/>
+              <a:buFont typeface="Wingdings" pitchFamily="2" charset="2"/>
+              <a:buChar char=""/>
+            </a:pPr>
+            <a:r>
+              <a:rPr sz="1000" b="1">
+                <a:solidFill>
+                  <a:srgbClr val="000000"/>
+                </a:solidFill>
+                <a:latin typeface="맑은 고딕"/>
+                <a:ea typeface="맑은 고딕"/>
+              </a:rPr>
+              <a:t>선택·근거와 사람 확인 시점:</a:t>
+            </a:r>
+            <a:r>
+              <a:rPr sz="1000" b="0">
+                <a:solidFill>
+                  <a:srgbClr val="000000"/>
+                </a:solidFill>
+                <a:latin typeface="맑은 고딕"/>
+                <a:ea typeface="맑은 고딕"/>
+              </a:rPr>
+              <a:t> </a:t>
+            </a:r>
+            <a:r>
+              <a:rPr sz="1000" b="1">
+                <a:solidFill>
+                  <a:srgbClr val="000000"/>
+                </a:solidFill>
+                <a:latin typeface="맑은 고딕"/>
+                <a:ea typeface="맑은 고딕"/>
+              </a:rPr>
+              <a:t>수작업</a:t>
+            </a:r>
+            <a:r>
+              <a:rPr sz="1000" b="0">
+                <a:solidFill>
+                  <a:srgbClr val="000000"/>
+                </a:solidFill>
+                <a:latin typeface="맑은 고딕"/>
+                <a:ea typeface="맑은 고딕"/>
+              </a:rPr>
+              <a:t>. LLM은 질문·정리만 보조하며 담당자가 답마다 확인한다.</a:t>
+            </a:r>
+          </a:p>
+          <a:p>
+            <a:pPr lvl="2" marL="551180" indent="-139700">
+              <a:spcBef>
+                <a:spcPts val="300"/>
+              </a:spcBef>
+              <a:spcAft>
+                <a:spcPts val="300"/>
+              </a:spcAft>
+              <a:buNone/>
+            </a:pPr>
+            <a:r>
+              <a:rPr sz="1000" b="0">
+                <a:solidFill>
+                  <a:srgbClr val="000000"/>
+                </a:solidFill>
+                <a:latin typeface="맑은 고딕"/>
+                <a:ea typeface="맑은 고딕"/>
+              </a:rPr>
+              <a:t>2. </a:t>
+            </a:r>
+            <a:r>
+              <a:rPr sz="1000" b="1">
+                <a:solidFill>
+                  <a:srgbClr val="000000"/>
+                </a:solidFill>
+                <a:latin typeface="맑은 고딕"/>
+                <a:ea typeface="맑은 고딕"/>
+              </a:rPr>
+              <a:t>요구·모델·설계 초안</a:t>
+            </a:r>
+          </a:p>
+          <a:p>
+            <a:pPr lvl="3" marL="731520" indent="-137160">
+              <a:spcBef>
+                <a:spcPts val="300"/>
+              </a:spcBef>
+              <a:spcAft>
+                <a:spcPts val="300"/>
+              </a:spcAft>
+              <a:buSzPct val="90000"/>
+              <a:buFont typeface="Wingdings" pitchFamily="2" charset="2"/>
+              <a:buChar char=""/>
+            </a:pPr>
+            <a:r>
+              <a:rPr sz="1000" b="1">
+                <a:solidFill>
+                  <a:srgbClr val="000000"/>
+                </a:solidFill>
+                <a:latin typeface="맑은 고딕"/>
+                <a:ea typeface="맑은 고딕"/>
+              </a:rPr>
+              <a:t>특성:</a:t>
+            </a:r>
+            <a:r>
+              <a:rPr sz="1000" b="0">
+                <a:solidFill>
+                  <a:srgbClr val="000000"/>
+                </a:solidFill>
+                <a:latin typeface="맑은 고딕"/>
+                <a:ea typeface="맑은 고딕"/>
+              </a:rPr>
+              <a:t> 업무 규칙—</a:t>
+            </a:r>
+            <a:r>
+              <a:rPr sz="1000" b="0">
+                <a:solidFill>
+                  <a:srgbClr val="000000"/>
+                </a:solidFill>
+                <a:latin typeface="맑은 고딕"/>
+                <a:ea typeface="맑은 고딕"/>
+              </a:rPr>
+              <a:t>확정 범위만 반영하고 미정 사항을 대신 결정하지 않아야 함 / 절차—아직 마련되지 않음 / 자동 확인—검사와 완료 조건이 없음 / 되돌림—Git으로 쉬움</a:t>
+            </a:r>
+          </a:p>
+          <a:p>
+            <a:pPr lvl="3" marL="731520" indent="-137160">
+              <a:spcBef>
+                <a:spcPts val="300"/>
+              </a:spcBef>
+              <a:spcAft>
+                <a:spcPts val="300"/>
+              </a:spcAft>
+              <a:buSzPct val="90000"/>
+              <a:buFont typeface="Wingdings" pitchFamily="2" charset="2"/>
+              <a:buChar char=""/>
+            </a:pPr>
+            <a:r>
+              <a:rPr sz="1000" b="1">
+                <a:solidFill>
+                  <a:srgbClr val="000000"/>
+                </a:solidFill>
+                <a:latin typeface="맑은 고딕"/>
+                <a:ea typeface="맑은 고딕"/>
+              </a:rPr>
+              <a:t>선택·근거와 사람 확인 시점:</a:t>
+            </a:r>
+            <a:r>
+              <a:rPr sz="1000" b="0">
+                <a:solidFill>
+                  <a:srgbClr val="000000"/>
+                </a:solidFill>
+                <a:latin typeface="맑은 고딕"/>
+                <a:ea typeface="맑은 고딕"/>
+              </a:rPr>
+              <a:t> </a:t>
+            </a:r>
+            <a:r>
+              <a:rPr sz="1000" b="1">
+                <a:solidFill>
+                  <a:srgbClr val="000000"/>
+                </a:solidFill>
+                <a:latin typeface="맑은 고딕"/>
+                <a:ea typeface="맑은 고딕"/>
+              </a:rPr>
+              <a:t>대화형 보조</a:t>
+            </a:r>
+            <a:r>
+              <a:rPr sz="1000" b="0">
+                <a:solidFill>
+                  <a:srgbClr val="000000"/>
+                </a:solidFill>
+                <a:latin typeface="맑은 고딕"/>
+                <a:ea typeface="맑은 고딕"/>
+              </a:rPr>
+              <a:t>. 담당자가 LLM의 답마다 검토한다.</a:t>
+            </a:r>
+          </a:p>
+          <a:p>
+            <a:pPr lvl="2" marL="551180" indent="-139700">
+              <a:spcBef>
+                <a:spcPts val="300"/>
+              </a:spcBef>
+              <a:spcAft>
+                <a:spcPts val="300"/>
+              </a:spcAft>
+              <a:buNone/>
+            </a:pPr>
+            <a:r>
+              <a:rPr sz="1000" b="0">
+                <a:solidFill>
+                  <a:srgbClr val="000000"/>
+                </a:solidFill>
+                <a:latin typeface="맑은 고딕"/>
+                <a:ea typeface="맑은 고딕"/>
+              </a:rPr>
+              <a:t>3. </a:t>
+            </a:r>
+            <a:r>
+              <a:rPr sz="1000" b="1">
+                <a:solidFill>
+                  <a:srgbClr val="000000"/>
+                </a:solidFill>
+                <a:latin typeface="맑은 고딕"/>
+                <a:ea typeface="맑은 고딕"/>
+              </a:rPr>
+              <a:t>저장소 골격</a:t>
+            </a:r>
+          </a:p>
+          <a:p>
+            <a:pPr lvl="3" marL="731520" indent="-137160">
+              <a:spcBef>
+                <a:spcPts val="300"/>
+              </a:spcBef>
+              <a:spcAft>
+                <a:spcPts val="300"/>
+              </a:spcAft>
+              <a:buSzPct val="90000"/>
+              <a:buFont typeface="Wingdings" pitchFamily="2" charset="2"/>
+              <a:buChar char=""/>
+            </a:pPr>
+            <a:r>
+              <a:rPr sz="1000" b="1">
+                <a:solidFill>
+                  <a:srgbClr val="000000"/>
+                </a:solidFill>
+                <a:latin typeface="맑은 고딕"/>
+                <a:ea typeface="맑은 고딕"/>
+              </a:rPr>
+              <a:t>특성:</a:t>
+            </a:r>
+            <a:r>
+              <a:rPr sz="1000" b="0">
+                <a:solidFill>
+                  <a:srgbClr val="000000"/>
+                </a:solidFill>
+                <a:latin typeface="맑은 고딕"/>
+                <a:ea typeface="맑은 고딕"/>
+              </a:rPr>
+              <a:t> 업무 규칙—</a:t>
+            </a:r>
+            <a:r>
+              <a:rPr sz="1000" b="0">
+                <a:solidFill>
+                  <a:srgbClr val="000000"/>
+                </a:solidFill>
+                <a:latin typeface="맑은 고딕"/>
+                <a:ea typeface="맑은 고딕"/>
+              </a:rPr>
+              <a:t>기술과 구성 규칙이 아직 정해지지 않음 / 절차—생성 순서와 명령이 없음 / 자동 확인—빌드·검사 환경이 필요함 / 되돌림—Git으로 쉬움</a:t>
+            </a:r>
+          </a:p>
+          <a:p>
+            <a:pPr lvl="3" marL="731520" indent="-137160">
+              <a:spcBef>
+                <a:spcPts val="300"/>
+              </a:spcBef>
+              <a:spcAft>
+                <a:spcPts val="300"/>
+              </a:spcAft>
+              <a:buSzPct val="90000"/>
+              <a:buFont typeface="Wingdings" pitchFamily="2" charset="2"/>
+              <a:buChar char=""/>
+            </a:pPr>
+            <a:r>
+              <a:rPr sz="1000" b="1">
+                <a:solidFill>
+                  <a:srgbClr val="000000"/>
+                </a:solidFill>
+                <a:latin typeface="맑은 고딕"/>
+                <a:ea typeface="맑은 고딕"/>
+              </a:rPr>
+              <a:t>선택·근거와 사람 확인 시점:</a:t>
+            </a:r>
+            <a:r>
+              <a:rPr sz="1000" b="0">
+                <a:solidFill>
+                  <a:srgbClr val="000000"/>
+                </a:solidFill>
+                <a:latin typeface="맑은 고딕"/>
+                <a:ea typeface="맑은 고딕"/>
+              </a:rPr>
+              <a:t> 현재는 </a:t>
+            </a:r>
+            <a:r>
+              <a:rPr sz="1000" b="1">
+                <a:solidFill>
+                  <a:srgbClr val="000000"/>
+                </a:solidFill>
+                <a:latin typeface="맑은 고딕"/>
+                <a:ea typeface="맑은 고딕"/>
+              </a:rPr>
+              <a:t>대화형 보조</a:t>
+            </a:r>
+            <a:r>
+              <a:rPr sz="1000" b="0">
+                <a:solidFill>
+                  <a:srgbClr val="000000"/>
+                </a:solidFill>
+                <a:latin typeface="맑은 고딕"/>
+                <a:ea typeface="맑은 고딕"/>
+              </a:rPr>
+              <a:t>. 담당자가 LLM의 답마다 확인한다.</a:t>
+            </a:r>
+          </a:p>
+          <a:p>
+            <a:pPr lvl="2" marL="551180" indent="-139700">
+              <a:spcBef>
+                <a:spcPts val="300"/>
+              </a:spcBef>
+              <a:spcAft>
+                <a:spcPts val="300"/>
+              </a:spcAft>
+              <a:buNone/>
+            </a:pPr>
+            <a:r>
+              <a:rPr sz="1000" b="0">
+                <a:solidFill>
+                  <a:srgbClr val="000000"/>
+                </a:solidFill>
+                <a:latin typeface="맑은 고딕"/>
+                <a:ea typeface="맑은 고딕"/>
+              </a:rPr>
+              <a:t>4. </a:t>
+            </a:r>
+            <a:r>
+              <a:rPr sz="1000" b="1">
+                <a:solidFill>
+                  <a:srgbClr val="000000"/>
+                </a:solidFill>
+                <a:latin typeface="맑은 고딕"/>
+                <a:ea typeface="맑은 고딕"/>
+              </a:rPr>
+              <a:t>확정 범위 코드 구현</a:t>
+            </a:r>
+          </a:p>
+          <a:p>
+            <a:pPr lvl="3" marL="731520" indent="-137160">
+              <a:spcBef>
+                <a:spcPts val="300"/>
+              </a:spcBef>
+              <a:spcAft>
+                <a:spcPts val="300"/>
+              </a:spcAft>
+              <a:buSzPct val="90000"/>
+              <a:buFont typeface="Wingdings" pitchFamily="2" charset="2"/>
+              <a:buChar char=""/>
+            </a:pPr>
+            <a:r>
+              <a:rPr sz="1000" b="1">
+                <a:solidFill>
+                  <a:srgbClr val="000000"/>
+                </a:solidFill>
+                <a:latin typeface="맑은 고딕"/>
+                <a:ea typeface="맑은 고딕"/>
+              </a:rPr>
+              <a:t>특성:</a:t>
+            </a:r>
+            <a:r>
+              <a:rPr sz="1000" b="0">
+                <a:solidFill>
+                  <a:srgbClr val="000000"/>
+                </a:solidFill>
+                <a:latin typeface="맑은 고딕"/>
+                <a:ea typeface="맑은 고딕"/>
+              </a:rPr>
+              <a:t> 업무 규칙—</a:t>
+            </a:r>
+            <a:r>
+              <a:rPr sz="1000" b="0">
+                <a:solidFill>
+                  <a:srgbClr val="000000"/>
+                </a:solidFill>
+                <a:latin typeface="맑은 고딕"/>
+                <a:ea typeface="맑은 고딕"/>
+              </a:rPr>
+              <a:t>확정 조건만 구현하고 미정 분기를 정책화하지 않아야 함 / 절차—설계와 구현 절차가 없음 / 자동 확인—완료 조건과 자동 검사가 아직 없음 / 되돌림—작은 로컬 변경으로 Git 복구 가능</a:t>
+            </a:r>
+          </a:p>
+          <a:p>
+            <a:pPr lvl="3" marL="731520" indent="-137160">
+              <a:spcBef>
+                <a:spcPts val="300"/>
+              </a:spcBef>
+              <a:spcAft>
+                <a:spcPts val="300"/>
+              </a:spcAft>
+              <a:buSzPct val="90000"/>
+              <a:buFont typeface="Wingdings" pitchFamily="2" charset="2"/>
+              <a:buChar char=""/>
+            </a:pPr>
+            <a:r>
+              <a:rPr sz="1000" b="1">
+                <a:solidFill>
+                  <a:srgbClr val="000000"/>
+                </a:solidFill>
+                <a:latin typeface="맑은 고딕"/>
+                <a:ea typeface="맑은 고딕"/>
+              </a:rPr>
+              <a:t>선택·근거와 사람 확인 시점:</a:t>
+            </a:r>
+            <a:r>
+              <a:rPr sz="1000" b="0">
+                <a:solidFill>
+                  <a:srgbClr val="000000"/>
+                </a:solidFill>
+                <a:latin typeface="맑은 고딕"/>
+                <a:ea typeface="맑은 고딕"/>
+              </a:rPr>
+              <a:t> 현재는 </a:t>
+            </a:r>
+            <a:r>
+              <a:rPr sz="1000" b="1">
+                <a:solidFill>
+                  <a:srgbClr val="000000"/>
+                </a:solidFill>
+                <a:latin typeface="맑은 고딕"/>
+                <a:ea typeface="맑은 고딕"/>
+              </a:rPr>
+              <a:t>대화형 보조</a:t>
+            </a:r>
+            <a:r>
+              <a:rPr sz="1000" b="0">
+                <a:solidFill>
+                  <a:srgbClr val="000000"/>
+                </a:solidFill>
+                <a:latin typeface="맑은 고딕"/>
+                <a:ea typeface="맑은 고딕"/>
+              </a:rPr>
+              <a:t>. 담당자가 LLM의 답마다 정책 침범과 오류를 확인한다.</a:t>
+            </a:r>
+          </a:p>
+        </p:txBody>
+      </p:sp>
+      <p:sp>
+        <p:nvSpPr>
+          <p:cNvPr id="9" name="내용 개체 틀 7">
+            <a:extLst>
+              <a:ext uri="{FF2B5EF4-FFF2-40B4-BE49-F238E27FC236}">
+                <a16:creationId xmlns:a16="http://schemas.microsoft.com/office/drawing/2014/main" id="{BEBA2C4A-B0BF-F2E4-EA6E-614C99CBA184}"/>
+              </a:ext>
+            </a:extLst>
+          </p:cNvPr>
+          <p:cNvSpPr>
+            <a:spLocks noGrp="1"/>
+          </p:cNvSpPr>
+          <p:nvPr>
+            <p:ph idx="1"/>
+          </p:nvPr>
+        </p:nvSpPr>
+        <p:spPr>
+          <a:xfrm>
+            <a:off x="233172" y="960120"/>
+            <a:ext cx="8778240" cy="576580"/>
+          </a:xfrm>
+        </p:spPr>
+        <p:txBody>
+          <a:bodyPr>
+            <a:normAutofit/>
+          </a:bodyPr>
+          <a:lstStyle/>
+          <a:p>
+            <a:pPr marL="182880" indent="0">
+              <a:spcBef>
+                <a:spcPts val="300"/>
+              </a:spcBef>
+              <a:spcAft>
+                <a:spcPts val="300"/>
+              </a:spcAft>
+              <a:buNone/>
+            </a:pPr>
+            <a:r>
+              <a:rPr sz="1000" b="0">
+                <a:solidFill>
+                  <a:srgbClr val="000000"/>
+                </a:solidFill>
+                <a:latin typeface="맑은 고딕"/>
+                <a:ea typeface="맑은 고딕"/>
+              </a:rPr>
+              <a:t>현재는 활용 방식만 선택한다. 요구·모델·설계·코드·검사·완료 조건의 내용은 만들지 않으며, 실습 1의 미정 정책도 확정하지 않는다. 운영 시스템과 실제 고객 데이터는 사용하지 않고 외부 부작용은 없으며, 로컬 변경은 Git으로 되돌릴 수 있다.</a:t>
+            </a:r>
+          </a:p>
+        </p:txBody>
+      </p:sp>
+      <p:sp>
+        <p:nvSpPr>
+          <p:cNvPr id="10" name="내용 개체 틀 7">
+            <a:extLst>
+              <a:ext uri="{FF2B5EF4-FFF2-40B4-BE49-F238E27FC236}">
+                <a16:creationId xmlns:a16="http://schemas.microsoft.com/office/drawing/2014/main" id="{BEBA2C4A-B0BF-F2E4-EA6E-614C99CBA184}"/>
+              </a:ext>
+            </a:extLst>
+          </p:cNvPr>
+          <p:cNvSpPr>
+            <a:spLocks noGrp="1"/>
+          </p:cNvSpPr>
+          <p:nvPr>
+            <p:ph idx="1"/>
+          </p:nvPr>
+        </p:nvSpPr>
+        <p:spPr>
+          <a:xfrm>
+            <a:off x="4572000" y="1536700"/>
+            <a:ext cx="4439412" cy="4775765"/>
+          </a:xfrm>
+        </p:spPr>
+        <p:txBody>
+          <a:bodyPr>
+            <a:normAutofit/>
+          </a:bodyPr>
+          <a:lstStyle/>
+          <a:p>
+            <a:pPr lvl="2" marL="551180" indent="-139700">
+              <a:spcBef>
+                <a:spcPts val="300"/>
+              </a:spcBef>
+              <a:spcAft>
+                <a:spcPts val="300"/>
+              </a:spcAft>
+              <a:buNone/>
+            </a:pPr>
+            <a:r>
+              <a:rPr sz="1000" b="0">
+                <a:solidFill>
+                  <a:srgbClr val="000000"/>
+                </a:solidFill>
+                <a:latin typeface="맑은 고딕"/>
+                <a:ea typeface="맑은 고딕"/>
+              </a:rPr>
+              <a:t>5. </a:t>
+            </a:r>
+            <a:r>
+              <a:rPr sz="1000" b="1">
+                <a:solidFill>
+                  <a:srgbClr val="000000"/>
+                </a:solidFill>
+                <a:latin typeface="맑은 고딕"/>
+                <a:ea typeface="맑은 고딕"/>
+              </a:rPr>
+              <a:t>검사 작성·실행</a:t>
+            </a:r>
+          </a:p>
+          <a:p>
+            <a:pPr lvl="3" marL="731520" indent="-137160">
+              <a:spcBef>
+                <a:spcPts val="300"/>
+              </a:spcBef>
+              <a:spcAft>
+                <a:spcPts val="300"/>
+              </a:spcAft>
+              <a:buSzPct val="90000"/>
+              <a:buFont typeface="Wingdings" pitchFamily="2" charset="2"/>
+              <a:buChar char=""/>
+            </a:pPr>
+            <a:r>
+              <a:rPr sz="1000" b="1">
+                <a:solidFill>
+                  <a:srgbClr val="000000"/>
+                </a:solidFill>
+                <a:latin typeface="맑은 고딕"/>
+                <a:ea typeface="맑은 고딕"/>
+              </a:rPr>
+              <a:t>특성:</a:t>
+            </a:r>
+            <a:r>
+              <a:rPr sz="1000" b="0">
+                <a:solidFill>
+                  <a:srgbClr val="000000"/>
+                </a:solidFill>
+                <a:latin typeface="맑은 고딕"/>
+                <a:ea typeface="맑은 고딕"/>
+              </a:rPr>
+              <a:t> 업무 규칙—</a:t>
+            </a:r>
+            <a:r>
+              <a:rPr sz="1000" b="0">
+                <a:solidFill>
+                  <a:srgbClr val="000000"/>
+                </a:solidFill>
+                <a:latin typeface="맑은 고딕"/>
+                <a:ea typeface="맑은 고딕"/>
+              </a:rPr>
+              <a:t>확인 대상과 기대 결과가 아직 정해지지 않음 / 절차—작성·실행 절차가 없음 / 자동 확인—검사를 마련하고 실제 오류를 잡는지 사람의 확인이 필요함 / 되돌림—Git으로 쉬움</a:t>
+            </a:r>
+          </a:p>
+          <a:p>
+            <a:pPr lvl="3" marL="731520" indent="-137160">
+              <a:spcBef>
+                <a:spcPts val="300"/>
+              </a:spcBef>
+              <a:spcAft>
+                <a:spcPts val="300"/>
+              </a:spcAft>
+              <a:buSzPct val="90000"/>
+              <a:buFont typeface="Wingdings" pitchFamily="2" charset="2"/>
+              <a:buChar char=""/>
+            </a:pPr>
+            <a:r>
+              <a:rPr sz="1000" b="1">
+                <a:solidFill>
+                  <a:srgbClr val="000000"/>
+                </a:solidFill>
+                <a:latin typeface="맑은 고딕"/>
+                <a:ea typeface="맑은 고딕"/>
+              </a:rPr>
+              <a:t>선택·근거와 사람 확인 시점:</a:t>
+            </a:r>
+            <a:r>
+              <a:rPr sz="1000" b="0">
+                <a:solidFill>
+                  <a:srgbClr val="000000"/>
+                </a:solidFill>
+                <a:latin typeface="맑은 고딕"/>
+                <a:ea typeface="맑은 고딕"/>
+              </a:rPr>
+              <a:t> 현재 검사 초안은 </a:t>
+            </a:r>
+            <a:r>
+              <a:rPr sz="1000" b="1">
+                <a:solidFill>
+                  <a:srgbClr val="000000"/>
+                </a:solidFill>
+                <a:latin typeface="맑은 고딕"/>
+                <a:ea typeface="맑은 고딕"/>
+              </a:rPr>
+              <a:t>대화형 보조</a:t>
+            </a:r>
+            <a:r>
+              <a:rPr sz="1000" b="0">
+                <a:solidFill>
+                  <a:srgbClr val="000000"/>
+                </a:solidFill>
+                <a:latin typeface="맑은 고딕"/>
+                <a:ea typeface="맑은 고딕"/>
+              </a:rPr>
+              <a:t> 대상이다. 담당자가 LLM의 답마다 확인한다.</a:t>
+            </a:r>
+          </a:p>
+          <a:p>
+            <a:pPr lvl="2" marL="551180" indent="-139700">
+              <a:spcBef>
+                <a:spcPts val="300"/>
+              </a:spcBef>
+              <a:spcAft>
+                <a:spcPts val="300"/>
+              </a:spcAft>
+              <a:buNone/>
+            </a:pPr>
+            <a:r>
+              <a:rPr sz="1000" b="0">
+                <a:solidFill>
+                  <a:srgbClr val="000000"/>
+                </a:solidFill>
+                <a:latin typeface="맑은 고딕"/>
+                <a:ea typeface="맑은 고딕"/>
+              </a:rPr>
+              <a:t>6. </a:t>
+            </a:r>
+            <a:r>
+              <a:rPr sz="1000" b="1">
+                <a:solidFill>
+                  <a:srgbClr val="000000"/>
+                </a:solidFill>
+                <a:latin typeface="맑은 고딕"/>
+                <a:ea typeface="맑은 고딕"/>
+              </a:rPr>
+              <a:t>릴리스 설명</a:t>
+            </a:r>
+          </a:p>
+          <a:p>
+            <a:pPr lvl="3" marL="731520" indent="-137160">
+              <a:spcBef>
+                <a:spcPts val="300"/>
+              </a:spcBef>
+              <a:spcAft>
+                <a:spcPts val="300"/>
+              </a:spcAft>
+              <a:buSzPct val="90000"/>
+              <a:buFont typeface="Wingdings" pitchFamily="2" charset="2"/>
+              <a:buChar char=""/>
+            </a:pPr>
+            <a:r>
+              <a:rPr sz="1000" b="1">
+                <a:solidFill>
+                  <a:srgbClr val="000000"/>
+                </a:solidFill>
+                <a:latin typeface="맑은 고딕"/>
+                <a:ea typeface="맑은 고딕"/>
+              </a:rPr>
+              <a:t>특성:</a:t>
+            </a:r>
+            <a:r>
+              <a:rPr sz="1000" b="0">
+                <a:solidFill>
+                  <a:srgbClr val="000000"/>
+                </a:solidFill>
+                <a:latin typeface="맑은 고딕"/>
+                <a:ea typeface="맑은 고딕"/>
+              </a:rPr>
+              <a:t> 업무 규칙—</a:t>
+            </a:r>
+            <a:r>
+              <a:rPr sz="1000" b="0">
+                <a:solidFill>
+                  <a:srgbClr val="000000"/>
+                </a:solidFill>
+                <a:latin typeface="맑은 고딕"/>
+                <a:ea typeface="맑은 고딕"/>
+              </a:rPr>
+              <a:t>확정 범위·제외 범위·미정 사항을 구분해야 함 / 절차—작성·승인 절차가 없음 / 자동 확인—실제 변경 내역과 검사 결과가 필요함 / 되돌림—Git으로 쉬움</a:t>
+            </a:r>
+          </a:p>
+          <a:p>
+            <a:pPr lvl="3" marL="731520" indent="-137160">
+              <a:spcBef>
+                <a:spcPts val="300"/>
+              </a:spcBef>
+              <a:spcAft>
+                <a:spcPts val="300"/>
+              </a:spcAft>
+              <a:buSzPct val="90000"/>
+              <a:buFont typeface="Wingdings" pitchFamily="2" charset="2"/>
+              <a:buChar char=""/>
+            </a:pPr>
+            <a:r>
+              <a:rPr sz="1000" b="1">
+                <a:solidFill>
+                  <a:srgbClr val="000000"/>
+                </a:solidFill>
+                <a:latin typeface="맑은 고딕"/>
+                <a:ea typeface="맑은 고딕"/>
+              </a:rPr>
+              <a:t>선택·근거와 사람 확인 시점:</a:t>
+            </a:r>
+            <a:r>
+              <a:rPr sz="1000" b="0">
+                <a:solidFill>
+                  <a:srgbClr val="000000"/>
+                </a:solidFill>
+                <a:latin typeface="맑은 고딕"/>
+                <a:ea typeface="맑은 고딕"/>
+              </a:rPr>
+              <a:t> 현재는 </a:t>
+            </a:r>
+            <a:r>
+              <a:rPr sz="1000" b="1">
+                <a:solidFill>
+                  <a:srgbClr val="000000"/>
+                </a:solidFill>
+                <a:latin typeface="맑은 고딕"/>
+                <a:ea typeface="맑은 고딕"/>
+              </a:rPr>
+              <a:t>대화형 보조</a:t>
+            </a:r>
+            <a:r>
+              <a:rPr sz="1000" b="0">
+                <a:solidFill>
+                  <a:srgbClr val="000000"/>
+                </a:solidFill>
+                <a:latin typeface="맑은 고딕"/>
+                <a:ea typeface="맑은 고딕"/>
+              </a:rPr>
+              <a:t>, 최종 확인과 승인은 </a:t>
+            </a:r>
+            <a:r>
+              <a:rPr sz="1000" b="1">
+                <a:solidFill>
+                  <a:srgbClr val="000000"/>
+                </a:solidFill>
+                <a:latin typeface="맑은 고딕"/>
+                <a:ea typeface="맑은 고딕"/>
+              </a:rPr>
+              <a:t>수작업</a:t>
+            </a:r>
+            <a:r>
+              <a:rPr sz="1000" b="0">
+                <a:solidFill>
+                  <a:srgbClr val="000000"/>
+                </a:solidFill>
+                <a:latin typeface="맑은 고딕"/>
+                <a:ea typeface="맑은 고딕"/>
+              </a:rPr>
+              <a:t>이다. 초안은 답마다, 승인은 공개 전에 확인한다.</a:t>
+            </a:r>
+          </a:p>
+          <a:p>
+            <a:pPr marL="182880" indent="0">
+              <a:spcBef>
+                <a:spcPts val="300"/>
+              </a:spcBef>
+              <a:spcAft>
+                <a:spcPts val="300"/>
+              </a:spcAft>
+              <a:buNone/>
+            </a:pPr>
+            <a:r>
+              <a:rPr sz="1000" b="1">
+                <a:solidFill>
+                  <a:srgbClr val="000000"/>
+                </a:solidFill>
+                <a:latin typeface="맑은 고딕"/>
+                <a:ea typeface="맑은 고딕"/>
+              </a:rPr>
+              <a:t>공통 전환 조건</a:t>
+            </a:r>
+          </a:p>
+          <a:p>
+            <a:pPr lvl="2" marL="411480" indent="-137160">
+              <a:spcBef>
+                <a:spcPts val="300"/>
+              </a:spcBef>
+              <a:spcAft>
+                <a:spcPts val="300"/>
+              </a:spcAft>
+              <a:buSzPct val="90000"/>
+              <a:buFont typeface="Wingdings" pitchFamily="2" charset="2"/>
+              <a:buChar char=""/>
+            </a:pPr>
+            <a:r>
+              <a:rPr sz="1000" b="0">
+                <a:solidFill>
+                  <a:srgbClr val="000000"/>
+                </a:solidFill>
+                <a:latin typeface="맑은 고딕"/>
+                <a:ea typeface="맑은 고딕"/>
+              </a:rPr>
+              <a:t>현재는 담당자의 수작업 결정과 LLM 대화형 보조가 가장 단순하고 충분하다. 비용은 아직 계측하지 않았으며, 별도 실행 체계 구성과 검토 비용을 줄이는 선택이다.</a:t>
+            </a:r>
+          </a:p>
+          <a:p>
+            <a:pPr lvl="2" marL="411480" indent="-137160">
+              <a:spcBef>
+                <a:spcPts val="300"/>
+              </a:spcBef>
+              <a:spcAft>
+                <a:spcPts val="300"/>
+              </a:spcAft>
+              <a:buSzPct val="90000"/>
+              <a:buFont typeface="Wingdings" pitchFamily="2" charset="2"/>
+              <a:buChar char=""/>
+            </a:pPr>
+            <a:r>
+              <a:rPr sz="1000" b="0">
+                <a:solidFill>
+                  <a:srgbClr val="000000"/>
+                </a:solidFill>
+                <a:latin typeface="맑은 고딕"/>
+                <a:ea typeface="맑은 고딕"/>
+              </a:rPr>
+              <a:t>절차를 고정할 수 있으면 일반 자동화 또는 워크플로를 사용한다. 명확한 완료 조건을 자동 검사로 판정할 수 있고, 그 검사가 실제 오류를 잡는다고 사람이 확인한 뒤에도 실행 결과에 따라 다음 행동을 정해야 하여 절차를 사전에 고정하기 어려울 때만 에이전트를 검토한다. 사람은 대화형 보조에서는 답마다, 워크플로에서는 정한 단계마다, 에이전트에서는 종료·중단 시점에 확인한다.</a:t>
             </a:r>
           </a:p>
         </p:txBody>
@@ -14565,7 +14909,7 @@
           <a:p>
             <a:r>
               <a:rPr kumimoji="1" lang="en-US" altLang="ko-KR" sz="1400" dirty="0" err="1"/>
-              <a:t>02. LLM이라는 재료</a:t>
+              <a:t>02. LLM이라는 도구</a:t>
             </a:r>
           </a:p>
         </p:txBody>
@@ -14799,6 +15143,16 @@
               <a:buChar char=""/>
             </a:pPr>
             <a:r>
+              <a:rPr sz="1800" b="0">
+                <a:solidFill>
+                  <a:srgbClr val="000000"/>
+                </a:solidFill>
+                <a:latin typeface="맑은 고딕"/>
+                <a:ea typeface="맑은 고딕"/>
+              </a:rPr>
+              <a:t>LLM은 우리에게 </a:t>
+            </a:r>
+            <a:r>
               <a:rPr sz="1800" b="1">
                 <a:solidFill>
                   <a:srgbClr val="000000"/>
@@ -14806,7 +15160,7 @@
                 <a:latin typeface="맑은 고딕"/>
                 <a:ea typeface="맑은 고딕"/>
               </a:rPr>
-              <a:t>비결정성</a:t>
+              <a:t>비결정적 도구로 프로그래밍한다는 것</a:t>
             </a:r>
             <a:r>
               <a:rPr sz="1800" b="0">
@@ -14816,7 +15170,47 @@
                 <a:latin typeface="맑은 고딕"/>
                 <a:ea typeface="맑은 고딕"/>
               </a:rPr>
-              <a:t>은 같은 요청에서도 다른 답이 나올 수 있다는 뜻이다. 답이 반드시 매번 달라진다는 뜻은 아니다.</a:t>
+              <a:t>이 무엇을 뜻하는지 생각하게 만든다</a:t>
+            </a:r>
+            <a:r>
+              <a:rPr sz="1000" b="0">
+                <a:solidFill>
+                  <a:srgbClr val="000000"/>
+                </a:solidFill>
+                <a:latin typeface="맑은 고딕"/>
+                <a:ea typeface="맑은 고딕"/>
+              </a:rPr>
+              <a:t>, </a:t>
+            </a:r>
+            <a:r>
+              <a:rPr sz="1000" b="0">
+                <a:solidFill>
+                  <a:srgbClr val="000000"/>
+                </a:solidFill>
+                <a:latin typeface="맑은 고딕"/>
+                <a:ea typeface="맑은 고딕"/>
+              </a:rPr>
+              <a:t>"forcing us to consider what it means to program with non-deterministic tools"</a:t>
+            </a:r>
+            <a:r>
+              <a:rPr sz="1000" b="0">
+                <a:solidFill>
+                  <a:srgbClr val="000000"/>
+                </a:solidFill>
+                <a:latin typeface="맑은 고딕"/>
+                <a:ea typeface="맑은 고딕"/>
+              </a:rPr>
+              <a:t>, </a:t>
+            </a:r>
+            <a:r>
+              <a:rPr sz="1000" b="0">
+                <a:solidFill>
+                  <a:srgbClr val="000000"/>
+                </a:solidFill>
+                <a:latin typeface="맑은 고딕"/>
+                <a:ea typeface="맑은 고딕"/>
+              </a:rPr>
+              <a:t>[Fowler 2025]</a:t>
             </a:r>
           </a:p>
           <a:p>
@@ -14839,7 +15233,7 @@
                 <a:latin typeface="맑은 고딕"/>
                 <a:ea typeface="맑은 고딕"/>
               </a:rPr>
-              <a:t>빈 업무 규칙</a:t>
+              <a:t>비결정성</a:t>
             </a:r>
             <a:r>
               <a:rPr sz="1800" b="0">
@@ -14849,7 +15243,83 @@
                 <a:latin typeface="맑은 고딕"/>
                 <a:ea typeface="맑은 고딕"/>
               </a:rPr>
-              <a:t>은 추측으로 채워진다. 첫 시도는 펜 값이 1,200원으로 바뀌자 2개에 2,400원을 청구했다.</a:t>
+              <a:t>은 같은 요청에서도 다른 답이 나올 수 있다는 뜻이다. 답이 반드시 매번 달라진다는 뜻은 아니다.</a:t>
+            </a:r>
+          </a:p>
+          <a:p>
+            <a:pPr lvl="2" marL="723900" indent="-368300">
+              <a:spcBef>
+                <a:spcPts val="600"/>
+              </a:spcBef>
+              <a:spcAft>
+                <a:spcPts val="600"/>
+              </a:spcAft>
+              <a:buSzPct val="90000"/>
+              <a:buFont typeface="Wingdings" pitchFamily="2" charset="2"/>
+              <a:buChar char=""/>
+            </a:pPr>
+            <a:r>
+              <a:rPr sz="1800" b="1">
+                <a:solidFill>
+                  <a:srgbClr val="000000"/>
+                </a:solidFill>
+                <a:latin typeface="맑은 고딕"/>
+                <a:ea typeface="맑은 고딕"/>
+              </a:rPr>
+              <a:t>정하지 않은 업무 규칙</a:t>
+            </a:r>
+            <a:r>
+              <a:rPr sz="1800" b="0">
+                <a:solidFill>
+                  <a:srgbClr val="000000"/>
+                </a:solidFill>
+                <a:latin typeface="맑은 고딕"/>
+                <a:ea typeface="맑은 고딕"/>
+              </a:rPr>
+              <a:t>은 LLM이 추측으로 채운다.</a:t>
+            </a:r>
+          </a:p>
+          <a:p>
+            <a:pPr lvl="3" marL="1077913" indent="-354013">
+              <a:spcBef>
+                <a:spcPts val="600"/>
+              </a:spcBef>
+              <a:spcAft>
+                <a:spcPts val="600"/>
+              </a:spcAft>
+              <a:buSzPct val="90000"/>
+              <a:buFont typeface="Wingdings" pitchFamily="2" charset="2"/>
+              <a:buChar char=""/>
+            </a:pPr>
+            <a:r>
+              <a:rPr sz="1600" b="0">
+                <a:solidFill>
+                  <a:srgbClr val="000000"/>
+                </a:solidFill>
+                <a:latin typeface="맑은 고딕"/>
+                <a:ea typeface="맑은 고딕"/>
+              </a:rPr>
+              <a:t>첫 시도는 펜 값이 1,200원으로 바뀌자 2개에 </a:t>
+            </a:r>
+            <a:r>
+              <a:rPr sz="1600" b="1">
+                <a:solidFill>
+                  <a:srgbClr val="000000"/>
+                </a:solidFill>
+                <a:latin typeface="맑은 고딕"/>
+                <a:ea typeface="맑은 고딕"/>
+              </a:rPr>
+              <a:t>2,400원</a:t>
+            </a:r>
+            <a:r>
+              <a:rPr sz="1600" b="0">
+                <a:solidFill>
+                  <a:srgbClr val="000000"/>
+                </a:solidFill>
+                <a:latin typeface="맑은 고딕"/>
+                <a:ea typeface="맑은 고딕"/>
+              </a:rPr>
+              <a:t>을 청구했다.</a:t>
             </a:r>
           </a:p>
           <a:p>
@@ -15070,7 +15540,7 @@
           <a:p>
             <a:r>
               <a:rPr kumimoji="1" lang="en-US" altLang="ko-KR" sz="1400" dirty="0" err="1"/>
-              <a:t>02. LLM이라는 재료</a:t>
+              <a:t>02. LLM이라는 도구</a:t>
             </a:r>
           </a:p>
         </p:txBody>
@@ -15403,7 +15873,7 @@
             </a:r>
           </a:p>
           <a:p>
-            <a:pPr lvl="2" marL="723900" indent="-368300">
+            <a:pPr lvl="3" marL="1077913" indent="-354013">
               <a:spcBef>
                 <a:spcPts val="600"/>
               </a:spcBef>
@@ -15412,10 +15882,10 @@
               </a:spcAft>
               <a:buSzPct val="90000"/>
               <a:buFont typeface="Wingdings" pitchFamily="2" charset="2"/>
-              <a:buChar char=""/>
+              <a:buChar char=""/>
             </a:pPr>
             <a:r>
-              <a:rPr sz="1800" b="0">
+              <a:rPr sz="1600" b="0">
                 <a:solidFill>
                   <a:srgbClr val="000000"/>
                 </a:solidFill>
@@ -15425,7 +15895,7 @@
               <a:t>처음 요청에 빠진 </a:t>
             </a:r>
             <a:r>
-              <a:rPr sz="1800" b="1">
+              <a:rPr sz="1600" b="1">
                 <a:solidFill>
                   <a:srgbClr val="000000"/>
                 </a:solidFill>
@@ -15435,7 +15905,7 @@
               <a:t>주문 금액·배송 요청·결제 거절 규칙</a:t>
             </a:r>
             <a:r>
-              <a:rPr sz="1800" b="0">
+              <a:rPr sz="1600" b="0">
                 <a:solidFill>
                   <a:srgbClr val="000000"/>
                 </a:solidFill>
@@ -15446,7 +15916,7 @@
             </a:r>
           </a:p>
           <a:p>
-            <a:pPr lvl="2" marL="723900" indent="-368300">
+            <a:pPr lvl="3" marL="1077913" indent="-354013">
               <a:spcBef>
                 <a:spcPts val="600"/>
               </a:spcBef>
@@ -15455,10 +15925,10 @@
               </a:spcAft>
               <a:buSzPct val="90000"/>
               <a:buFont typeface="Wingdings" pitchFamily="2" charset="2"/>
-              <a:buChar char=""/>
+              <a:buChar char=""/>
             </a:pPr>
             <a:r>
-              <a:rPr sz="1800" b="0">
+              <a:rPr sz="1600" b="0">
                 <a:solidFill>
                   <a:srgbClr val="000000"/>
                 </a:solidFill>
@@ -15468,7 +15938,7 @@
               <a:t>결제 매뉴얼 </a:t>
             </a:r>
             <a:r>
-              <a:rPr sz="1800" b="1">
+              <a:rPr sz="1600" b="1">
                 <a:solidFill>
                   <a:srgbClr val="000000"/>
                 </a:solidFill>
@@ -15478,7 +15948,7 @@
               <a:t>200쪽 전부</a:t>
             </a:r>
             <a:r>
-              <a:rPr sz="1800" b="0">
+              <a:rPr sz="1600" b="0">
                 <a:solidFill>
                   <a:srgbClr val="000000"/>
                 </a:solidFill>
@@ -15696,7 +16166,7 @@
           <a:p>
             <a:r>
               <a:rPr kumimoji="1" lang="en-US" altLang="ko-KR" sz="1400" dirty="0" err="1"/>
-              <a:t>02. LLM이라는 재료</a:t>
+              <a:t>02. LLM이라는 도구</a:t>
             </a:r>
           </a:p>
         </p:txBody>
@@ -15896,69 +16366,6 @@
             </a:r>
           </a:p>
           <a:p>
-            <a:pPr lvl="2" marL="723900" indent="-368300">
-              <a:spcBef>
-                <a:spcPts val="600"/>
-              </a:spcBef>
-              <a:spcAft>
-                <a:spcPts val="600"/>
-              </a:spcAft>
-              <a:buSzPct val="90000"/>
-              <a:buFont typeface="Wingdings" pitchFamily="2" charset="2"/>
-              <a:buChar char=""/>
-            </a:pPr>
-            <a:r>
-              <a:rPr sz="1800" b="0">
-                <a:solidFill>
-                  <a:srgbClr val="000000"/>
-                </a:solidFill>
-                <a:latin typeface="맑은 고딕"/>
-                <a:ea typeface="맑은 고딕"/>
-              </a:rPr>
-              <a:t>주문 금액 구현 1회 위임은 </a:t>
-            </a:r>
-            <a:r>
-              <a:rPr sz="1800" b="1">
-                <a:solidFill>
-                  <a:srgbClr val="000000"/>
-                </a:solidFill>
-                <a:latin typeface="맑은 고딕"/>
-                <a:ea typeface="맑은 고딕"/>
-              </a:rPr>
-              <a:t>11턴, 출력 3,367토큰, 입력 339,270토큰</a:t>
-            </a:r>
-            <a:r>
-              <a:rPr sz="1800" b="0">
-                <a:solidFill>
-                  <a:srgbClr val="000000"/>
-                </a:solidFill>
-                <a:latin typeface="맑은 고딕"/>
-                <a:ea typeface="맑은 고딕"/>
-              </a:rPr>
-              <a:t>이었다</a:t>
-            </a:r>
-            <a:r>
-              <a:rPr sz="1400" b="0">
-                <a:solidFill>
-                  <a:srgbClr val="000000"/>
-                </a:solidFill>
-                <a:latin typeface="맑은 고딕"/>
-                <a:ea typeface="맑은 고딕"/>
-              </a:rPr>
-              <a:t>(2026-10 기준)</a:t>
-            </a:r>
-            <a:r>
-              <a:rPr sz="1800" b="0">
-                <a:solidFill>
-                  <a:srgbClr val="000000"/>
-                </a:solidFill>
-                <a:latin typeface="맑은 고딕"/>
-                <a:ea typeface="맑은 고딕"/>
-              </a:rPr>
-              <a:t>.</a:t>
-            </a:r>
-          </a:p>
-          <a:p>
             <a:pPr lvl="3" marL="1077913" indent="-354013">
               <a:spcBef>
                 <a:spcPts val="600"/>
@@ -15978,7 +16385,7 @@
                 <a:latin typeface="맑은 고딕"/>
                 <a:ea typeface="맑은 고딕"/>
               </a:rPr>
-              <a:t>입력은 </a:t>
+              <a:t>주문 금액 구현 1회 위임은 </a:t>
             </a:r>
             <a:r>
               <a:rPr sz="1600" b="1">
@@ -15988,6 +16395,69 @@
                 <a:latin typeface="맑은 고딕"/>
                 <a:ea typeface="맑은 고딕"/>
               </a:rPr>
+              <a:t>11턴, 출력 3,367토큰, 입력 339,270토큰</a:t>
+            </a:r>
+            <a:r>
+              <a:rPr sz="1600" b="0">
+                <a:solidFill>
+                  <a:srgbClr val="000000"/>
+                </a:solidFill>
+                <a:latin typeface="맑은 고딕"/>
+                <a:ea typeface="맑은 고딕"/>
+              </a:rPr>
+              <a:t>이었다</a:t>
+            </a:r>
+            <a:r>
+              <a:rPr sz="1200" b="0">
+                <a:solidFill>
+                  <a:srgbClr val="000000"/>
+                </a:solidFill>
+                <a:latin typeface="맑은 고딕"/>
+                <a:ea typeface="맑은 고딕"/>
+              </a:rPr>
+              <a:t>(2026-10 기준)</a:t>
+            </a:r>
+            <a:r>
+              <a:rPr sz="1600" b="0">
+                <a:solidFill>
+                  <a:srgbClr val="000000"/>
+                </a:solidFill>
+                <a:latin typeface="맑은 고딕"/>
+                <a:ea typeface="맑은 고딕"/>
+              </a:rPr>
+              <a:t>.</a:t>
+            </a:r>
+          </a:p>
+          <a:p>
+            <a:pPr lvl="3" marL="1077913" indent="-354013">
+              <a:spcBef>
+                <a:spcPts val="600"/>
+              </a:spcBef>
+              <a:spcAft>
+                <a:spcPts val="600"/>
+              </a:spcAft>
+              <a:buSzPct val="90000"/>
+              <a:buFont typeface="Wingdings" pitchFamily="2" charset="2"/>
+              <a:buChar char=""/>
+            </a:pPr>
+            <a:r>
+              <a:rPr sz="1600" b="0">
+                <a:solidFill>
+                  <a:srgbClr val="000000"/>
+                </a:solidFill>
+                <a:latin typeface="맑은 고딕"/>
+                <a:ea typeface="맑은 고딕"/>
+              </a:rPr>
+              <a:t>입력 339,270토큰은 </a:t>
+            </a:r>
+            <a:r>
+              <a:rPr sz="1600" b="1">
+                <a:solidFill>
+                  <a:srgbClr val="000000"/>
+                </a:solidFill>
+                <a:latin typeface="맑은 고딕"/>
+                <a:ea typeface="맑은 고딕"/>
+              </a:rPr>
               <a:t>캐시 생성 19,110 + 캐시 읽기 320,142 + 일반 입력 18</a:t>
             </a:r>
             <a:r>
@@ -15998,7 +16468,7 @@
                 <a:latin typeface="맑은 고딕"/>
                 <a:ea typeface="맑은 고딕"/>
               </a:rPr>
-              <a:t>이다. 위임 한 번과 모델 턴 한 번은 다르다.</a:t>
+              <a:t>의 합이다. 위임 한 번이 모델 호출 11번이었다.</a:t>
             </a:r>
           </a:p>
           <a:p>
@@ -16247,7 +16717,7 @@
           <a:p>
             <a:r>
               <a:rPr kumimoji="1" lang="en-US" altLang="ko-KR" sz="1400" dirty="0" err="1"/>
-              <a:t>02. LLM이라는 재료</a:t>
+              <a:t>02. LLM이라는 도구</a:t>
             </a:r>
           </a:p>
         </p:txBody>
@@ -17420,7 +17890,7 @@
             </a:r>
           </a:p>
           <a:p>
-            <a:pPr lvl="2" marL="723900" indent="-368300">
+            <a:pPr lvl="3" marL="1077913" indent="-354013">
               <a:spcBef>
                 <a:spcPts val="600"/>
               </a:spcBef>
@@ -17429,10 +17899,10 @@
               </a:spcAft>
               <a:buSzPct val="90000"/>
               <a:buFont typeface="Wingdings" pitchFamily="2" charset="2"/>
-              <a:buChar char=""/>
+              <a:buChar char=""/>
             </a:pPr>
             <a:r>
-              <a:rPr sz="1800" b="1">
+              <a:rPr sz="1600" b="1">
                 <a:solidFill>
                   <a:srgbClr val="000000"/>
                 </a:solidFill>
@@ -17442,7 +17912,7 @@
               <a:t>11턴의 재읽기</a:t>
             </a:r>
             <a:r>
-              <a:rPr sz="1800" b="0">
+              <a:rPr sz="1600" b="0">
                 <a:solidFill>
                   <a:srgbClr val="000000"/>
                 </a:solidFill>
@@ -17661,7 +18131,7 @@
           <a:p>
             <a:r>
               <a:rPr kumimoji="1" lang="en-US" altLang="ko-KR" sz="1400" dirty="0" err="1"/>
-              <a:t>02. LLM이라는 재료</a:t>
+              <a:t>02. LLM이라는 도구</a:t>
             </a:r>
           </a:p>
         </p:txBody>
@@ -17737,7 +18207,7 @@
           </p:nvPr>
         </p:nvGraphicFramePr>
         <p:xfrm>
-          <a:off x="1355916" y="3223145"/>
+          <a:off x="1355916" y="3497465"/>
           <a:ext cx="6418580" cy="3873500"/>
         </p:xfrm>
         <a:graphic>
@@ -18644,7 +19114,7 @@
         <p:spPr>
           <a:xfrm>
             <a:off x="365760" y="960120"/>
-            <a:ext cx="8412480" cy="1891213"/>
+            <a:ext cx="8412480" cy="2148251"/>
           </a:xfrm>
           <a:prstGeom prst="rect">
             <a:avLst/>
@@ -18684,7 +19154,27 @@
                 <a:latin typeface="맑은 고딕"/>
                 <a:ea typeface="맑은 고딕"/>
               </a:rPr>
-              <a:t>은 그 작업을 맡겨도 되는지, 맡긴다면 어떤 방식으로 맡길지를 구분하는 성질이다.</a:t>
+              <a:t>은 그 작업을 맡겨도 되는지, 맡긴다면 어떤 방식으로 맡길지를 구분하는 성질이다. </a:t>
+            </a:r>
+            <a:r>
+              <a:rPr sz="1800" b="1">
+                <a:solidFill>
+                  <a:srgbClr val="000000"/>
+                </a:solidFill>
+                <a:latin typeface="맑은 고딕"/>
+                <a:ea typeface="맑은 고딕"/>
+              </a:rPr>
+              <a:t>업무 규칙의 확정·절차의 확정·결과의 자동 확인·되돌리기 쉬움</a:t>
+            </a:r>
+            <a:r>
+              <a:rPr sz="1800" b="0">
+                <a:solidFill>
+                  <a:srgbClr val="000000"/>
+                </a:solidFill>
+                <a:latin typeface="맑은 고딕"/>
+                <a:ea typeface="맑은 고딕"/>
+              </a:rPr>
+              <a:t> 4가지를 본다.</a:t>
             </a:r>
           </a:p>
           <a:p>
@@ -18841,7 +19331,7 @@
         </p:nvSpPr>
         <p:spPr>
           <a:xfrm>
-            <a:off x="365760" y="2924695"/>
+            <a:off x="365760" y="3199015"/>
             <a:ext cx="8412480" cy="222250"/>
           </a:xfrm>
           <a:prstGeom prst="rect">
@@ -18890,7 +19380,7 @@
         </p:nvSpPr>
         <p:spPr>
           <a:xfrm>
-            <a:off x="365760" y="4891745"/>
+            <a:off x="365760" y="5166065"/>
             <a:ext cx="8412480" cy="975360"/>
           </a:xfrm>
           <a:prstGeom prst="rect">
@@ -19063,7 +19553,7 @@
           <a:p>
             <a:r>
               <a:rPr kumimoji="1" lang="en-US" altLang="ko-KR" sz="1400" dirty="0" err="1"/>
-              <a:t>02. LLM이라는 재료</a:t>
+              <a:t>02. LLM이라는 도구</a:t>
             </a:r>
           </a:p>
         </p:txBody>
@@ -19139,7 +19629,7 @@
           </p:nvPr>
         </p:nvGraphicFramePr>
         <p:xfrm>
-          <a:off x="1900746" y="3960294"/>
+          <a:off x="1900746" y="4585134"/>
           <a:ext cx="5328920" cy="3873500"/>
         </p:xfrm>
         <a:graphic>
@@ -20046,7 +20536,7 @@
         <p:spPr>
           <a:xfrm>
             <a:off x="365760" y="960120"/>
-            <a:ext cx="8412480" cy="1587442"/>
+            <a:ext cx="8412480" cy="2241719"/>
           </a:xfrm>
           <a:prstGeom prst="rect">
             <a:avLst/>
@@ -20076,7 +20566,7 @@
                 <a:latin typeface="맑은 고딕"/>
                 <a:ea typeface="맑은 고딕"/>
               </a:rPr>
-              <a:t>수작업에서 에이전트로 갈수록 </a:t>
+              <a:t>수작업·대화형 보조·워크플로·에이전트로 갈수록 </a:t>
             </a:r>
             <a:r>
               <a:rPr sz="1800" b="1">
@@ -20086,7 +20576,7 @@
                 <a:latin typeface="맑은 고딕"/>
                 <a:ea typeface="맑은 고딕"/>
               </a:rPr>
-              <a:t>작업 순서 결정이</a:t>
+              <a:t>작업 순서 결정</a:t>
             </a:r>
             <a:r>
               <a:rPr sz="1800" b="0">
@@ -20096,7 +20586,7 @@
                 <a:latin typeface="맑은 고딕"/>
                 <a:ea typeface="맑은 고딕"/>
               </a:rPr>
-              <a:t> 사람에서 LLM으로 옮겨 간다.</a:t>
+              <a:t>이 사람에서 LLM으로 옮겨 간다.</a:t>
             </a:r>
           </a:p>
           <a:p>
@@ -20180,6 +20670,59 @@
                 <a:ea typeface="맑은 고딕"/>
               </a:rPr>
               <a:t>[Anthropic 2024]</a:t>
+            </a:r>
+          </a:p>
+          <a:p>
+            <a:pPr lvl="3" marL="1077913" indent="-354013">
+              <a:spcBef>
+                <a:spcPts val="600"/>
+              </a:spcBef>
+              <a:spcAft>
+                <a:spcPts val="600"/>
+              </a:spcAft>
+              <a:buSzPct val="90000"/>
+              <a:buFont typeface="Wingdings" pitchFamily="2" charset="2"/>
+              <a:buChar char=""/>
+            </a:pPr>
+            <a:r>
+              <a:rPr sz="1600" b="0">
+                <a:solidFill>
+                  <a:srgbClr val="000000"/>
+                </a:solidFill>
+                <a:latin typeface="맑은 고딕"/>
+                <a:ea typeface="맑은 고딕"/>
+              </a:rPr>
+              <a:t>여기서 </a:t>
+            </a:r>
+            <a:r>
+              <a:rPr sz="1600" b="1">
+                <a:solidFill>
+                  <a:srgbClr val="000000"/>
+                </a:solidFill>
+                <a:latin typeface="맑은 고딕"/>
+                <a:ea typeface="맑은 고딕"/>
+              </a:rPr>
+              <a:t>도구</a:t>
+            </a:r>
+            <a:r>
+              <a:rPr sz="1200" b="0">
+                <a:solidFill>
+                  <a:srgbClr val="000000"/>
+                </a:solidFill>
+                <a:latin typeface="맑은 고딕"/>
+                <a:ea typeface="맑은 고딕"/>
+              </a:rPr>
+              <a:t>(tool)</a:t>
+            </a:r>
+            <a:r>
+              <a:rPr sz="1600" b="0">
+                <a:solidFill>
+                  <a:srgbClr val="000000"/>
+                </a:solidFill>
+                <a:latin typeface="맑은 고딕"/>
+                <a:ea typeface="맑은 고딕"/>
+              </a:rPr>
+              <a:t>는 LLM이 호출하는 기능이다. 사람이 사용하는 도구인 LLM 자체와 구분한다.</a:t>
             </a:r>
           </a:p>
         </p:txBody>
@@ -20263,7 +20806,7 @@
         </p:nvSpPr>
         <p:spPr>
           <a:xfrm>
-            <a:off x="365760" y="3661844"/>
+            <a:off x="365760" y="4286684"/>
             <a:ext cx="8412480" cy="222250"/>
           </a:xfrm>
           <a:prstGeom prst="rect">
@@ -20312,7 +20855,7 @@
         </p:nvSpPr>
         <p:spPr>
           <a:xfrm>
-            <a:off x="365760" y="2673650"/>
+            <a:off x="365760" y="3298490"/>
             <a:ext cx="8412480" cy="201168"/>
           </a:xfrm>
           <a:prstGeom prst="rect">
@@ -20363,7 +20906,7 @@
         </p:blipFill>
         <p:spPr>
           <a:xfrm>
-            <a:off x="3630007" y="2911394"/>
+            <a:off x="3630007" y="3536234"/>
             <a:ext cx="1870397" cy="412121"/>
           </a:xfrm>
           <a:prstGeom prst="rect">
@@ -20511,7 +21054,7 @@
           <a:p>
             <a:r>
               <a:rPr kumimoji="1" lang="en-US" altLang="ko-KR" sz="1400" dirty="0" err="1"/>
-              <a:t>02. LLM이라는 재료</a:t>
+              <a:t>02. LLM이라는 도구</a:t>
             </a:r>
           </a:p>
         </p:txBody>
@@ -20757,7 +21300,7 @@
                 <a:latin typeface="맑은 고딕"/>
                 <a:ea typeface="맑은 고딕"/>
               </a:rPr>
-              <a:t>도 미리 코드로 정하면 워크플로다. 반복 여부만으로 두 형태를 구분하지 않는다.</a:t>
+              <a:t>도 미리 코드로 정하면 워크플로다. 반복 여부만으로 두 방식을 구분하지 않는다.</a:t>
             </a:r>
           </a:p>
         </p:txBody>

--- a/courses/ai-native/sessions/s02.pptx
+++ b/courses/ai-native/sessions/s02.pptx
@@ -4593,7 +4593,7 @@
         </p:nvGraphicFramePr>
         <p:xfrm>
           <a:off x="1928686" y="2112010"/>
-          <a:ext cx="5273040" cy="3873500"/>
+          <a:ext cx="5273040" cy="2016000"/>
         </p:xfrm>
         <a:graphic>
           <a:graphicData uri="http://schemas.openxmlformats.org/drawingml/2006/table">
@@ -6000,6 +6000,101 @@
                 <a:ea typeface="맑은 고딕"/>
               </a:rPr>
               <a:t>주문 첫 릴리스의 활용 방식</a:t>
+            </a:r>
+          </a:p>
+        </p:txBody>
+      </p:sp>
+      <p:sp>
+        <p:nvSpPr>
+          <p:cNvPr id="15" name="TextBox 12">
+            <a:extLst>
+              <a:ext uri="{FF2B5EF4-FFF2-40B4-BE49-F238E27FC236}">
+                <a16:creationId xmlns:a16="http://schemas.microsoft.com/office/drawing/2014/main" id="{654EDDB4-901F-3D48-A715-17D163E8A7AC}"/>
+              </a:ext>
+            </a:extLst>
+          </p:cNvPr>
+          <p:cNvSpPr txBox="1"/>
+          <p:nvPr/>
+        </p:nvSpPr>
+        <p:spPr>
+          <a:xfrm>
+            <a:off x="365760" y="4356610"/>
+            <a:ext cx="8412480" cy="1051560"/>
+          </a:xfrm>
+          <a:prstGeom prst="rect">
+            <a:avLst/>
+          </a:prstGeom>
+          <a:noFill/>
+        </p:spPr>
+        <p:txBody>
+          <a:bodyPr wrap="square">
+            <a:spAutoFit/>
+          </a:bodyPr>
+          <a:lstStyle/>
+          <a:p>
+            <a:pPr lvl="2" marL="723900" indent="-368300">
+              <a:spcBef>
+                <a:spcPts val="600"/>
+              </a:spcBef>
+              <a:spcAft>
+                <a:spcPts val="600"/>
+              </a:spcAft>
+              <a:buSzPct val="90000"/>
+              <a:buFont typeface="Wingdings" pitchFamily="2" charset="2"/>
+              <a:buChar char=""/>
+            </a:pPr>
+            <a:r>
+              <a:rPr sz="1800" b="1">
+                <a:solidFill>
+                  <a:srgbClr val="000000"/>
+                </a:solidFill>
+                <a:latin typeface="맑은 고딕"/>
+                <a:ea typeface="맑은 고딕"/>
+              </a:rPr>
+              <a:t>일 하나를 한 방식으로 고정하지 않는다.</a:t>
+            </a:r>
+          </a:p>
+          <a:p>
+            <a:pPr lvl="3" marL="1077913" indent="-354013">
+              <a:spcBef>
+                <a:spcPts val="600"/>
+              </a:spcBef>
+              <a:spcAft>
+                <a:spcPts val="600"/>
+              </a:spcAft>
+              <a:buSzPct val="90000"/>
+              <a:buFont typeface="Wingdings" pitchFamily="2" charset="2"/>
+              <a:buChar char=""/>
+            </a:pPr>
+            <a:r>
+              <a:rPr sz="1600" b="0">
+                <a:solidFill>
+                  <a:srgbClr val="000000"/>
+                </a:solidFill>
+                <a:latin typeface="맑은 고딕"/>
+                <a:ea typeface="맑은 고딕"/>
+              </a:rPr>
+              <a:t>데이터 이관의 실행은 사람이 하면서 </a:t>
+            </a:r>
+            <a:r>
+              <a:rPr sz="1600" b="1">
+                <a:solidFill>
+                  <a:srgbClr val="000000"/>
+                </a:solidFill>
+                <a:latin typeface="맑은 고딕"/>
+                <a:ea typeface="맑은 고딕"/>
+              </a:rPr>
+              <a:t>스크립트 초안</a:t>
+            </a:r>
+            <a:r>
+              <a:rPr sz="1600" b="0">
+                <a:solidFill>
+                  <a:srgbClr val="000000"/>
+                </a:solidFill>
+                <a:latin typeface="맑은 고딕"/>
+                <a:ea typeface="맑은 고딕"/>
+              </a:rPr>
+              <a:t>은 LLM의 도움으로 만들 수 있다.</a:t>
             </a:r>
           </a:p>
         </p:txBody>
@@ -6251,72 +6346,6 @@
                 <a:latin typeface="맑은 고딕"/>
                 <a:ea typeface="맑은 고딕"/>
               </a:rPr>
-              <a:t>일 하나를 한 방식으로 고정하지 않는다.</a:t>
-            </a:r>
-          </a:p>
-          <a:p>
-            <a:pPr lvl="3" marL="1077913" indent="-354013">
-              <a:spcBef>
-                <a:spcPts val="600"/>
-              </a:spcBef>
-              <a:spcAft>
-                <a:spcPts val="600"/>
-              </a:spcAft>
-              <a:buSzPct val="90000"/>
-              <a:buFont typeface="Wingdings" pitchFamily="2" charset="2"/>
-              <a:buChar char=""/>
-            </a:pPr>
-            <a:r>
-              <a:rPr sz="1600" b="0">
-                <a:solidFill>
-                  <a:srgbClr val="000000"/>
-                </a:solidFill>
-                <a:latin typeface="맑은 고딕"/>
-                <a:ea typeface="맑은 고딕"/>
-              </a:rPr>
-              <a:t>데이터 이관의 실행은 사람이 하면서 </a:t>
-            </a:r>
-            <a:r>
-              <a:rPr sz="1600" b="1">
-                <a:solidFill>
-                  <a:srgbClr val="000000"/>
-                </a:solidFill>
-                <a:latin typeface="맑은 고딕"/>
-                <a:ea typeface="맑은 고딕"/>
-              </a:rPr>
-              <a:t>스크립트 초안</a:t>
-            </a:r>
-            <a:r>
-              <a:rPr sz="1600" b="0">
-                <a:solidFill>
-                  <a:srgbClr val="000000"/>
-                </a:solidFill>
-                <a:latin typeface="맑은 고딕"/>
-                <a:ea typeface="맑은 고딕"/>
-              </a:rPr>
-              <a:t>은 LLM의 도움으로 만들 수 있다.</a:t>
-            </a:r>
-          </a:p>
-          <a:p>
-            <a:pPr lvl="2" marL="723900" indent="-368300">
-              <a:spcBef>
-                <a:spcPts val="600"/>
-              </a:spcBef>
-              <a:spcAft>
-                <a:spcPts val="600"/>
-              </a:spcAft>
-              <a:buSzPct val="90000"/>
-              <a:buFont typeface="Wingdings" pitchFamily="2" charset="2"/>
-              <a:buChar char=""/>
-            </a:pPr>
-            <a:r>
-              <a:rPr sz="1800" b="1">
-                <a:solidFill>
-                  <a:srgbClr val="000000"/>
-                </a:solidFill>
-                <a:latin typeface="맑은 고딕"/>
-                <a:ea typeface="맑은 고딕"/>
-              </a:rPr>
               <a:t>첫 릴리스의 조건</a:t>
             </a:r>
             <a:r>
@@ -6577,7 +6606,7 @@
         </p:nvGraphicFramePr>
         <p:xfrm>
           <a:off x="1399096" y="4985443"/>
-          <a:ext cx="6332220" cy="3873500"/>
+          <a:ext cx="6332220" cy="1152000"/>
         </p:xfrm>
         <a:graphic>
           <a:graphicData uri="http://schemas.openxmlformats.org/drawingml/2006/table">
@@ -8638,7 +8667,7 @@
         </p:nvGraphicFramePr>
         <p:xfrm>
           <a:off x="2126806" y="2112010"/>
-          <a:ext cx="4876800" cy="3873500"/>
+          <a:ext cx="4876800" cy="1152000"/>
         </p:xfrm>
         <a:graphic>
           <a:graphicData uri="http://schemas.openxmlformats.org/drawingml/2006/table">
@@ -10346,7 +10375,7 @@
         </p:nvGraphicFramePr>
         <p:xfrm>
           <a:off x="1230186" y="2112010"/>
-          <a:ext cx="6670040" cy="3873500"/>
+          <a:ext cx="6670040" cy="1728000"/>
         </p:xfrm>
         <a:graphic>
           <a:graphicData uri="http://schemas.openxmlformats.org/drawingml/2006/table">
@@ -16794,7 +16823,7 @@
         </p:nvGraphicFramePr>
         <p:xfrm>
           <a:off x="1956626" y="4148628"/>
-          <a:ext cx="5217160" cy="3873500"/>
+          <a:ext cx="5217160" cy="1440000"/>
         </p:xfrm>
         <a:graphic>
           <a:graphicData uri="http://schemas.openxmlformats.org/drawingml/2006/table">
@@ -18208,7 +18237,7 @@
         </p:nvGraphicFramePr>
         <p:xfrm>
           <a:off x="1355916" y="3497465"/>
-          <a:ext cx="6418580" cy="3873500"/>
+          <a:ext cx="6418580" cy="1440000"/>
         </p:xfrm>
         <a:graphic>
           <a:graphicData uri="http://schemas.openxmlformats.org/drawingml/2006/table">
@@ -19630,7 +19659,7 @@
         </p:nvGraphicFramePr>
         <p:xfrm>
           <a:off x="1900746" y="4585134"/>
-          <a:ext cx="5328920" cy="3873500"/>
+          <a:ext cx="5328920" cy="1440000"/>
         </p:xfrm>
         <a:graphic>
           <a:graphicData uri="http://schemas.openxmlformats.org/drawingml/2006/table">
